--- a/docs/presentations/Custos_Phase2_Review2.pptx
+++ b/docs/presentations/Custos_Phase2_Review2.pptx
@@ -27,9 +27,11 @@
     <p:sldId id="272" r:id="rId25"/>
     <p:sldId id="273" r:id="rId26"/>
     <p:sldId id="274" r:id="rId27"/>
-    <p:sldId id="275" r:id="rId28"/>
-    <p:sldId id="276" r:id="rId29"/>
-    <p:sldId id="277" r:id="rId10"/>
+    <p:sldId id="275" r:id="rId30"/>
+    <p:sldId id="276" r:id="rId28"/>
+    <p:sldId id="277" r:id="rId31"/>
+    <p:sldId id="278" r:id="rId29"/>
+    <p:sldId id="279" r:id="rId10"/>
   </p:sldIdLst>
   <p:sldSz cx="12192000" cy="6858000"/>
   <p:notesSz cx="6858000" cy="9144000"/>
@@ -5815,7 +5817,7 @@
                 <a:ea typeface="Calibri" panose="020F0502020204030204" pitchFamily="34" charset="0"/>
                 <a:cs typeface="Calibri" panose="020F0502020204030204" pitchFamily="34" charset="0"/>
               </a:rPr>
-              <a:t>Seven rules, evaluated in order. New: the drift floor — a significantly drifted model is never auto-approved, however clean the other signals.</a:t>
+              <a:t>Seven rules, evaluated in order. New: the drift floor — a significantly drifted model is never auto-approved. Slide 20 tests it on real data.</a:t>
             </a:r>
           </a:p>
         </p:txBody>
@@ -6083,7 +6085,7 @@
                 <a:ea typeface="Calibri" panose="020F0502020204030204" pitchFamily="34" charset="0"/>
                 <a:cs typeface="Calibri" panose="020F0502020204030204" pitchFamily="34" charset="0"/>
               </a:rPr>
-              <a:t>Ten of twelve components complete. New since Review-1 are marked.</a:t>
+              <a:t>Eleven of twelve components complete. New since Review-1 are marked.</a:t>
             </a:r>
           </a:p>
         </p:txBody>
@@ -6873,7 +6875,7 @@
                         <a:rPr sz="950" b="0">
                           <a:latin typeface="Calibri"/>
                         </a:rPr>
-                        <a:t>Lending Club run</a:t>
+                        <a:t>Lending Club study</a:t>
                       </a:r>
                     </a:p>
                   </a:txBody>
@@ -6890,7 +6892,7 @@
                         <a:rPr sz="950" b="0">
                           <a:latin typeface="Calibri"/>
                         </a:rPr>
-                        <a:t>Field validation on 2.2M real loans, 2007–2018</a:t>
+                        <a:t>new — pre-registered field study on 589,186 matured loans; results committed</a:t>
                       </a:r>
                     </a:p>
                   </a:txBody>
@@ -6907,7 +6909,7 @@
                         <a:rPr sz="950" b="0">
                           <a:latin typeface="Calibri"/>
                         </a:rPr>
-                        <a:t>In progress</a:t>
+                        <a:t>Complete</a:t>
                       </a:r>
                     </a:p>
                   </a:txBody>
@@ -8701,7 +8703,7 @@
                 <a:ea typeface="Calibri" panose="020F0502020204030204" pitchFamily="34" charset="0"/>
                 <a:cs typeface="Calibri" panose="020F0502020204030204" pitchFamily="34" charset="0"/>
               </a:rPr>
-              <a:t>Validation — Field Data: Lending Club</a:t>
+              <a:t>Validation — Field Study: How It Was Run</a:t>
             </a:r>
           </a:p>
         </p:txBody>
@@ -8746,7 +8748,7 @@
                 <a:ea typeface="Calibri" panose="020F0502020204030204" pitchFamily="34" charset="0"/>
                 <a:cs typeface="Calibri" panose="020F0502020204030204" pitchFamily="34" charset="0"/>
               </a:rPr>
-              <a:t>Calibration proves the detector is correct. Field data proves it fires on drift nobody chose: ~2.2 million real loans, 2007–2018, across the 2008 crisis and the 2016 credit-policy change.</a:t>
+              <a:t>Calibration proves the detector is correct. A field study tests whether gating on drift actually helps: 2.26 million real Lending Club loans, of which 589,186 matured loans from 2012–2015 were evaluated against a model trained on 2007–2011.</a:t>
             </a:r>
           </a:p>
           <a:p>
@@ -8763,7 +8765,7 @@
                 <a:ea typeface="Calibri" panose="020F0502020204030204" pitchFamily="34" charset="0"/>
                 <a:cs typeface="Calibri" panose="020F0502020204030204" pitchFamily="34" charset="0"/>
               </a:rPr>
-              <a:t>Harness ready — reads the compressed file directly and scores quarterly windows against a fixed 2007 baseline, using the same code as the gateway.</a:t>
+              <a:t>Pre-registered — hypotheses, metrics and what each outcome would mean were committed and pushed before the dataset was even downloaded.</a:t>
             </a:r>
           </a:p>
           <a:p>
@@ -8780,7 +8782,7 @@
                 <a:ea typeface="Calibri" panose="020F0502020204030204" pitchFamily="34" charset="0"/>
                 <a:cs typeface="Calibri" panose="020F0502020204030204" pitchFamily="34" charset="0"/>
               </a:rPr>
-              <a:t>Bug found before the first run — dates sorted as text, so “Aug-2018” would have become the baseline. Fixed, with a regression test on Lending Club's own date format.</a:t>
+              <a:t>Leakage and censoring enforced in code — only fields known when the loan was made, and only loans whose term had ended, so outcomes are real.</a:t>
             </a:r>
           </a:p>
           <a:p>
@@ -8797,7 +8799,7 @@
                 <a:ea typeface="Calibri" panose="020F0502020204030204" pitchFamily="34" charset="0"/>
                 <a:cs typeface="Calibri" panose="020F0502020204030204" pitchFamily="34" charset="0"/>
               </a:rPr>
-              <a:t>Harness calibrated on a planted 2016 shift — found at the right quarter, with the right feature blamed.</a:t>
+              <a:t>Seven review strategies compared at the same review budget, from random review to the model's own risk score to Custos's drift gating.</a:t>
             </a:r>
           </a:p>
           <a:p>
@@ -8814,7 +8816,7 @@
                 <a:ea typeface="Calibri" panose="020F0502020204030204" pitchFamily="34" charset="0"/>
                 <a:cs typeface="Calibri" panose="020F0502020204030204" pitchFamily="34" charset="0"/>
               </a:rPr>
-              <a:t>Status: dataset run pending. Results will be reported as measured — the detector is not tuned to the data.</a:t>
+              <a:t>Two bugs caught before the real run — dates sorted as text, and a harm measure that could not see miscalibration. Both fixed, both recorded.</a:t>
             </a:r>
           </a:p>
         </p:txBody>
@@ -9195,7 +9197,7 @@
                 <a:ea typeface="Calibri" panose="020F0502020204030204" pitchFamily="34" charset="0"/>
                 <a:cs typeface="Calibri" panose="020F0502020204030204" pitchFamily="34" charset="0"/>
               </a:rPr>
-              <a:t>Engineering rigour, work plan and conclusion</a:t>
+              <a:t>Engineering rigour, next phase (self-healing), work plan, conclusion</a:t>
             </a:r>
           </a:p>
         </p:txBody>
@@ -9394,7 +9396,7 @@
                 <a:ea typeface="Calibri" panose="020F0502020204030204" pitchFamily="34" charset="0"/>
                 <a:cs typeface="Calibri" panose="020F0502020204030204" pitchFamily="34" charset="0"/>
               </a:rPr>
-              <a:t>Engineering Rigour — Defects We Found in Our Own System</a:t>
+              <a:t>Field Result — Our Core Assumption Failed</a:t>
             </a:r>
           </a:p>
         </p:txBody>
@@ -9434,12 +9436,12 @@
               <a:buNone/>
             </a:pPr>
             <a:r>
-              <a:rPr lang="en-US" sz="1300" b="0" i="0" dirty="0">
+              <a:rPr lang="en-US" sz="1400" b="0" i="0" dirty="0">
                 <a:latin typeface="Calibri" panose="020F0502020204030204" pitchFamily="34" charset="0"/>
                 <a:ea typeface="Calibri" panose="020F0502020204030204" pitchFamily="34" charset="0"/>
                 <a:cs typeface="Calibri" panose="020F0502020204030204" pitchFamily="34" charset="0"/>
               </a:rPr>
-              <a:t>Five defects, none visible to a test that sends one request at a time. Two were introduced and caught during this phase.</a:t>
+              <a:t>Asked to pick 5% of 589,186 real loans for human review, gating on population drift — how Custos works today — caught fewer defaults than picking at random. The model's own risk score caught 2.1× random.</a:t>
             </a:r>
           </a:p>
         </p:txBody>
@@ -9568,378 +9570,30 @@
           </a:p>
         </p:txBody>
       </p:sp>
-      <p:graphicFrame>
-        <p:nvGraphicFramePr>
-          <p:cNvPr id="8" name="Table 7"/>
-          <p:cNvGraphicFramePr>
-            <a:graphicFrameLocks noGrp="1"/>
-          </p:cNvGraphicFramePr>
+      <p:pic>
+        <p:nvPicPr>
+          <p:cNvPr id="8" name="Picture 7" descr="gating_results.png"/>
+          <p:cNvPicPr>
+            <a:picLocks noChangeAspect="1"/>
+          </p:cNvPicPr>
           <p:nvPr/>
-        </p:nvGraphicFramePr>
-        <p:xfrm>
-          <a:off x="960120" y="2331720"/>
-          <a:ext cx="10241279" cy="152400"/>
-        </p:xfrm>
-        <a:graphic>
-          <a:graphicData uri="http://schemas.openxmlformats.org/drawingml/2006/table">
-            <a:tbl>
-              <a:tblPr firstRow="1">
-                <a:tableStyleId>{5C22544A-7EE6-4342-B048-85BDC9FD1C3A}</a:tableStyleId>
-              </a:tblPr>
-              <a:tblGrid>
-                <a:gridCol w="1741017"/>
-                <a:gridCol w="4915814"/>
-                <a:gridCol w="3584448"/>
-              </a:tblGrid>
-              <a:tr h="25400">
-                <a:tc>
-                  <a:txBody>
-                    <a:bodyPr wrap="square"/>
-                    <a:lstStyle/>
-                    <a:p>
-                      <a:r>
-                        <a:rPr sz="1100" b="1">
-                          <a:solidFill>
-                            <a:srgbClr val="FFFFFF"/>
-                          </a:solidFill>
-                          <a:latin typeface="Calibri"/>
-                        </a:rPr>
-                        <a:t>Found by</a:t>
-                      </a:r>
-                    </a:p>
-                  </a:txBody>
-                  <a:tcPr marL="63500" marR="63500" marT="38100" marB="38100">
-                    <a:solidFill>
-                      <a:srgbClr val="1F5CA8"/>
-                    </a:solidFill>
-                  </a:tcPr>
-                </a:tc>
-                <a:tc>
-                  <a:txBody>
-                    <a:bodyPr wrap="square"/>
-                    <a:lstStyle/>
-                    <a:p>
-                      <a:r>
-                        <a:rPr sz="1100" b="1">
-                          <a:solidFill>
-                            <a:srgbClr val="FFFFFF"/>
-                          </a:solidFill>
-                          <a:latin typeface="Calibri"/>
-                        </a:rPr>
-                        <a:t>Defect</a:t>
-                      </a:r>
-                    </a:p>
-                  </a:txBody>
-                  <a:tcPr marL="63500" marR="63500" marT="38100" marB="38100">
-                    <a:solidFill>
-                      <a:srgbClr val="1F5CA8"/>
-                    </a:solidFill>
-                  </a:tcPr>
-                </a:tc>
-                <a:tc>
-                  <a:txBody>
-                    <a:bodyPr wrap="square"/>
-                    <a:lstStyle/>
-                    <a:p>
-                      <a:r>
-                        <a:rPr sz="1100" b="1">
-                          <a:solidFill>
-                            <a:srgbClr val="FFFFFF"/>
-                          </a:solidFill>
-                          <a:latin typeface="Calibri"/>
-                        </a:rPr>
-                        <a:t>Fix</a:t>
-                      </a:r>
-                    </a:p>
-                  </a:txBody>
-                  <a:tcPr marL="63500" marR="63500" marT="38100" marB="38100">
-                    <a:solidFill>
-                      <a:srgbClr val="1F5CA8"/>
-                    </a:solidFill>
-                  </a:tcPr>
-                </a:tc>
-              </a:tr>
-              <a:tr h="25400">
-                <a:tc>
-                  <a:txBody>
-                    <a:bodyPr wrap="square"/>
-                    <a:lstStyle/>
-                    <a:p>
-                      <a:r>
-                        <a:rPr sz="1100" b="0">
-                          <a:latin typeface="Calibri"/>
-                        </a:rPr>
-                        <a:t>Load harness (R1)</a:t>
-                      </a:r>
-                    </a:p>
-                  </a:txBody>
-                  <a:tcPr marL="63500" marR="63500" marT="38100" marB="38100">
-                    <a:noFill/>
-                  </a:tcPr>
-                </a:tc>
-                <a:tc>
-                  <a:txBody>
-                    <a:bodyPr wrap="square"/>
-                    <a:lstStyle/>
-                    <a:p>
-                      <a:r>
-                        <a:rPr sz="1100" b="0">
-                          <a:latin typeface="Calibri"/>
-                        </a:rPr>
-                        <a:t>Published p99 of 0.5 ms measured a timer that stops before the audit write; real figure was 49 ms</a:t>
-                      </a:r>
-                    </a:p>
-                  </a:txBody>
-                  <a:tcPr marL="63500" marR="63500" marT="38100" marB="38100">
-                    <a:noFill/>
-                  </a:tcPr>
-                </a:tc>
-                <a:tc>
-                  <a:txBody>
-                    <a:bodyPr wrap="square"/>
-                    <a:lstStyle/>
-                    <a:p>
-                      <a:r>
-                        <a:rPr sz="1100" b="0">
-                          <a:latin typeface="Calibri"/>
-                        </a:rPr>
-                        <a:t>Report client-observed latency; now 9 ms at the same rate</a:t>
-                      </a:r>
-                    </a:p>
-                  </a:txBody>
-                  <a:tcPr marL="63500" marR="63500" marT="38100" marB="38100">
-                    <a:noFill/>
-                  </a:tcPr>
-                </a:tc>
-              </a:tr>
-              <a:tr h="25400">
-                <a:tc>
-                  <a:txBody>
-                    <a:bodyPr wrap="square"/>
-                    <a:lstStyle/>
-                    <a:p>
-                      <a:r>
-                        <a:rPr sz="1100" b="0">
-                          <a:latin typeface="Calibri"/>
-                        </a:rPr>
-                        <a:t>Load harness (R1)</a:t>
-                      </a:r>
-                    </a:p>
-                  </a:txBody>
-                  <a:tcPr marL="63500" marR="63500" marT="38100" marB="38100">
-                    <a:solidFill>
-                      <a:srgbClr val="F4F6F9"/>
-                    </a:solidFill>
-                  </a:tcPr>
-                </a:tc>
-                <a:tc>
-                  <a:txBody>
-                    <a:bodyPr wrap="square"/>
-                    <a:lstStyle/>
-                    <a:p>
-                      <a:r>
-                        <a:rPr sz="1100" b="0">
-                          <a:latin typeface="Calibri"/>
-                        </a:rPr>
-                        <a:t>Audit chain dropped entries under concurrency and still verified as intact</a:t>
-                      </a:r>
-                    </a:p>
-                  </a:txBody>
-                  <a:tcPr marL="63500" marR="63500" marT="38100" marB="38100">
-                    <a:solidFill>
-                      <a:srgbClr val="F4F6F9"/>
-                    </a:solidFill>
-                  </a:tcPr>
-                </a:tc>
-                <a:tc>
-                  <a:txBody>
-                    <a:bodyPr wrap="square"/>
-                    <a:lstStyle/>
-                    <a:p>
-                      <a:r>
-                        <a:rPr sz="1100" b="0">
-                          <a:latin typeface="Calibri"/>
-                        </a:rPr>
-                        <a:t>Advisory lock + jittered backoff; 0 lost from 2 to 48 writers</a:t>
-                      </a:r>
-                    </a:p>
-                  </a:txBody>
-                  <a:tcPr marL="63500" marR="63500" marT="38100" marB="38100">
-                    <a:solidFill>
-                      <a:srgbClr val="F4F6F9"/>
-                    </a:solidFill>
-                  </a:tcPr>
-                </a:tc>
-              </a:tr>
-              <a:tr h="25400">
-                <a:tc>
-                  <a:txBody>
-                    <a:bodyPr wrap="square"/>
-                    <a:lstStyle/>
-                    <a:p>
-                      <a:r>
-                        <a:rPr sz="1100" b="0">
-                          <a:latin typeface="Calibri"/>
-                        </a:rPr>
-                        <a:t>Load harness (R1)</a:t>
-                      </a:r>
-                    </a:p>
-                  </a:txBody>
-                  <a:tcPr marL="63500" marR="63500" marT="38100" marB="38100">
-                    <a:noFill/>
-                  </a:tcPr>
-                </a:tc>
-                <a:tc>
-                  <a:txBody>
-                    <a:bodyPr wrap="square"/>
-                    <a:lstStyle/>
-                    <a:p>
-                      <a:r>
-                        <a:rPr sz="1100" b="0">
-                          <a:latin typeface="Calibri"/>
-                        </a:rPr>
-                        <a:t>Overload changed verdicts: ~13% flipped ALLOW → REVIEW</a:t>
-                      </a:r>
-                    </a:p>
-                  </a:txBody>
-                  <a:tcPr marL="63500" marR="63500" marT="38100" marB="38100">
-                    <a:noFill/>
-                  </a:tcPr>
-                </a:tc>
-                <a:tc>
-                  <a:txBody>
-                    <a:bodyPr wrap="square"/>
-                    <a:lstStyle/>
-                    <a:p>
-                      <a:r>
-                        <a:rPr sz="1100" b="0">
-                          <a:latin typeface="Calibri"/>
-                        </a:rPr>
-                        <a:t>Event loop unblocked + admission control: 0 flips under overload</a:t>
-                      </a:r>
-                    </a:p>
-                  </a:txBody>
-                  <a:tcPr marL="63500" marR="63500" marT="38100" marB="38100">
-                    <a:noFill/>
-                  </a:tcPr>
-                </a:tc>
-              </a:tr>
-              <a:tr h="25400">
-                <a:tc>
-                  <a:txBody>
-                    <a:bodyPr wrap="square"/>
-                    <a:lstStyle/>
-                    <a:p>
-                      <a:r>
-                        <a:rPr sz="1100" b="0">
-                          <a:latin typeface="Calibri"/>
-                        </a:rPr>
-                        <a:t>Unit test (R2)</a:t>
-                      </a:r>
-                    </a:p>
-                  </a:txBody>
-                  <a:tcPr marL="63500" marR="63500" marT="38100" marB="38100">
-                    <a:solidFill>
-                      <a:srgbClr val="F4F6F9"/>
-                    </a:solidFill>
-                  </a:tcPr>
-                </a:tc>
-                <a:tc>
-                  <a:txBody>
-                    <a:bodyPr wrap="square"/>
-                    <a:lstStyle/>
-                    <a:p>
-                      <a:r>
-                        <a:rPr sz="1100" b="0">
-                          <a:latin typeface="Calibri"/>
-                        </a:rPr>
-                        <a:t>Replay harness sorted dates as text — “Aug-2018” became the 2007 baseline</a:t>
-                      </a:r>
-                    </a:p>
-                  </a:txBody>
-                  <a:tcPr marL="63500" marR="63500" marT="38100" marB="38100">
-                    <a:solidFill>
-                      <a:srgbClr val="F4F6F9"/>
-                    </a:solidFill>
-                  </a:tcPr>
-                </a:tc>
-                <a:tc>
-                  <a:txBody>
-                    <a:bodyPr wrap="square"/>
-                    <a:lstStyle/>
-                    <a:p>
-                      <a:r>
-                        <a:rPr sz="1100" b="0">
-                          <a:latin typeface="Calibri"/>
-                        </a:rPr>
-                        <a:t>Parse dates; regression test on Lending Club's own date format</a:t>
-                      </a:r>
-                    </a:p>
-                  </a:txBody>
-                  <a:tcPr marL="63500" marR="63500" marT="38100" marB="38100">
-                    <a:solidFill>
-                      <a:srgbClr val="F4F6F9"/>
-                    </a:solidFill>
-                  </a:tcPr>
-                </a:tc>
-              </a:tr>
-              <a:tr h="25400">
-                <a:tc>
-                  <a:txBody>
-                    <a:bodyPr wrap="square"/>
-                    <a:lstStyle/>
-                    <a:p>
-                      <a:r>
-                        <a:rPr sz="1100" b="0">
-                          <a:latin typeface="Calibri"/>
-                        </a:rPr>
-                        <a:t>Fusion arithmetic (R2)</a:t>
-                      </a:r>
-                    </a:p>
-                  </a:txBody>
-                  <a:tcPr marL="63500" marR="63500" marT="38100" marB="38100">
-                    <a:noFill/>
-                  </a:tcPr>
-                </a:tc>
-                <a:tc>
-                  <a:txBody>
-                    <a:bodyPr wrap="square"/>
-                    <a:lstStyle/>
-                    <a:p>
-                      <a:r>
-                        <a:rPr sz="1100" b="0">
-                          <a:latin typeface="Calibri"/>
-                        </a:rPr>
-                        <a:t>Adding a live risk signal let a significantly drifted model reach ALLOW</a:t>
-                      </a:r>
-                    </a:p>
-                  </a:txBody>
-                  <a:tcPr marL="63500" marR="63500" marT="38100" marB="38100">
-                    <a:noFill/>
-                  </a:tcPr>
-                </a:tc>
-                <a:tc>
-                  <a:txBody>
-                    <a:bodyPr wrap="square"/>
-                    <a:lstStyle/>
-                    <a:p>
-                      <a:r>
-                        <a:rPr sz="1100" b="0">
-                          <a:latin typeface="Calibri"/>
-                        </a:rPr>
-                        <a:t>Explicit drift-floor rule in the decision cascade, pinned by tests</a:t>
-                      </a:r>
-                    </a:p>
-                  </a:txBody>
-                  <a:tcPr marL="63500" marR="63500" marT="38100" marB="38100">
-                    <a:noFill/>
-                  </a:tcPr>
-                </a:tc>
-              </a:tr>
-            </a:tbl>
-          </a:graphicData>
-        </a:graphic>
-      </p:graphicFrame>
+        </p:nvPicPr>
+        <p:blipFill>
+          <a:blip r:embed="rId4"/>
+          <a:stretch>
+            <a:fillRect/>
+          </a:stretch>
+        </p:blipFill>
+        <p:spPr>
+          <a:xfrm>
+            <a:off x="1066647" y="2514600"/>
+            <a:ext cx="10058400" cy="3017520"/>
+          </a:xfrm>
+          <a:prstGeom prst="rect">
+            <a:avLst/>
+          </a:prstGeom>
+        </p:spPr>
+      </p:pic>
     </p:spTree>
     <p:extLst>
       <p:ext uri="{BB962C8B-B14F-4D97-AF65-F5344CB8AC3E}">
@@ -10010,7 +9664,7 @@
                 <a:ea typeface="Calibri" panose="020F0502020204030204" pitchFamily="34" charset="0"/>
                 <a:cs typeface="Calibri" panose="020F0502020204030204" pitchFamily="34" charset="0"/>
               </a:rPr>
-              <a:t>Work Plan to the Final Review</a:t>
+              <a:t>Engineering Rigour — Problems We Found in Our Own System</a:t>
             </a:r>
           </a:p>
         </p:txBody>
@@ -10050,12 +9704,12 @@
               <a:buNone/>
             </a:pPr>
             <a:r>
-              <a:rPr lang="en-US" sz="1400" b="0" i="0" dirty="0">
+              <a:rPr lang="en-US" sz="1300" b="0" i="0" dirty="0">
                 <a:latin typeface="Calibri" panose="020F0502020204030204" pitchFamily="34" charset="0"/>
                 <a:ea typeface="Calibri" panose="020F0502020204030204" pitchFamily="34" charset="0"/>
                 <a:cs typeface="Calibri" panose="020F0502020204030204" pitchFamily="34" charset="0"/>
               </a:rPr>
-              <a:t>What remains, and what each item depends on.</a:t>
+              <a:t>Six problems, found by our own tooling. The last is the largest: real data contradicted the assumption the gating was built on.</a:t>
             </a:r>
           </a:p>
         </p:txBody>
@@ -10193,7 +9847,7 @@
           <p:nvPr/>
         </p:nvGraphicFramePr>
         <p:xfrm>
-          <a:off x="960120" y="2194560"/>
+          <a:off x="960120" y="2331720"/>
           <a:ext cx="10241279" cy="177800"/>
         </p:xfrm>
         <a:graphic>
@@ -10203,9 +9857,9 @@
                 <a:tableStyleId>{5C22544A-7EE6-4342-B048-85BDC9FD1C3A}</a:tableStyleId>
               </a:tblPr>
               <a:tblGrid>
-                <a:gridCol w="3072384"/>
+                <a:gridCol w="1741017"/>
                 <a:gridCol w="4915814"/>
-                <a:gridCol w="2253081"/>
+                <a:gridCol w="3584448"/>
               </a:tblGrid>
               <a:tr h="25400">
                 <a:tc>
@@ -10220,7 +9874,7 @@
                           </a:solidFill>
                           <a:latin typeface="Calibri"/>
                         </a:rPr>
-                        <a:t>Item</a:t>
+                        <a:t>Found by</a:t>
                       </a:r>
                     </a:p>
                   </a:txBody>
@@ -10242,7 +9896,7 @@
                           </a:solidFill>
                           <a:latin typeface="Calibri"/>
                         </a:rPr>
-                        <a:t>Why it matters</a:t>
+                        <a:t>Defect</a:t>
                       </a:r>
                     </a:p>
                   </a:txBody>
@@ -10264,7 +9918,7 @@
                           </a:solidFill>
                           <a:latin typeface="Calibri"/>
                         </a:rPr>
-                        <a:t>Depends on</a:t>
+                        <a:t>Fix</a:t>
                       </a:r>
                     </a:p>
                   </a:txBody>
@@ -10285,7 +9939,7 @@
                         <a:rPr sz="1100" b="0">
                           <a:latin typeface="Calibri"/>
                         </a:rPr>
-                        <a:t>Lending Club field validation</a:t>
+                        <a:t>Load harness (R1)</a:t>
                       </a:r>
                     </a:p>
                   </a:txBody>
@@ -10302,7 +9956,7 @@
                         <a:rPr sz="1100" b="0">
                           <a:latin typeface="Calibri"/>
                         </a:rPr>
-                        <a:t>Real drift nobody chose — the field half of validation</a:t>
+                        <a:t>Published p99 of 0.5 ms measured a timer that stops before the audit write; real figure was 49 ms</a:t>
                       </a:r>
                     </a:p>
                   </a:txBody>
@@ -10319,7 +9973,7 @@
                         <a:rPr sz="1100" b="0">
                           <a:latin typeface="Calibri"/>
                         </a:rPr>
-                        <a:t>Dataset download (ready to run)</a:t>
+                        <a:t>Report client-observed latency; now 9 ms at the same rate</a:t>
                       </a:r>
                     </a:p>
                   </a:txBody>
@@ -10338,7 +9992,7 @@
                         <a:rPr sz="1100" b="0">
                           <a:latin typeface="Calibri"/>
                         </a:rPr>
-                        <a:t>Scale-out: multiple gateway workers</a:t>
+                        <a:t>Load harness (R1)</a:t>
                       </a:r>
                     </a:p>
                   </a:txBody>
@@ -10357,7 +10011,7 @@
                         <a:rPr sz="1100" b="0">
                           <a:latin typeface="Calibri"/>
                         </a:rPr>
-                        <a:t>One process saturates near 300 req/s; past that, requests queue before the gate can see them</a:t>
+                        <a:t>Audit chain dropped entries under concurrency and still verified as intact</a:t>
                       </a:r>
                     </a:p>
                   </a:txBody>
@@ -10376,7 +10030,7 @@
                         <a:rPr sz="1100" b="0">
                           <a:latin typeface="Calibri"/>
                         </a:rPr>
-                        <a:t>Postgres for shared state</a:t>
+                        <a:t>Advisory lock + jittered backoff; 0 lost from 2 to 48 writers</a:t>
                       </a:r>
                     </a:p>
                   </a:txBody>
@@ -10397,7 +10051,7 @@
                         <a:rPr sz="1100" b="0">
                           <a:latin typeface="Calibri"/>
                         </a:rPr>
-                        <a:t>Postgres load measurement</a:t>
+                        <a:t>Load harness (R1)</a:t>
                       </a:r>
                     </a:p>
                   </a:txBody>
@@ -10414,7 +10068,7 @@
                         <a:rPr sz="1100" b="0">
                           <a:latin typeface="Calibri"/>
                         </a:rPr>
-                        <a:t>SQLite is the pessimistic floor; production runs Postgres</a:t>
+                        <a:t>Overload changed verdicts: ~13% flipped ALLOW → REVIEW</a:t>
                       </a:r>
                     </a:p>
                   </a:txBody>
@@ -10431,7 +10085,7 @@
                         <a:rPr sz="1100" b="0">
                           <a:latin typeface="Calibri"/>
                         </a:rPr>
-                        <a:t>Docker</a:t>
+                        <a:t>Event loop unblocked + admission control: 0 flips under overload</a:t>
                       </a:r>
                     </a:p>
                   </a:txBody>
@@ -10450,7 +10104,7 @@
                         <a:rPr sz="1100" b="0">
                           <a:latin typeface="Calibri"/>
                         </a:rPr>
-                        <a:t>Model / data versioning + retraining trigger</a:t>
+                        <a:t>Unit test (R2)</a:t>
                       </a:r>
                     </a:p>
                   </a:txBody>
@@ -10469,7 +10123,7 @@
                         <a:rPr sz="1100" b="0">
                           <a:latin typeface="Calibri"/>
                         </a:rPr>
-                        <a:t>What practitioners named as prerequisites</a:t>
+                        <a:t>Replay harness sorted dates as text — “Aug-2018” became the 2007 baseline</a:t>
                       </a:r>
                     </a:p>
                   </a:txBody>
@@ -10488,7 +10142,7 @@
                         <a:rPr sz="1100" b="0">
                           <a:latin typeface="Calibri"/>
                         </a:rPr>
-                        <a:t>—</a:t>
+                        <a:t>Parse dates; regression test on Lending Club's own date format</a:t>
                       </a:r>
                     </a:p>
                   </a:txBody>
@@ -10509,7 +10163,7 @@
                         <a:rPr sz="1100" b="0">
                           <a:latin typeface="Calibri"/>
                         </a:rPr>
-                        <a:t>Pipeline-break vs population-shift signal</a:t>
+                        <a:t>Fusion arithmetic (R2)</a:t>
                       </a:r>
                     </a:p>
                   </a:txBody>
@@ -10526,7 +10180,7 @@
                         <a:rPr sz="1100" b="0">
                           <a:latin typeface="Calibri"/>
                         </a:rPr>
-                        <a:t>One dead feed needs a different response from a real shift</a:t>
+                        <a:t>Adding a live risk signal let a significantly drifted model reach ALLOW</a:t>
                       </a:r>
                     </a:p>
                   </a:txBody>
@@ -10543,7 +10197,7 @@
                         <a:rPr sz="1100" b="0">
                           <a:latin typeface="Calibri"/>
                         </a:rPr>
-                        <a:t>—</a:t>
+                        <a:t>Explicit drift-floor rule in the decision cascade, pinned by tests</a:t>
                       </a:r>
                     </a:p>
                   </a:txBody>
@@ -10562,7 +10216,7 @@
                         <a:rPr sz="1100" b="0">
                           <a:latin typeface="Calibri"/>
                         </a:rPr>
-                        <a:t>Final report and paper draft</a:t>
+                        <a:t>Pre-registered study (R2)</a:t>
                       </a:r>
                     </a:p>
                   </a:txBody>
@@ -10581,7 +10235,7 @@
                         <a:rPr sz="1100" b="0">
                           <a:latin typeface="Calibri"/>
                         </a:rPr>
-                        <a:t>Department submission</a:t>
+                        <a:t>On real loans, drift gating caught fewer defaults than random; the drift floor would escalate 92% of decisions for no gain</a:t>
                       </a:r>
                     </a:p>
                   </a:txBody>
@@ -10600,7 +10254,7 @@
                         <a:rPr sz="1100" b="0">
                           <a:latin typeface="Calibri"/>
                         </a:rPr>
-                        <a:t>All of the above</a:t>
+                        <a:t>Not yet fixed — gating to be rebuilt around risk-ranked review</a:t>
                       </a:r>
                     </a:p>
                   </a:txBody>
@@ -10685,7 +10339,7 @@
                 <a:ea typeface="Calibri" panose="020F0502020204030204" pitchFamily="34" charset="0"/>
                 <a:cs typeface="Calibri" panose="020F0502020204030204" pitchFamily="34" charset="0"/>
               </a:rPr>
-              <a:t>Conclusion</a:t>
+              <a:t>Next Phase — From Gating to Governed Self-Healing</a:t>
             </a:r>
           </a:p>
         </p:txBody>
@@ -10725,12 +10379,1024 @@
               <a:buNone/>
             </a:pPr>
             <a:r>
+              <a:rPr lang="en-US" sz="1300" b="0" i="0" dirty="0">
+                <a:latin typeface="Calibri" panose="020F0502020204030204" pitchFamily="34" charset="0"/>
+                <a:ea typeface="Calibri" panose="020F0502020204030204" pitchFamily="34" charset="0"/>
+                <a:cs typeface="Calibri" panose="020F0502020204030204" pitchFamily="34" charset="0"/>
+              </a:rPr>
+              <a:t>Custos is domain-agnostic MLOps infrastructure: it gates any model whose output triggers an action. Our field study showed drift is a poor per-decision gate but a strong alarm — so next it triggers a repair, tested in shadow and applied only with human approval.</a:t>
+            </a:r>
+          </a:p>
+        </p:txBody>
+      </p:sp>
+      <p:pic>
+        <p:nvPicPr>
+          <p:cNvPr id="5" name="Graphic 4">
+            <a:extLst>
+              <a:ext uri="{FF2B5EF4-FFF2-40B4-BE49-F238E27FC236}">
+                <a16:creationId xmlns:a16="http://schemas.microsoft.com/office/drawing/2014/main" id="{E7125167-8301-4D88-B79A-A8DA3C19E0D6}"/>
+              </a:ext>
+            </a:extLst>
+          </p:cNvPr>
+          <p:cNvPicPr>
+            <a:picLocks noChangeAspect="1"/>
+          </p:cNvPicPr>
+          <p:nvPr/>
+        </p:nvPicPr>
+        <p:blipFill>
+          <a:blip r:embed="rId2">
+            <a:extLst>
+              <a:ext uri="{96DAC541-7B7A-43D3-8B79-37D633B846F1}">
+                <asvg:svgBlip xmlns:asvg="http://schemas.microsoft.com/office/drawing/2016/SVG/main" r:embed="rId3"/>
+              </a:ext>
+            </a:extLst>
+          </a:blip>
+          <a:stretch>
+            <a:fillRect/>
+          </a:stretch>
+        </p:blipFill>
+        <p:spPr>
+          <a:xfrm>
+            <a:off x="127001" y="86782"/>
+            <a:ext cx="1159932" cy="1159932"/>
+          </a:xfrm>
+          <a:prstGeom prst="rect">
+            <a:avLst/>
+          </a:prstGeom>
+        </p:spPr>
+      </p:pic>
+      <p:sp>
+        <p:nvSpPr>
+          <p:cNvPr id="4" name="Date Placeholder 3">
+            <a:extLst>
+              <a:ext uri="{FF2B5EF4-FFF2-40B4-BE49-F238E27FC236}">
+                <a16:creationId xmlns:a16="http://schemas.microsoft.com/office/drawing/2014/main" id="{35032362-C5A5-4DBF-AD79-DE6FB7439999}"/>
+              </a:ext>
+            </a:extLst>
+          </p:cNvPr>
+          <p:cNvSpPr>
+            <a:spLocks noGrp="1"/>
+          </p:cNvSpPr>
+          <p:nvPr>
+            <p:ph type="dt" sz="half" idx="10"/>
+          </p:nvPr>
+        </p:nvSpPr>
+        <p:spPr/>
+        <p:txBody>
+          <a:bodyPr/>
+          <a:lstStyle/>
+          <a:p>
+            <a:fld id="{64C96E34-94C0-49E4-A53B-4A44141FD3C8}" type="datetime3">
+              <a:rPr lang="en-US" smtClean="0"/>
+              <a:t>17 October 2026</a:t>
+            </a:fld>
+            <a:endParaRPr lang="en-US" dirty="0"/>
+          </a:p>
+        </p:txBody>
+      </p:sp>
+      <p:sp>
+        <p:nvSpPr>
+          <p:cNvPr id="6" name="Slide Number Placeholder 5">
+            <a:extLst>
+              <a:ext uri="{FF2B5EF4-FFF2-40B4-BE49-F238E27FC236}">
+                <a16:creationId xmlns:a16="http://schemas.microsoft.com/office/drawing/2014/main" id="{115AAB64-5B51-4B5A-B69E-D96362CE6E74}"/>
+              </a:ext>
+            </a:extLst>
+          </p:cNvPr>
+          <p:cNvSpPr>
+            <a:spLocks noGrp="1"/>
+          </p:cNvSpPr>
+          <p:nvPr>
+            <p:ph type="sldNum" sz="quarter" idx="12"/>
+          </p:nvPr>
+        </p:nvSpPr>
+        <p:spPr/>
+        <p:txBody>
+          <a:bodyPr/>
+          <a:lstStyle/>
+          <a:p>
+            <a:fld id="{D57F1E4F-1CFF-5643-939E-217C01CDF565}" type="slidenum">
+              <a:rPr lang="en-US" smtClean="0"/>
+              <a:pPr/>
+              <a:t>3</a:t>
+            </a:fld>
+            <a:endParaRPr lang="en-US" dirty="0"/>
+          </a:p>
+        </p:txBody>
+      </p:sp>
+      <p:sp>
+        <p:nvSpPr>
+          <p:cNvPr id="7" name="Footer Placeholder 6">
+            <a:extLst>
+              <a:ext uri="{FF2B5EF4-FFF2-40B4-BE49-F238E27FC236}">
+                <a16:creationId xmlns:a16="http://schemas.microsoft.com/office/drawing/2014/main" id="{8683C6DF-27D9-468B-A1AB-FE568488FE57}"/>
+              </a:ext>
+            </a:extLst>
+          </p:cNvPr>
+          <p:cNvSpPr>
+            <a:spLocks noGrp="1"/>
+          </p:cNvSpPr>
+          <p:nvPr>
+            <p:ph type="ftr" sz="quarter" idx="11"/>
+          </p:nvPr>
+        </p:nvSpPr>
+        <p:spPr/>
+        <p:txBody>
+          <a:bodyPr/>
+          <a:lstStyle/>
+          <a:p>
+            <a:r>
+              <a:rPr lang="en-US"/>
+              <a:t>Dept of AI &amp; DS</a:t>
+            </a:r>
+            <a:endParaRPr lang="en-US" dirty="0"/>
+          </a:p>
+        </p:txBody>
+      </p:sp>
+      <p:pic>
+        <p:nvPicPr>
+          <p:cNvPr id="8" name="Picture 7" descr="self_healing_loop.png"/>
+          <p:cNvPicPr>
+            <a:picLocks noChangeAspect="1"/>
+          </p:cNvPicPr>
+          <p:nvPr/>
+        </p:nvPicPr>
+        <p:blipFill>
+          <a:blip r:embed="rId4"/>
+          <a:stretch>
+            <a:fillRect/>
+          </a:stretch>
+        </p:blipFill>
+        <p:spPr>
+          <a:xfrm>
+            <a:off x="1066647" y="2697480"/>
+            <a:ext cx="10058400" cy="2148840"/>
+          </a:xfrm>
+          <a:prstGeom prst="rect">
+            <a:avLst/>
+          </a:prstGeom>
+        </p:spPr>
+      </p:pic>
+    </p:spTree>
+    <p:extLst>
+      <p:ext uri="{BB962C8B-B14F-4D97-AF65-F5344CB8AC3E}">
+        <p14:creationId xmlns:p14="http://schemas.microsoft.com/office/powerpoint/2010/main" val="3231882420"/>
+      </p:ext>
+    </p:extLst>
+  </p:cSld>
+  <p:clrMapOvr>
+    <a:masterClrMapping/>
+  </p:clrMapOvr>
+</p:sld>
+</file>
+
+<file path=ppt/slides/slide23.xml><?xml version="1.0" encoding="utf-8"?>
+<p:sld xmlns:a="http://schemas.openxmlformats.org/drawingml/2006/main" xmlns:r="http://schemas.openxmlformats.org/officeDocument/2006/relationships" xmlns:p="http://schemas.openxmlformats.org/presentationml/2006/main">
+  <p:cSld>
+    <p:spTree>
+      <p:nvGrpSpPr>
+        <p:cNvPr id="1" name=""/>
+        <p:cNvGrpSpPr/>
+        <p:nvPr/>
+      </p:nvGrpSpPr>
+      <p:grpSpPr>
+        <a:xfrm>
+          <a:off x="0" y="0"/>
+          <a:ext cx="0" cy="0"/>
+          <a:chOff x="0" y="0"/>
+          <a:chExt cx="0" cy="0"/>
+        </a:xfrm>
+      </p:grpSpPr>
+      <p:sp>
+        <p:nvSpPr>
+          <p:cNvPr id="2" name="Title 1">
+            <a:extLst>
+              <a:ext uri="{FF2B5EF4-FFF2-40B4-BE49-F238E27FC236}">
+                <a16:creationId xmlns:a16="http://schemas.microsoft.com/office/drawing/2014/main" id="{BD1A189D-22D1-4D1A-9E04-C6134EC51F8B}"/>
+              </a:ext>
+            </a:extLst>
+          </p:cNvPr>
+          <p:cNvSpPr>
+            <a:spLocks noGrp="1"/>
+          </p:cNvSpPr>
+          <p:nvPr>
+            <p:ph type="ctrTitle"/>
+          </p:nvPr>
+        </p:nvSpPr>
+        <p:spPr>
+          <a:xfrm>
+            <a:off x="1684868" y="203198"/>
+            <a:ext cx="9694332" cy="880535"/>
+          </a:xfrm>
+        </p:spPr>
+        <p:txBody>
+          <a:bodyPr>
+            <a:normAutofit/>
+          </a:bodyPr>
+          <a:lstStyle/>
+          <a:p>
+            <a:pPr marL="0" indent="0" algn="l">
+              <a:spcBef>
+                <a:spcPts val="0"/>
+              </a:spcBef>
+              <a:buNone/>
+            </a:pPr>
+            <a:r>
+              <a:rPr lang="en-US" sz="3200" b="1" i="0" dirty="0">
+                <a:latin typeface="Calibri" panose="020F0502020204030204" pitchFamily="34" charset="0"/>
+                <a:ea typeface="Calibri" panose="020F0502020204030204" pitchFamily="34" charset="0"/>
+                <a:cs typeface="Calibri" panose="020F0502020204030204" pitchFamily="34" charset="0"/>
+              </a:rPr>
+              <a:t>Work Plan to the Final Review</a:t>
+            </a:r>
+          </a:p>
+        </p:txBody>
+      </p:sp>
+      <p:sp>
+        <p:nvSpPr>
+          <p:cNvPr id="3" name="Subtitle 2">
+            <a:extLst>
+              <a:ext uri="{FF2B5EF4-FFF2-40B4-BE49-F238E27FC236}">
+                <a16:creationId xmlns:a16="http://schemas.microsoft.com/office/drawing/2014/main" id="{255E737C-85F2-47BC-AD38-AD8B001473B7}"/>
+              </a:ext>
+            </a:extLst>
+          </p:cNvPr>
+          <p:cNvSpPr>
+            <a:spLocks noGrp="1"/>
+          </p:cNvSpPr>
+          <p:nvPr>
+            <p:ph type="subTitle" idx="1"/>
+          </p:nvPr>
+        </p:nvSpPr>
+        <p:spPr>
+          <a:xfrm>
+            <a:off x="1684867" y="1574800"/>
+            <a:ext cx="9694333" cy="4614333"/>
+          </a:xfrm>
+        </p:spPr>
+        <p:txBody>
+          <a:bodyPr>
+            <a:normAutofit/>
+          </a:bodyPr>
+          <a:lstStyle/>
+          <a:p>
+            <a:pPr marL="0" indent="0" algn="l">
+              <a:spcBef>
+                <a:spcPts val="0"/>
+              </a:spcBef>
+              <a:buNone/>
+            </a:pPr>
+            <a:r>
+              <a:rPr lang="en-US" sz="1400" b="0" i="0" dirty="0">
+                <a:latin typeface="Calibri" panose="020F0502020204030204" pitchFamily="34" charset="0"/>
+                <a:ea typeface="Calibri" panose="020F0502020204030204" pitchFamily="34" charset="0"/>
+                <a:cs typeface="Calibri" panose="020F0502020204030204" pitchFamily="34" charset="0"/>
+              </a:rPr>
+              <a:t>What remains, and what each item depends on.</a:t>
+            </a:r>
+          </a:p>
+        </p:txBody>
+      </p:sp>
+      <p:pic>
+        <p:nvPicPr>
+          <p:cNvPr id="5" name="Graphic 4">
+            <a:extLst>
+              <a:ext uri="{FF2B5EF4-FFF2-40B4-BE49-F238E27FC236}">
+                <a16:creationId xmlns:a16="http://schemas.microsoft.com/office/drawing/2014/main" id="{E7125167-8301-4D88-B79A-A8DA3C19E0D6}"/>
+              </a:ext>
+            </a:extLst>
+          </p:cNvPr>
+          <p:cNvPicPr>
+            <a:picLocks noChangeAspect="1"/>
+          </p:cNvPicPr>
+          <p:nvPr/>
+        </p:nvPicPr>
+        <p:blipFill>
+          <a:blip r:embed="rId2">
+            <a:extLst>
+              <a:ext uri="{96DAC541-7B7A-43D3-8B79-37D633B846F1}">
+                <asvg:svgBlip xmlns:asvg="http://schemas.microsoft.com/office/drawing/2016/SVG/main" r:embed="rId3"/>
+              </a:ext>
+            </a:extLst>
+          </a:blip>
+          <a:stretch>
+            <a:fillRect/>
+          </a:stretch>
+        </p:blipFill>
+        <p:spPr>
+          <a:xfrm>
+            <a:off x="127001" y="86782"/>
+            <a:ext cx="1159932" cy="1159932"/>
+          </a:xfrm>
+          <a:prstGeom prst="rect">
+            <a:avLst/>
+          </a:prstGeom>
+        </p:spPr>
+      </p:pic>
+      <p:sp>
+        <p:nvSpPr>
+          <p:cNvPr id="4" name="Date Placeholder 3">
+            <a:extLst>
+              <a:ext uri="{FF2B5EF4-FFF2-40B4-BE49-F238E27FC236}">
+                <a16:creationId xmlns:a16="http://schemas.microsoft.com/office/drawing/2014/main" id="{35032362-C5A5-4DBF-AD79-DE6FB7439999}"/>
+              </a:ext>
+            </a:extLst>
+          </p:cNvPr>
+          <p:cNvSpPr>
+            <a:spLocks noGrp="1"/>
+          </p:cNvSpPr>
+          <p:nvPr>
+            <p:ph type="dt" sz="half" idx="10"/>
+          </p:nvPr>
+        </p:nvSpPr>
+        <p:spPr/>
+        <p:txBody>
+          <a:bodyPr/>
+          <a:lstStyle/>
+          <a:p>
+            <a:fld id="{64C96E34-94C0-49E4-A53B-4A44141FD3C8}" type="datetime3">
+              <a:rPr lang="en-US" smtClean="0"/>
+              <a:t>17 October 2026</a:t>
+            </a:fld>
+            <a:endParaRPr lang="en-US" dirty="0"/>
+          </a:p>
+        </p:txBody>
+      </p:sp>
+      <p:sp>
+        <p:nvSpPr>
+          <p:cNvPr id="6" name="Slide Number Placeholder 5">
+            <a:extLst>
+              <a:ext uri="{FF2B5EF4-FFF2-40B4-BE49-F238E27FC236}">
+                <a16:creationId xmlns:a16="http://schemas.microsoft.com/office/drawing/2014/main" id="{115AAB64-5B51-4B5A-B69E-D96362CE6E74}"/>
+              </a:ext>
+            </a:extLst>
+          </p:cNvPr>
+          <p:cNvSpPr>
+            <a:spLocks noGrp="1"/>
+          </p:cNvSpPr>
+          <p:nvPr>
+            <p:ph type="sldNum" sz="quarter" idx="12"/>
+          </p:nvPr>
+        </p:nvSpPr>
+        <p:spPr/>
+        <p:txBody>
+          <a:bodyPr/>
+          <a:lstStyle/>
+          <a:p>
+            <a:fld id="{D57F1E4F-1CFF-5643-939E-217C01CDF565}" type="slidenum">
+              <a:rPr lang="en-US" smtClean="0"/>
+              <a:pPr/>
+              <a:t>3</a:t>
+            </a:fld>
+            <a:endParaRPr lang="en-US" dirty="0"/>
+          </a:p>
+        </p:txBody>
+      </p:sp>
+      <p:sp>
+        <p:nvSpPr>
+          <p:cNvPr id="7" name="Footer Placeholder 6">
+            <a:extLst>
+              <a:ext uri="{FF2B5EF4-FFF2-40B4-BE49-F238E27FC236}">
+                <a16:creationId xmlns:a16="http://schemas.microsoft.com/office/drawing/2014/main" id="{8683C6DF-27D9-468B-A1AB-FE568488FE57}"/>
+              </a:ext>
+            </a:extLst>
+          </p:cNvPr>
+          <p:cNvSpPr>
+            <a:spLocks noGrp="1"/>
+          </p:cNvSpPr>
+          <p:nvPr>
+            <p:ph type="ftr" sz="quarter" idx="11"/>
+          </p:nvPr>
+        </p:nvSpPr>
+        <p:spPr/>
+        <p:txBody>
+          <a:bodyPr/>
+          <a:lstStyle/>
+          <a:p>
+            <a:r>
+              <a:rPr lang="en-US"/>
+              <a:t>Dept of AI &amp; DS</a:t>
+            </a:r>
+            <a:endParaRPr lang="en-US" dirty="0"/>
+          </a:p>
+        </p:txBody>
+      </p:sp>
+      <p:graphicFrame>
+        <p:nvGraphicFramePr>
+          <p:cNvPr id="8" name="Table 7"/>
+          <p:cNvGraphicFramePr>
+            <a:graphicFrameLocks noGrp="1"/>
+          </p:cNvGraphicFramePr>
+          <p:nvPr/>
+        </p:nvGraphicFramePr>
+        <p:xfrm>
+          <a:off x="960120" y="2194560"/>
+          <a:ext cx="10241279" cy="203200"/>
+        </p:xfrm>
+        <a:graphic>
+          <a:graphicData uri="http://schemas.openxmlformats.org/drawingml/2006/table">
+            <a:tbl>
+              <a:tblPr firstRow="1">
+                <a:tableStyleId>{5C22544A-7EE6-4342-B048-85BDC9FD1C3A}</a:tableStyleId>
+              </a:tblPr>
+              <a:tblGrid>
+                <a:gridCol w="3072384"/>
+                <a:gridCol w="4915814"/>
+                <a:gridCol w="2253081"/>
+              </a:tblGrid>
+              <a:tr h="25400">
+                <a:tc>
+                  <a:txBody>
+                    <a:bodyPr wrap="square"/>
+                    <a:lstStyle/>
+                    <a:p>
+                      <a:r>
+                        <a:rPr sz="1100" b="1">
+                          <a:solidFill>
+                            <a:srgbClr val="FFFFFF"/>
+                          </a:solidFill>
+                          <a:latin typeface="Calibri"/>
+                        </a:rPr>
+                        <a:t>Item</a:t>
+                      </a:r>
+                    </a:p>
+                  </a:txBody>
+                  <a:tcPr marL="63500" marR="63500" marT="38100" marB="38100">
+                    <a:solidFill>
+                      <a:srgbClr val="1F5CA8"/>
+                    </a:solidFill>
+                  </a:tcPr>
+                </a:tc>
+                <a:tc>
+                  <a:txBody>
+                    <a:bodyPr wrap="square"/>
+                    <a:lstStyle/>
+                    <a:p>
+                      <a:r>
+                        <a:rPr sz="1100" b="1">
+                          <a:solidFill>
+                            <a:srgbClr val="FFFFFF"/>
+                          </a:solidFill>
+                          <a:latin typeface="Calibri"/>
+                        </a:rPr>
+                        <a:t>Why it matters</a:t>
+                      </a:r>
+                    </a:p>
+                  </a:txBody>
+                  <a:tcPr marL="63500" marR="63500" marT="38100" marB="38100">
+                    <a:solidFill>
+                      <a:srgbClr val="1F5CA8"/>
+                    </a:solidFill>
+                  </a:tcPr>
+                </a:tc>
+                <a:tc>
+                  <a:txBody>
+                    <a:bodyPr wrap="square"/>
+                    <a:lstStyle/>
+                    <a:p>
+                      <a:r>
+                        <a:rPr sz="1100" b="1">
+                          <a:solidFill>
+                            <a:srgbClr val="FFFFFF"/>
+                          </a:solidFill>
+                          <a:latin typeface="Calibri"/>
+                        </a:rPr>
+                        <a:t>Depends on</a:t>
+                      </a:r>
+                    </a:p>
+                  </a:txBody>
+                  <a:tcPr marL="63500" marR="63500" marT="38100" marB="38100">
+                    <a:solidFill>
+                      <a:srgbClr val="1F5CA8"/>
+                    </a:solidFill>
+                  </a:tcPr>
+                </a:tc>
+              </a:tr>
+              <a:tr h="25400">
+                <a:tc>
+                  <a:txBody>
+                    <a:bodyPr wrap="square"/>
+                    <a:lstStyle/>
+                    <a:p>
+                      <a:r>
+                        <a:rPr sz="1100" b="0">
+                          <a:latin typeface="Calibri"/>
+                        </a:rPr>
+                        <a:t>Rebuild gating around risk-ranked review</a:t>
+                      </a:r>
+                    </a:p>
+                  </a:txBody>
+                  <a:tcPr marL="63500" marR="63500" marT="38100" marB="38100">
+                    <a:noFill/>
+                  </a:tcPr>
+                </a:tc>
+                <a:tc>
+                  <a:txBody>
+                    <a:bodyPr wrap="square"/>
+                    <a:lstStyle/>
+                    <a:p>
+                      <a:r>
+                        <a:rPr sz="1100" b="0">
+                          <a:latin typeface="Calibri"/>
+                        </a:rPr>
+                        <a:t>On real loans the model's risk ranking caught 2.1× random; drift gating caught less than random</a:t>
+                      </a:r>
+                    </a:p>
+                  </a:txBody>
+                  <a:tcPr marL="63500" marR="63500" marT="38100" marB="38100">
+                    <a:noFill/>
+                  </a:tcPr>
+                </a:tc>
+                <a:tc>
+                  <a:txBody>
+                    <a:bodyPr wrap="square"/>
+                    <a:lstStyle/>
+                    <a:p>
+                      <a:r>
+                        <a:rPr sz="1100" b="0">
+                          <a:latin typeface="Calibri"/>
+                        </a:rPr>
+                        <a:t>—</a:t>
+                      </a:r>
+                    </a:p>
+                  </a:txBody>
+                  <a:tcPr marL="63500" marR="63500" marT="38100" marB="38100">
+                    <a:noFill/>
+                  </a:tcPr>
+                </a:tc>
+              </a:tr>
+              <a:tr h="25400">
+                <a:tc>
+                  <a:txBody>
+                    <a:bodyPr wrap="square"/>
+                    <a:lstStyle/>
+                    <a:p>
+                      <a:r>
+                        <a:rPr sz="1100" b="0">
+                          <a:latin typeface="Calibri"/>
+                        </a:rPr>
+                        <a:t>Replicate on a second credit dataset</a:t>
+                      </a:r>
+                    </a:p>
+                  </a:txBody>
+                  <a:tcPr marL="63500" marR="63500" marT="38100" marB="38100">
+                    <a:solidFill>
+                      <a:srgbClr val="F4F6F9"/>
+                    </a:solidFill>
+                  </a:tcPr>
+                </a:tc>
+                <a:tc>
+                  <a:txBody>
+                    <a:bodyPr wrap="square"/>
+                    <a:lstStyle/>
+                    <a:p>
+                      <a:r>
+                        <a:rPr sz="1100" b="0">
+                          <a:latin typeface="Calibri"/>
+                        </a:rPr>
+                        <a:t>One dataset cannot support a general claim</a:t>
+                      </a:r>
+                    </a:p>
+                  </a:txBody>
+                  <a:tcPr marL="63500" marR="63500" marT="38100" marB="38100">
+                    <a:solidFill>
+                      <a:srgbClr val="F4F6F9"/>
+                    </a:solidFill>
+                  </a:tcPr>
+                </a:tc>
+                <a:tc>
+                  <a:txBody>
+                    <a:bodyPr wrap="square"/>
+                    <a:lstStyle/>
+                    <a:p>
+                      <a:r>
+                        <a:rPr sz="1100" b="0">
+                          <a:latin typeface="Calibri"/>
+                        </a:rPr>
+                        <a:t>Dataset access</a:t>
+                      </a:r>
+                    </a:p>
+                  </a:txBody>
+                  <a:tcPr marL="63500" marR="63500" marT="38100" marB="38100">
+                    <a:solidFill>
+                      <a:srgbClr val="F4F6F9"/>
+                    </a:solidFill>
+                  </a:tcPr>
+                </a:tc>
+              </a:tr>
+              <a:tr h="25400">
+                <a:tc>
+                  <a:txBody>
+                    <a:bodyPr wrap="square"/>
+                    <a:lstStyle/>
+                    <a:p>
+                      <a:r>
+                        <a:rPr sz="1100" b="0">
+                          <a:latin typeface="Calibri"/>
+                        </a:rPr>
+                        <a:t>Scale-out: multiple gateway workers</a:t>
+                      </a:r>
+                    </a:p>
+                  </a:txBody>
+                  <a:tcPr marL="63500" marR="63500" marT="38100" marB="38100">
+                    <a:noFill/>
+                  </a:tcPr>
+                </a:tc>
+                <a:tc>
+                  <a:txBody>
+                    <a:bodyPr wrap="square"/>
+                    <a:lstStyle/>
+                    <a:p>
+                      <a:r>
+                        <a:rPr sz="1100" b="0">
+                          <a:latin typeface="Calibri"/>
+                        </a:rPr>
+                        <a:t>One process saturates near 300 req/s; past that, requests queue before the gate can see them</a:t>
+                      </a:r>
+                    </a:p>
+                  </a:txBody>
+                  <a:tcPr marL="63500" marR="63500" marT="38100" marB="38100">
+                    <a:noFill/>
+                  </a:tcPr>
+                </a:tc>
+                <a:tc>
+                  <a:txBody>
+                    <a:bodyPr wrap="square"/>
+                    <a:lstStyle/>
+                    <a:p>
+                      <a:r>
+                        <a:rPr sz="1100" b="0">
+                          <a:latin typeface="Calibri"/>
+                        </a:rPr>
+                        <a:t>Postgres for shared state</a:t>
+                      </a:r>
+                    </a:p>
+                  </a:txBody>
+                  <a:tcPr marL="63500" marR="63500" marT="38100" marB="38100">
+                    <a:noFill/>
+                  </a:tcPr>
+                </a:tc>
+              </a:tr>
+              <a:tr h="25400">
+                <a:tc>
+                  <a:txBody>
+                    <a:bodyPr wrap="square"/>
+                    <a:lstStyle/>
+                    <a:p>
+                      <a:r>
+                        <a:rPr sz="1100" b="0">
+                          <a:latin typeface="Calibri"/>
+                        </a:rPr>
+                        <a:t>Postgres load measurement</a:t>
+                      </a:r>
+                    </a:p>
+                  </a:txBody>
+                  <a:tcPr marL="63500" marR="63500" marT="38100" marB="38100">
+                    <a:solidFill>
+                      <a:srgbClr val="F4F6F9"/>
+                    </a:solidFill>
+                  </a:tcPr>
+                </a:tc>
+                <a:tc>
+                  <a:txBody>
+                    <a:bodyPr wrap="square"/>
+                    <a:lstStyle/>
+                    <a:p>
+                      <a:r>
+                        <a:rPr sz="1100" b="0">
+                          <a:latin typeface="Calibri"/>
+                        </a:rPr>
+                        <a:t>SQLite is the pessimistic floor; production runs Postgres</a:t>
+                      </a:r>
+                    </a:p>
+                  </a:txBody>
+                  <a:tcPr marL="63500" marR="63500" marT="38100" marB="38100">
+                    <a:solidFill>
+                      <a:srgbClr val="F4F6F9"/>
+                    </a:solidFill>
+                  </a:tcPr>
+                </a:tc>
+                <a:tc>
+                  <a:txBody>
+                    <a:bodyPr wrap="square"/>
+                    <a:lstStyle/>
+                    <a:p>
+                      <a:r>
+                        <a:rPr sz="1100" b="0">
+                          <a:latin typeface="Calibri"/>
+                        </a:rPr>
+                        <a:t>Docker</a:t>
+                      </a:r>
+                    </a:p>
+                  </a:txBody>
+                  <a:tcPr marL="63500" marR="63500" marT="38100" marB="38100">
+                    <a:solidFill>
+                      <a:srgbClr val="F4F6F9"/>
+                    </a:solidFill>
+                  </a:tcPr>
+                </a:tc>
+              </a:tr>
+              <a:tr h="25400">
+                <a:tc>
+                  <a:txBody>
+                    <a:bodyPr wrap="square"/>
+                    <a:lstStyle/>
+                    <a:p>
+                      <a:r>
+                        <a:rPr sz="1100" b="0">
+                          <a:latin typeface="Calibri"/>
+                        </a:rPr>
+                        <a:t>Self-healing step 1: broken-feed detection + proposed rollback, in shadow</a:t>
+                      </a:r>
+                    </a:p>
+                  </a:txBody>
+                  <a:tcPr marL="63500" marR="63500" marT="38100" marB="38100">
+                    <a:noFill/>
+                  </a:tcPr>
+                </a:tc>
+                <a:tc>
+                  <a:txBody>
+                    <a:bodyPr wrap="square"/>
+                    <a:lstStyle/>
+                    <a:p>
+                      <a:r>
+                        <a:rPr sz="1100" b="0">
+                          <a:latin typeface="Calibri"/>
+                        </a:rPr>
+                        <a:t>A dead input feed needs a different repair from a real population shift</a:t>
+                      </a:r>
+                    </a:p>
+                  </a:txBody>
+                  <a:tcPr marL="63500" marR="63500" marT="38100" marB="38100">
+                    <a:noFill/>
+                  </a:tcPr>
+                </a:tc>
+                <a:tc>
+                  <a:txBody>
+                    <a:bodyPr wrap="square"/>
+                    <a:lstStyle/>
+                    <a:p>
+                      <a:r>
+                        <a:rPr sz="1100" b="0">
+                          <a:latin typeface="Calibri"/>
+                        </a:rPr>
+                        <a:t>Model versioning</a:t>
+                      </a:r>
+                    </a:p>
+                  </a:txBody>
+                  <a:tcPr marL="63500" marR="63500" marT="38100" marB="38100">
+                    <a:noFill/>
+                  </a:tcPr>
+                </a:tc>
+              </a:tr>
+              <a:tr h="25400">
+                <a:tc>
+                  <a:txBody>
+                    <a:bodyPr wrap="square"/>
+                    <a:lstStyle/>
+                    <a:p>
+                      <a:r>
+                        <a:rPr sz="1100" b="0">
+                          <a:latin typeface="Calibri"/>
+                        </a:rPr>
+                        <a:t>Self-healing step 2: human approval queue; every repair on the audit chain</a:t>
+                      </a:r>
+                    </a:p>
+                  </a:txBody>
+                  <a:tcPr marL="63500" marR="63500" marT="38100" marB="38100">
+                    <a:solidFill>
+                      <a:srgbClr val="F4F6F9"/>
+                    </a:solidFill>
+                  </a:tcPr>
+                </a:tc>
+                <a:tc>
+                  <a:txBody>
+                    <a:bodyPr wrap="square"/>
+                    <a:lstStyle/>
+                    <a:p>
+                      <a:r>
+                        <a:rPr sz="1100" b="0">
+                          <a:latin typeface="Calibri"/>
+                        </a:rPr>
+                        <a:t>No repair is applied without a person and a tamper-evident record</a:t>
+                      </a:r>
+                    </a:p>
+                  </a:txBody>
+                  <a:tcPr marL="63500" marR="63500" marT="38100" marB="38100">
+                    <a:solidFill>
+                      <a:srgbClr val="F4F6F9"/>
+                    </a:solidFill>
+                  </a:tcPr>
+                </a:tc>
+                <a:tc>
+                  <a:txBody>
+                    <a:bodyPr wrap="square"/>
+                    <a:lstStyle/>
+                    <a:p>
+                      <a:r>
+                        <a:rPr sz="1100" b="0">
+                          <a:latin typeface="Calibri"/>
+                        </a:rPr>
+                        <a:t>Step 1</a:t>
+                      </a:r>
+                    </a:p>
+                  </a:txBody>
+                  <a:tcPr marL="63500" marR="63500" marT="38100" marB="38100">
+                    <a:solidFill>
+                      <a:srgbClr val="F4F6F9"/>
+                    </a:solidFill>
+                  </a:tcPr>
+                </a:tc>
+              </a:tr>
+              <a:tr h="25400">
+                <a:tc>
+                  <a:txBody>
+                    <a:bodyPr wrap="square"/>
+                    <a:lstStyle/>
+                    <a:p>
+                      <a:r>
+                        <a:rPr sz="1100" b="0">
+                          <a:latin typeface="Calibri"/>
+                        </a:rPr>
+                        <a:t>Final report and paper draft</a:t>
+                      </a:r>
+                    </a:p>
+                  </a:txBody>
+                  <a:tcPr marL="63500" marR="63500" marT="38100" marB="38100">
+                    <a:noFill/>
+                  </a:tcPr>
+                </a:tc>
+                <a:tc>
+                  <a:txBody>
+                    <a:bodyPr wrap="square"/>
+                    <a:lstStyle/>
+                    <a:p>
+                      <a:r>
+                        <a:rPr sz="1100" b="0">
+                          <a:latin typeface="Calibri"/>
+                        </a:rPr>
+                        <a:t>Department submission</a:t>
+                      </a:r>
+                    </a:p>
+                  </a:txBody>
+                  <a:tcPr marL="63500" marR="63500" marT="38100" marB="38100">
+                    <a:noFill/>
+                  </a:tcPr>
+                </a:tc>
+                <a:tc>
+                  <a:txBody>
+                    <a:bodyPr wrap="square"/>
+                    <a:lstStyle/>
+                    <a:p>
+                      <a:r>
+                        <a:rPr sz="1100" b="0">
+                          <a:latin typeface="Calibri"/>
+                        </a:rPr>
+                        <a:t>All of the above</a:t>
+                      </a:r>
+                    </a:p>
+                  </a:txBody>
+                  <a:tcPr marL="63500" marR="63500" marT="38100" marB="38100">
+                    <a:noFill/>
+                  </a:tcPr>
+                </a:tc>
+              </a:tr>
+            </a:tbl>
+          </a:graphicData>
+        </a:graphic>
+      </p:graphicFrame>
+    </p:spTree>
+    <p:extLst>
+      <p:ext uri="{BB962C8B-B14F-4D97-AF65-F5344CB8AC3E}">
+        <p14:creationId xmlns:p14="http://schemas.microsoft.com/office/powerpoint/2010/main" val="3231882420"/>
+      </p:ext>
+    </p:extLst>
+  </p:cSld>
+  <p:clrMapOvr>
+    <a:masterClrMapping/>
+  </p:clrMapOvr>
+</p:sld>
+</file>
+
+<file path=ppt/slides/slide24.xml><?xml version="1.0" encoding="utf-8"?>
+<p:sld xmlns:a="http://schemas.openxmlformats.org/drawingml/2006/main" xmlns:r="http://schemas.openxmlformats.org/officeDocument/2006/relationships" xmlns:p="http://schemas.openxmlformats.org/presentationml/2006/main">
+  <p:cSld>
+    <p:spTree>
+      <p:nvGrpSpPr>
+        <p:cNvPr id="1" name=""/>
+        <p:cNvGrpSpPr/>
+        <p:nvPr/>
+      </p:nvGrpSpPr>
+      <p:grpSpPr>
+        <a:xfrm>
+          <a:off x="0" y="0"/>
+          <a:ext cx="0" cy="0"/>
+          <a:chOff x="0" y="0"/>
+          <a:chExt cx="0" cy="0"/>
+        </a:xfrm>
+      </p:grpSpPr>
+      <p:sp>
+        <p:nvSpPr>
+          <p:cNvPr id="2" name="Title 1">
+            <a:extLst>
+              <a:ext uri="{FF2B5EF4-FFF2-40B4-BE49-F238E27FC236}">
+                <a16:creationId xmlns:a16="http://schemas.microsoft.com/office/drawing/2014/main" id="{BD1A189D-22D1-4D1A-9E04-C6134EC51F8B}"/>
+              </a:ext>
+            </a:extLst>
+          </p:cNvPr>
+          <p:cNvSpPr>
+            <a:spLocks noGrp="1"/>
+          </p:cNvSpPr>
+          <p:nvPr>
+            <p:ph type="ctrTitle"/>
+          </p:nvPr>
+        </p:nvSpPr>
+        <p:spPr>
+          <a:xfrm>
+            <a:off x="1684868" y="203198"/>
+            <a:ext cx="9694332" cy="880535"/>
+          </a:xfrm>
+        </p:spPr>
+        <p:txBody>
+          <a:bodyPr>
+            <a:normAutofit/>
+          </a:bodyPr>
+          <a:lstStyle/>
+          <a:p>
+            <a:pPr marL="0" indent="0" algn="l">
+              <a:spcBef>
+                <a:spcPts val="0"/>
+              </a:spcBef>
+              <a:buNone/>
+            </a:pPr>
+            <a:r>
+              <a:rPr lang="en-US" sz="3200" b="1" i="0" dirty="0">
+                <a:latin typeface="Calibri" panose="020F0502020204030204" pitchFamily="34" charset="0"/>
+                <a:ea typeface="Calibri" panose="020F0502020204030204" pitchFamily="34" charset="0"/>
+                <a:cs typeface="Calibri" panose="020F0502020204030204" pitchFamily="34" charset="0"/>
+              </a:rPr>
+              <a:t>Conclusion</a:t>
+            </a:r>
+          </a:p>
+        </p:txBody>
+      </p:sp>
+      <p:sp>
+        <p:nvSpPr>
+          <p:cNvPr id="3" name="Subtitle 2">
+            <a:extLst>
+              <a:ext uri="{FF2B5EF4-FFF2-40B4-BE49-F238E27FC236}">
+                <a16:creationId xmlns:a16="http://schemas.microsoft.com/office/drawing/2014/main" id="{255E737C-85F2-47BC-AD38-AD8B001473B7}"/>
+              </a:ext>
+            </a:extLst>
+          </p:cNvPr>
+          <p:cNvSpPr>
+            <a:spLocks noGrp="1"/>
+          </p:cNvSpPr>
+          <p:nvPr>
+            <p:ph type="subTitle" idx="1"/>
+          </p:nvPr>
+        </p:nvSpPr>
+        <p:spPr>
+          <a:xfrm>
+            <a:off x="1684867" y="1574800"/>
+            <a:ext cx="9694333" cy="4614333"/>
+          </a:xfrm>
+        </p:spPr>
+        <p:txBody>
+          <a:bodyPr>
+            <a:normAutofit/>
+          </a:bodyPr>
+          <a:lstStyle/>
+          <a:p>
+            <a:pPr marL="0" indent="0" algn="l">
+              <a:spcBef>
+                <a:spcPts val="0"/>
+              </a:spcBef>
+              <a:buNone/>
+            </a:pPr>
+            <a:r>
               <a:rPr lang="en-US" sz="1400" b="1" i="0" dirty="0">
                 <a:latin typeface="Calibri" panose="020F0502020204030204" pitchFamily="34" charset="0"/>
                 <a:ea typeface="Calibri" panose="020F0502020204030204" pitchFamily="34" charset="0"/>
                 <a:cs typeface="Calibri" panose="020F0502020204030204" pitchFamily="34" charset="0"/>
               </a:rPr>
-              <a:t>304 tests passing · latency budget holds to 200 req/s, double Review-1 · overload no longer changes verdicts · all three trust signals live.</a:t>
+              <a:t>342 tests passing · latency budget holds to 200 req/s, double Review-1 · overload no longer changes verdicts · all three trust signals live.</a:t>
+            </a:r>
+          </a:p>
+          <a:p>
+            <a:pPr marL="0" indent="0" algn="l">
+              <a:spcBef>
+                <a:spcPts val="200"/>
+              </a:spcBef>
+              <a:buNone/>
+            </a:pPr>
+            <a:r>
+              <a:rPr lang="en-US" sz="1300" b="0" i="0" dirty="0">
+                <a:latin typeface="Calibri" panose="020F0502020204030204" pitchFamily="34" charset="0"/>
+                <a:ea typeface="Calibri" panose="020F0502020204030204" pitchFamily="34" charset="0"/>
+                <a:cs typeface="Calibri" panose="020F0502020204030204" pitchFamily="34" charset="0"/>
+              </a:rPr>
+              <a:t>And the hardest result: on 589,186 real loans, gating on drift did worse than random review. Pre-registered, reported as measured — and it now decides what we build next.</a:t>
             </a:r>
           </a:p>
         </p:txBody>
@@ -11106,7 +11772,7 @@
                         <a:rPr sz="1100" b="0">
                           <a:latin typeface="Calibri"/>
                         </a:rPr>
-                        <a:t>Python SDK · React operator dashboard · fintech demonstration · 304-test suite across unit, integration and end-to-end</a:t>
+                        <a:t>Python SDK · React operator dashboard · fintech demonstration · 342-test suite across unit, integration and end-to-end</a:t>
                       </a:r>
                     </a:p>
                   </a:txBody>
@@ -11266,7 +11932,7 @@
                 <a:ea typeface="Calibri" panose="020F0502020204030204" pitchFamily="34" charset="0"/>
                 <a:cs typeface="Calibri" panose="020F0502020204030204" pitchFamily="34" charset="0"/>
               </a:rPr>
-              <a:t>The detector is validated by calibration against shifts of known size; the gateway by open-loop load testing. Our own tooling has found five defects in the system, all fixed and pinned by tests.</a:t>
+              <a:t>The detector is validated by calibration against shifts of known size, the gateway by open-loop load testing, and the gating idea itself by a pre-registered study on 589,186 real loans. That study found that gating on population drift catches fewer bad loans than random review. We report it as measured, and it now decides what we build next.</a:t>
             </a:r>
           </a:p>
         </p:txBody>
@@ -11869,7 +12535,7 @@
                         <a:rPr sz="1100" b="0">
                           <a:latin typeface="Calibri"/>
                         </a:rPr>
-                        <a:t>In progress</a:t>
+                        <a:t>Done — negative</a:t>
                       </a:r>
                     </a:p>
                   </a:txBody>
@@ -11886,7 +12552,7 @@
                         <a:rPr sz="1100" b="0">
                           <a:latin typeface="Calibri"/>
                         </a:rPr>
-                        <a:t>Replay harness hardened: reads .gz directly, quarterly windows, and a date-ordering bug found and fixed. Dataset run pending download</a:t>
+                        <a:t>Pre-registered study, 589,186 real loans: drift gating caught fewer defaults than random review. Reported as measured</a:t>
                       </a:r>
                     </a:p>
                   </a:txBody>

--- a/docs/presentations/Custos_Phase2_Review2.pptx
+++ b/docs/presentations/Custos_Phase2_Review2.pptx
@@ -6224,7 +6224,7 @@
         </p:nvGraphicFramePr>
         <p:xfrm>
           <a:off x="960120" y="2240280"/>
-          <a:ext cx="10241278" cy="330200"/>
+          <a:ext cx="10241278" cy="355600"/>
         </p:xfrm>
         <a:graphic>
           <a:graphicData uri="http://schemas.openxmlformats.org/drawingml/2006/table">
@@ -6499,7 +6499,7 @@
                         <a:rPr sz="950" b="0">
                           <a:latin typeface="Calibri"/>
                         </a:rPr>
-                        <a:t>Concurrent fan-out, per-engine timeouts, weighted fusion, 7-rule decision cascade</a:t>
+                        <a:t>Concurrent fan-out, per-engine timeouts, weighted fusion, 8-rule decision cascade</a:t>
                       </a:r>
                     </a:p>
                   </a:txBody>
@@ -6668,7 +6668,7 @@
                         <a:rPr sz="950" b="0">
                           <a:latin typeface="Calibri"/>
                         </a:rPr>
-                        <a:t>/v1/evaluate, /health, /metrics and 14 control-plane endpoints</a:t>
+                        <a:t>/v1/evaluate, /health, /metrics and 23 control-plane endpoints</a:t>
                       </a:r>
                     </a:p>
                   </a:txBody>
@@ -6928,7 +6928,7 @@
                         <a:rPr sz="950" b="0">
                           <a:latin typeface="Calibri"/>
                         </a:rPr>
-                        <a:t>Versioning + retraining trigger</a:t>
+                        <a:t>Governed self-healing</a:t>
                       </a:r>
                     </a:p>
                   </a:txBody>
@@ -6947,7 +6947,7 @@
                         <a:rPr sz="950" b="0">
                           <a:latin typeface="Calibri"/>
                         </a:rPr>
-                        <a:t>Model / data version tracking and a drift-driven retrain signal</a:t>
+                        <a:t>new — feed-vs-shift diagnosis, shadow-tested repairs, named approval, audited</a:t>
                       </a:r>
                     </a:p>
                   </a:txBody>
@@ -6966,7 +6966,7 @@
                         <a:rPr sz="950" b="0">
                           <a:latin typeface="Calibri"/>
                         </a:rPr>
-                        <a:t>Final review</a:t>
+                        <a:t>Complete</a:t>
                       </a:r>
                     </a:p>
                   </a:txBody>
@@ -6974,6 +6974,59 @@
                     <a:solidFill>
                       <a:srgbClr val="F4F6F9"/>
                     </a:solidFill>
+                  </a:tcPr>
+                </a:tc>
+              </a:tr>
+              <a:tr h="25400">
+                <a:tc>
+                  <a:txBody>
+                    <a:bodyPr wrap="square"/>
+                    <a:lstStyle/>
+                    <a:p>
+                      <a:r>
+                        <a:rPr sz="950" b="0">
+                          <a:latin typeface="Calibri"/>
+                        </a:rPr>
+                        <a:t>Versioning + retraining</a:t>
+                      </a:r>
+                    </a:p>
+                  </a:txBody>
+                  <a:tcPr marL="63500" marR="63500" marT="38100" marB="38100">
+                    <a:noFill/>
+                  </a:tcPr>
+                </a:tc>
+                <a:tc>
+                  <a:txBody>
+                    <a:bodyPr wrap="square"/>
+                    <a:lstStyle/>
+                    <a:p>
+                      <a:r>
+                        <a:rPr sz="950" b="0">
+                          <a:latin typeface="Calibri"/>
+                        </a:rPr>
+                        <a:t>Model / data version tracking and a drift-driven retrain signal</a:t>
+                      </a:r>
+                    </a:p>
+                  </a:txBody>
+                  <a:tcPr marL="63500" marR="63500" marT="38100" marB="38100">
+                    <a:noFill/>
+                  </a:tcPr>
+                </a:tc>
+                <a:tc>
+                  <a:txBody>
+                    <a:bodyPr wrap="square"/>
+                    <a:lstStyle/>
+                    <a:p>
+                      <a:r>
+                        <a:rPr sz="950" b="0">
+                          <a:latin typeface="Calibri"/>
+                        </a:rPr>
+                        <a:t>Final review</a:t>
+                      </a:r>
+                    </a:p>
+                  </a:txBody>
+                  <a:tcPr marL="63500" marR="63500" marT="38100" marB="38100">
+                    <a:noFill/>
                   </a:tcPr>
                 </a:tc>
               </a:tr>
@@ -9197,7 +9250,7 @@
                 <a:ea typeface="Calibri" panose="020F0502020204030204" pitchFamily="34" charset="0"/>
                 <a:cs typeface="Calibri" panose="020F0502020204030204" pitchFamily="34" charset="0"/>
               </a:rPr>
-              <a:t>Engineering rigour, next phase (self-healing), work plan, conclusion</a:t>
+              <a:t>Engineering rigour, governed self-healing, work plan, conclusion</a:t>
             </a:r>
           </a:p>
         </p:txBody>
@@ -9709,7 +9762,7 @@
                 <a:ea typeface="Calibri" panose="020F0502020204030204" pitchFamily="34" charset="0"/>
                 <a:cs typeface="Calibri" panose="020F0502020204030204" pitchFamily="34" charset="0"/>
               </a:rPr>
-              <a:t>Six problems, found by our own tooling. The last is the largest: real data contradicted the assumption the gating was built on.</a:t>
+              <a:t>Seven problems, found by our own tooling. The largest: real data contradicted the assumption the gating was built on.</a:t>
             </a:r>
           </a:p>
         </p:txBody>
@@ -9848,7 +9901,7 @@
         </p:nvGraphicFramePr>
         <p:xfrm>
           <a:off x="960120" y="2331720"/>
-          <a:ext cx="10241279" cy="177800"/>
+          <a:ext cx="10241279" cy="203200"/>
         </p:xfrm>
         <a:graphic>
           <a:graphicData uri="http://schemas.openxmlformats.org/drawingml/2006/table">
@@ -10262,6 +10315,59 @@
                     <a:solidFill>
                       <a:srgbClr val="F4F6F9"/>
                     </a:solidFill>
+                  </a:tcPr>
+                </a:tc>
+              </a:tr>
+              <a:tr h="25400">
+                <a:tc>
+                  <a:txBody>
+                    <a:bodyPr wrap="square"/>
+                    <a:lstStyle/>
+                    <a:p>
+                      <a:r>
+                        <a:rPr sz="1100" b="0">
+                          <a:latin typeface="Calibri"/>
+                        </a:rPr>
+                        <a:t>Self-healing (R2+)</a:t>
+                      </a:r>
+                    </a:p>
+                  </a:txBody>
+                  <a:tcPr marL="63500" marR="63500" marT="38100" marB="38100">
+                    <a:noFill/>
+                  </a:tcPr>
+                </a:tc>
+                <a:tc>
+                  <a:txBody>
+                    <a:bodyPr wrap="square"/>
+                    <a:lstStyle/>
+                    <a:p>
+                      <a:r>
+                        <a:rPr sz="1100" b="0">
+                          <a:latin typeface="Calibri"/>
+                        </a:rPr>
+                        <a:t>Drift window scored the baseline's own rows as live traffic: healthy drift read 0.02, honestly 0.18</a:t>
+                      </a:r>
+                    </a:p>
+                  </a:txBody>
+                  <a:tcPr marL="63500" marR="63500" marT="38100" marB="38100">
+                    <a:noFill/>
+                  </a:tcPr>
+                </a:tc>
+                <a:tc>
+                  <a:txBody>
+                    <a:bodyPr wrap="square"/>
+                    <a:lstStyle/>
+                    <a:p>
+                      <a:r>
+                        <a:rPr sz="1100" b="0">
+                          <a:latin typeface="Calibri"/>
+                        </a:rPr>
+                        <a:t>Window starts at the current baseline; regression test</a:t>
+                      </a:r>
+                    </a:p>
+                  </a:txBody>
+                  <a:tcPr marL="63500" marR="63500" marT="38100" marB="38100">
+                    <a:noFill/>
                   </a:tcPr>
                 </a:tc>
               </a:tr>
@@ -10339,7 +10445,7 @@
                 <a:ea typeface="Calibri" panose="020F0502020204030204" pitchFamily="34" charset="0"/>
                 <a:cs typeface="Calibri" panose="020F0502020204030204" pitchFamily="34" charset="0"/>
               </a:rPr>
-              <a:t>Next Phase — From Gating to Governed Self-Healing</a:t>
+              <a:t>Governed Self-Healing — Built</a:t>
             </a:r>
           </a:p>
         </p:txBody>
@@ -10384,7 +10490,7 @@
                 <a:ea typeface="Calibri" panose="020F0502020204030204" pitchFamily="34" charset="0"/>
                 <a:cs typeface="Calibri" panose="020F0502020204030204" pitchFamily="34" charset="0"/>
               </a:rPr>
-              <a:t>Custos is domain-agnostic MLOps infrastructure: it gates any model whose output triggers an action. Our field study showed drift is a poor per-decision gate but a strong alarm — so next it triggers a repair, tested in shadow and applied only with human approval.</a:t>
+              <a:t>Drift is a poor per-decision gate but a strong alarm, so Custos now acts on it: it tells a broken data feed from a real population shift, proposes a repair, shadow-tests it on real decisions, and applies it only when a named person approves. Domain-agnostic — any model whose output triggers an action.</a:t>
             </a:r>
           </a:p>
         </p:txBody>
@@ -10529,8 +10635,8 @@
         </p:blipFill>
         <p:spPr>
           <a:xfrm>
-            <a:off x="1066647" y="2697480"/>
-            <a:ext cx="10058400" cy="2148840"/>
+            <a:off x="1066647" y="2606040"/>
+            <a:ext cx="10058400" cy="2011680"/>
           </a:xfrm>
           <a:prstGeom prst="rect">
             <a:avLst/>
@@ -11106,7 +11212,7 @@
                         <a:rPr sz="1100" b="0">
                           <a:latin typeface="Calibri"/>
                         </a:rPr>
-                        <a:t>Self-healing step 1: broken-feed detection + proposed rollback, in shadow</a:t>
+                        <a:t>Self-healing: more fault signatures (unit change, partial outage)</a:t>
                       </a:r>
                     </a:p>
                   </a:txBody>
@@ -11123,7 +11229,7 @@
                         <a:rPr sz="1100" b="0">
                           <a:latin typeface="Calibri"/>
                         </a:rPr>
-                        <a:t>A dead input feed needs a different repair from a real population shift</a:t>
+                        <a:t>Today only stuck and missing feeds are diagnosed; a feed that is wrong but still varies reads as a shift</a:t>
                       </a:r>
                     </a:p>
                   </a:txBody>
@@ -11140,7 +11246,7 @@
                         <a:rPr sz="1100" b="0">
                           <a:latin typeface="Calibri"/>
                         </a:rPr>
-                        <a:t>Model versioning</a:t>
+                        <a:t>—</a:t>
                       </a:r>
                     </a:p>
                   </a:txBody>
@@ -11159,7 +11265,7 @@
                         <a:rPr sz="1100" b="0">
                           <a:latin typeface="Calibri"/>
                         </a:rPr>
-                        <a:t>Self-healing step 2: human approval queue; every repair on the audit chain</a:t>
+                        <a:t>Per-user sign-in for approvers</a:t>
                       </a:r>
                     </a:p>
                   </a:txBody>
@@ -11178,7 +11284,7 @@
                         <a:rPr sz="1100" b="0">
                           <a:latin typeface="Calibri"/>
                         </a:rPr>
-                        <a:t>No repair is applied without a person and a tamper-evident record</a:t>
+                        <a:t>Approvers are named, not authenticated — Custos has tenant keys, not user accounts</a:t>
                       </a:r>
                     </a:p>
                   </a:txBody>
@@ -11197,7 +11303,7 @@
                         <a:rPr sz="1100" b="0">
                           <a:latin typeface="Calibri"/>
                         </a:rPr>
-                        <a:t>Step 1</a:t>
+                        <a:t>—</a:t>
                       </a:r>
                     </a:p>
                   </a:txBody>
@@ -11380,7 +11486,7 @@
                 <a:ea typeface="Calibri" panose="020F0502020204030204" pitchFamily="34" charset="0"/>
                 <a:cs typeface="Calibri" panose="020F0502020204030204" pitchFamily="34" charset="0"/>
               </a:rPr>
-              <a:t>342 tests passing · latency budget holds to 200 req/s, double Review-1 · overload no longer changes verdicts · all three trust signals live.</a:t>
+              <a:t>392 tests passing · latency budget holds to 200 req/s, double Review-1 · overload no longer changes verdicts · all three trust signals live · governed self-healing built.</a:t>
             </a:r>
           </a:p>
           <a:p>
@@ -11772,7 +11878,7 @@
                         <a:rPr sz="1100" b="0">
                           <a:latin typeface="Calibri"/>
                         </a:rPr>
-                        <a:t>Python SDK · React operator dashboard · fintech demonstration · 342-test suite across unit, integration and end-to-end</a:t>
+                        <a:t>Python SDK · React operator dashboard · fintech demonstration · 392-test suite across unit, integration and end-to-end</a:t>
                       </a:r>
                     </a:p>
                   </a:txBody>
@@ -13505,7 +13611,7 @@
                 <a:ea typeface="Calibri" panose="020F0502020204030204" pitchFamily="34" charset="0"/>
                 <a:cs typeface="Calibri" panose="020F0502020204030204" pitchFamily="34" charset="0"/>
               </a:rPr>
-              <a:t>Custos does not train, serve or retrain models. It decides and records; humans act.</a:t>
+              <a:t>Custos does not train, serve or retrain models. It decides, records and proposes repairs to its own gating; humans approve.</a:t>
             </a:r>
           </a:p>
           <a:p>

--- a/docs/presentations/Custos_Phase2_Review2.pptx
+++ b/docs/presentations/Custos_Phase2_Review2.pptx
@@ -11486,7 +11486,7 @@
                 <a:ea typeface="Calibri" panose="020F0502020204030204" pitchFamily="34" charset="0"/>
                 <a:cs typeface="Calibri" panose="020F0502020204030204" pitchFamily="34" charset="0"/>
               </a:rPr>
-              <a:t>392 tests passing · latency budget holds to 200 req/s, double Review-1 · overload no longer changes verdicts · all three trust signals live · governed self-healing built.</a:t>
+              <a:t>397 tests passing · latency budget holds to 200 req/s, double Review-1 · overload no longer changes verdicts · all three trust signals live · governed self-healing built.</a:t>
             </a:r>
           </a:p>
           <a:p>
@@ -11878,7 +11878,7 @@
                         <a:rPr sz="1100" b="0">
                           <a:latin typeface="Calibri"/>
                         </a:rPr>
-                        <a:t>Python SDK · React operator dashboard · fintech demonstration · 392-test suite across unit, integration and end-to-end</a:t>
+                        <a:t>Python SDK · React operator dashboard · fintech demonstration · 397-test suite across unit, integration and end-to-end</a:t>
                       </a:r>
                     </a:p>
                   </a:txBody>

--- a/docs/presentations/Custos_Phase2_Review2.pptx
+++ b/docs/presentations/Custos_Phase2_Review2.pptx
@@ -30,8 +30,9 @@
     <p:sldId id="275" r:id="rId30"/>
     <p:sldId id="276" r:id="rId28"/>
     <p:sldId id="277" r:id="rId31"/>
-    <p:sldId id="278" r:id="rId29"/>
-    <p:sldId id="279" r:id="rId10"/>
+    <p:sldId id="278" r:id="rId32"/>
+    <p:sldId id="279" r:id="rId29"/>
+    <p:sldId id="280" r:id="rId10"/>
   </p:sldIdLst>
   <p:sldSz cx="12192000" cy="6858000"/>
   <p:notesSz cx="6858000" cy="9144000"/>
@@ -9250,7 +9251,7 @@
                 <a:ea typeface="Calibri" panose="020F0502020204030204" pitchFamily="34" charset="0"/>
                 <a:cs typeface="Calibri" panose="020F0502020204030204" pitchFamily="34" charset="0"/>
               </a:rPr>
-              <a:t>Engineering rigour, governed self-healing, work plan, conclusion</a:t>
+              <a:t>Engineering rigour, self-healing, other domains, work plan, conclusion</a:t>
             </a:r>
           </a:p>
         </p:txBody>
@@ -10713,6 +10714,812 @@
                 <a:ea typeface="Calibri" panose="020F0502020204030204" pitchFamily="34" charset="0"/>
                 <a:cs typeface="Calibri" panose="020F0502020204030204" pitchFamily="34" charset="0"/>
               </a:rPr>
+              <a:t>Beyond Lending — Where Custos Applies</a:t>
+            </a:r>
+          </a:p>
+        </p:txBody>
+      </p:sp>
+      <p:sp>
+        <p:nvSpPr>
+          <p:cNvPr id="3" name="Subtitle 2">
+            <a:extLst>
+              <a:ext uri="{FF2B5EF4-FFF2-40B4-BE49-F238E27FC236}">
+                <a16:creationId xmlns:a16="http://schemas.microsoft.com/office/drawing/2014/main" id="{255E737C-85F2-47BC-AD38-AD8B001473B7}"/>
+              </a:ext>
+            </a:extLst>
+          </p:cNvPr>
+          <p:cNvSpPr>
+            <a:spLocks noGrp="1"/>
+          </p:cNvSpPr>
+          <p:nvPr>
+            <p:ph type="subTitle" idx="1"/>
+          </p:nvPr>
+        </p:nvSpPr>
+        <p:spPr>
+          <a:xfrm>
+            <a:off x="1684867" y="1574800"/>
+            <a:ext cx="9694333" cy="4614333"/>
+          </a:xfrm>
+        </p:spPr>
+        <p:txBody>
+          <a:bodyPr>
+            <a:normAutofit/>
+          </a:bodyPr>
+          <a:lstStyle/>
+          <a:p>
+            <a:pPr marL="0" indent="0" algn="l">
+              <a:spcBef>
+                <a:spcPts val="0"/>
+              </a:spcBef>
+              <a:buNone/>
+            </a:pPr>
+            <a:r>
+              <a:rPr lang="en-US" sz="1300" b="0" i="0" dirty="0">
+                <a:latin typeface="Calibri" panose="020F0502020204030204" pitchFamily="34" charset="0"/>
+                <a:ea typeface="Calibri" panose="020F0502020204030204" pitchFamily="34" charset="0"/>
+                <a:cs typeface="Calibri" panose="020F0502020204030204" pitchFamily="34" charset="0"/>
+              </a:rPr>
+              <a:t>Custos gates any model whose output triggers an action that can be allowed, held for a person, or blocked. A new domain is configuration — inputs, context, rules, weights — not code. Two are demonstrated; the rest are stated, not claimed.</a:t>
+            </a:r>
+          </a:p>
+        </p:txBody>
+      </p:sp>
+      <p:pic>
+        <p:nvPicPr>
+          <p:cNvPr id="5" name="Graphic 4">
+            <a:extLst>
+              <a:ext uri="{FF2B5EF4-FFF2-40B4-BE49-F238E27FC236}">
+                <a16:creationId xmlns:a16="http://schemas.microsoft.com/office/drawing/2014/main" id="{E7125167-8301-4D88-B79A-A8DA3C19E0D6}"/>
+              </a:ext>
+            </a:extLst>
+          </p:cNvPr>
+          <p:cNvPicPr>
+            <a:picLocks noChangeAspect="1"/>
+          </p:cNvPicPr>
+          <p:nvPr/>
+        </p:nvPicPr>
+        <p:blipFill>
+          <a:blip r:embed="rId2">
+            <a:extLst>
+              <a:ext uri="{96DAC541-7B7A-43D3-8B79-37D633B846F1}">
+                <asvg:svgBlip xmlns:asvg="http://schemas.microsoft.com/office/drawing/2016/SVG/main" r:embed="rId3"/>
+              </a:ext>
+            </a:extLst>
+          </a:blip>
+          <a:stretch>
+            <a:fillRect/>
+          </a:stretch>
+        </p:blipFill>
+        <p:spPr>
+          <a:xfrm>
+            <a:off x="127001" y="86782"/>
+            <a:ext cx="1159932" cy="1159932"/>
+          </a:xfrm>
+          <a:prstGeom prst="rect">
+            <a:avLst/>
+          </a:prstGeom>
+        </p:spPr>
+      </p:pic>
+      <p:sp>
+        <p:nvSpPr>
+          <p:cNvPr id="4" name="Date Placeholder 3">
+            <a:extLst>
+              <a:ext uri="{FF2B5EF4-FFF2-40B4-BE49-F238E27FC236}">
+                <a16:creationId xmlns:a16="http://schemas.microsoft.com/office/drawing/2014/main" id="{35032362-C5A5-4DBF-AD79-DE6FB7439999}"/>
+              </a:ext>
+            </a:extLst>
+          </p:cNvPr>
+          <p:cNvSpPr>
+            <a:spLocks noGrp="1"/>
+          </p:cNvSpPr>
+          <p:nvPr>
+            <p:ph type="dt" sz="half" idx="10"/>
+          </p:nvPr>
+        </p:nvSpPr>
+        <p:spPr/>
+        <p:txBody>
+          <a:bodyPr/>
+          <a:lstStyle/>
+          <a:p>
+            <a:fld id="{64C96E34-94C0-49E4-A53B-4A44141FD3C8}" type="datetime3">
+              <a:rPr lang="en-US" smtClean="0"/>
+              <a:t>17 October 2026</a:t>
+            </a:fld>
+            <a:endParaRPr lang="en-US" dirty="0"/>
+          </a:p>
+        </p:txBody>
+      </p:sp>
+      <p:sp>
+        <p:nvSpPr>
+          <p:cNvPr id="6" name="Slide Number Placeholder 5">
+            <a:extLst>
+              <a:ext uri="{FF2B5EF4-FFF2-40B4-BE49-F238E27FC236}">
+                <a16:creationId xmlns:a16="http://schemas.microsoft.com/office/drawing/2014/main" id="{115AAB64-5B51-4B5A-B69E-D96362CE6E74}"/>
+              </a:ext>
+            </a:extLst>
+          </p:cNvPr>
+          <p:cNvSpPr>
+            <a:spLocks noGrp="1"/>
+          </p:cNvSpPr>
+          <p:nvPr>
+            <p:ph type="sldNum" sz="quarter" idx="12"/>
+          </p:nvPr>
+        </p:nvSpPr>
+        <p:spPr/>
+        <p:txBody>
+          <a:bodyPr/>
+          <a:lstStyle/>
+          <a:p>
+            <a:fld id="{D57F1E4F-1CFF-5643-939E-217C01CDF565}" type="slidenum">
+              <a:rPr lang="en-US" smtClean="0"/>
+              <a:pPr/>
+              <a:t>3</a:t>
+            </a:fld>
+            <a:endParaRPr lang="en-US" dirty="0"/>
+          </a:p>
+        </p:txBody>
+      </p:sp>
+      <p:sp>
+        <p:nvSpPr>
+          <p:cNvPr id="7" name="Footer Placeholder 6">
+            <a:extLst>
+              <a:ext uri="{FF2B5EF4-FFF2-40B4-BE49-F238E27FC236}">
+                <a16:creationId xmlns:a16="http://schemas.microsoft.com/office/drawing/2014/main" id="{8683C6DF-27D9-468B-A1AB-FE568488FE57}"/>
+              </a:ext>
+            </a:extLst>
+          </p:cNvPr>
+          <p:cNvSpPr>
+            <a:spLocks noGrp="1"/>
+          </p:cNvSpPr>
+          <p:nvPr>
+            <p:ph type="ftr" sz="quarter" idx="11"/>
+          </p:nvPr>
+        </p:nvSpPr>
+        <p:spPr/>
+        <p:txBody>
+          <a:bodyPr/>
+          <a:lstStyle/>
+          <a:p>
+            <a:r>
+              <a:rPr lang="en-US"/>
+              <a:t>Dept of AI &amp; DS</a:t>
+            </a:r>
+            <a:endParaRPr lang="en-US" dirty="0"/>
+          </a:p>
+        </p:txBody>
+      </p:sp>
+      <p:graphicFrame>
+        <p:nvGraphicFramePr>
+          <p:cNvPr id="8" name="Table 7"/>
+          <p:cNvGraphicFramePr>
+            <a:graphicFrameLocks noGrp="1"/>
+          </p:cNvGraphicFramePr>
+          <p:nvPr/>
+        </p:nvGraphicFramePr>
+        <p:xfrm>
+          <a:off x="960120" y="2331720"/>
+          <a:ext cx="10241278" cy="177800"/>
+        </p:xfrm>
+        <a:graphic>
+          <a:graphicData uri="http://schemas.openxmlformats.org/drawingml/2006/table">
+            <a:tbl>
+              <a:tblPr firstRow="1">
+                <a:tableStyleId>{5C22544A-7EE6-4342-B048-85BDC9FD1C3A}</a:tableStyleId>
+              </a:tblPr>
+              <a:tblGrid>
+                <a:gridCol w="1741017"/>
+                <a:gridCol w="2560320"/>
+                <a:gridCol w="3277209"/>
+                <a:gridCol w="2662732"/>
+              </a:tblGrid>
+              <a:tr h="25400">
+                <a:tc>
+                  <a:txBody>
+                    <a:bodyPr wrap="square"/>
+                    <a:lstStyle/>
+                    <a:p>
+                      <a:r>
+                        <a:rPr sz="1100" b="1">
+                          <a:solidFill>
+                            <a:srgbClr val="FFFFFF"/>
+                          </a:solidFill>
+                          <a:latin typeface="Calibri"/>
+                        </a:rPr>
+                        <a:t>Domain</a:t>
+                      </a:r>
+                    </a:p>
+                  </a:txBody>
+                  <a:tcPr marL="63500" marR="63500" marT="38100" marB="38100">
+                    <a:solidFill>
+                      <a:srgbClr val="1F5CA8"/>
+                    </a:solidFill>
+                  </a:tcPr>
+                </a:tc>
+                <a:tc>
+                  <a:txBody>
+                    <a:bodyPr wrap="square"/>
+                    <a:lstStyle/>
+                    <a:p>
+                      <a:r>
+                        <a:rPr sz="1100" b="1">
+                          <a:solidFill>
+                            <a:srgbClr val="FFFFFF"/>
+                          </a:solidFill>
+                          <a:latin typeface="Calibri"/>
+                        </a:rPr>
+                        <a:t>Action Custos gates</a:t>
+                      </a:r>
+                    </a:p>
+                  </a:txBody>
+                  <a:tcPr marL="63500" marR="63500" marT="38100" marB="38100">
+                    <a:solidFill>
+                      <a:srgbClr val="1F5CA8"/>
+                    </a:solidFill>
+                  </a:tcPr>
+                </a:tc>
+                <a:tc>
+                  <a:txBody>
+                    <a:bodyPr wrap="square"/>
+                    <a:lstStyle/>
+                    <a:p>
+                      <a:r>
+                        <a:rPr sz="1100" b="1">
+                          <a:solidFill>
+                            <a:srgbClr val="FFFFFF"/>
+                          </a:solidFill>
+                          <a:latin typeface="Calibri"/>
+                        </a:rPr>
+                        <a:t>What it catches</a:t>
+                      </a:r>
+                    </a:p>
+                  </a:txBody>
+                  <a:tcPr marL="63500" marR="63500" marT="38100" marB="38100">
+                    <a:solidFill>
+                      <a:srgbClr val="1F5CA8"/>
+                    </a:solidFill>
+                  </a:tcPr>
+                </a:tc>
+                <a:tc>
+                  <a:txBody>
+                    <a:bodyPr wrap="square"/>
+                    <a:lstStyle/>
+                    <a:p>
+                      <a:r>
+                        <a:rPr sz="1100" b="1">
+                          <a:solidFill>
+                            <a:srgbClr val="FFFFFF"/>
+                          </a:solidFill>
+                          <a:latin typeface="Calibri"/>
+                        </a:rPr>
+                        <a:t>Status</a:t>
+                      </a:r>
+                    </a:p>
+                  </a:txBody>
+                  <a:tcPr marL="63500" marR="63500" marT="38100" marB="38100">
+                    <a:solidFill>
+                      <a:srgbClr val="1F5CA8"/>
+                    </a:solidFill>
+                  </a:tcPr>
+                </a:tc>
+              </a:tr>
+              <a:tr h="25400">
+                <a:tc>
+                  <a:txBody>
+                    <a:bodyPr wrap="square"/>
+                    <a:lstStyle/>
+                    <a:p>
+                      <a:r>
+                        <a:rPr sz="1100" b="0">
+                          <a:latin typeface="Calibri"/>
+                        </a:rPr>
+                        <a:t>Lending</a:t>
+                      </a:r>
+                    </a:p>
+                  </a:txBody>
+                  <a:tcPr marL="63500" marR="63500" marT="38100" marB="38100">
+                    <a:noFill/>
+                  </a:tcPr>
+                </a:tc>
+                <a:tc>
+                  <a:txBody>
+                    <a:bodyPr wrap="square"/>
+                    <a:lstStyle/>
+                    <a:p>
+                      <a:r>
+                        <a:rPr sz="1100" b="0">
+                          <a:latin typeface="Calibri"/>
+                        </a:rPr>
+                        <a:t>Approve or disburse a loan</a:t>
+                      </a:r>
+                    </a:p>
+                  </a:txBody>
+                  <a:tcPr marL="63500" marR="63500" marT="38100" marB="38100">
+                    <a:noFill/>
+                  </a:tcPr>
+                </a:tc>
+                <a:tc>
+                  <a:txBody>
+                    <a:bodyPr wrap="square"/>
+                    <a:lstStyle/>
+                    <a:p>
+                      <a:r>
+                        <a:rPr sz="1100" b="0">
+                          <a:latin typeface="Calibri"/>
+                        </a:rPr>
+                        <a:t>Population drift, unusual amounts, policy limits</a:t>
+                      </a:r>
+                    </a:p>
+                  </a:txBody>
+                  <a:tcPr marL="63500" marR="63500" marT="38100" marB="38100">
+                    <a:noFill/>
+                  </a:tcPr>
+                </a:tc>
+                <a:tc>
+                  <a:txBody>
+                    <a:bodyPr wrap="square"/>
+                    <a:lstStyle/>
+                    <a:p>
+                      <a:r>
+                        <a:rPr sz="1100" b="0">
+                          <a:latin typeface="Calibri"/>
+                        </a:rPr>
+                        <a:t>Demonstrated · field study on 589,186 loans · EU AI Act high-risk</a:t>
+                      </a:r>
+                    </a:p>
+                  </a:txBody>
+                  <a:tcPr marL="63500" marR="63500" marT="38100" marB="38100">
+                    <a:noFill/>
+                  </a:tcPr>
+                </a:tc>
+              </a:tr>
+              <a:tr h="25400">
+                <a:tc>
+                  <a:txBody>
+                    <a:bodyPr wrap="square"/>
+                    <a:lstStyle/>
+                    <a:p>
+                      <a:r>
+                        <a:rPr sz="1100" b="0">
+                          <a:latin typeface="Calibri"/>
+                        </a:rPr>
+                        <a:t>AI agents (refunds)</a:t>
+                      </a:r>
+                    </a:p>
+                  </a:txBody>
+                  <a:tcPr marL="63500" marR="63500" marT="38100" marB="38100">
+                    <a:solidFill>
+                      <a:srgbClr val="F4F6F9"/>
+                    </a:solidFill>
+                  </a:tcPr>
+                </a:tc>
+                <a:tc>
+                  <a:txBody>
+                    <a:bodyPr wrap="square"/>
+                    <a:lstStyle/>
+                    <a:p>
+                      <a:r>
+                        <a:rPr sz="1100" b="0">
+                          <a:latin typeface="Calibri"/>
+                        </a:rPr>
+                        <a:t>Any tool action — here, issuing a refund</a:t>
+                      </a:r>
+                    </a:p>
+                  </a:txBody>
+                  <a:tcPr marL="63500" marR="63500" marT="38100" marB="38100">
+                    <a:solidFill>
+                      <a:srgbClr val="F4F6F9"/>
+                    </a:solidFill>
+                  </a:tcPr>
+                </a:tc>
+                <a:tc>
+                  <a:txBody>
+                    <a:bodyPr wrap="square"/>
+                    <a:lstStyle/>
+                    <a:p>
+                      <a:r>
+                        <a:rPr sz="1100" b="0">
+                          <a:latin typeface="Calibri"/>
+                        </a:rPr>
+                        <a:t>Runaway loops, manipulated requests, a fraud ring</a:t>
+                      </a:r>
+                    </a:p>
+                  </a:txBody>
+                  <a:tcPr marL="63500" marR="63500" marT="38100" marB="38100">
+                    <a:solidFill>
+                      <a:srgbClr val="F4F6F9"/>
+                    </a:solidFill>
+                  </a:tcPr>
+                </a:tc>
+                <a:tc>
+                  <a:txBody>
+                    <a:bodyPr wrap="square"/>
+                    <a:lstStyle/>
+                    <a:p>
+                      <a:r>
+                        <a:rPr sz="1100" b="0">
+                          <a:latin typeface="Calibri"/>
+                        </a:rPr>
+                        <a:t>Demonstrated · live demo 3, no code change</a:t>
+                      </a:r>
+                    </a:p>
+                  </a:txBody>
+                  <a:tcPr marL="63500" marR="63500" marT="38100" marB="38100">
+                    <a:solidFill>
+                      <a:srgbClr val="F4F6F9"/>
+                    </a:solidFill>
+                  </a:tcPr>
+                </a:tc>
+              </a:tr>
+              <a:tr h="25400">
+                <a:tc>
+                  <a:txBody>
+                    <a:bodyPr wrap="square"/>
+                    <a:lstStyle/>
+                    <a:p>
+                      <a:r>
+                        <a:rPr sz="1100" b="0">
+                          <a:latin typeface="Calibri"/>
+                        </a:rPr>
+                        <a:t>Dynamic pricing</a:t>
+                      </a:r>
+                    </a:p>
+                  </a:txBody>
+                  <a:tcPr marL="63500" marR="63500" marT="38100" marB="38100">
+                    <a:noFill/>
+                  </a:tcPr>
+                </a:tc>
+                <a:tc>
+                  <a:txBody>
+                    <a:bodyPr wrap="square"/>
+                    <a:lstStyle/>
+                    <a:p>
+                      <a:r>
+                        <a:rPr sz="1100" b="0">
+                          <a:latin typeface="Calibri"/>
+                        </a:rPr>
+                        <a:t>Publish a price</a:t>
+                      </a:r>
+                    </a:p>
+                  </a:txBody>
+                  <a:tcPr marL="63500" marR="63500" marT="38100" marB="38100">
+                    <a:noFill/>
+                  </a:tcPr>
+                </a:tc>
+                <a:tc>
+                  <a:txBody>
+                    <a:bodyPr wrap="square"/>
+                    <a:lstStyle/>
+                    <a:p>
+                      <a:r>
+                        <a:rPr sz="1100" b="0">
+                          <a:latin typeface="Calibri"/>
+                        </a:rPr>
+                        <a:t>A price far outside its normal range; never below cost</a:t>
+                      </a:r>
+                    </a:p>
+                  </a:txBody>
+                  <a:tcPr marL="63500" marR="63500" marT="38100" marB="38100">
+                    <a:noFill/>
+                  </a:tcPr>
+                </a:tc>
+                <a:tc>
+                  <a:txBody>
+                    <a:bodyPr wrap="square"/>
+                    <a:lstStyle/>
+                    <a:p>
+                      <a:r>
+                        <a:rPr sz="1100" b="0">
+                          <a:latin typeface="Calibri"/>
+                        </a:rPr>
+                        <a:t>Applies by configuration</a:t>
+                      </a:r>
+                    </a:p>
+                  </a:txBody>
+                  <a:tcPr marL="63500" marR="63500" marT="38100" marB="38100">
+                    <a:noFill/>
+                  </a:tcPr>
+                </a:tc>
+              </a:tr>
+              <a:tr h="25400">
+                <a:tc>
+                  <a:txBody>
+                    <a:bodyPr wrap="square"/>
+                    <a:lstStyle/>
+                    <a:p>
+                      <a:r>
+                        <a:rPr sz="1100" b="0">
+                          <a:latin typeface="Calibri"/>
+                        </a:rPr>
+                        <a:t>Medical triage</a:t>
+                      </a:r>
+                    </a:p>
+                  </a:txBody>
+                  <a:tcPr marL="63500" marR="63500" marT="38100" marB="38100">
+                    <a:solidFill>
+                      <a:srgbClr val="F4F6F9"/>
+                    </a:solidFill>
+                  </a:tcPr>
+                </a:tc>
+                <a:tc>
+                  <a:txBody>
+                    <a:bodyPr wrap="square"/>
+                    <a:lstStyle/>
+                    <a:p>
+                      <a:r>
+                        <a:rPr sz="1100" b="0">
+                          <a:latin typeface="Calibri"/>
+                        </a:rPr>
+                        <a:t>Route a patient as low priority</a:t>
+                      </a:r>
+                    </a:p>
+                  </a:txBody>
+                  <a:tcPr marL="63500" marR="63500" marT="38100" marB="38100">
+                    <a:solidFill>
+                      <a:srgbClr val="F4F6F9"/>
+                    </a:solidFill>
+                  </a:tcPr>
+                </a:tc>
+                <a:tc>
+                  <a:txBody>
+                    <a:bodyPr wrap="square"/>
+                    <a:lstStyle/>
+                    <a:p>
+                      <a:r>
+                        <a:rPr sz="1100" b="0">
+                          <a:latin typeface="Calibri"/>
+                        </a:rPr>
+                        <a:t>A stuck device feed; red-flag symptoms always to a human</a:t>
+                      </a:r>
+                    </a:p>
+                  </a:txBody>
+                  <a:tcPr marL="63500" marR="63500" marT="38100" marB="38100">
+                    <a:solidFill>
+                      <a:srgbClr val="F4F6F9"/>
+                    </a:solidFill>
+                  </a:tcPr>
+                </a:tc>
+                <a:tc>
+                  <a:txBody>
+                    <a:bodyPr wrap="square"/>
+                    <a:lstStyle/>
+                    <a:p>
+                      <a:r>
+                        <a:rPr sz="1100" b="0">
+                          <a:latin typeface="Calibri"/>
+                        </a:rPr>
+                        <a:t>Applies by configuration · EU AI Act high-risk</a:t>
+                      </a:r>
+                    </a:p>
+                  </a:txBody>
+                  <a:tcPr marL="63500" marR="63500" marT="38100" marB="38100">
+                    <a:solidFill>
+                      <a:srgbClr val="F4F6F9"/>
+                    </a:solidFill>
+                  </a:tcPr>
+                </a:tc>
+              </a:tr>
+              <a:tr h="25400">
+                <a:tc>
+                  <a:txBody>
+                    <a:bodyPr wrap="square"/>
+                    <a:lstStyle/>
+                    <a:p>
+                      <a:r>
+                        <a:rPr sz="1100" b="0">
+                          <a:latin typeface="Calibri"/>
+                        </a:rPr>
+                        <a:t>Hiring and screening</a:t>
+                      </a:r>
+                    </a:p>
+                  </a:txBody>
+                  <a:tcPr marL="63500" marR="63500" marT="38100" marB="38100">
+                    <a:noFill/>
+                  </a:tcPr>
+                </a:tc>
+                <a:tc>
+                  <a:txBody>
+                    <a:bodyPr wrap="square"/>
+                    <a:lstStyle/>
+                    <a:p>
+                      <a:r>
+                        <a:rPr sz="1100" b="0">
+                          <a:latin typeface="Calibri"/>
+                        </a:rPr>
+                        <a:t>Auto-reject a candidate</a:t>
+                      </a:r>
+                    </a:p>
+                  </a:txBody>
+                  <a:tcPr marL="63500" marR="63500" marT="38100" marB="38100">
+                    <a:noFill/>
+                  </a:tcPr>
+                </a:tc>
+                <a:tc>
+                  <a:txBody>
+                    <a:bodyPr wrap="square"/>
+                    <a:lstStyle/>
+                    <a:p>
+                      <a:r>
+                        <a:rPr sz="1100" b="0">
+                          <a:latin typeface="Calibri"/>
+                        </a:rPr>
+                        <a:t>Applicant-pool shift; rule: REVIEW only, never auto-reject</a:t>
+                      </a:r>
+                    </a:p>
+                  </a:txBody>
+                  <a:tcPr marL="63500" marR="63500" marT="38100" marB="38100">
+                    <a:noFill/>
+                  </a:tcPr>
+                </a:tc>
+                <a:tc>
+                  <a:txBody>
+                    <a:bodyPr wrap="square"/>
+                    <a:lstStyle/>
+                    <a:p>
+                      <a:r>
+                        <a:rPr sz="1100" b="0">
+                          <a:latin typeface="Calibri"/>
+                        </a:rPr>
+                        <a:t>Applies by configuration · EU AI Act high-risk</a:t>
+                      </a:r>
+                    </a:p>
+                  </a:txBody>
+                  <a:tcPr marL="63500" marR="63500" marT="38100" marB="38100">
+                    <a:noFill/>
+                  </a:tcPr>
+                </a:tc>
+              </a:tr>
+              <a:tr h="25400">
+                <a:tc>
+                  <a:txBody>
+                    <a:bodyPr wrap="square"/>
+                    <a:lstStyle/>
+                    <a:p>
+                      <a:r>
+                        <a:rPr sz="1100" b="0">
+                          <a:latin typeface="Calibri"/>
+                        </a:rPr>
+                        <a:t>Insurance claims</a:t>
+                      </a:r>
+                    </a:p>
+                  </a:txBody>
+                  <a:tcPr marL="63500" marR="63500" marT="38100" marB="38100">
+                    <a:solidFill>
+                      <a:srgbClr val="F4F6F9"/>
+                    </a:solidFill>
+                  </a:tcPr>
+                </a:tc>
+                <a:tc>
+                  <a:txBody>
+                    <a:bodyPr wrap="square"/>
+                    <a:lstStyle/>
+                    <a:p>
+                      <a:r>
+                        <a:rPr sz="1100" b="0">
+                          <a:latin typeface="Calibri"/>
+                        </a:rPr>
+                        <a:t>Auto-pay a claim</a:t>
+                      </a:r>
+                    </a:p>
+                  </a:txBody>
+                  <a:tcPr marL="63500" marR="63500" marT="38100" marB="38100">
+                    <a:solidFill>
+                      <a:srgbClr val="F4F6F9"/>
+                    </a:solidFill>
+                  </a:tcPr>
+                </a:tc>
+                <a:tc>
+                  <a:txBody>
+                    <a:bodyPr wrap="square"/>
+                    <a:lstStyle/>
+                    <a:p>
+                      <a:r>
+                        <a:rPr sz="1100" b="0">
+                          <a:latin typeface="Calibri"/>
+                        </a:rPr>
+                        <a:t>Claim-mix shift after a disaster; bursts per policy</a:t>
+                      </a:r>
+                    </a:p>
+                  </a:txBody>
+                  <a:tcPr marL="63500" marR="63500" marT="38100" marB="38100">
+                    <a:solidFill>
+                      <a:srgbClr val="F4F6F9"/>
+                    </a:solidFill>
+                  </a:tcPr>
+                </a:tc>
+                <a:tc>
+                  <a:txBody>
+                    <a:bodyPr wrap="square"/>
+                    <a:lstStyle/>
+                    <a:p>
+                      <a:r>
+                        <a:rPr sz="1100" b="0">
+                          <a:latin typeface="Calibri"/>
+                        </a:rPr>
+                        <a:t>Applies by configuration</a:t>
+                      </a:r>
+                    </a:p>
+                  </a:txBody>
+                  <a:tcPr marL="63500" marR="63500" marT="38100" marB="38100">
+                    <a:solidFill>
+                      <a:srgbClr val="F4F6F9"/>
+                    </a:solidFill>
+                  </a:tcPr>
+                </a:tc>
+              </a:tr>
+            </a:tbl>
+          </a:graphicData>
+        </a:graphic>
+      </p:graphicFrame>
+    </p:spTree>
+    <p:extLst>
+      <p:ext uri="{BB962C8B-B14F-4D97-AF65-F5344CB8AC3E}">
+        <p14:creationId xmlns:p14="http://schemas.microsoft.com/office/powerpoint/2010/main" val="3231882420"/>
+      </p:ext>
+    </p:extLst>
+  </p:cSld>
+  <p:clrMapOvr>
+    <a:masterClrMapping/>
+  </p:clrMapOvr>
+</p:sld>
+</file>
+
+<file path=ppt/slides/slide24.xml><?xml version="1.0" encoding="utf-8"?>
+<p:sld xmlns:a="http://schemas.openxmlformats.org/drawingml/2006/main" xmlns:r="http://schemas.openxmlformats.org/officeDocument/2006/relationships" xmlns:p="http://schemas.openxmlformats.org/presentationml/2006/main">
+  <p:cSld>
+    <p:spTree>
+      <p:nvGrpSpPr>
+        <p:cNvPr id="1" name=""/>
+        <p:cNvGrpSpPr/>
+        <p:nvPr/>
+      </p:nvGrpSpPr>
+      <p:grpSpPr>
+        <a:xfrm>
+          <a:off x="0" y="0"/>
+          <a:ext cx="0" cy="0"/>
+          <a:chOff x="0" y="0"/>
+          <a:chExt cx="0" cy="0"/>
+        </a:xfrm>
+      </p:grpSpPr>
+      <p:sp>
+        <p:nvSpPr>
+          <p:cNvPr id="2" name="Title 1">
+            <a:extLst>
+              <a:ext uri="{FF2B5EF4-FFF2-40B4-BE49-F238E27FC236}">
+                <a16:creationId xmlns:a16="http://schemas.microsoft.com/office/drawing/2014/main" id="{BD1A189D-22D1-4D1A-9E04-C6134EC51F8B}"/>
+              </a:ext>
+            </a:extLst>
+          </p:cNvPr>
+          <p:cNvSpPr>
+            <a:spLocks noGrp="1"/>
+          </p:cNvSpPr>
+          <p:nvPr>
+            <p:ph type="ctrTitle"/>
+          </p:nvPr>
+        </p:nvSpPr>
+        <p:spPr>
+          <a:xfrm>
+            <a:off x="1684868" y="203198"/>
+            <a:ext cx="9694332" cy="880535"/>
+          </a:xfrm>
+        </p:spPr>
+        <p:txBody>
+          <a:bodyPr>
+            <a:normAutofit/>
+          </a:bodyPr>
+          <a:lstStyle/>
+          <a:p>
+            <a:pPr marL="0" indent="0" algn="l">
+              <a:spcBef>
+                <a:spcPts val="0"/>
+              </a:spcBef>
+              <a:buNone/>
+            </a:pPr>
+            <a:r>
+              <a:rPr lang="en-US" sz="3200" b="1" i="0" dirty="0">
+                <a:latin typeface="Calibri" panose="020F0502020204030204" pitchFamily="34" charset="0"/>
+                <a:ea typeface="Calibri" panose="020F0502020204030204" pitchFamily="34" charset="0"/>
+                <a:cs typeface="Calibri" panose="020F0502020204030204" pitchFamily="34" charset="0"/>
+              </a:rPr>
               <a:t>Work Plan to the Final Review</a:t>
             </a:r>
           </a:p>
@@ -11384,7 +12191,7 @@
 </p:sld>
 </file>
 
-<file path=ppt/slides/slide24.xml><?xml version="1.0" encoding="utf-8"?>
+<file path=ppt/slides/slide25.xml><?xml version="1.0" encoding="utf-8"?>
 <p:sld xmlns:a="http://schemas.openxmlformats.org/drawingml/2006/main" xmlns:r="http://schemas.openxmlformats.org/officeDocument/2006/relationships" xmlns:p="http://schemas.openxmlformats.org/presentationml/2006/main">
   <p:cSld>
     <p:spTree>

--- a/docs/presentations/Custos_Phase2_Review2.pptx
+++ b/docs/presentations/Custos_Phase2_Review2.pptx
@@ -11,28 +11,18 @@
     <p:sldId id="256" r:id="rId2"/>
     <p:sldId id="257" r:id="rId3"/>
     <p:sldId id="258" r:id="rId4"/>
-    <p:sldId id="259" r:id="rId17"/>
-    <p:sldId id="260" r:id="rId5"/>
+    <p:sldId id="259" r:id="rId5"/>
+    <p:sldId id="260" r:id="rId17"/>
     <p:sldId id="261" r:id="rId18"/>
-    <p:sldId id="262" r:id="rId19"/>
-    <p:sldId id="263" r:id="rId6"/>
-    <p:sldId id="264" r:id="rId20"/>
-    <p:sldId id="265" r:id="rId7"/>
-    <p:sldId id="266" r:id="rId8"/>
-    <p:sldId id="267" r:id="rId21"/>
-    <p:sldId id="268" r:id="rId9"/>
+    <p:sldId id="262" r:id="rId6"/>
+    <p:sldId id="263" r:id="rId19"/>
+    <p:sldId id="264" r:id="rId7"/>
+    <p:sldId id="265" r:id="rId8"/>
+    <p:sldId id="266" r:id="rId20"/>
+    <p:sldId id="267" r:id="rId9"/>
+    <p:sldId id="268" r:id="rId21"/>
     <p:sldId id="269" r:id="rId22"/>
-    <p:sldId id="270" r:id="rId23"/>
-    <p:sldId id="271" r:id="rId24"/>
-    <p:sldId id="272" r:id="rId25"/>
-    <p:sldId id="273" r:id="rId26"/>
-    <p:sldId id="274" r:id="rId27"/>
-    <p:sldId id="275" r:id="rId30"/>
-    <p:sldId id="276" r:id="rId28"/>
-    <p:sldId id="277" r:id="rId31"/>
-    <p:sldId id="278" r:id="rId32"/>
-    <p:sldId id="279" r:id="rId29"/>
-    <p:sldId id="280" r:id="rId10"/>
+    <p:sldId id="270" r:id="rId10"/>
   </p:sldIdLst>
   <p:sldSz cx="12192000" cy="6858000"/>
   <p:notesSz cx="6858000" cy="9144000"/>
@@ -3918,6 +3908,22 @@
               <a:t>Runtime Drift Enforcement for Production ML Models</a:t>
             </a:r>
           </a:p>
+          <a:p>
+            <a:pPr marL="0" indent="0" algn="ctr">
+              <a:spcBef>
+                <a:spcPts val="120"/>
+              </a:spcBef>
+              <a:buNone/>
+            </a:pPr>
+            <a:r>
+              <a:rPr lang="en-US" sz="1500" b="0" i="1" dirty="0">
+                <a:latin typeface="Calibri" panose="020F0502020204030204" pitchFamily="34" charset="0"/>
+                <a:ea typeface="Calibri" panose="020F0502020204030204" pitchFamily="34" charset="0"/>
+                <a:cs typeface="Calibri" panose="020F0502020204030204" pitchFamily="34" charset="0"/>
+              </a:rPr>
+              <a:t>Decide  ·  Explain  ·  Record  ·  Heal</a:t>
+            </a:r>
+          </a:p>
         </p:txBody>
       </p:sp>
       <p:sp>
@@ -4234,7 +4240,7 @@
         <p:spPr>
           <a:xfrm>
             <a:off x="1684868" y="203198"/>
-            <a:ext cx="9999132" cy="880535"/>
+            <a:ext cx="9694332" cy="880535"/>
           </a:xfrm>
         </p:spPr>
         <p:txBody>
@@ -4255,7 +4261,7 @@
                 <a:ea typeface="Calibri" panose="020F0502020204030204" pitchFamily="34" charset="0"/>
                 <a:cs typeface="Calibri" panose="020F0502020204030204" pitchFamily="34" charset="0"/>
               </a:rPr>
-              <a:t>Requirement Analysis and Specification</a:t>
+              <a:t>System Design — Architecture</a:t>
             </a:r>
           </a:p>
         </p:txBody>
@@ -4295,12 +4301,12 @@
               <a:buNone/>
             </a:pPr>
             <a:r>
-              <a:rPr lang="en-US" sz="1300" b="0" i="0" dirty="0">
+              <a:rPr lang="en-US" sz="1500" b="0" i="1" dirty="0">
                 <a:latin typeface="Calibri" panose="020F0502020204030204" pitchFamily="34" charset="0"/>
                 <a:ea typeface="Calibri" panose="020F0502020204030204" pitchFamily="34" charset="0"/>
                 <a:cs typeface="Calibri" panose="020F0502020204030204" pitchFamily="34" charset="0"/>
               </a:rPr>
-              <a:t>Review-1's requirements plus three new ones (marked). NFR7 is what the load test forced: overload must be refused, never queued.</a:t>
+              <a:t>The hot path answers every request; slow work runs offline. Full design: “Inside Custos”.</a:t>
             </a:r>
           </a:p>
         </p:txBody>
@@ -4394,7 +4400,7 @@
             <a:fld id="{D57F1E4F-1CFF-5643-939E-217C01CDF565}" type="slidenum">
               <a:rPr lang="en-US" smtClean="0"/>
               <a:pPr/>
-              <a:t>6</a:t>
+              <a:t>7</a:t>
             </a:fld>
             <a:endParaRPr lang="en-US" dirty="0"/>
           </a:p>
@@ -4429,1016 +4435,34 @@
           </a:p>
         </p:txBody>
       </p:sp>
-      <p:graphicFrame>
-        <p:nvGraphicFramePr>
-          <p:cNvPr id="8" name="Table 7"/>
-          <p:cNvGraphicFramePr>
-            <a:graphicFrameLocks noGrp="1"/>
-          </p:cNvGraphicFramePr>
+      <p:pic>
+        <p:nvPicPr>
+          <p:cNvPr id="8" name="Picture 7" descr="architecture.png"/>
+          <p:cNvPicPr>
+            <a:picLocks noChangeAspect="1"/>
+          </p:cNvPicPr>
           <p:nvPr/>
-        </p:nvGraphicFramePr>
-        <p:xfrm>
-          <a:off x="960120" y="2331720"/>
-          <a:ext cx="10241278" cy="330200"/>
-        </p:xfrm>
-        <a:graphic>
-          <a:graphicData uri="http://schemas.openxmlformats.org/drawingml/2006/table">
-            <a:tbl>
-              <a:tblPr firstRow="1">
-                <a:tableStyleId>{5C22544A-7EE6-4342-B048-85BDC9FD1C3A}</a:tableStyleId>
-              </a:tblPr>
-              <a:tblGrid>
-                <a:gridCol w="614476"/>
-                <a:gridCol w="4608576"/>
-                <a:gridCol w="716889"/>
-                <a:gridCol w="4301337"/>
-              </a:tblGrid>
-              <a:tr h="25400">
-                <a:tc>
-                  <a:txBody>
-                    <a:bodyPr wrap="square"/>
-                    <a:lstStyle/>
-                    <a:p>
-                      <a:r>
-                        <a:rPr sz="950" b="1">
-                          <a:solidFill>
-                            <a:srgbClr val="FFFFFF"/>
-                          </a:solidFill>
-                          <a:latin typeface="Calibri"/>
-                        </a:rPr>
-                        <a:t/>
-                      </a:r>
-                    </a:p>
-                  </a:txBody>
-                  <a:tcPr marL="63500" marR="63500" marT="38100" marB="38100">
-                    <a:solidFill>
-                      <a:srgbClr val="1F5CA8"/>
-                    </a:solidFill>
-                  </a:tcPr>
-                </a:tc>
-                <a:tc>
-                  <a:txBody>
-                    <a:bodyPr wrap="square"/>
-                    <a:lstStyle/>
-                    <a:p>
-                      <a:r>
-                        <a:rPr sz="950" b="1">
-                          <a:solidFill>
-                            <a:srgbClr val="FFFFFF"/>
-                          </a:solidFill>
-                          <a:latin typeface="Calibri"/>
-                        </a:rPr>
-                        <a:t>Functional</a:t>
-                      </a:r>
-                    </a:p>
-                  </a:txBody>
-                  <a:tcPr marL="63500" marR="63500" marT="38100" marB="38100">
-                    <a:solidFill>
-                      <a:srgbClr val="1F5CA8"/>
-                    </a:solidFill>
-                  </a:tcPr>
-                </a:tc>
-                <a:tc>
-                  <a:txBody>
-                    <a:bodyPr wrap="square"/>
-                    <a:lstStyle/>
-                    <a:p>
-                      <a:r>
-                        <a:rPr sz="950" b="1">
-                          <a:solidFill>
-                            <a:srgbClr val="FFFFFF"/>
-                          </a:solidFill>
-                          <a:latin typeface="Calibri"/>
-                        </a:rPr>
-                        <a:t/>
-                      </a:r>
-                    </a:p>
-                  </a:txBody>
-                  <a:tcPr marL="63500" marR="63500" marT="38100" marB="38100">
-                    <a:solidFill>
-                      <a:srgbClr val="1F5CA8"/>
-                    </a:solidFill>
-                  </a:tcPr>
-                </a:tc>
-                <a:tc>
-                  <a:txBody>
-                    <a:bodyPr wrap="square"/>
-                    <a:lstStyle/>
-                    <a:p>
-                      <a:r>
-                        <a:rPr sz="950" b="1">
-                          <a:solidFill>
-                            <a:srgbClr val="FFFFFF"/>
-                          </a:solidFill>
-                          <a:latin typeface="Calibri"/>
-                        </a:rPr>
-                        <a:t>Non-functional</a:t>
-                      </a:r>
-                    </a:p>
-                  </a:txBody>
-                  <a:tcPr marL="63500" marR="63500" marT="38100" marB="38100">
-                    <a:solidFill>
-                      <a:srgbClr val="1F5CA8"/>
-                    </a:solidFill>
-                  </a:tcPr>
-                </a:tc>
-              </a:tr>
-              <a:tr h="25400">
-                <a:tc>
-                  <a:txBody>
-                    <a:bodyPr wrap="square"/>
-                    <a:lstStyle/>
-                    <a:p>
-                      <a:r>
-                        <a:rPr sz="950" b="0">
-                          <a:latin typeface="Calibri"/>
-                        </a:rPr>
-                        <a:t>FR1</a:t>
-                      </a:r>
-                    </a:p>
-                  </a:txBody>
-                  <a:tcPr marL="63500" marR="63500" marT="38100" marB="38100">
-                    <a:noFill/>
-                  </a:tcPr>
-                </a:tc>
-                <a:tc>
-                  <a:txBody>
-                    <a:bodyPr wrap="square"/>
-                    <a:lstStyle/>
-                    <a:p>
-                      <a:r>
-                        <a:rPr sz="950" b="0">
-                          <a:latin typeface="Calibri"/>
-                        </a:rPr>
-                        <a:t>Register models and capture a reference distribution</a:t>
-                      </a:r>
-                    </a:p>
-                  </a:txBody>
-                  <a:tcPr marL="63500" marR="63500" marT="38100" marB="38100">
-                    <a:noFill/>
-                  </a:tcPr>
-                </a:tc>
-                <a:tc>
-                  <a:txBody>
-                    <a:bodyPr wrap="square"/>
-                    <a:lstStyle/>
-                    <a:p>
-                      <a:r>
-                        <a:rPr sz="950" b="0">
-                          <a:latin typeface="Calibri"/>
-                        </a:rPr>
-                        <a:t>NFR1</a:t>
-                      </a:r>
-                    </a:p>
-                  </a:txBody>
-                  <a:tcPr marL="63500" marR="63500" marT="38100" marB="38100">
-                    <a:noFill/>
-                  </a:tcPr>
-                </a:tc>
-                <a:tc>
-                  <a:txBody>
-                    <a:bodyPr wrap="square"/>
-                    <a:lstStyle/>
-                    <a:p>
-                      <a:r>
-                        <a:rPr sz="950" b="0">
-                          <a:latin typeface="Calibri"/>
-                        </a:rPr>
-                        <a:t>Gateway p99 &lt;= 50 ms; 20 ms per-engine cap</a:t>
-                      </a:r>
-                    </a:p>
-                  </a:txBody>
-                  <a:tcPr marL="63500" marR="63500" marT="38100" marB="38100">
-                    <a:noFill/>
-                  </a:tcPr>
-                </a:tc>
-              </a:tr>
-              <a:tr h="25400">
-                <a:tc>
-                  <a:txBody>
-                    <a:bodyPr wrap="square"/>
-                    <a:lstStyle/>
-                    <a:p>
-                      <a:r>
-                        <a:rPr sz="950" b="0">
-                          <a:latin typeface="Calibri"/>
-                        </a:rPr>
-                        <a:t>FR2</a:t>
-                      </a:r>
-                    </a:p>
-                  </a:txBody>
-                  <a:tcPr marL="63500" marR="63500" marT="38100" marB="38100">
-                    <a:solidFill>
-                      <a:srgbClr val="F4F6F9"/>
-                    </a:solidFill>
-                  </a:tcPr>
-                </a:tc>
-                <a:tc>
-                  <a:txBody>
-                    <a:bodyPr wrap="square"/>
-                    <a:lstStyle/>
-                    <a:p>
-                      <a:r>
-                        <a:rPr sz="950" b="0">
-                          <a:latin typeface="Calibri"/>
-                        </a:rPr>
-                        <a:t>Compute PSI and KS per feature, offline</a:t>
-                      </a:r>
-                    </a:p>
-                  </a:txBody>
-                  <a:tcPr marL="63500" marR="63500" marT="38100" marB="38100">
-                    <a:solidFill>
-                      <a:srgbClr val="F4F6F9"/>
-                    </a:solidFill>
-                  </a:tcPr>
-                </a:tc>
-                <a:tc>
-                  <a:txBody>
-                    <a:bodyPr wrap="square"/>
-                    <a:lstStyle/>
-                    <a:p>
-                      <a:r>
-                        <a:rPr sz="950" b="0">
-                          <a:latin typeface="Calibri"/>
-                        </a:rPr>
-                        <a:t>NFR2</a:t>
-                      </a:r>
-                    </a:p>
-                  </a:txBody>
-                  <a:tcPr marL="63500" marR="63500" marT="38100" marB="38100">
-                    <a:solidFill>
-                      <a:srgbClr val="F4F6F9"/>
-                    </a:solidFill>
-                  </a:tcPr>
-                </a:tc>
-                <a:tc>
-                  <a:txBody>
-                    <a:bodyPr wrap="square"/>
-                    <a:lstStyle/>
-                    <a:p>
-                      <a:r>
-                        <a:rPr sz="950" b="0">
-                          <a:latin typeface="Calibri"/>
-                        </a:rPr>
-                        <a:t>A Custos failure must not fail the caller</a:t>
-                      </a:r>
-                    </a:p>
-                  </a:txBody>
-                  <a:tcPr marL="63500" marR="63500" marT="38100" marB="38100">
-                    <a:solidFill>
-                      <a:srgbClr val="F4F6F9"/>
-                    </a:solidFill>
-                  </a:tcPr>
-                </a:tc>
-              </a:tr>
-              <a:tr h="25400">
-                <a:tc>
-                  <a:txBody>
-                    <a:bodyPr wrap="square"/>
-                    <a:lstStyle/>
-                    <a:p>
-                      <a:r>
-                        <a:rPr sz="950" b="0">
-                          <a:latin typeface="Calibri"/>
-                        </a:rPr>
-                        <a:t>FR3</a:t>
-                      </a:r>
-                    </a:p>
-                  </a:txBody>
-                  <a:tcPr marL="63500" marR="63500" marT="38100" marB="38100">
-                    <a:noFill/>
-                  </a:tcPr>
-                </a:tc>
-                <a:tc>
-                  <a:txBody>
-                    <a:bodyPr wrap="square"/>
-                    <a:lstStyle/>
-                    <a:p>
-                      <a:r>
-                        <a:rPr sz="950" b="0">
-                          <a:latin typeface="Calibri"/>
-                        </a:rPr>
-                        <a:t>Roll per-feature statistics into one severity</a:t>
-                      </a:r>
-                    </a:p>
-                  </a:txBody>
-                  <a:tcPr marL="63500" marR="63500" marT="38100" marB="38100">
-                    <a:noFill/>
-                  </a:tcPr>
-                </a:tc>
-                <a:tc>
-                  <a:txBody>
-                    <a:bodyPr wrap="square"/>
-                    <a:lstStyle/>
-                    <a:p>
-                      <a:r>
-                        <a:rPr sz="950" b="0">
-                          <a:latin typeface="Calibri"/>
-                        </a:rPr>
-                        <a:t>NFR3</a:t>
-                      </a:r>
-                    </a:p>
-                  </a:txBody>
-                  <a:tcPr marL="63500" marR="63500" marT="38100" marB="38100">
-                    <a:noFill/>
-                  </a:tcPr>
-                </a:tc>
-                <a:tc>
-                  <a:txBody>
-                    <a:bodyPr wrap="square"/>
-                    <a:lstStyle/>
-                    <a:p>
-                      <a:r>
-                        <a:rPr sz="950" b="0">
-                          <a:latin typeface="Calibri"/>
-                        </a:rPr>
-                        <a:t>tenant_id on every table and every query</a:t>
-                      </a:r>
-                    </a:p>
-                  </a:txBody>
-                  <a:tcPr marL="63500" marR="63500" marT="38100" marB="38100">
-                    <a:noFill/>
-                  </a:tcPr>
-                </a:tc>
-              </a:tr>
-              <a:tr h="25400">
-                <a:tc>
-                  <a:txBody>
-                    <a:bodyPr wrap="square"/>
-                    <a:lstStyle/>
-                    <a:p>
-                      <a:r>
-                        <a:rPr sz="950" b="0">
-                          <a:latin typeface="Calibri"/>
-                        </a:rPr>
-                        <a:t>FR4</a:t>
-                      </a:r>
-                    </a:p>
-                  </a:txBody>
-                  <a:tcPr marL="63500" marR="63500" marT="38100" marB="38100">
-                    <a:solidFill>
-                      <a:srgbClr val="F4F6F9"/>
-                    </a:solidFill>
-                  </a:tcPr>
-                </a:tc>
-                <a:tc>
-                  <a:txBody>
-                    <a:bodyPr wrap="square"/>
-                    <a:lstStyle/>
-                    <a:p>
-                      <a:r>
-                        <a:rPr sz="950" b="0">
-                          <a:latin typeface="Calibri"/>
-                        </a:rPr>
-                        <a:t>Evaluate tenant policy rules against request context</a:t>
-                      </a:r>
-                    </a:p>
-                  </a:txBody>
-                  <a:tcPr marL="63500" marR="63500" marT="38100" marB="38100">
-                    <a:solidFill>
-                      <a:srgbClr val="F4F6F9"/>
-                    </a:solidFill>
-                  </a:tcPr>
-                </a:tc>
-                <a:tc>
-                  <a:txBody>
-                    <a:bodyPr wrap="square"/>
-                    <a:lstStyle/>
-                    <a:p>
-                      <a:r>
-                        <a:rPr sz="950" b="0">
-                          <a:latin typeface="Calibri"/>
-                        </a:rPr>
-                        <a:t>NFR4</a:t>
-                      </a:r>
-                    </a:p>
-                  </a:txBody>
-                  <a:tcPr marL="63500" marR="63500" marT="38100" marB="38100">
-                    <a:solidFill>
-                      <a:srgbClr val="F4F6F9"/>
-                    </a:solidFill>
-                  </a:tcPr>
-                </a:tc>
-                <a:tc>
-                  <a:txBody>
-                    <a:bodyPr wrap="square"/>
-                    <a:lstStyle/>
-                    <a:p>
-                      <a:r>
-                        <a:rPr sz="950" b="0">
-                          <a:latin typeface="Calibri"/>
-                        </a:rPr>
-                        <a:t>Keys stored as SHA-256; rule text parsed, never eval'd</a:t>
-                      </a:r>
-                    </a:p>
-                  </a:txBody>
-                  <a:tcPr marL="63500" marR="63500" marT="38100" marB="38100">
-                    <a:solidFill>
-                      <a:srgbClr val="F4F6F9"/>
-                    </a:solidFill>
-                  </a:tcPr>
-                </a:tc>
-              </a:tr>
-              <a:tr h="25400">
-                <a:tc>
-                  <a:txBody>
-                    <a:bodyPr wrap="square"/>
-                    <a:lstStyle/>
-                    <a:p>
-                      <a:r>
-                        <a:rPr sz="950" b="0">
-                          <a:latin typeface="Calibri"/>
-                        </a:rPr>
-                        <a:t>FR5</a:t>
-                      </a:r>
-                    </a:p>
-                  </a:txBody>
-                  <a:tcPr marL="63500" marR="63500" marT="38100" marB="38100">
-                    <a:noFill/>
-                  </a:tcPr>
-                </a:tc>
-                <a:tc>
-                  <a:txBody>
-                    <a:bodyPr wrap="square"/>
-                    <a:lstStyle/>
-                    <a:p>
-                      <a:r>
-                        <a:rPr sz="950" b="0">
-                          <a:latin typeface="Calibri"/>
-                        </a:rPr>
-                        <a:t>Fuse signals into a weighted trust score</a:t>
-                      </a:r>
-                    </a:p>
-                  </a:txBody>
-                  <a:tcPr marL="63500" marR="63500" marT="38100" marB="38100">
-                    <a:noFill/>
-                  </a:tcPr>
-                </a:tc>
-                <a:tc>
-                  <a:txBody>
-                    <a:bodyPr wrap="square"/>
-                    <a:lstStyle/>
-                    <a:p>
-                      <a:r>
-                        <a:rPr sz="950" b="0">
-                          <a:latin typeface="Calibri"/>
-                        </a:rPr>
-                        <a:t>NFR5</a:t>
-                      </a:r>
-                    </a:p>
-                  </a:txBody>
-                  <a:tcPr marL="63500" marR="63500" marT="38100" marB="38100">
-                    <a:noFill/>
-                  </a:tcPr>
-                </a:tc>
-                <a:tc>
-                  <a:txBody>
-                    <a:bodyPr wrap="square"/>
-                    <a:lstStyle/>
-                    <a:p>
-                      <a:r>
-                        <a:rPr sz="950" b="0">
-                          <a:latin typeface="Calibri"/>
-                        </a:rPr>
-                        <a:t>A new signal must not modify existing code</a:t>
-                      </a:r>
-                    </a:p>
-                  </a:txBody>
-                  <a:tcPr marL="63500" marR="63500" marT="38100" marB="38100">
-                    <a:noFill/>
-                  </a:tcPr>
-                </a:tc>
-              </a:tr>
-              <a:tr h="25400">
-                <a:tc>
-                  <a:txBody>
-                    <a:bodyPr wrap="square"/>
-                    <a:lstStyle/>
-                    <a:p>
-                      <a:r>
-                        <a:rPr sz="950" b="0">
-                          <a:latin typeface="Calibri"/>
-                        </a:rPr>
-                        <a:t>FR6</a:t>
-                      </a:r>
-                    </a:p>
-                  </a:txBody>
-                  <a:tcPr marL="63500" marR="63500" marT="38100" marB="38100">
-                    <a:solidFill>
-                      <a:srgbClr val="F4F6F9"/>
-                    </a:solidFill>
-                  </a:tcPr>
-                </a:tc>
-                <a:tc>
-                  <a:txBody>
-                    <a:bodyPr wrap="square"/>
-                    <a:lstStyle/>
-                    <a:p>
-                      <a:r>
-                        <a:rPr sz="950" b="0">
-                          <a:latin typeface="Calibri"/>
-                        </a:rPr>
-                        <a:t>Return ALLOW / REVIEW / BLOCK with reasons</a:t>
-                      </a:r>
-                    </a:p>
-                  </a:txBody>
-                  <a:tcPr marL="63500" marR="63500" marT="38100" marB="38100">
-                    <a:solidFill>
-                      <a:srgbClr val="F4F6F9"/>
-                    </a:solidFill>
-                  </a:tcPr>
-                </a:tc>
-                <a:tc>
-                  <a:txBody>
-                    <a:bodyPr wrap="square"/>
-                    <a:lstStyle/>
-                    <a:p>
-                      <a:r>
-                        <a:rPr sz="950" b="0">
-                          <a:latin typeface="Calibri"/>
-                        </a:rPr>
-                        <a:t>NFR6</a:t>
-                      </a:r>
-                    </a:p>
-                  </a:txBody>
-                  <a:tcPr marL="63500" marR="63500" marT="38100" marB="38100">
-                    <a:solidFill>
-                      <a:srgbClr val="F4F6F9"/>
-                    </a:solidFill>
-                  </a:tcPr>
-                </a:tc>
-                <a:tc>
-                  <a:txBody>
-                    <a:bodyPr wrap="square"/>
-                    <a:lstStyle/>
-                    <a:p>
-                      <a:r>
-                        <a:rPr sz="950" b="0">
-                          <a:latin typeface="Calibri"/>
-                        </a:rPr>
-                        <a:t>Gateway and worker horizontally scalable</a:t>
-                      </a:r>
-                    </a:p>
-                  </a:txBody>
-                  <a:tcPr marL="63500" marR="63500" marT="38100" marB="38100">
-                    <a:solidFill>
-                      <a:srgbClr val="F4F6F9"/>
-                    </a:solidFill>
-                  </a:tcPr>
-                </a:tc>
-              </a:tr>
-              <a:tr h="25400">
-                <a:tc>
-                  <a:txBody>
-                    <a:bodyPr wrap="square"/>
-                    <a:lstStyle/>
-                    <a:p>
-                      <a:r>
-                        <a:rPr sz="950" b="0">
-                          <a:latin typeface="Calibri"/>
-                        </a:rPr>
-                        <a:t>FR7</a:t>
-                      </a:r>
-                    </a:p>
-                  </a:txBody>
-                  <a:tcPr marL="63500" marR="63500" marT="38100" marB="38100">
-                    <a:noFill/>
-                  </a:tcPr>
-                </a:tc>
-                <a:tc>
-                  <a:txBody>
-                    <a:bodyPr wrap="square"/>
-                    <a:lstStyle/>
-                    <a:p>
-                      <a:r>
-                        <a:rPr sz="950" b="0">
-                          <a:latin typeface="Calibri"/>
-                        </a:rPr>
-                        <a:t>Honour an engine veto over all other signals</a:t>
-                      </a:r>
-                    </a:p>
-                  </a:txBody>
-                  <a:tcPr marL="63500" marR="63500" marT="38100" marB="38100">
-                    <a:noFill/>
-                  </a:tcPr>
-                </a:tc>
-                <a:tc>
-                  <a:txBody>
-                    <a:bodyPr wrap="square"/>
-                    <a:lstStyle/>
-                    <a:p>
-                      <a:r>
-                        <a:rPr sz="950" b="0">
-                          <a:latin typeface="Calibri"/>
-                        </a:rPr>
-                        <a:t>NFR7</a:t>
-                      </a:r>
-                    </a:p>
-                  </a:txBody>
-                  <a:tcPr marL="63500" marR="63500" marT="38100" marB="38100">
-                    <a:noFill/>
-                  </a:tcPr>
-                </a:tc>
-                <a:tc>
-                  <a:txBody>
-                    <a:bodyPr wrap="square"/>
-                    <a:lstStyle/>
-                    <a:p>
-                      <a:r>
-                        <a:rPr sz="950" b="0">
-                          <a:latin typeface="Calibri"/>
-                        </a:rPr>
-                        <a:t>new — Overload is refused, never queued (bounded in-flight)</a:t>
-                      </a:r>
-                    </a:p>
-                  </a:txBody>
-                  <a:tcPr marL="63500" marR="63500" marT="38100" marB="38100">
-                    <a:noFill/>
-                  </a:tcPr>
-                </a:tc>
-              </a:tr>
-              <a:tr h="25400">
-                <a:tc>
-                  <a:txBody>
-                    <a:bodyPr wrap="square"/>
-                    <a:lstStyle/>
-                    <a:p>
-                      <a:r>
-                        <a:rPr sz="950" b="0">
-                          <a:latin typeface="Calibri"/>
-                        </a:rPr>
-                        <a:t>FR8</a:t>
-                      </a:r>
-                    </a:p>
-                  </a:txBody>
-                  <a:tcPr marL="63500" marR="63500" marT="38100" marB="38100">
-                    <a:solidFill>
-                      <a:srgbClr val="F4F6F9"/>
-                    </a:solidFill>
-                  </a:tcPr>
-                </a:tc>
-                <a:tc>
-                  <a:txBody>
-                    <a:bodyPr wrap="square"/>
-                    <a:lstStyle/>
-                    <a:p>
-                      <a:r>
-                        <a:rPr sz="950" b="0">
-                          <a:latin typeface="Calibri"/>
-                        </a:rPr>
-                        <a:t>Append every decision to a tamper-evident chain</a:t>
-                      </a:r>
-                    </a:p>
-                  </a:txBody>
-                  <a:tcPr marL="63500" marR="63500" marT="38100" marB="38100">
-                    <a:solidFill>
-                      <a:srgbClr val="F4F6F9"/>
-                    </a:solidFill>
-                  </a:tcPr>
-                </a:tc>
-                <a:tc>
-                  <a:txBody>
-                    <a:bodyPr wrap="square"/>
-                    <a:lstStyle/>
-                    <a:p>
-                      <a:r>
-                        <a:rPr sz="950" b="0">
-                          <a:latin typeface="Calibri"/>
-                        </a:rPr>
-                        <a:t/>
-                      </a:r>
-                    </a:p>
-                  </a:txBody>
-                  <a:tcPr marL="63500" marR="63500" marT="38100" marB="38100">
-                    <a:solidFill>
-                      <a:srgbClr val="F4F6F9"/>
-                    </a:solidFill>
-                  </a:tcPr>
-                </a:tc>
-                <a:tc>
-                  <a:txBody>
-                    <a:bodyPr wrap="square"/>
-                    <a:lstStyle/>
-                    <a:p>
-                      <a:r>
-                        <a:rPr sz="950" b="0">
-                          <a:latin typeface="Calibri"/>
-                        </a:rPr>
-                        <a:t>Python 3.11, FastAPI, SQLAlchemy 2, Celery</a:t>
-                      </a:r>
-                    </a:p>
-                  </a:txBody>
-                  <a:tcPr marL="63500" marR="63500" marT="38100" marB="38100">
-                    <a:solidFill>
-                      <a:srgbClr val="F4F6F9"/>
-                    </a:solidFill>
-                  </a:tcPr>
-                </a:tc>
-              </a:tr>
-              <a:tr h="25400">
-                <a:tc>
-                  <a:txBody>
-                    <a:bodyPr wrap="square"/>
-                    <a:lstStyle/>
-                    <a:p>
-                      <a:r>
-                        <a:rPr sz="950" b="0">
-                          <a:latin typeface="Calibri"/>
-                        </a:rPr>
-                        <a:t>FR9</a:t>
-                      </a:r>
-                    </a:p>
-                  </a:txBody>
-                  <a:tcPr marL="63500" marR="63500" marT="38100" marB="38100">
-                    <a:noFill/>
-                  </a:tcPr>
-                </a:tc>
-                <a:tc>
-                  <a:txBody>
-                    <a:bodyPr wrap="square"/>
-                    <a:lstStyle/>
-                    <a:p>
-                      <a:r>
-                        <a:rPr sz="950" b="0">
-                          <a:latin typeface="Calibri"/>
-                        </a:rPr>
-                        <a:t>Verify a chain and report the first modified entry</a:t>
-                      </a:r>
-                    </a:p>
-                  </a:txBody>
-                  <a:tcPr marL="63500" marR="63500" marT="38100" marB="38100">
-                    <a:noFill/>
-                  </a:tcPr>
-                </a:tc>
-                <a:tc>
-                  <a:txBody>
-                    <a:bodyPr wrap="square"/>
-                    <a:lstStyle/>
-                    <a:p>
-                      <a:r>
-                        <a:rPr sz="950" b="0">
-                          <a:latin typeface="Calibri"/>
-                        </a:rPr>
-                        <a:t/>
-                      </a:r>
-                    </a:p>
-                  </a:txBody>
-                  <a:tcPr marL="63500" marR="63500" marT="38100" marB="38100">
-                    <a:noFill/>
-                  </a:tcPr>
-                </a:tc>
-                <a:tc>
-                  <a:txBody>
-                    <a:bodyPr wrap="square"/>
-                    <a:lstStyle/>
-                    <a:p>
-                      <a:r>
-                        <a:rPr sz="950" b="0">
-                          <a:latin typeface="Calibri"/>
-                        </a:rPr>
-                        <a:t>React 18 + TypeScript 5, Vite</a:t>
-                      </a:r>
-                    </a:p>
-                  </a:txBody>
-                  <a:tcPr marL="63500" marR="63500" marT="38100" marB="38100">
-                    <a:noFill/>
-                  </a:tcPr>
-                </a:tc>
-              </a:tr>
-              <a:tr h="25400">
-                <a:tc>
-                  <a:txBody>
-                    <a:bodyPr wrap="square"/>
-                    <a:lstStyle/>
-                    <a:p>
-                      <a:r>
-                        <a:rPr sz="950" b="0">
-                          <a:latin typeface="Calibri"/>
-                        </a:rPr>
-                        <a:t>FR10</a:t>
-                      </a:r>
-                    </a:p>
-                  </a:txBody>
-                  <a:tcPr marL="63500" marR="63500" marT="38100" marB="38100">
-                    <a:solidFill>
-                      <a:srgbClr val="F4F6F9"/>
-                    </a:solidFill>
-                  </a:tcPr>
-                </a:tc>
-                <a:tc>
-                  <a:txBody>
-                    <a:bodyPr wrap="square"/>
-                    <a:lstStyle/>
-                    <a:p>
-                      <a:r>
-                        <a:rPr sz="950" b="0">
-                          <a:latin typeface="Calibri"/>
-                        </a:rPr>
-                        <a:t>Route unregistered models to REVIEW</a:t>
-                      </a:r>
-                    </a:p>
-                  </a:txBody>
-                  <a:tcPr marL="63500" marR="63500" marT="38100" marB="38100">
-                    <a:solidFill>
-                      <a:srgbClr val="F4F6F9"/>
-                    </a:solidFill>
-                  </a:tcPr>
-                </a:tc>
-                <a:tc>
-                  <a:txBody>
-                    <a:bodyPr wrap="square"/>
-                    <a:lstStyle/>
-                    <a:p>
-                      <a:r>
-                        <a:rPr sz="950" b="0">
-                          <a:latin typeface="Calibri"/>
-                        </a:rPr>
-                        <a:t/>
-                      </a:r>
-                    </a:p>
-                  </a:txBody>
-                  <a:tcPr marL="63500" marR="63500" marT="38100" marB="38100">
-                    <a:solidFill>
-                      <a:srgbClr val="F4F6F9"/>
-                    </a:solidFill>
-                  </a:tcPr>
-                </a:tc>
-                <a:tc>
-                  <a:txBody>
-                    <a:bodyPr wrap="square"/>
-                    <a:lstStyle/>
-                    <a:p>
-                      <a:r>
-                        <a:rPr sz="950" b="0">
-                          <a:latin typeface="Calibri"/>
-                        </a:rPr>
-                        <a:t>PostgreSQL 16 + Redis 7; SQLite on one node</a:t>
-                      </a:r>
-                    </a:p>
-                  </a:txBody>
-                  <a:tcPr marL="63500" marR="63500" marT="38100" marB="38100">
-                    <a:solidFill>
-                      <a:srgbClr val="F4F6F9"/>
-                    </a:solidFill>
-                  </a:tcPr>
-                </a:tc>
-              </a:tr>
-              <a:tr h="25400">
-                <a:tc>
-                  <a:txBody>
-                    <a:bodyPr wrap="square"/>
-                    <a:lstStyle/>
-                    <a:p>
-                      <a:r>
-                        <a:rPr sz="950" b="0">
-                          <a:latin typeface="Calibri"/>
-                        </a:rPr>
-                        <a:t>FR11</a:t>
-                      </a:r>
-                    </a:p>
-                  </a:txBody>
-                  <a:tcPr marL="63500" marR="63500" marT="38100" marB="38100">
-                    <a:noFill/>
-                  </a:tcPr>
-                </a:tc>
-                <a:tc>
-                  <a:txBody>
-                    <a:bodyPr wrap="square"/>
-                    <a:lstStyle/>
-                    <a:p>
-                      <a:r>
-                        <a:rPr sz="950" b="0">
-                          <a:latin typeface="Calibri"/>
-                        </a:rPr>
-                        <a:t>new — Score per-request risk: unusual amount, request velocity</a:t>
-                      </a:r>
-                    </a:p>
-                  </a:txBody>
-                  <a:tcPr marL="63500" marR="63500" marT="38100" marB="38100">
-                    <a:noFill/>
-                  </a:tcPr>
-                </a:tc>
-                <a:tc>
-                  <a:txBody>
-                    <a:bodyPr wrap="square"/>
-                    <a:lstStyle/>
-                    <a:p>
-                      <a:r>
-                        <a:rPr sz="950" b="0">
-                          <a:latin typeface="Calibri"/>
-                        </a:rPr>
-                        <a:t/>
-                      </a:r>
-                    </a:p>
-                  </a:txBody>
-                  <a:tcPr marL="63500" marR="63500" marT="38100" marB="38100">
-                    <a:noFill/>
-                  </a:tcPr>
-                </a:tc>
-                <a:tc>
-                  <a:txBody>
-                    <a:bodyPr wrap="square"/>
-                    <a:lstStyle/>
-                    <a:p>
-                      <a:r>
-                        <a:rPr sz="950" b="0">
-                          <a:latin typeface="Calibri"/>
-                        </a:rPr>
-                        <a:t/>
-                      </a:r>
-                    </a:p>
-                  </a:txBody>
-                  <a:tcPr marL="63500" marR="63500" marT="38100" marB="38100">
-                    <a:noFill/>
-                  </a:tcPr>
-                </a:tc>
-              </a:tr>
-              <a:tr h="25400">
-                <a:tc>
-                  <a:txBody>
-                    <a:bodyPr wrap="square"/>
-                    <a:lstStyle/>
-                    <a:p>
-                      <a:r>
-                        <a:rPr sz="950" b="0">
-                          <a:latin typeface="Calibri"/>
-                        </a:rPr>
-                        <a:t>FR12</a:t>
-                      </a:r>
-                    </a:p>
-                  </a:txBody>
-                  <a:tcPr marL="63500" marR="63500" marT="38100" marB="38100">
-                    <a:solidFill>
-                      <a:srgbClr val="F4F6F9"/>
-                    </a:solidFill>
-                  </a:tcPr>
-                </a:tc>
-                <a:tc>
-                  <a:txBody>
-                    <a:bodyPr wrap="square"/>
-                    <a:lstStyle/>
-                    <a:p>
-                      <a:r>
-                        <a:rPr sz="950" b="0">
-                          <a:latin typeface="Calibri"/>
-                        </a:rPr>
-                        <a:t>new — Never auto-approve a model in the significant drift band</a:t>
-                      </a:r>
-                    </a:p>
-                  </a:txBody>
-                  <a:tcPr marL="63500" marR="63500" marT="38100" marB="38100">
-                    <a:solidFill>
-                      <a:srgbClr val="F4F6F9"/>
-                    </a:solidFill>
-                  </a:tcPr>
-                </a:tc>
-                <a:tc>
-                  <a:txBody>
-                    <a:bodyPr wrap="square"/>
-                    <a:lstStyle/>
-                    <a:p>
-                      <a:r>
-                        <a:rPr sz="950" b="0">
-                          <a:latin typeface="Calibri"/>
-                        </a:rPr>
-                        <a:t/>
-                      </a:r>
-                    </a:p>
-                  </a:txBody>
-                  <a:tcPr marL="63500" marR="63500" marT="38100" marB="38100">
-                    <a:solidFill>
-                      <a:srgbClr val="F4F6F9"/>
-                    </a:solidFill>
-                  </a:tcPr>
-                </a:tc>
-                <a:tc>
-                  <a:txBody>
-                    <a:bodyPr wrap="square"/>
-                    <a:lstStyle/>
-                    <a:p>
-                      <a:r>
-                        <a:rPr sz="950" b="0">
-                          <a:latin typeface="Calibri"/>
-                        </a:rPr>
-                        <a:t/>
-                      </a:r>
-                    </a:p>
-                  </a:txBody>
-                  <a:tcPr marL="63500" marR="63500" marT="38100" marB="38100">
-                    <a:solidFill>
-                      <a:srgbClr val="F4F6F9"/>
-                    </a:solidFill>
-                  </a:tcPr>
-                </a:tc>
-              </a:tr>
-            </a:tbl>
-          </a:graphicData>
-        </a:graphic>
-      </p:graphicFrame>
+        </p:nvPicPr>
+        <p:blipFill>
+          <a:blip r:embed="rId4"/>
+          <a:stretch>
+            <a:fillRect/>
+          </a:stretch>
+        </p:blipFill>
+        <p:spPr>
+          <a:xfrm>
+            <a:off x="1066647" y="2240280"/>
+            <a:ext cx="10058400" cy="3108960"/>
+          </a:xfrm>
+          <a:prstGeom prst="rect">
+            <a:avLst/>
+          </a:prstGeom>
+        </p:spPr>
+      </p:pic>
     </p:spTree>
     <p:extLst>
       <p:ext uri="{BB962C8B-B14F-4D97-AF65-F5344CB8AC3E}">
-        <p14:creationId xmlns:p14="http://schemas.microsoft.com/office/powerpoint/2010/main" val="402940564"/>
+        <p14:creationId xmlns:p14="http://schemas.microsoft.com/office/powerpoint/2010/main" val="1238004487"/>
       </p:ext>
     </p:extLst>
   </p:cSld>
@@ -5505,7 +4529,7 @@
                 <a:ea typeface="Calibri" panose="020F0502020204030204" pitchFamily="34" charset="0"/>
                 <a:cs typeface="Calibri" panose="020F0502020204030204" pitchFamily="34" charset="0"/>
               </a:rPr>
-              <a:t>System Design — Architecture</a:t>
+              <a:t>System Design — Decision Logic</a:t>
             </a:r>
           </a:p>
         </p:txBody>
@@ -5545,12 +4569,12 @@
               <a:buNone/>
             </a:pPr>
             <a:r>
-              <a:rPr lang="en-US" sz="1400" b="0" i="0" dirty="0">
+              <a:rPr lang="en-US" sz="1500" b="0" i="1" dirty="0">
                 <a:latin typeface="Calibri" panose="020F0502020204030204" pitchFamily="34" charset="0"/>
                 <a:ea typeface="Calibri" panose="020F0502020204030204" pitchFamily="34" charset="0"/>
                 <a:cs typeface="Calibri" panose="020F0502020204030204" pitchFamily="34" charset="0"/>
               </a:rPr>
-              <a:t>Two planes: the request path does the minimum, statistics run offline. New: all three engines are live — risk is no longer a stub.</a:t>
+              <a:t>Rules before score: a veto always wins; a drifted model never auto-approves.</a:t>
             </a:r>
           </a:p>
         </p:txBody>
@@ -5644,7 +4668,7 @@
             <a:fld id="{D57F1E4F-1CFF-5643-939E-217C01CDF565}" type="slidenum">
               <a:rPr lang="en-US" smtClean="0"/>
               <a:pPr/>
-              <a:t>7</a:t>
+              <a:t>3</a:t>
             </a:fld>
             <a:endParaRPr lang="en-US" dirty="0"/>
           </a:p>
@@ -5681,7 +4705,7 @@
       </p:sp>
       <p:pic>
         <p:nvPicPr>
-          <p:cNvPr id="8" name="Picture 7" descr="architecture.png"/>
+          <p:cNvPr id="8" name="Picture 7" descr="decision_flow.png"/>
           <p:cNvPicPr>
             <a:picLocks noChangeAspect="1"/>
           </p:cNvPicPr>
@@ -5695,8 +4719,8 @@
         </p:blipFill>
         <p:spPr>
           <a:xfrm>
-            <a:off x="1066647" y="2697480"/>
-            <a:ext cx="10058400" cy="3108960"/>
+            <a:off x="1066647" y="2377440"/>
+            <a:ext cx="10058400" cy="2514600"/>
           </a:xfrm>
           <a:prstGeom prst="rect">
             <a:avLst/>
@@ -5706,7 +4730,7 @@
     </p:spTree>
     <p:extLst>
       <p:ext uri="{BB962C8B-B14F-4D97-AF65-F5344CB8AC3E}">
-        <p14:creationId xmlns:p14="http://schemas.microsoft.com/office/powerpoint/2010/main" val="1238004487"/>
+        <p14:creationId xmlns:p14="http://schemas.microsoft.com/office/powerpoint/2010/main" val="3231882420"/>
       </p:ext>
     </p:extLst>
   </p:cSld>
@@ -5773,7 +4797,7 @@
                 <a:ea typeface="Calibri" panose="020F0502020204030204" pitchFamily="34" charset="0"/>
                 <a:cs typeface="Calibri" panose="020F0502020204030204" pitchFamily="34" charset="0"/>
               </a:rPr>
-              <a:t>System Design — Decision Logic</a:t>
+              <a:t>Implementation</a:t>
             </a:r>
           </a:p>
         </p:txBody>
@@ -5813,12 +4837,12 @@
               <a:buNone/>
             </a:pPr>
             <a:r>
-              <a:rPr lang="en-US" sz="1400" b="0" i="0" dirty="0">
+              <a:rPr lang="en-US" sz="1500" b="0" i="1" dirty="0">
                 <a:latin typeface="Calibri" panose="020F0502020204030204" pitchFamily="34" charset="0"/>
                 <a:ea typeface="Calibri" panose="020F0502020204030204" pitchFamily="34" charset="0"/>
                 <a:cs typeface="Calibri" panose="020F0502020204030204" pitchFamily="34" charset="0"/>
               </a:rPr>
-              <a:t>Seven rules, evaluated in order. New: the drift floor — a significantly drifted model is never auto-approved. Slide 20 tests it on real data.</a:t>
+              <a:t>397 tests  ·  p99 31 ms at 200 req/s  ·  0 verdicts changed by overload</a:t>
             </a:r>
           </a:p>
         </p:txBody>
@@ -5912,274 +4936,6 @@
             <a:fld id="{D57F1E4F-1CFF-5643-939E-217C01CDF565}" type="slidenum">
               <a:rPr lang="en-US" smtClean="0"/>
               <a:pPr/>
-              <a:t>3</a:t>
-            </a:fld>
-            <a:endParaRPr lang="en-US" dirty="0"/>
-          </a:p>
-        </p:txBody>
-      </p:sp>
-      <p:sp>
-        <p:nvSpPr>
-          <p:cNvPr id="7" name="Footer Placeholder 6">
-            <a:extLst>
-              <a:ext uri="{FF2B5EF4-FFF2-40B4-BE49-F238E27FC236}">
-                <a16:creationId xmlns:a16="http://schemas.microsoft.com/office/drawing/2014/main" id="{8683C6DF-27D9-468B-A1AB-FE568488FE57}"/>
-              </a:ext>
-            </a:extLst>
-          </p:cNvPr>
-          <p:cNvSpPr>
-            <a:spLocks noGrp="1"/>
-          </p:cNvSpPr>
-          <p:nvPr>
-            <p:ph type="ftr" sz="quarter" idx="11"/>
-          </p:nvPr>
-        </p:nvSpPr>
-        <p:spPr/>
-        <p:txBody>
-          <a:bodyPr/>
-          <a:lstStyle/>
-          <a:p>
-            <a:r>
-              <a:rPr lang="en-US"/>
-              <a:t>Dept of AI &amp; DS</a:t>
-            </a:r>
-            <a:endParaRPr lang="en-US" dirty="0"/>
-          </a:p>
-        </p:txBody>
-      </p:sp>
-      <p:pic>
-        <p:nvPicPr>
-          <p:cNvPr id="8" name="Picture 7" descr="decision_flow.png"/>
-          <p:cNvPicPr>
-            <a:picLocks noChangeAspect="1"/>
-          </p:cNvPicPr>
-          <p:nvPr/>
-        </p:nvPicPr>
-        <p:blipFill>
-          <a:blip r:embed="rId4"/>
-          <a:stretch>
-            <a:fillRect/>
-          </a:stretch>
-        </p:blipFill>
-        <p:spPr>
-          <a:xfrm>
-            <a:off x="1066647" y="2743200"/>
-            <a:ext cx="10058400" cy="2514600"/>
-          </a:xfrm>
-          <a:prstGeom prst="rect">
-            <a:avLst/>
-          </a:prstGeom>
-        </p:spPr>
-      </p:pic>
-    </p:spTree>
-    <p:extLst>
-      <p:ext uri="{BB962C8B-B14F-4D97-AF65-F5344CB8AC3E}">
-        <p14:creationId xmlns:p14="http://schemas.microsoft.com/office/powerpoint/2010/main" val="3231882420"/>
-      </p:ext>
-    </p:extLst>
-  </p:cSld>
-  <p:clrMapOvr>
-    <a:masterClrMapping/>
-  </p:clrMapOvr>
-</p:sld>
-</file>
-
-<file path=ppt/slides/slide13.xml><?xml version="1.0" encoding="utf-8"?>
-<p:sld xmlns:a="http://schemas.openxmlformats.org/drawingml/2006/main" xmlns:r="http://schemas.openxmlformats.org/officeDocument/2006/relationships" xmlns:p="http://schemas.openxmlformats.org/presentationml/2006/main">
-  <p:cSld>
-    <p:spTree>
-      <p:nvGrpSpPr>
-        <p:cNvPr id="1" name=""/>
-        <p:cNvGrpSpPr/>
-        <p:nvPr/>
-      </p:nvGrpSpPr>
-      <p:grpSpPr>
-        <a:xfrm>
-          <a:off x="0" y="0"/>
-          <a:ext cx="0" cy="0"/>
-          <a:chOff x="0" y="0"/>
-          <a:chExt cx="0" cy="0"/>
-        </a:xfrm>
-      </p:grpSpPr>
-      <p:sp>
-        <p:nvSpPr>
-          <p:cNvPr id="2" name="Title 1">
-            <a:extLst>
-              <a:ext uri="{FF2B5EF4-FFF2-40B4-BE49-F238E27FC236}">
-                <a16:creationId xmlns:a16="http://schemas.microsoft.com/office/drawing/2014/main" id="{BD1A189D-22D1-4D1A-9E04-C6134EC51F8B}"/>
-              </a:ext>
-            </a:extLst>
-          </p:cNvPr>
-          <p:cNvSpPr>
-            <a:spLocks noGrp="1"/>
-          </p:cNvSpPr>
-          <p:nvPr>
-            <p:ph type="ctrTitle"/>
-          </p:nvPr>
-        </p:nvSpPr>
-        <p:spPr>
-          <a:xfrm>
-            <a:off x="1684868" y="203198"/>
-            <a:ext cx="9694332" cy="880535"/>
-          </a:xfrm>
-        </p:spPr>
-        <p:txBody>
-          <a:bodyPr>
-            <a:normAutofit/>
-          </a:bodyPr>
-          <a:lstStyle/>
-          <a:p>
-            <a:pPr marL="0" indent="0" algn="l">
-              <a:spcBef>
-                <a:spcPts val="0"/>
-              </a:spcBef>
-              <a:buNone/>
-            </a:pPr>
-            <a:r>
-              <a:rPr lang="en-US" sz="3200" b="1" i="0" dirty="0">
-                <a:latin typeface="Calibri" panose="020F0502020204030204" pitchFamily="34" charset="0"/>
-                <a:ea typeface="Calibri" panose="020F0502020204030204" pitchFamily="34" charset="0"/>
-                <a:cs typeface="Calibri" panose="020F0502020204030204" pitchFamily="34" charset="0"/>
-              </a:rPr>
-              <a:t>Implementation — Status</a:t>
-            </a:r>
-          </a:p>
-        </p:txBody>
-      </p:sp>
-      <p:sp>
-        <p:nvSpPr>
-          <p:cNvPr id="3" name="Subtitle 2">
-            <a:extLst>
-              <a:ext uri="{FF2B5EF4-FFF2-40B4-BE49-F238E27FC236}">
-                <a16:creationId xmlns:a16="http://schemas.microsoft.com/office/drawing/2014/main" id="{255E737C-85F2-47BC-AD38-AD8B001473B7}"/>
-              </a:ext>
-            </a:extLst>
-          </p:cNvPr>
-          <p:cNvSpPr>
-            <a:spLocks noGrp="1"/>
-          </p:cNvSpPr>
-          <p:nvPr>
-            <p:ph type="subTitle" idx="1"/>
-          </p:nvPr>
-        </p:nvSpPr>
-        <p:spPr>
-          <a:xfrm>
-            <a:off x="1684867" y="1574800"/>
-            <a:ext cx="9694333" cy="4614333"/>
-          </a:xfrm>
-        </p:spPr>
-        <p:txBody>
-          <a:bodyPr>
-            <a:normAutofit/>
-          </a:bodyPr>
-          <a:lstStyle/>
-          <a:p>
-            <a:pPr marL="0" indent="0" algn="l">
-              <a:spcBef>
-                <a:spcPts val="0"/>
-              </a:spcBef>
-              <a:buNone/>
-            </a:pPr>
-            <a:r>
-              <a:rPr lang="en-US" sz="1300" b="0" i="0" dirty="0">
-                <a:latin typeface="Calibri" panose="020F0502020204030204" pitchFamily="34" charset="0"/>
-                <a:ea typeface="Calibri" panose="020F0502020204030204" pitchFamily="34" charset="0"/>
-                <a:cs typeface="Calibri" panose="020F0502020204030204" pitchFamily="34" charset="0"/>
-              </a:rPr>
-              <a:t>Eleven of twelve components complete. New since Review-1 are marked.</a:t>
-            </a:r>
-          </a:p>
-        </p:txBody>
-      </p:sp>
-      <p:pic>
-        <p:nvPicPr>
-          <p:cNvPr id="5" name="Graphic 4">
-            <a:extLst>
-              <a:ext uri="{FF2B5EF4-FFF2-40B4-BE49-F238E27FC236}">
-                <a16:creationId xmlns:a16="http://schemas.microsoft.com/office/drawing/2014/main" id="{E7125167-8301-4D88-B79A-A8DA3C19E0D6}"/>
-              </a:ext>
-            </a:extLst>
-          </p:cNvPr>
-          <p:cNvPicPr>
-            <a:picLocks noChangeAspect="1"/>
-          </p:cNvPicPr>
-          <p:nvPr/>
-        </p:nvPicPr>
-        <p:blipFill>
-          <a:blip r:embed="rId2">
-            <a:extLst>
-              <a:ext uri="{96DAC541-7B7A-43D3-8B79-37D633B846F1}">
-                <asvg:svgBlip xmlns:asvg="http://schemas.microsoft.com/office/drawing/2016/SVG/main" r:embed="rId3"/>
-              </a:ext>
-            </a:extLst>
-          </a:blip>
-          <a:stretch>
-            <a:fillRect/>
-          </a:stretch>
-        </p:blipFill>
-        <p:spPr>
-          <a:xfrm>
-            <a:off x="127001" y="86782"/>
-            <a:ext cx="1159932" cy="1159932"/>
-          </a:xfrm>
-          <a:prstGeom prst="rect">
-            <a:avLst/>
-          </a:prstGeom>
-        </p:spPr>
-      </p:pic>
-      <p:sp>
-        <p:nvSpPr>
-          <p:cNvPr id="4" name="Date Placeholder 3">
-            <a:extLst>
-              <a:ext uri="{FF2B5EF4-FFF2-40B4-BE49-F238E27FC236}">
-                <a16:creationId xmlns:a16="http://schemas.microsoft.com/office/drawing/2014/main" id="{35032362-C5A5-4DBF-AD79-DE6FB7439999}"/>
-              </a:ext>
-            </a:extLst>
-          </p:cNvPr>
-          <p:cNvSpPr>
-            <a:spLocks noGrp="1"/>
-          </p:cNvSpPr>
-          <p:nvPr>
-            <p:ph type="dt" sz="half" idx="10"/>
-          </p:nvPr>
-        </p:nvSpPr>
-        <p:spPr/>
-        <p:txBody>
-          <a:bodyPr/>
-          <a:lstStyle/>
-          <a:p>
-            <a:fld id="{64C96E34-94C0-49E4-A53B-4A44141FD3C8}" type="datetime3">
-              <a:rPr lang="en-US" smtClean="0"/>
-              <a:t>17 October 2026</a:t>
-            </a:fld>
-            <a:endParaRPr lang="en-US" dirty="0"/>
-          </a:p>
-        </p:txBody>
-      </p:sp>
-      <p:sp>
-        <p:nvSpPr>
-          <p:cNvPr id="6" name="Slide Number Placeholder 5">
-            <a:extLst>
-              <a:ext uri="{FF2B5EF4-FFF2-40B4-BE49-F238E27FC236}">
-                <a16:creationId xmlns:a16="http://schemas.microsoft.com/office/drawing/2014/main" id="{115AAB64-5B51-4B5A-B69E-D96362CE6E74}"/>
-              </a:ext>
-            </a:extLst>
-          </p:cNvPr>
-          <p:cNvSpPr>
-            <a:spLocks noGrp="1"/>
-          </p:cNvSpPr>
-          <p:nvPr>
-            <p:ph type="sldNum" sz="quarter" idx="12"/>
-          </p:nvPr>
-        </p:nvSpPr>
-        <p:spPr/>
-        <p:txBody>
-          <a:bodyPr/>
-          <a:lstStyle/>
-          <a:p>
-            <a:fld id="{D57F1E4F-1CFF-5643-939E-217C01CDF565}" type="slidenum">
-              <a:rPr lang="en-US" smtClean="0"/>
-              <a:pPr/>
               <a:t>8</a:t>
             </a:fld>
             <a:endParaRPr lang="en-US" dirty="0"/>
@@ -6224,8 +4980,8 @@
           <p:nvPr/>
         </p:nvGraphicFramePr>
         <p:xfrm>
-          <a:off x="960120" y="2240280"/>
-          <a:ext cx="10241278" cy="355600"/>
+          <a:off x="960120" y="2103120"/>
+          <a:ext cx="10241279" cy="254000"/>
         </p:xfrm>
         <a:graphic>
           <a:graphicData uri="http://schemas.openxmlformats.org/drawingml/2006/table">
@@ -6234,9 +4990,9 @@
                 <a:tableStyleId>{5C22544A-7EE6-4342-B048-85BDC9FD1C3A}</a:tableStyleId>
               </a:tblPr>
               <a:tblGrid>
-                <a:gridCol w="2150668"/>
-                <a:gridCol w="6759244"/>
-                <a:gridCol w="1331366"/>
+                <a:gridCol w="2457907"/>
+                <a:gridCol w="5735116"/>
+                <a:gridCol w="2048256"/>
               </a:tblGrid>
               <a:tr h="25400">
                 <a:tc>
@@ -6245,7 +5001,7 @@
                     <a:lstStyle/>
                     <a:p>
                       <a:r>
-                        <a:rPr sz="950" b="1">
+                        <a:rPr sz="1400" b="1">
                           <a:solidFill>
                             <a:srgbClr val="FFFFFF"/>
                           </a:solidFill>
@@ -6267,7 +5023,7 @@
                     <a:lstStyle/>
                     <a:p>
                       <a:r>
-                        <a:rPr sz="950" b="1">
+                        <a:rPr sz="1400" b="1">
                           <a:solidFill>
                             <a:srgbClr val="FFFFFF"/>
                           </a:solidFill>
@@ -6289,7 +5045,7 @@
                     <a:lstStyle/>
                     <a:p>
                       <a:r>
-                        <a:rPr sz="950" b="1">
+                        <a:rPr sz="1400" b="1">
                           <a:solidFill>
                             <a:srgbClr val="FFFFFF"/>
                           </a:solidFill>
@@ -6313,7 +5069,7 @@
                     <a:lstStyle/>
                     <a:p>
                       <a:r>
-                        <a:rPr sz="950" b="0">
+                        <a:rPr sz="1400" b="0">
                           <a:latin typeface="Calibri"/>
                         </a:rPr>
                         <a:t>Drift engine</a:t>
@@ -6330,10 +5086,10 @@
                     <a:lstStyle/>
                     <a:p>
                       <a:r>
-                        <a:rPr sz="950" b="0">
+                        <a:rPr sz="1400" b="0">
                           <a:latin typeface="Calibri"/>
                         </a:rPr>
-                        <a:t>PSI and KS in pure Python, monotone severity roll-up, offline worker, cached hot-path read</a:t>
+                        <a:t>PSI · KS · offline worker · cached hot-path read</a:t>
                       </a:r>
                     </a:p>
                   </a:txBody>
@@ -6347,7 +5103,7 @@
                     <a:lstStyle/>
                     <a:p>
                       <a:r>
-                        <a:rPr sz="950" b="0">
+                        <a:rPr sz="1400" b="0">
                           <a:latin typeface="Calibri"/>
                         </a:rPr>
                         <a:t>Complete</a:t>
@@ -6366,7 +5122,7 @@
                     <a:lstStyle/>
                     <a:p>
                       <a:r>
-                        <a:rPr sz="950" b="0">
+                        <a:rPr sz="1400" b="0">
                           <a:latin typeface="Calibri"/>
                         </a:rPr>
                         <a:t>Policy engine</a:t>
@@ -6385,10 +5141,10 @@
                     <a:lstStyle/>
                     <a:p>
                       <a:r>
-                        <a:rPr sz="950" b="0">
+                        <a:rPr sz="1400" b="0">
                           <a:latin typeface="Calibri"/>
                         </a:rPr>
-                        <a:t>Tokeniser, recursive-descent parser, AST evaluator, veto — no eval anywhere</a:t>
+                        <a:t>Rule grammar and parser · veto</a:t>
                       </a:r>
                     </a:p>
                   </a:txBody>
@@ -6404,7 +5160,7 @@
                     <a:lstStyle/>
                     <a:p>
                       <a:r>
-                        <a:rPr sz="950" b="0">
+                        <a:rPr sz="1400" b="0">
                           <a:latin typeface="Calibri"/>
                         </a:rPr>
                         <a:t>Complete</a:t>
@@ -6425,7 +5181,7 @@
                     <a:lstStyle/>
                     <a:p>
                       <a:r>
-                        <a:rPr sz="950" b="0">
+                        <a:rPr sz="1400" b="0">
                           <a:latin typeface="Calibri"/>
                         </a:rPr>
                         <a:t>Risk engine</a:t>
@@ -6442,10 +5198,10 @@
                     <a:lstStyle/>
                     <a:p>
                       <a:r>
-                        <a:rPr sz="950" b="0">
+                        <a:rPr sz="1400" b="0">
                           <a:latin typeface="Calibri"/>
                         </a:rPr>
-                        <a:t>new — robust amount anomaly (median / MAD) + per-customer velocity, per tenant</a:t>
+                        <a:t>Amount anomaly · per-customer velocity</a:t>
                       </a:r>
                     </a:p>
                   </a:txBody>
@@ -6459,10 +5215,10 @@
                     <a:lstStyle/>
                     <a:p>
                       <a:r>
-                        <a:rPr sz="950" b="0">
+                        <a:rPr sz="1400" b="0">
                           <a:latin typeface="Calibri"/>
                         </a:rPr>
-                        <a:t>Complete</a:t>
+                        <a:t>Complete · new</a:t>
                       </a:r>
                     </a:p>
                   </a:txBody>
@@ -6478,10 +5234,10 @@
                     <a:lstStyle/>
                     <a:p>
                       <a:r>
-                        <a:rPr sz="950" b="0">
+                        <a:rPr sz="1400" b="0">
                           <a:latin typeface="Calibri"/>
                         </a:rPr>
-                        <a:t>Trust engine</a:t>
+                        <a:t>Gateway</a:t>
                       </a:r>
                     </a:p>
                   </a:txBody>
@@ -6497,10 +5253,10 @@
                     <a:lstStyle/>
                     <a:p>
                       <a:r>
-                        <a:rPr sz="950" b="0">
+                        <a:rPr sz="1400" b="0">
                           <a:latin typeface="Calibri"/>
                         </a:rPr>
-                        <a:t>Concurrent fan-out, per-engine timeouts, weighted fusion, 8-rule decision cascade</a:t>
+                        <a:t>Fan-out · fusion · 8-rule cascade · admission control</a:t>
                       </a:r>
                     </a:p>
                   </a:txBody>
@@ -6516,7 +5272,7 @@
                     <a:lstStyle/>
                     <a:p>
                       <a:r>
-                        <a:rPr sz="950" b="0">
+                        <a:rPr sz="1400" b="0">
                           <a:latin typeface="Calibri"/>
                         </a:rPr>
                         <a:t>Complete</a:t>
@@ -6537,10 +5293,10 @@
                     <a:lstStyle/>
                     <a:p>
                       <a:r>
-                        <a:rPr sz="950" b="0">
+                        <a:rPr sz="1400" b="0">
                           <a:latin typeface="Calibri"/>
                         </a:rPr>
-                        <a:t>Admission control</a:t>
+                        <a:t>Audit chain</a:t>
                       </a:r>
                     </a:p>
                   </a:txBody>
@@ -6554,10 +5310,10 @@
                     <a:lstStyle/>
                     <a:p>
                       <a:r>
-                        <a:rPr sz="950" b="0">
+                        <a:rPr sz="1400" b="0">
                           <a:latin typeface="Calibri"/>
                         </a:rPr>
-                        <a:t>new — bounded in-flight gate, 503 shed, audit write moved to a dedicated thread</a:t>
+                        <a:t>SHA-256 hash chain · verify · export</a:t>
                       </a:r>
                     </a:p>
                   </a:txBody>
@@ -6571,7 +5327,7 @@
                     <a:lstStyle/>
                     <a:p>
                       <a:r>
-                        <a:rPr sz="950" b="0">
+                        <a:rPr sz="1400" b="0">
                           <a:latin typeface="Calibri"/>
                         </a:rPr>
                         <a:t>Complete</a:t>
@@ -6590,10 +5346,10 @@
                     <a:lstStyle/>
                     <a:p>
                       <a:r>
-                        <a:rPr sz="950" b="0">
+                        <a:rPr sz="1400" b="0">
                           <a:latin typeface="Calibri"/>
                         </a:rPr>
-                        <a:t>Audit chain</a:t>
+                        <a:t>Self-healing</a:t>
                       </a:r>
                     </a:p>
                   </a:txBody>
@@ -6609,10 +5365,10 @@
                     <a:lstStyle/>
                     <a:p>
                       <a:r>
-                        <a:rPr sz="950" b="0">
+                        <a:rPr sz="1400" b="0">
                           <a:latin typeface="Calibri"/>
                         </a:rPr>
-                        <a:t>SHA-256 hash chain, race-safe append, verification and evidence export</a:t>
+                        <a:t>Diagnose · shadow test · human approval · verify</a:t>
                       </a:r>
                     </a:p>
                   </a:txBody>
@@ -6628,10 +5384,10 @@
                     <a:lstStyle/>
                     <a:p>
                       <a:r>
-                        <a:rPr sz="950" b="0">
+                        <a:rPr sz="1400" b="0">
                           <a:latin typeface="Calibri"/>
                         </a:rPr>
-                        <a:t>Complete</a:t>
+                        <a:t>Complete · new</a:t>
                       </a:r>
                     </a:p>
                   </a:txBody>
@@ -6649,10 +5405,10 @@
                     <a:lstStyle/>
                     <a:p>
                       <a:r>
-                        <a:rPr sz="950" b="0">
+                        <a:rPr sz="1400" b="0">
                           <a:latin typeface="Calibri"/>
                         </a:rPr>
-                        <a:t>Gateway + control plane</a:t>
+                        <a:t>SDK + dashboard</a:t>
                       </a:r>
                     </a:p>
                   </a:txBody>
@@ -6666,10 +5422,10 @@
                     <a:lstStyle/>
                     <a:p>
                       <a:r>
-                        <a:rPr sz="950" b="0">
+                        <a:rPr sz="1400" b="0">
                           <a:latin typeface="Calibri"/>
                         </a:rPr>
-                        <a:t>/v1/evaluate, /health, /metrics and 23 control-plane endpoints</a:t>
+                        <a:t>Python SDK · 3 live demos · console · page guides</a:t>
                       </a:r>
                     </a:p>
                   </a:txBody>
@@ -6683,7 +5439,7 @@
                     <a:lstStyle/>
                     <a:p>
                       <a:r>
-                        <a:rPr sz="950" b="0">
+                        <a:rPr sz="1400" b="0">
                           <a:latin typeface="Calibri"/>
                         </a:rPr>
                         <a:t>Complete</a:t>
@@ -6702,10 +5458,10 @@
                     <a:lstStyle/>
                     <a:p>
                       <a:r>
-                        <a:rPr sz="950" b="0">
+                        <a:rPr sz="1400" b="0">
                           <a:latin typeface="Calibri"/>
                         </a:rPr>
-                        <a:t>Python SDK</a:t>
+                        <a:t>Field study</a:t>
                       </a:r>
                     </a:p>
                   </a:txBody>
@@ -6721,10 +5477,10 @@
                     <a:lstStyle/>
                     <a:p>
                       <a:r>
-                        <a:rPr sz="950" b="0">
+                        <a:rPr sz="1400" b="0">
                           <a:latin typeface="Calibri"/>
                         </a:rPr>
-                        <a:t>@guard decorator, fail-open client — standard library only</a:t>
+                        <a:t>Pre-registered · 589,186 Lending Club loans</a:t>
                       </a:r>
                     </a:p>
                   </a:txBody>
@@ -6740,10 +5496,10 @@
                     <a:lstStyle/>
                     <a:p>
                       <a:r>
-                        <a:rPr sz="950" b="0">
+                        <a:rPr sz="1400" b="0">
                           <a:latin typeface="Calibri"/>
                         </a:rPr>
-                        <a:t>Complete</a:t>
+                        <a:t>Complete · new</a:t>
                       </a:r>
                     </a:p>
                   </a:txBody>
@@ -6761,231 +5517,7 @@
                     <a:lstStyle/>
                     <a:p>
                       <a:r>
-                        <a:rPr sz="950" b="0">
-                          <a:latin typeface="Calibri"/>
-                        </a:rPr>
-                        <a:t>Dashboard</a:t>
-                      </a:r>
-                    </a:p>
-                  </a:txBody>
-                  <a:tcPr marL="63500" marR="63500" marT="38100" marB="38100">
-                    <a:noFill/>
-                  </a:tcPr>
-                </a:tc>
-                <a:tc>
-                  <a:txBody>
-                    <a:bodyPr wrap="square"/>
-                    <a:lstStyle/>
-                    <a:p>
-                      <a:r>
-                        <a:rPr sz="950" b="0">
-                          <a:latin typeface="Calibri"/>
-                        </a:rPr>
-                        <a:t>React + TypeScript operator console: models, drift, decisions, audit</a:t>
-                      </a:r>
-                    </a:p>
-                  </a:txBody>
-                  <a:tcPr marL="63500" marR="63500" marT="38100" marB="38100">
-                    <a:noFill/>
-                  </a:tcPr>
-                </a:tc>
-                <a:tc>
-                  <a:txBody>
-                    <a:bodyPr wrap="square"/>
-                    <a:lstStyle/>
-                    <a:p>
-                      <a:r>
-                        <a:rPr sz="950" b="0">
-                          <a:latin typeface="Calibri"/>
-                        </a:rPr>
-                        <a:t>Complete</a:t>
-                      </a:r>
-                    </a:p>
-                  </a:txBody>
-                  <a:tcPr marL="63500" marR="63500" marT="38100" marB="38100">
-                    <a:noFill/>
-                  </a:tcPr>
-                </a:tc>
-              </a:tr>
-              <a:tr h="25400">
-                <a:tc>
-                  <a:txBody>
-                    <a:bodyPr wrap="square"/>
-                    <a:lstStyle/>
-                    <a:p>
-                      <a:r>
-                        <a:rPr sz="950" b="0">
-                          <a:latin typeface="Calibri"/>
-                        </a:rPr>
-                        <a:t>Replay harness</a:t>
-                      </a:r>
-                    </a:p>
-                  </a:txBody>
-                  <a:tcPr marL="63500" marR="63500" marT="38100" marB="38100">
-                    <a:solidFill>
-                      <a:srgbClr val="F4F6F9"/>
-                    </a:solidFill>
-                  </a:tcPr>
-                </a:tc>
-                <a:tc>
-                  <a:txBody>
-                    <a:bodyPr wrap="square"/>
-                    <a:lstStyle/>
-                    <a:p>
-                      <a:r>
-                        <a:rPr sz="950" b="0">
-                          <a:latin typeface="Calibri"/>
-                        </a:rPr>
-                        <a:t>Real-data drift replay; date-order bug fixed; calibrated on a planted shift</a:t>
-                      </a:r>
-                    </a:p>
-                  </a:txBody>
-                  <a:tcPr marL="63500" marR="63500" marT="38100" marB="38100">
-                    <a:solidFill>
-                      <a:srgbClr val="F4F6F9"/>
-                    </a:solidFill>
-                  </a:tcPr>
-                </a:tc>
-                <a:tc>
-                  <a:txBody>
-                    <a:bodyPr wrap="square"/>
-                    <a:lstStyle/>
-                    <a:p>
-                      <a:r>
-                        <a:rPr sz="950" b="0">
-                          <a:latin typeface="Calibri"/>
-                        </a:rPr>
-                        <a:t>Complete</a:t>
-                      </a:r>
-                    </a:p>
-                  </a:txBody>
-                  <a:tcPr marL="63500" marR="63500" marT="38100" marB="38100">
-                    <a:solidFill>
-                      <a:srgbClr val="F4F6F9"/>
-                    </a:solidFill>
-                  </a:tcPr>
-                </a:tc>
-              </a:tr>
-              <a:tr h="25400">
-                <a:tc>
-                  <a:txBody>
-                    <a:bodyPr wrap="square"/>
-                    <a:lstStyle/>
-                    <a:p>
-                      <a:r>
-                        <a:rPr sz="950" b="0">
-                          <a:latin typeface="Calibri"/>
-                        </a:rPr>
-                        <a:t>Lending Club study</a:t>
-                      </a:r>
-                    </a:p>
-                  </a:txBody>
-                  <a:tcPr marL="63500" marR="63500" marT="38100" marB="38100">
-                    <a:noFill/>
-                  </a:tcPr>
-                </a:tc>
-                <a:tc>
-                  <a:txBody>
-                    <a:bodyPr wrap="square"/>
-                    <a:lstStyle/>
-                    <a:p>
-                      <a:r>
-                        <a:rPr sz="950" b="0">
-                          <a:latin typeface="Calibri"/>
-                        </a:rPr>
-                        <a:t>new — pre-registered field study on 589,186 matured loans; results committed</a:t>
-                      </a:r>
-                    </a:p>
-                  </a:txBody>
-                  <a:tcPr marL="63500" marR="63500" marT="38100" marB="38100">
-                    <a:noFill/>
-                  </a:tcPr>
-                </a:tc>
-                <a:tc>
-                  <a:txBody>
-                    <a:bodyPr wrap="square"/>
-                    <a:lstStyle/>
-                    <a:p>
-                      <a:r>
-                        <a:rPr sz="950" b="0">
-                          <a:latin typeface="Calibri"/>
-                        </a:rPr>
-                        <a:t>Complete</a:t>
-                      </a:r>
-                    </a:p>
-                  </a:txBody>
-                  <a:tcPr marL="63500" marR="63500" marT="38100" marB="38100">
-                    <a:noFill/>
-                  </a:tcPr>
-                </a:tc>
-              </a:tr>
-              <a:tr h="25400">
-                <a:tc>
-                  <a:txBody>
-                    <a:bodyPr wrap="square"/>
-                    <a:lstStyle/>
-                    <a:p>
-                      <a:r>
-                        <a:rPr sz="950" b="0">
-                          <a:latin typeface="Calibri"/>
-                        </a:rPr>
-                        <a:t>Governed self-healing</a:t>
-                      </a:r>
-                    </a:p>
-                  </a:txBody>
-                  <a:tcPr marL="63500" marR="63500" marT="38100" marB="38100">
-                    <a:solidFill>
-                      <a:srgbClr val="F4F6F9"/>
-                    </a:solidFill>
-                  </a:tcPr>
-                </a:tc>
-                <a:tc>
-                  <a:txBody>
-                    <a:bodyPr wrap="square"/>
-                    <a:lstStyle/>
-                    <a:p>
-                      <a:r>
-                        <a:rPr sz="950" b="0">
-                          <a:latin typeface="Calibri"/>
-                        </a:rPr>
-                        <a:t>new — feed-vs-shift diagnosis, shadow-tested repairs, named approval, audited</a:t>
-                      </a:r>
-                    </a:p>
-                  </a:txBody>
-                  <a:tcPr marL="63500" marR="63500" marT="38100" marB="38100">
-                    <a:solidFill>
-                      <a:srgbClr val="F4F6F9"/>
-                    </a:solidFill>
-                  </a:tcPr>
-                </a:tc>
-                <a:tc>
-                  <a:txBody>
-                    <a:bodyPr wrap="square"/>
-                    <a:lstStyle/>
-                    <a:p>
-                      <a:r>
-                        <a:rPr sz="950" b="0">
-                          <a:latin typeface="Calibri"/>
-                        </a:rPr>
-                        <a:t>Complete</a:t>
-                      </a:r>
-                    </a:p>
-                  </a:txBody>
-                  <a:tcPr marL="63500" marR="63500" marT="38100" marB="38100">
-                    <a:solidFill>
-                      <a:srgbClr val="F4F6F9"/>
-                    </a:solidFill>
-                  </a:tcPr>
-                </a:tc>
-              </a:tr>
-              <a:tr h="25400">
-                <a:tc>
-                  <a:txBody>
-                    <a:bodyPr wrap="square"/>
-                    <a:lstStyle/>
-                    <a:p>
-                      <a:r>
-                        <a:rPr sz="950" b="0">
+                        <a:rPr sz="1400" b="0">
                           <a:latin typeface="Calibri"/>
                         </a:rPr>
                         <a:t>Versioning + retraining</a:t>
@@ -7002,10 +5534,10 @@
                     <a:lstStyle/>
                     <a:p>
                       <a:r>
-                        <a:rPr sz="950" b="0">
+                        <a:rPr sz="1400" b="0">
                           <a:latin typeface="Calibri"/>
                         </a:rPr>
-                        <a:t>Model / data version tracking and a drift-driven retrain signal</a:t>
+                        <a:t>Model / data versions · retrain request</a:t>
                       </a:r>
                     </a:p>
                   </a:txBody>
@@ -7019,7 +5551,7 @@
                     <a:lstStyle/>
                     <a:p>
                       <a:r>
-                        <a:rPr sz="950" b="0">
+                        <a:rPr sz="1400" b="0">
                           <a:latin typeface="Calibri"/>
                         </a:rPr>
                         <a:t>Final review</a:t>
@@ -7048,6 +5580,274 @@
 </p:sld>
 </file>
 
+<file path=ppt/slides/slide13.xml><?xml version="1.0" encoding="utf-8"?>
+<p:sld xmlns:a="http://schemas.openxmlformats.org/drawingml/2006/main" xmlns:r="http://schemas.openxmlformats.org/officeDocument/2006/relationships" xmlns:p="http://schemas.openxmlformats.org/presentationml/2006/main">
+  <p:cSld>
+    <p:spTree>
+      <p:nvGrpSpPr>
+        <p:cNvPr id="1" name=""/>
+        <p:cNvGrpSpPr/>
+        <p:nvPr/>
+      </p:nvGrpSpPr>
+      <p:grpSpPr>
+        <a:xfrm>
+          <a:off x="0" y="0"/>
+          <a:ext cx="0" cy="0"/>
+          <a:chOff x="0" y="0"/>
+          <a:chExt cx="0" cy="0"/>
+        </a:xfrm>
+      </p:grpSpPr>
+      <p:sp>
+        <p:nvSpPr>
+          <p:cNvPr id="2" name="Title 1">
+            <a:extLst>
+              <a:ext uri="{FF2B5EF4-FFF2-40B4-BE49-F238E27FC236}">
+                <a16:creationId xmlns:a16="http://schemas.microsoft.com/office/drawing/2014/main" id="{BD1A189D-22D1-4D1A-9E04-C6134EC51F8B}"/>
+              </a:ext>
+            </a:extLst>
+          </p:cNvPr>
+          <p:cNvSpPr>
+            <a:spLocks noGrp="1"/>
+          </p:cNvSpPr>
+          <p:nvPr>
+            <p:ph type="ctrTitle"/>
+          </p:nvPr>
+        </p:nvSpPr>
+        <p:spPr>
+          <a:xfrm>
+            <a:off x="1684868" y="203198"/>
+            <a:ext cx="9694332" cy="880535"/>
+          </a:xfrm>
+        </p:spPr>
+        <p:txBody>
+          <a:bodyPr>
+            <a:normAutofit/>
+          </a:bodyPr>
+          <a:lstStyle/>
+          <a:p>
+            <a:pPr marL="0" indent="0" algn="l">
+              <a:spcBef>
+                <a:spcPts val="0"/>
+              </a:spcBef>
+              <a:buNone/>
+            </a:pPr>
+            <a:r>
+              <a:rPr lang="en-US" sz="3200" b="1" i="0" dirty="0">
+                <a:latin typeface="Calibri" panose="020F0502020204030204" pitchFamily="34" charset="0"/>
+                <a:ea typeface="Calibri" panose="020F0502020204030204" pitchFamily="34" charset="0"/>
+                <a:cs typeface="Calibri" panose="020F0502020204030204" pitchFamily="34" charset="0"/>
+              </a:rPr>
+              <a:t>Results — Field Study on Real Loans</a:t>
+            </a:r>
+          </a:p>
+        </p:txBody>
+      </p:sp>
+      <p:sp>
+        <p:nvSpPr>
+          <p:cNvPr id="3" name="Subtitle 2">
+            <a:extLst>
+              <a:ext uri="{FF2B5EF4-FFF2-40B4-BE49-F238E27FC236}">
+                <a16:creationId xmlns:a16="http://schemas.microsoft.com/office/drawing/2014/main" id="{255E737C-85F2-47BC-AD38-AD8B001473B7}"/>
+              </a:ext>
+            </a:extLst>
+          </p:cNvPr>
+          <p:cNvSpPr>
+            <a:spLocks noGrp="1"/>
+          </p:cNvSpPr>
+          <p:nvPr>
+            <p:ph type="subTitle" idx="1"/>
+          </p:nvPr>
+        </p:nvSpPr>
+        <p:spPr>
+          <a:xfrm>
+            <a:off x="1684867" y="1574800"/>
+            <a:ext cx="9694333" cy="4614333"/>
+          </a:xfrm>
+        </p:spPr>
+        <p:txBody>
+          <a:bodyPr>
+            <a:normAutofit/>
+          </a:bodyPr>
+          <a:lstStyle/>
+          <a:p>
+            <a:pPr marL="0" indent="0" algn="l">
+              <a:spcBef>
+                <a:spcPts val="0"/>
+              </a:spcBef>
+              <a:buNone/>
+            </a:pPr>
+            <a:r>
+              <a:rPr lang="en-US" sz="1500" b="0" i="1" dirty="0">
+                <a:latin typeface="Calibri" panose="020F0502020204030204" pitchFamily="34" charset="0"/>
+                <a:ea typeface="Calibri" panose="020F0502020204030204" pitchFamily="34" charset="0"/>
+                <a:cs typeface="Calibri" panose="020F0502020204030204" pitchFamily="34" charset="0"/>
+              </a:rPr>
+              <a:t>Pre-registered. Drift gating lost to random review — so the next gate ranks by risk.</a:t>
+            </a:r>
+          </a:p>
+        </p:txBody>
+      </p:sp>
+      <p:pic>
+        <p:nvPicPr>
+          <p:cNvPr id="5" name="Graphic 4">
+            <a:extLst>
+              <a:ext uri="{FF2B5EF4-FFF2-40B4-BE49-F238E27FC236}">
+                <a16:creationId xmlns:a16="http://schemas.microsoft.com/office/drawing/2014/main" id="{E7125167-8301-4D88-B79A-A8DA3C19E0D6}"/>
+              </a:ext>
+            </a:extLst>
+          </p:cNvPr>
+          <p:cNvPicPr>
+            <a:picLocks noChangeAspect="1"/>
+          </p:cNvPicPr>
+          <p:nvPr/>
+        </p:nvPicPr>
+        <p:blipFill>
+          <a:blip r:embed="rId2">
+            <a:extLst>
+              <a:ext uri="{96DAC541-7B7A-43D3-8B79-37D633B846F1}">
+                <asvg:svgBlip xmlns:asvg="http://schemas.microsoft.com/office/drawing/2016/SVG/main" r:embed="rId3"/>
+              </a:ext>
+            </a:extLst>
+          </a:blip>
+          <a:stretch>
+            <a:fillRect/>
+          </a:stretch>
+        </p:blipFill>
+        <p:spPr>
+          <a:xfrm>
+            <a:off x="127001" y="86782"/>
+            <a:ext cx="1159932" cy="1159932"/>
+          </a:xfrm>
+          <a:prstGeom prst="rect">
+            <a:avLst/>
+          </a:prstGeom>
+        </p:spPr>
+      </p:pic>
+      <p:sp>
+        <p:nvSpPr>
+          <p:cNvPr id="4" name="Date Placeholder 3">
+            <a:extLst>
+              <a:ext uri="{FF2B5EF4-FFF2-40B4-BE49-F238E27FC236}">
+                <a16:creationId xmlns:a16="http://schemas.microsoft.com/office/drawing/2014/main" id="{35032362-C5A5-4DBF-AD79-DE6FB7439999}"/>
+              </a:ext>
+            </a:extLst>
+          </p:cNvPr>
+          <p:cNvSpPr>
+            <a:spLocks noGrp="1"/>
+          </p:cNvSpPr>
+          <p:nvPr>
+            <p:ph type="dt" sz="half" idx="10"/>
+          </p:nvPr>
+        </p:nvSpPr>
+        <p:spPr/>
+        <p:txBody>
+          <a:bodyPr/>
+          <a:lstStyle/>
+          <a:p>
+            <a:fld id="{64C96E34-94C0-49E4-A53B-4A44141FD3C8}" type="datetime3">
+              <a:rPr lang="en-US" smtClean="0"/>
+              <a:t>17 October 2026</a:t>
+            </a:fld>
+            <a:endParaRPr lang="en-US" dirty="0"/>
+          </a:p>
+        </p:txBody>
+      </p:sp>
+      <p:sp>
+        <p:nvSpPr>
+          <p:cNvPr id="6" name="Slide Number Placeholder 5">
+            <a:extLst>
+              <a:ext uri="{FF2B5EF4-FFF2-40B4-BE49-F238E27FC236}">
+                <a16:creationId xmlns:a16="http://schemas.microsoft.com/office/drawing/2014/main" id="{115AAB64-5B51-4B5A-B69E-D96362CE6E74}"/>
+              </a:ext>
+            </a:extLst>
+          </p:cNvPr>
+          <p:cNvSpPr>
+            <a:spLocks noGrp="1"/>
+          </p:cNvSpPr>
+          <p:nvPr>
+            <p:ph type="sldNum" sz="quarter" idx="12"/>
+          </p:nvPr>
+        </p:nvSpPr>
+        <p:spPr/>
+        <p:txBody>
+          <a:bodyPr/>
+          <a:lstStyle/>
+          <a:p>
+            <a:fld id="{D57F1E4F-1CFF-5643-939E-217C01CDF565}" type="slidenum">
+              <a:rPr lang="en-US" smtClean="0"/>
+              <a:pPr/>
+              <a:t>3</a:t>
+            </a:fld>
+            <a:endParaRPr lang="en-US" dirty="0"/>
+          </a:p>
+        </p:txBody>
+      </p:sp>
+      <p:sp>
+        <p:nvSpPr>
+          <p:cNvPr id="7" name="Footer Placeholder 6">
+            <a:extLst>
+              <a:ext uri="{FF2B5EF4-FFF2-40B4-BE49-F238E27FC236}">
+                <a16:creationId xmlns:a16="http://schemas.microsoft.com/office/drawing/2014/main" id="{8683C6DF-27D9-468B-A1AB-FE568488FE57}"/>
+              </a:ext>
+            </a:extLst>
+          </p:cNvPr>
+          <p:cNvSpPr>
+            <a:spLocks noGrp="1"/>
+          </p:cNvSpPr>
+          <p:nvPr>
+            <p:ph type="ftr" sz="quarter" idx="11"/>
+          </p:nvPr>
+        </p:nvSpPr>
+        <p:spPr/>
+        <p:txBody>
+          <a:bodyPr/>
+          <a:lstStyle/>
+          <a:p>
+            <a:r>
+              <a:rPr lang="en-US"/>
+              <a:t>Dept of AI &amp; DS</a:t>
+            </a:r>
+            <a:endParaRPr lang="en-US" dirty="0"/>
+          </a:p>
+        </p:txBody>
+      </p:sp>
+      <p:pic>
+        <p:nvPicPr>
+          <p:cNvPr id="8" name="Picture 7" descr="gating_results.png"/>
+          <p:cNvPicPr>
+            <a:picLocks noChangeAspect="1"/>
+          </p:cNvPicPr>
+          <p:nvPr/>
+        </p:nvPicPr>
+        <p:blipFill>
+          <a:blip r:embed="rId4"/>
+          <a:stretch>
+            <a:fillRect/>
+          </a:stretch>
+        </p:blipFill>
+        <p:spPr>
+          <a:xfrm>
+            <a:off x="1066647" y="2194560"/>
+            <a:ext cx="10058400" cy="3017520"/>
+          </a:xfrm>
+          <a:prstGeom prst="rect">
+            <a:avLst/>
+          </a:prstGeom>
+        </p:spPr>
+      </p:pic>
+    </p:spTree>
+    <p:extLst>
+      <p:ext uri="{BB962C8B-B14F-4D97-AF65-F5344CB8AC3E}">
+        <p14:creationId xmlns:p14="http://schemas.microsoft.com/office/powerpoint/2010/main" val="3231882420"/>
+      </p:ext>
+    </p:extLst>
+  </p:cSld>
+  <p:clrMapOvr>
+    <a:masterClrMapping/>
+  </p:clrMapOvr>
+</p:sld>
+</file>
+
 <file path=ppt/slides/slide14.xml><?xml version="1.0" encoding="utf-8"?>
 <p:sld xmlns:a="http://schemas.openxmlformats.org/drawingml/2006/main" xmlns:r="http://schemas.openxmlformats.org/officeDocument/2006/relationships" xmlns:p="http://schemas.openxmlformats.org/presentationml/2006/main">
   <p:cSld>
@@ -7105,7 +5905,7 @@
                 <a:ea typeface="Calibri" panose="020F0502020204030204" pitchFamily="34" charset="0"/>
                 <a:cs typeface="Calibri" panose="020F0502020204030204" pitchFamily="34" charset="0"/>
               </a:rPr>
-              <a:t>Implementation — Risk Engine (new)</a:t>
+              <a:t>Governed Self-Healing — and Beyond Lending</a:t>
             </a:r>
           </a:p>
         </p:txBody>
@@ -7145,12 +5945,12 @@
               <a:buNone/>
             </a:pPr>
             <a:r>
-              <a:rPr lang="en-US" sz="1400" b="0" i="0" dirty="0">
+              <a:rPr lang="en-US" sz="1500" b="0" i="1" dirty="0">
                 <a:latin typeface="Calibri" panose="020F0502020204030204" pitchFamily="34" charset="0"/>
                 <a:ea typeface="Calibri" panose="020F0502020204030204" pitchFamily="34" charset="0"/>
                 <a:cs typeface="Calibri" panose="020F0502020204030204" pitchFamily="34" charset="0"/>
               </a:rPr>
-              <a:t>Drift asks whether the model still fits. Policy asks whether the action is allowed. Risk asks whether this one request is unusual — and abstains rather than guess when it cannot tell.</a:t>
+              <a:t>Same engine, any domain: AI agents · pricing · triage · hiring · claims.</a:t>
             </a:r>
           </a:p>
         </p:txBody>
@@ -7279,342 +6079,30 @@
           </a:p>
         </p:txBody>
       </p:sp>
-      <p:graphicFrame>
-        <p:nvGraphicFramePr>
-          <p:cNvPr id="8" name="Table 7"/>
-          <p:cNvGraphicFramePr>
-            <a:graphicFrameLocks noGrp="1"/>
-          </p:cNvGraphicFramePr>
+      <p:pic>
+        <p:nvPicPr>
+          <p:cNvPr id="8" name="Picture 7" descr="self_healing_loop.png"/>
+          <p:cNvPicPr>
+            <a:picLocks noChangeAspect="1"/>
+          </p:cNvPicPr>
           <p:nvPr/>
-        </p:nvGraphicFramePr>
-        <p:xfrm>
-          <a:off x="960120" y="2514600"/>
-          <a:ext cx="10241279" cy="101600"/>
-        </p:xfrm>
-        <a:graphic>
-          <a:graphicData uri="http://schemas.openxmlformats.org/drawingml/2006/table">
-            <a:tbl>
-              <a:tblPr firstRow="1">
-                <a:tableStyleId>{5C22544A-7EE6-4342-B048-85BDC9FD1C3A}</a:tableStyleId>
-              </a:tblPr>
-              <a:tblGrid>
-                <a:gridCol w="1228953"/>
-                <a:gridCol w="2457907"/>
-                <a:gridCol w="4096512"/>
-                <a:gridCol w="2457907"/>
-              </a:tblGrid>
-              <a:tr h="25400">
-                <a:tc>
-                  <a:txBody>
-                    <a:bodyPr wrap="square"/>
-                    <a:lstStyle/>
-                    <a:p>
-                      <a:r>
-                        <a:rPr sz="1100" b="1">
-                          <a:solidFill>
-                            <a:srgbClr val="FFFFFF"/>
-                          </a:solidFill>
-                          <a:latin typeface="Calibri"/>
-                        </a:rPr>
-                        <a:t>Component</a:t>
-                      </a:r>
-                    </a:p>
-                  </a:txBody>
-                  <a:tcPr marL="63500" marR="63500" marT="38100" marB="38100">
-                    <a:solidFill>
-                      <a:srgbClr val="1F5CA8"/>
-                    </a:solidFill>
-                  </a:tcPr>
-                </a:tc>
-                <a:tc>
-                  <a:txBody>
-                    <a:bodyPr wrap="square"/>
-                    <a:lstStyle/>
-                    <a:p>
-                      <a:r>
-                        <a:rPr sz="1100" b="1">
-                          <a:solidFill>
-                            <a:srgbClr val="FFFFFF"/>
-                          </a:solidFill>
-                          <a:latin typeface="Calibri"/>
-                        </a:rPr>
-                        <a:t>What it measures</a:t>
-                      </a:r>
-                    </a:p>
-                  </a:txBody>
-                  <a:tcPr marL="63500" marR="63500" marT="38100" marB="38100">
-                    <a:solidFill>
-                      <a:srgbClr val="1F5CA8"/>
-                    </a:solidFill>
-                  </a:tcPr>
-                </a:tc>
-                <a:tc>
-                  <a:txBody>
-                    <a:bodyPr wrap="square"/>
-                    <a:lstStyle/>
-                    <a:p>
-                      <a:r>
-                        <a:rPr sz="1100" b="1">
-                          <a:solidFill>
-                            <a:srgbClr val="FFFFFF"/>
-                          </a:solidFill>
-                          <a:latin typeface="Calibri"/>
-                        </a:rPr>
-                        <a:t>How</a:t>
-                      </a:r>
-                    </a:p>
-                  </a:txBody>
-                  <a:tcPr marL="63500" marR="63500" marT="38100" marB="38100">
-                    <a:solidFill>
-                      <a:srgbClr val="1F5CA8"/>
-                    </a:solidFill>
-                  </a:tcPr>
-                </a:tc>
-                <a:tc>
-                  <a:txBody>
-                    <a:bodyPr wrap="square"/>
-                    <a:lstStyle/>
-                    <a:p>
-                      <a:r>
-                        <a:rPr sz="1100" b="1">
-                          <a:solidFill>
-                            <a:srgbClr val="FFFFFF"/>
-                          </a:solidFill>
-                          <a:latin typeface="Calibri"/>
-                        </a:rPr>
-                        <a:t>When it abstains</a:t>
-                      </a:r>
-                    </a:p>
-                  </a:txBody>
-                  <a:tcPr marL="63500" marR="63500" marT="38100" marB="38100">
-                    <a:solidFill>
-                      <a:srgbClr val="1F5CA8"/>
-                    </a:solidFill>
-                  </a:tcPr>
-                </a:tc>
-              </a:tr>
-              <a:tr h="25400">
-                <a:tc>
-                  <a:txBody>
-                    <a:bodyPr wrap="square"/>
-                    <a:lstStyle/>
-                    <a:p>
-                      <a:r>
-                        <a:rPr sz="1100" b="0">
-                          <a:latin typeface="Calibri"/>
-                        </a:rPr>
-                        <a:t>Amount</a:t>
-                      </a:r>
-                    </a:p>
-                  </a:txBody>
-                  <a:tcPr marL="63500" marR="63500" marT="38100" marB="38100">
-                    <a:noFill/>
-                  </a:tcPr>
-                </a:tc>
-                <a:tc>
-                  <a:txBody>
-                    <a:bodyPr wrap="square"/>
-                    <a:lstStyle/>
-                    <a:p>
-                      <a:r>
-                        <a:rPr sz="1100" b="0">
-                          <a:latin typeface="Calibri"/>
-                        </a:rPr>
-                        <a:t>Is this amount unusual for this tenant and model?</a:t>
-                      </a:r>
-                    </a:p>
-                  </a:txBody>
-                  <a:tcPr marL="63500" marR="63500" marT="38100" marB="38100">
-                    <a:noFill/>
-                  </a:tcPr>
-                </a:tc>
-                <a:tc>
-                  <a:txBody>
-                    <a:bodyPr wrap="square"/>
-                    <a:lstStyle/>
-                    <a:p>
-                      <a:r>
-                        <a:rPr sz="1100" b="0">
-                          <a:latin typeface="Calibri"/>
-                        </a:rPr>
-                        <a:t>Robust z-score against the last 2,000 amounts — median and MAD, so outliers cannot drag the baseline. No risk at z ≤ 3, full risk at z ≥ 10</a:t>
-                      </a:r>
-                    </a:p>
-                  </a:txBody>
-                  <a:tcPr marL="63500" marR="63500" marT="38100" marB="38100">
-                    <a:noFill/>
-                  </a:tcPr>
-                </a:tc>
-                <a:tc>
-                  <a:txBody>
-                    <a:bodyPr wrap="square"/>
-                    <a:lstStyle/>
-                    <a:p>
-                      <a:r>
-                        <a:rPr sz="1100" b="0">
-                          <a:latin typeface="Calibri"/>
-                        </a:rPr>
-                        <a:t>Fewer than 50 amounts seen: “normal” is not yet known</a:t>
-                      </a:r>
-                    </a:p>
-                  </a:txBody>
-                  <a:tcPr marL="63500" marR="63500" marT="38100" marB="38100">
-                    <a:noFill/>
-                  </a:tcPr>
-                </a:tc>
-              </a:tr>
-              <a:tr h="25400">
-                <a:tc>
-                  <a:txBody>
-                    <a:bodyPr wrap="square"/>
-                    <a:lstStyle/>
-                    <a:p>
-                      <a:r>
-                        <a:rPr sz="1100" b="0">
-                          <a:latin typeface="Calibri"/>
-                        </a:rPr>
-                        <a:t>Velocity</a:t>
-                      </a:r>
-                    </a:p>
-                  </a:txBody>
-                  <a:tcPr marL="63500" marR="63500" marT="38100" marB="38100">
-                    <a:solidFill>
-                      <a:srgbClr val="F4F6F9"/>
-                    </a:solidFill>
-                  </a:tcPr>
-                </a:tc>
-                <a:tc>
-                  <a:txBody>
-                    <a:bodyPr wrap="square"/>
-                    <a:lstStyle/>
-                    <a:p>
-                      <a:r>
-                        <a:rPr sz="1100" b="0">
-                          <a:latin typeface="Calibri"/>
-                        </a:rPr>
-                        <a:t>Is one customer firing requests in a burst?</a:t>
-                      </a:r>
-                    </a:p>
-                  </a:txBody>
-                  <a:tcPr marL="63500" marR="63500" marT="38100" marB="38100">
-                    <a:solidFill>
-                      <a:srgbClr val="F4F6F9"/>
-                    </a:solidFill>
-                  </a:tcPr>
-                </a:tc>
-                <a:tc>
-                  <a:txBody>
-                    <a:bodyPr wrap="square"/>
-                    <a:lstStyle/>
-                    <a:p>
-                      <a:r>
-                        <a:rPr sz="1100" b="0">
-                          <a:latin typeface="Calibri"/>
-                        </a:rPr>
-                        <a:t>Requests by the same customer_id in the last 60 s. No risk at ≤ 3, full risk at ≥ 10</a:t>
-                      </a:r>
-                    </a:p>
-                  </a:txBody>
-                  <a:tcPr marL="63500" marR="63500" marT="38100" marB="38100">
-                    <a:solidFill>
-                      <a:srgbClr val="F4F6F9"/>
-                    </a:solidFill>
-                  </a:tcPr>
-                </a:tc>
-                <a:tc>
-                  <a:txBody>
-                    <a:bodyPr wrap="square"/>
-                    <a:lstStyle/>
-                    <a:p>
-                      <a:r>
-                        <a:rPr sz="1100" b="0">
-                          <a:latin typeface="Calibri"/>
-                        </a:rPr>
-                        <a:t>No customer / account / subject id in the request</a:t>
-                      </a:r>
-                    </a:p>
-                  </a:txBody>
-                  <a:tcPr marL="63500" marR="63500" marT="38100" marB="38100">
-                    <a:solidFill>
-                      <a:srgbClr val="F4F6F9"/>
-                    </a:solidFill>
-                  </a:tcPr>
-                </a:tc>
-              </a:tr>
-              <a:tr h="25400">
-                <a:tc>
-                  <a:txBody>
-                    <a:bodyPr wrap="square"/>
-                    <a:lstStyle/>
-                    <a:p>
-                      <a:r>
-                        <a:rPr sz="1100" b="0">
-                          <a:latin typeface="Calibri"/>
-                        </a:rPr>
-                        <a:t>Combined</a:t>
-                      </a:r>
-                    </a:p>
-                  </a:txBody>
-                  <a:tcPr marL="63500" marR="63500" marT="38100" marB="38100">
-                    <a:noFill/>
-                  </a:tcPr>
-                </a:tc>
-                <a:tc>
-                  <a:txBody>
-                    <a:bodyPr wrap="square"/>
-                    <a:lstStyle/>
-                    <a:p>
-                      <a:r>
-                        <a:rPr sz="1100" b="0">
-                          <a:latin typeface="Calibri"/>
-                        </a:rPr>
-                        <a:t>Engine score = 1 − worst component</a:t>
-                      </a:r>
-                    </a:p>
-                  </a:txBody>
-                  <a:tcPr marL="63500" marR="63500" marT="38100" marB="38100">
-                    <a:noFill/>
-                  </a:tcPr>
-                </a:tc>
-                <a:tc>
-                  <a:txBody>
-                    <a:bodyPr wrap="square"/>
-                    <a:lstStyle/>
-                    <a:p>
-                      <a:r>
-                        <a:rPr sz="1100" b="0">
-                          <a:latin typeface="Calibri"/>
-                        </a:rPr>
-                        <a:t>Worst, not average: one red flag is enough</a:t>
-                      </a:r>
-                    </a:p>
-                  </a:txBody>
-                  <a:tcPr marL="63500" marR="63500" marT="38100" marB="38100">
-                    <a:noFill/>
-                  </a:tcPr>
-                </a:tc>
-                <a:tc>
-                  <a:txBody>
-                    <a:bodyPr wrap="square"/>
-                    <a:lstStyle/>
-                    <a:p>
-                      <a:r>
-                        <a:rPr sz="1100" b="0">
-                          <a:latin typeface="Calibri"/>
-                        </a:rPr>
-                        <a:t>No component can vote → degraded, excluded from fusion</a:t>
-                      </a:r>
-                    </a:p>
-                  </a:txBody>
-                  <a:tcPr marL="63500" marR="63500" marT="38100" marB="38100">
-                    <a:noFill/>
-                  </a:tcPr>
-                </a:tc>
-              </a:tr>
-            </a:tbl>
-          </a:graphicData>
-        </a:graphic>
-      </p:graphicFrame>
+        </p:nvPicPr>
+        <p:blipFill>
+          <a:blip r:embed="rId4"/>
+          <a:stretch>
+            <a:fillRect/>
+          </a:stretch>
+        </p:blipFill>
+        <p:spPr>
+          <a:xfrm>
+            <a:off x="1066647" y="2560320"/>
+            <a:ext cx="10058400" cy="2011680"/>
+          </a:xfrm>
+          <a:prstGeom prst="rect">
+            <a:avLst/>
+          </a:prstGeom>
+        </p:spPr>
+      </p:pic>
     </p:spTree>
     <p:extLst>
       <p:ext uri="{BB962C8B-B14F-4D97-AF65-F5344CB8AC3E}">
@@ -7685,7 +6173,7 @@
                 <a:ea typeface="Calibri" panose="020F0502020204030204" pitchFamily="34" charset="0"/>
                 <a:cs typeface="Calibri" panose="020F0502020204030204" pitchFamily="34" charset="0"/>
               </a:rPr>
-              <a:t>Implementation — Admission Control (new)</a:t>
+              <a:t>Conclusion and Work Plan</a:t>
             </a:r>
           </a:p>
         </p:txBody>
@@ -7718,19 +6206,54 @@
           </a:bodyPr>
           <a:lstStyle/>
           <a:p>
-            <a:pPr marL="0" indent="0" algn="l">
+            <a:pPr marL="285750" indent="-285750" algn="l">
               <a:spcBef>
                 <a:spcPts val="0"/>
               </a:spcBef>
-              <a:buNone/>
+              <a:buFont typeface="Arial" panose="020B0604020202020204" pitchFamily="34" charset="0"/>
+              <a:buChar char="•"/>
             </a:pPr>
             <a:r>
-              <a:rPr lang="en-US" sz="1400" b="0" i="0" dirty="0">
+              <a:rPr lang="en-US" sz="1600" b="0" i="0" dirty="0">
                 <a:latin typeface="Calibri" panose="020F0502020204030204" pitchFamily="34" charset="0"/>
                 <a:ea typeface="Calibri" panose="020F0502020204030204" pitchFamily="34" charset="0"/>
                 <a:cs typeface="Calibri" panose="020F0502020204030204" pitchFamily="34" charset="0"/>
               </a:rPr>
-              <a:t>At Review-1, overload made the gateway queue, collapse and change its answers. It now refuses what it cannot serve, and under overload zero verdicts change (was up to 985 per phase).</a:t>
+              <a:t>Custos gates any model-driven action — decides, explains, records, heals.</a:t>
+            </a:r>
+          </a:p>
+          <a:p>
+            <a:pPr marL="285750" indent="-285750" algn="l">
+              <a:spcBef>
+                <a:spcPts val="120"/>
+              </a:spcBef>
+              <a:buFont typeface="Arial" panose="020B0604020202020204" pitchFamily="34" charset="0"/>
+              <a:buChar char="•"/>
+            </a:pPr>
+            <a:r>
+              <a:rPr lang="en-US" sz="1600" b="0" i="0" dirty="0">
+                <a:latin typeface="Calibri" panose="020F0502020204030204" pitchFamily="34" charset="0"/>
+                <a:ea typeface="Calibri" panose="020F0502020204030204" pitchFamily="34" charset="0"/>
+                <a:cs typeface="Calibri" panose="020F0502020204030204" pitchFamily="34" charset="0"/>
+              </a:rPr>
+              <a:t>Next: risk-ranked review · a second dataset · scale-out on PostgreSQL.</a:t>
+            </a:r>
+          </a:p>
+          <a:p>
+            <a:pPr marL="285750" indent="-285750" algn="l">
+              <a:spcBef>
+                <a:spcPts val="120"/>
+              </a:spcBef>
+              <a:buFont typeface="Arial" panose="020B0604020202020204" pitchFamily="34" charset="0"/>
+              <a:buChar char="•"/>
+            </a:pPr>
+            <a:r>
+              <a:rPr lang="en-US" sz="1600" b="0" i="0" dirty="0">
+                <a:latin typeface="Calibri" panose="020F0502020204030204" pitchFamily="34" charset="0"/>
+                <a:ea typeface="Calibri" panose="020F0502020204030204" pitchFamily="34" charset="0"/>
+                <a:cs typeface="Calibri" panose="020F0502020204030204" pitchFamily="34" charset="0"/>
+              </a:rPr>
+              <a:t>Now: a live demo — three scenarios, two domains.</a:t>
             </a:r>
           </a:p>
         </p:txBody>
@@ -7824,7 +6347,7 @@
             <a:fld id="{D57F1E4F-1CFF-5643-939E-217C01CDF565}" type="slidenum">
               <a:rPr lang="en-US" smtClean="0"/>
               <a:pPr/>
-              <a:t>3</a:t>
+              <a:t>9</a:t>
             </a:fld>
             <a:endParaRPr lang="en-US" dirty="0"/>
           </a:p>
@@ -7859,1150 +6382,270 @@
           </a:p>
         </p:txBody>
       </p:sp>
-      <p:pic>
-        <p:nvPicPr>
-          <p:cNvPr id="8" name="Picture 7" descr="load_before_after.png"/>
-          <p:cNvPicPr>
-            <a:picLocks noChangeAspect="1"/>
-          </p:cNvPicPr>
+      <p:graphicFrame>
+        <p:nvGraphicFramePr>
+          <p:cNvPr id="8" name="Table 7"/>
+          <p:cNvGraphicFramePr>
+            <a:graphicFrameLocks noGrp="1"/>
+          </p:cNvGraphicFramePr>
           <p:nvPr/>
-        </p:nvPicPr>
-        <p:blipFill>
-          <a:blip r:embed="rId4"/>
-          <a:stretch>
-            <a:fillRect/>
-          </a:stretch>
-        </p:blipFill>
-        <p:spPr>
-          <a:xfrm>
-            <a:off x="1066647" y="2514600"/>
-            <a:ext cx="10058400" cy="3108960"/>
-          </a:xfrm>
-          <a:prstGeom prst="rect">
-            <a:avLst/>
-          </a:prstGeom>
-        </p:spPr>
-      </p:pic>
+        </p:nvGraphicFramePr>
+        <p:xfrm>
+          <a:off x="960120" y="3291840"/>
+          <a:ext cx="10241279" cy="101600"/>
+        </p:xfrm>
+        <a:graphic>
+          <a:graphicData uri="http://schemas.openxmlformats.org/drawingml/2006/table">
+            <a:tbl>
+              <a:tblPr firstRow="1">
+                <a:tableStyleId>{5C22544A-7EE6-4342-B048-85BDC9FD1C3A}</a:tableStyleId>
+              </a:tblPr>
+              <a:tblGrid>
+                <a:gridCol w="2048256"/>
+                <a:gridCol w="1638604"/>
+                <a:gridCol w="6554419"/>
+              </a:tblGrid>
+              <a:tr h="25400">
+                <a:tc>
+                  <a:txBody>
+                    <a:bodyPr wrap="square"/>
+                    <a:lstStyle/>
+                    <a:p>
+                      <a:r>
+                        <a:rPr sz="1300" b="1">
+                          <a:solidFill>
+                            <a:srgbClr val="FFFFFF"/>
+                          </a:solidFill>
+                          <a:latin typeface="Calibri"/>
+                        </a:rPr>
+                        <a:t>Team member</a:t>
+                      </a:r>
+                    </a:p>
+                  </a:txBody>
+                  <a:tcPr marL="63500" marR="63500" marT="38100" marB="38100">
+                    <a:solidFill>
+                      <a:srgbClr val="1F5CA8"/>
+                    </a:solidFill>
+                  </a:tcPr>
+                </a:tc>
+                <a:tc>
+                  <a:txBody>
+                    <a:bodyPr wrap="square"/>
+                    <a:lstStyle/>
+                    <a:p>
+                      <a:r>
+                        <a:rPr sz="1300" b="1">
+                          <a:solidFill>
+                            <a:srgbClr val="FFFFFF"/>
+                          </a:solidFill>
+                          <a:latin typeface="Calibri"/>
+                        </a:rPr>
+                        <a:t>USN</a:t>
+                      </a:r>
+                    </a:p>
+                  </a:txBody>
+                  <a:tcPr marL="63500" marR="63500" marT="38100" marB="38100">
+                    <a:solidFill>
+                      <a:srgbClr val="1F5CA8"/>
+                    </a:solidFill>
+                  </a:tcPr>
+                </a:tc>
+                <a:tc>
+                  <a:txBody>
+                    <a:bodyPr wrap="square"/>
+                    <a:lstStyle/>
+                    <a:p>
+                      <a:r>
+                        <a:rPr sz="1300" b="1">
+                          <a:solidFill>
+                            <a:srgbClr val="FFFFFF"/>
+                          </a:solidFill>
+                          <a:latin typeface="Calibri"/>
+                        </a:rPr>
+                        <a:t>Modules owned (Review-1)</a:t>
+                      </a:r>
+                    </a:p>
+                  </a:txBody>
+                  <a:tcPr marL="63500" marR="63500" marT="38100" marB="38100">
+                    <a:solidFill>
+                      <a:srgbClr val="1F5CA8"/>
+                    </a:solidFill>
+                  </a:tcPr>
+                </a:tc>
+              </a:tr>
+              <a:tr h="25400">
+                <a:tc>
+                  <a:txBody>
+                    <a:bodyPr wrap="square"/>
+                    <a:lstStyle/>
+                    <a:p>
+                      <a:r>
+                        <a:rPr sz="1300" b="0">
+                          <a:latin typeface="Calibri"/>
+                        </a:rPr>
+                        <a:t>AYUSH PANDEY</a:t>
+                      </a:r>
+                    </a:p>
+                  </a:txBody>
+                  <a:tcPr marL="63500" marR="63500" marT="38100" marB="38100">
+                    <a:noFill/>
+                  </a:tcPr>
+                </a:tc>
+                <a:tc>
+                  <a:txBody>
+                    <a:bodyPr wrap="square"/>
+                    <a:lstStyle/>
+                    <a:p>
+                      <a:r>
+                        <a:rPr sz="1300" b="0">
+                          <a:latin typeface="Calibri"/>
+                        </a:rPr>
+                        <a:t>1BM23AD074</a:t>
+                      </a:r>
+                    </a:p>
+                  </a:txBody>
+                  <a:tcPr marL="63500" marR="63500" marT="38100" marB="38100">
+                    <a:noFill/>
+                  </a:tcPr>
+                </a:tc>
+                <a:tc>
+                  <a:txBody>
+                    <a:bodyPr wrap="square"/>
+                    <a:lstStyle/>
+                    <a:p>
+                      <a:r>
+                        <a:rPr sz="1300" b="0">
+                          <a:latin typeface="Calibri"/>
+                        </a:rPr>
+                        <a:t>Architecture · drift engine · trust fusion and decision logic</a:t>
+                      </a:r>
+                    </a:p>
+                  </a:txBody>
+                  <a:tcPr marL="63500" marR="63500" marT="38100" marB="38100">
+                    <a:noFill/>
+                  </a:tcPr>
+                </a:tc>
+              </a:tr>
+              <a:tr h="25400">
+                <a:tc>
+                  <a:txBody>
+                    <a:bodyPr wrap="square"/>
+                    <a:lstStyle/>
+                    <a:p>
+                      <a:r>
+                        <a:rPr sz="1300" b="0">
+                          <a:latin typeface="Calibri"/>
+                        </a:rPr>
+                        <a:t>VIVEK BOORA</a:t>
+                      </a:r>
+                    </a:p>
+                  </a:txBody>
+                  <a:tcPr marL="63500" marR="63500" marT="38100" marB="38100">
+                    <a:solidFill>
+                      <a:srgbClr val="F4F6F9"/>
+                    </a:solidFill>
+                  </a:tcPr>
+                </a:tc>
+                <a:tc>
+                  <a:txBody>
+                    <a:bodyPr wrap="square"/>
+                    <a:lstStyle/>
+                    <a:p>
+                      <a:r>
+                        <a:rPr sz="1300" b="0">
+                          <a:latin typeface="Calibri"/>
+                        </a:rPr>
+                        <a:t>1BM23AD073</a:t>
+                      </a:r>
+                    </a:p>
+                  </a:txBody>
+                  <a:tcPr marL="63500" marR="63500" marT="38100" marB="38100">
+                    <a:solidFill>
+                      <a:srgbClr val="F4F6F9"/>
+                    </a:solidFill>
+                  </a:tcPr>
+                </a:tc>
+                <a:tc>
+                  <a:txBody>
+                    <a:bodyPr wrap="square"/>
+                    <a:lstStyle/>
+                    <a:p>
+                      <a:r>
+                        <a:rPr sz="1300" b="0">
+                          <a:latin typeface="Calibri"/>
+                        </a:rPr>
+                        <a:t>Gateway and control plane · policy engine · audit chain</a:t>
+                      </a:r>
+                    </a:p>
+                  </a:txBody>
+                  <a:tcPr marL="63500" marR="63500" marT="38100" marB="38100">
+                    <a:solidFill>
+                      <a:srgbClr val="F4F6F9"/>
+                    </a:solidFill>
+                  </a:tcPr>
+                </a:tc>
+              </a:tr>
+              <a:tr h="25400">
+                <a:tc>
+                  <a:txBody>
+                    <a:bodyPr wrap="square"/>
+                    <a:lstStyle/>
+                    <a:p>
+                      <a:r>
+                        <a:rPr sz="1300" b="0">
+                          <a:latin typeface="Calibri"/>
+                        </a:rPr>
+                        <a:t>NITIN</a:t>
+                      </a:r>
+                    </a:p>
+                  </a:txBody>
+                  <a:tcPr marL="63500" marR="63500" marT="38100" marB="38100">
+                    <a:noFill/>
+                  </a:tcPr>
+                </a:tc>
+                <a:tc>
+                  <a:txBody>
+                    <a:bodyPr wrap="square"/>
+                    <a:lstStyle/>
+                    <a:p>
+                      <a:r>
+                        <a:rPr sz="1300" b="0">
+                          <a:latin typeface="Calibri"/>
+                        </a:rPr>
+                        <a:t>1BM24AD404</a:t>
+                      </a:r>
+                    </a:p>
+                  </a:txBody>
+                  <a:tcPr marL="63500" marR="63500" marT="38100" marB="38100">
+                    <a:noFill/>
+                  </a:tcPr>
+                </a:tc>
+                <a:tc>
+                  <a:txBody>
+                    <a:bodyPr wrap="square"/>
+                    <a:lstStyle/>
+                    <a:p>
+                      <a:r>
+                        <a:rPr sz="1300" b="0">
+                          <a:latin typeface="Calibri"/>
+                        </a:rPr>
+                        <a:t>Python SDK · operator dashboard · demo · test suite</a:t>
+                      </a:r>
+                    </a:p>
+                  </a:txBody>
+                  <a:tcPr marL="63500" marR="63500" marT="38100" marB="38100">
+                    <a:noFill/>
+                  </a:tcPr>
+                </a:tc>
+              </a:tr>
+            </a:tbl>
+          </a:graphicData>
+        </a:graphic>
+      </p:graphicFrame>
     </p:spTree>
     <p:extLst>
       <p:ext uri="{BB962C8B-B14F-4D97-AF65-F5344CB8AC3E}">
-        <p14:creationId xmlns:p14="http://schemas.microsoft.com/office/powerpoint/2010/main" val="3231882420"/>
-      </p:ext>
-    </p:extLst>
-  </p:cSld>
-  <p:clrMapOvr>
-    <a:masterClrMapping/>
-  </p:clrMapOvr>
-</p:sld>
-</file>
-
-<file path=ppt/slides/slide16.xml><?xml version="1.0" encoding="utf-8"?>
-<p:sld xmlns:a="http://schemas.openxmlformats.org/drawingml/2006/main" xmlns:r="http://schemas.openxmlformats.org/officeDocument/2006/relationships" xmlns:p="http://schemas.openxmlformats.org/presentationml/2006/main">
-  <p:cSld>
-    <p:spTree>
-      <p:nvGrpSpPr>
-        <p:cNvPr id="1" name=""/>
-        <p:cNvGrpSpPr/>
-        <p:nvPr/>
-      </p:nvGrpSpPr>
-      <p:grpSpPr>
-        <a:xfrm>
-          <a:off x="0" y="0"/>
-          <a:ext cx="0" cy="0"/>
-          <a:chOff x="0" y="0"/>
-          <a:chExt cx="0" cy="0"/>
-        </a:xfrm>
-      </p:grpSpPr>
-      <p:sp>
-        <p:nvSpPr>
-          <p:cNvPr id="2" name="Title 1">
-            <a:extLst>
-              <a:ext uri="{FF2B5EF4-FFF2-40B4-BE49-F238E27FC236}">
-                <a16:creationId xmlns:a16="http://schemas.microsoft.com/office/drawing/2014/main" id="{BD1A189D-22D1-4D1A-9E04-C6134EC51F8B}"/>
-              </a:ext>
-            </a:extLst>
-          </p:cNvPr>
-          <p:cNvSpPr>
-            <a:spLocks noGrp="1"/>
-          </p:cNvSpPr>
-          <p:nvPr>
-            <p:ph type="ctrTitle"/>
-          </p:nvPr>
-        </p:nvSpPr>
-        <p:spPr>
-          <a:xfrm>
-            <a:off x="1684868" y="203198"/>
-            <a:ext cx="9694332" cy="880535"/>
-          </a:xfrm>
-        </p:spPr>
-        <p:txBody>
-          <a:bodyPr>
-            <a:normAutofit/>
-          </a:bodyPr>
-          <a:lstStyle/>
-          <a:p>
-            <a:pPr marL="0" indent="0" algn="l">
-              <a:spcBef>
-                <a:spcPts val="0"/>
-              </a:spcBef>
-              <a:buNone/>
-            </a:pPr>
-            <a:r>
-              <a:rPr lang="en-US" sz="3200" b="1" i="0" dirty="0">
-                <a:latin typeface="Calibri" panose="020F0502020204030204" pitchFamily="34" charset="0"/>
-                <a:ea typeface="Calibri" panose="020F0502020204030204" pitchFamily="34" charset="0"/>
-                <a:cs typeface="Calibri" panose="020F0502020204030204" pitchFamily="34" charset="0"/>
-              </a:rPr>
-              <a:t>Results — Live Demonstration</a:t>
-            </a:r>
-          </a:p>
-        </p:txBody>
-      </p:sp>
-      <p:sp>
-        <p:nvSpPr>
-          <p:cNvPr id="3" name="Subtitle 2">
-            <a:extLst>
-              <a:ext uri="{FF2B5EF4-FFF2-40B4-BE49-F238E27FC236}">
-                <a16:creationId xmlns:a16="http://schemas.microsoft.com/office/drawing/2014/main" id="{255E737C-85F2-47BC-AD38-AD8B001473B7}"/>
-              </a:ext>
-            </a:extLst>
-          </p:cNvPr>
-          <p:cNvSpPr>
-            <a:spLocks noGrp="1"/>
-          </p:cNvSpPr>
-          <p:nvPr>
-            <p:ph type="subTitle" idx="1"/>
-          </p:nvPr>
-        </p:nvSpPr>
-        <p:spPr>
-          <a:xfrm>
-            <a:off x="1684867" y="1574800"/>
-            <a:ext cx="9694333" cy="4614333"/>
-          </a:xfrm>
-        </p:spPr>
-        <p:txBody>
-          <a:bodyPr>
-            <a:normAutofit/>
-          </a:bodyPr>
-          <a:lstStyle/>
-          <a:p>
-            <a:pPr marL="0" indent="0" algn="l">
-              <a:spcBef>
-                <a:spcPts val="0"/>
-              </a:spcBef>
-              <a:buNone/>
-            </a:pPr>
-            <a:r>
-              <a:rPr lang="en-US" sz="1400" b="0" i="0" dirty="0">
-                <a:latin typeface="Calibri" panose="020F0502020204030204" pitchFamily="34" charset="0"/>
-                <a:ea typeface="Calibri" panose="020F0502020204030204" pitchFamily="34" charset="0"/>
-                <a:cs typeface="Calibri" panose="020F0502020204030204" pitchFamily="34" charset="0"/>
-              </a:rPr>
-              <a:t>Same five acts as Review-1, all three signals live. Act 4 is now held by the drift floor, with the reason stated in plain language.</a:t>
-            </a:r>
-          </a:p>
-        </p:txBody>
-      </p:sp>
-      <p:pic>
-        <p:nvPicPr>
-          <p:cNvPr id="5" name="Graphic 4">
-            <a:extLst>
-              <a:ext uri="{FF2B5EF4-FFF2-40B4-BE49-F238E27FC236}">
-                <a16:creationId xmlns:a16="http://schemas.microsoft.com/office/drawing/2014/main" id="{E7125167-8301-4D88-B79A-A8DA3C19E0D6}"/>
-              </a:ext>
-            </a:extLst>
-          </p:cNvPr>
-          <p:cNvPicPr>
-            <a:picLocks noChangeAspect="1"/>
-          </p:cNvPicPr>
-          <p:nvPr/>
-        </p:nvPicPr>
-        <p:blipFill>
-          <a:blip r:embed="rId2">
-            <a:extLst>
-              <a:ext uri="{96DAC541-7B7A-43D3-8B79-37D633B846F1}">
-                <asvg:svgBlip xmlns:asvg="http://schemas.microsoft.com/office/drawing/2016/SVG/main" r:embed="rId3"/>
-              </a:ext>
-            </a:extLst>
-          </a:blip>
-          <a:stretch>
-            <a:fillRect/>
-          </a:stretch>
-        </p:blipFill>
-        <p:spPr>
-          <a:xfrm>
-            <a:off x="127001" y="86782"/>
-            <a:ext cx="1159932" cy="1159932"/>
-          </a:xfrm>
-          <a:prstGeom prst="rect">
-            <a:avLst/>
-          </a:prstGeom>
-        </p:spPr>
-      </p:pic>
-      <p:sp>
-        <p:nvSpPr>
-          <p:cNvPr id="4" name="Date Placeholder 3">
-            <a:extLst>
-              <a:ext uri="{FF2B5EF4-FFF2-40B4-BE49-F238E27FC236}">
-                <a16:creationId xmlns:a16="http://schemas.microsoft.com/office/drawing/2014/main" id="{35032362-C5A5-4DBF-AD79-DE6FB7439999}"/>
-              </a:ext>
-            </a:extLst>
-          </p:cNvPr>
-          <p:cNvSpPr>
-            <a:spLocks noGrp="1"/>
-          </p:cNvSpPr>
-          <p:nvPr>
-            <p:ph type="dt" sz="half" idx="10"/>
-          </p:nvPr>
-        </p:nvSpPr>
-        <p:spPr/>
-        <p:txBody>
-          <a:bodyPr/>
-          <a:lstStyle/>
-          <a:p>
-            <a:fld id="{64C96E34-94C0-49E4-A53B-4A44141FD3C8}" type="datetime3">
-              <a:rPr lang="en-US" smtClean="0"/>
-              <a:t>17 October 2026</a:t>
-            </a:fld>
-            <a:endParaRPr lang="en-US" dirty="0"/>
-          </a:p>
-        </p:txBody>
-      </p:sp>
-      <p:sp>
-        <p:nvSpPr>
-          <p:cNvPr id="6" name="Slide Number Placeholder 5">
-            <a:extLst>
-              <a:ext uri="{FF2B5EF4-FFF2-40B4-BE49-F238E27FC236}">
-                <a16:creationId xmlns:a16="http://schemas.microsoft.com/office/drawing/2014/main" id="{115AAB64-5B51-4B5A-B69E-D96362CE6E74}"/>
-              </a:ext>
-            </a:extLst>
-          </p:cNvPr>
-          <p:cNvSpPr>
-            <a:spLocks noGrp="1"/>
-          </p:cNvSpPr>
-          <p:nvPr>
-            <p:ph type="sldNum" sz="quarter" idx="12"/>
-          </p:nvPr>
-        </p:nvSpPr>
-        <p:spPr/>
-        <p:txBody>
-          <a:bodyPr/>
-          <a:lstStyle/>
-          <a:p>
-            <a:fld id="{D57F1E4F-1CFF-5643-939E-217C01CDF565}" type="slidenum">
-              <a:rPr lang="en-US" smtClean="0"/>
-              <a:pPr/>
-              <a:t>3</a:t>
-            </a:fld>
-            <a:endParaRPr lang="en-US" dirty="0"/>
-          </a:p>
-        </p:txBody>
-      </p:sp>
-      <p:sp>
-        <p:nvSpPr>
-          <p:cNvPr id="7" name="Footer Placeholder 6">
-            <a:extLst>
-              <a:ext uri="{FF2B5EF4-FFF2-40B4-BE49-F238E27FC236}">
-                <a16:creationId xmlns:a16="http://schemas.microsoft.com/office/drawing/2014/main" id="{8683C6DF-27D9-468B-A1AB-FE568488FE57}"/>
-              </a:ext>
-            </a:extLst>
-          </p:cNvPr>
-          <p:cNvSpPr>
-            <a:spLocks noGrp="1"/>
-          </p:cNvSpPr>
-          <p:nvPr>
-            <p:ph type="ftr" sz="quarter" idx="11"/>
-          </p:nvPr>
-        </p:nvSpPr>
-        <p:spPr/>
-        <p:txBody>
-          <a:bodyPr/>
-          <a:lstStyle/>
-          <a:p>
-            <a:r>
-              <a:rPr lang="en-US"/>
-              <a:t>Dept of AI &amp; DS</a:t>
-            </a:r>
-            <a:endParaRPr lang="en-US" dirty="0"/>
-          </a:p>
-        </p:txBody>
-      </p:sp>
-      <p:pic>
-        <p:nvPicPr>
-          <p:cNvPr id="8" name="Picture 7" descr="demo_trajectory.png"/>
-          <p:cNvPicPr>
-            <a:picLocks noChangeAspect="1"/>
-          </p:cNvPicPr>
-          <p:nvPr/>
-        </p:nvPicPr>
-        <p:blipFill>
-          <a:blip r:embed="rId4"/>
-          <a:stretch>
-            <a:fillRect/>
-          </a:stretch>
-        </p:blipFill>
-        <p:spPr>
-          <a:xfrm>
-            <a:off x="1066647" y="2560320"/>
-            <a:ext cx="10058400" cy="3108960"/>
-          </a:xfrm>
-          <a:prstGeom prst="rect">
-            <a:avLst/>
-          </a:prstGeom>
-        </p:spPr>
-      </p:pic>
-    </p:spTree>
-    <p:extLst>
-      <p:ext uri="{BB962C8B-B14F-4D97-AF65-F5344CB8AC3E}">
-        <p14:creationId xmlns:p14="http://schemas.microsoft.com/office/powerpoint/2010/main" val="3231882420"/>
-      </p:ext>
-    </p:extLst>
-  </p:cSld>
-  <p:clrMapOvr>
-    <a:masterClrMapping/>
-  </p:clrMapOvr>
-</p:sld>
-</file>
-
-<file path=ppt/slides/slide17.xml><?xml version="1.0" encoding="utf-8"?>
-<p:sld xmlns:a="http://schemas.openxmlformats.org/drawingml/2006/main" xmlns:r="http://schemas.openxmlformats.org/officeDocument/2006/relationships" xmlns:p="http://schemas.openxmlformats.org/presentationml/2006/main">
-  <p:cSld>
-    <p:spTree>
-      <p:nvGrpSpPr>
-        <p:cNvPr id="1" name=""/>
-        <p:cNvGrpSpPr/>
-        <p:nvPr/>
-      </p:nvGrpSpPr>
-      <p:grpSpPr>
-        <a:xfrm>
-          <a:off x="0" y="0"/>
-          <a:ext cx="0" cy="0"/>
-          <a:chOff x="0" y="0"/>
-          <a:chExt cx="0" cy="0"/>
-        </a:xfrm>
-      </p:grpSpPr>
-      <p:sp>
-        <p:nvSpPr>
-          <p:cNvPr id="2" name="Title 1">
-            <a:extLst>
-              <a:ext uri="{FF2B5EF4-FFF2-40B4-BE49-F238E27FC236}">
-                <a16:creationId xmlns:a16="http://schemas.microsoft.com/office/drawing/2014/main" id="{BD1A189D-22D1-4D1A-9E04-C6134EC51F8B}"/>
-              </a:ext>
-            </a:extLst>
-          </p:cNvPr>
-          <p:cNvSpPr>
-            <a:spLocks noGrp="1"/>
-          </p:cNvSpPr>
-          <p:nvPr>
-            <p:ph type="ctrTitle"/>
-          </p:nvPr>
-        </p:nvSpPr>
-        <p:spPr>
-          <a:xfrm>
-            <a:off x="1684868" y="203198"/>
-            <a:ext cx="9694332" cy="880535"/>
-          </a:xfrm>
-        </p:spPr>
-        <p:txBody>
-          <a:bodyPr>
-            <a:normAutofit/>
-          </a:bodyPr>
-          <a:lstStyle/>
-          <a:p>
-            <a:pPr marL="0" indent="0" algn="l">
-              <a:spcBef>
-                <a:spcPts val="0"/>
-              </a:spcBef>
-              <a:buNone/>
-            </a:pPr>
-            <a:r>
-              <a:rPr lang="en-US" sz="3200" b="1" i="0" dirty="0">
-                <a:latin typeface="Calibri" panose="020F0502020204030204" pitchFamily="34" charset="0"/>
-                <a:ea typeface="Calibri" panose="020F0502020204030204" pitchFamily="34" charset="0"/>
-                <a:cs typeface="Calibri" panose="020F0502020204030204" pitchFamily="34" charset="0"/>
-              </a:rPr>
-              <a:t>Results — Drift Attribution</a:t>
-            </a:r>
-          </a:p>
-        </p:txBody>
-      </p:sp>
-      <p:sp>
-        <p:nvSpPr>
-          <p:cNvPr id="3" name="Subtitle 2">
-            <a:extLst>
-              <a:ext uri="{FF2B5EF4-FFF2-40B4-BE49-F238E27FC236}">
-                <a16:creationId xmlns:a16="http://schemas.microsoft.com/office/drawing/2014/main" id="{255E737C-85F2-47BC-AD38-AD8B001473B7}"/>
-              </a:ext>
-            </a:extLst>
-          </p:cNvPr>
-          <p:cNvSpPr>
-            <a:spLocks noGrp="1"/>
-          </p:cNvSpPr>
-          <p:nvPr>
-            <p:ph type="subTitle" idx="1"/>
-          </p:nvPr>
-        </p:nvSpPr>
-        <p:spPr>
-          <a:xfrm>
-            <a:off x="1684867" y="1574800"/>
-            <a:ext cx="9694333" cy="4614333"/>
-          </a:xfrm>
-        </p:spPr>
-        <p:txBody>
-          <a:bodyPr>
-            <a:normAutofit/>
-          </a:bodyPr>
-          <a:lstStyle/>
-          <a:p>
-            <a:pPr marL="0" indent="0" algn="l">
-              <a:spcBef>
-                <a:spcPts val="0"/>
-              </a:spcBef>
-              <a:buNone/>
-            </a:pPr>
-            <a:r>
-              <a:rPr lang="en-US" sz="1400" b="0" i="0" dirty="0">
-                <a:latin typeface="Calibri" panose="020F0502020204030204" pitchFamily="34" charset="0"/>
-                <a:ea typeface="Calibri" panose="020F0502020204030204" pitchFamily="34" charset="0"/>
-                <a:cs typeface="Calibri" panose="020F0502020204030204" pitchFamily="34" charset="0"/>
-              </a:rPr>
-              <a:t>Severity says the model moved; attribution says which input moved — the difference between a population shift and a broken upstream feed.</a:t>
-            </a:r>
-          </a:p>
-        </p:txBody>
-      </p:sp>
-      <p:pic>
-        <p:nvPicPr>
-          <p:cNvPr id="5" name="Graphic 4">
-            <a:extLst>
-              <a:ext uri="{FF2B5EF4-FFF2-40B4-BE49-F238E27FC236}">
-                <a16:creationId xmlns:a16="http://schemas.microsoft.com/office/drawing/2014/main" id="{E7125167-8301-4D88-B79A-A8DA3C19E0D6}"/>
-              </a:ext>
-            </a:extLst>
-          </p:cNvPr>
-          <p:cNvPicPr>
-            <a:picLocks noChangeAspect="1"/>
-          </p:cNvPicPr>
-          <p:nvPr/>
-        </p:nvPicPr>
-        <p:blipFill>
-          <a:blip r:embed="rId2">
-            <a:extLst>
-              <a:ext uri="{96DAC541-7B7A-43D3-8B79-37D633B846F1}">
-                <asvg:svgBlip xmlns:asvg="http://schemas.microsoft.com/office/drawing/2016/SVG/main" r:embed="rId3"/>
-              </a:ext>
-            </a:extLst>
-          </a:blip>
-          <a:stretch>
-            <a:fillRect/>
-          </a:stretch>
-        </p:blipFill>
-        <p:spPr>
-          <a:xfrm>
-            <a:off x="127001" y="86782"/>
-            <a:ext cx="1159932" cy="1159932"/>
-          </a:xfrm>
-          <a:prstGeom prst="rect">
-            <a:avLst/>
-          </a:prstGeom>
-        </p:spPr>
-      </p:pic>
-      <p:sp>
-        <p:nvSpPr>
-          <p:cNvPr id="4" name="Date Placeholder 3">
-            <a:extLst>
-              <a:ext uri="{FF2B5EF4-FFF2-40B4-BE49-F238E27FC236}">
-                <a16:creationId xmlns:a16="http://schemas.microsoft.com/office/drawing/2014/main" id="{35032362-C5A5-4DBF-AD79-DE6FB7439999}"/>
-              </a:ext>
-            </a:extLst>
-          </p:cNvPr>
-          <p:cNvSpPr>
-            <a:spLocks noGrp="1"/>
-          </p:cNvSpPr>
-          <p:nvPr>
-            <p:ph type="dt" sz="half" idx="10"/>
-          </p:nvPr>
-        </p:nvSpPr>
-        <p:spPr/>
-        <p:txBody>
-          <a:bodyPr/>
-          <a:lstStyle/>
-          <a:p>
-            <a:fld id="{64C96E34-94C0-49E4-A53B-4A44141FD3C8}" type="datetime3">
-              <a:rPr lang="en-US" smtClean="0"/>
-              <a:t>17 October 2026</a:t>
-            </a:fld>
-            <a:endParaRPr lang="en-US" dirty="0"/>
-          </a:p>
-        </p:txBody>
-      </p:sp>
-      <p:sp>
-        <p:nvSpPr>
-          <p:cNvPr id="6" name="Slide Number Placeholder 5">
-            <a:extLst>
-              <a:ext uri="{FF2B5EF4-FFF2-40B4-BE49-F238E27FC236}">
-                <a16:creationId xmlns:a16="http://schemas.microsoft.com/office/drawing/2014/main" id="{115AAB64-5B51-4B5A-B69E-D96362CE6E74}"/>
-              </a:ext>
-            </a:extLst>
-          </p:cNvPr>
-          <p:cNvSpPr>
-            <a:spLocks noGrp="1"/>
-          </p:cNvSpPr>
-          <p:nvPr>
-            <p:ph type="sldNum" sz="quarter" idx="12"/>
-          </p:nvPr>
-        </p:nvSpPr>
-        <p:spPr/>
-        <p:txBody>
-          <a:bodyPr/>
-          <a:lstStyle/>
-          <a:p>
-            <a:fld id="{D57F1E4F-1CFF-5643-939E-217C01CDF565}" type="slidenum">
-              <a:rPr lang="en-US" smtClean="0"/>
-              <a:pPr/>
-              <a:t>3</a:t>
-            </a:fld>
-            <a:endParaRPr lang="en-US" dirty="0"/>
-          </a:p>
-        </p:txBody>
-      </p:sp>
-      <p:sp>
-        <p:nvSpPr>
-          <p:cNvPr id="7" name="Footer Placeholder 6">
-            <a:extLst>
-              <a:ext uri="{FF2B5EF4-FFF2-40B4-BE49-F238E27FC236}">
-                <a16:creationId xmlns:a16="http://schemas.microsoft.com/office/drawing/2014/main" id="{8683C6DF-27D9-468B-A1AB-FE568488FE57}"/>
-              </a:ext>
-            </a:extLst>
-          </p:cNvPr>
-          <p:cNvSpPr>
-            <a:spLocks noGrp="1"/>
-          </p:cNvSpPr>
-          <p:nvPr>
-            <p:ph type="ftr" sz="quarter" idx="11"/>
-          </p:nvPr>
-        </p:nvSpPr>
-        <p:spPr/>
-        <p:txBody>
-          <a:bodyPr/>
-          <a:lstStyle/>
-          <a:p>
-            <a:r>
-              <a:rPr lang="en-US"/>
-              <a:t>Dept of AI &amp; DS</a:t>
-            </a:r>
-            <a:endParaRPr lang="en-US" dirty="0"/>
-          </a:p>
-        </p:txBody>
-      </p:sp>
-      <p:pic>
-        <p:nvPicPr>
-          <p:cNvPr id="8" name="Picture 7" descr="drift_attribution.png"/>
-          <p:cNvPicPr>
-            <a:picLocks noChangeAspect="1"/>
-          </p:cNvPicPr>
-          <p:nvPr/>
-        </p:nvPicPr>
-        <p:blipFill>
-          <a:blip r:embed="rId4"/>
-          <a:stretch>
-            <a:fillRect/>
-          </a:stretch>
-        </p:blipFill>
-        <p:spPr>
-          <a:xfrm>
-            <a:off x="1066647" y="2651760"/>
-            <a:ext cx="10058400" cy="2880360"/>
-          </a:xfrm>
-          <a:prstGeom prst="rect">
-            <a:avLst/>
-          </a:prstGeom>
-        </p:spPr>
-      </p:pic>
-    </p:spTree>
-    <p:extLst>
-      <p:ext uri="{BB962C8B-B14F-4D97-AF65-F5344CB8AC3E}">
-        <p14:creationId xmlns:p14="http://schemas.microsoft.com/office/powerpoint/2010/main" val="3231882420"/>
-      </p:ext>
-    </p:extLst>
-  </p:cSld>
-  <p:clrMapOvr>
-    <a:masterClrMapping/>
-  </p:clrMapOvr>
-</p:sld>
-</file>
-
-<file path=ppt/slides/slide18.xml><?xml version="1.0" encoding="utf-8"?>
-<p:sld xmlns:a="http://schemas.openxmlformats.org/drawingml/2006/main" xmlns:r="http://schemas.openxmlformats.org/officeDocument/2006/relationships" xmlns:p="http://schemas.openxmlformats.org/presentationml/2006/main">
-  <p:cSld>
-    <p:spTree>
-      <p:nvGrpSpPr>
-        <p:cNvPr id="1" name=""/>
-        <p:cNvGrpSpPr/>
-        <p:nvPr/>
-      </p:nvGrpSpPr>
-      <p:grpSpPr>
-        <a:xfrm>
-          <a:off x="0" y="0"/>
-          <a:ext cx="0" cy="0"/>
-          <a:chOff x="0" y="0"/>
-          <a:chExt cx="0" cy="0"/>
-        </a:xfrm>
-      </p:grpSpPr>
-      <p:sp>
-        <p:nvSpPr>
-          <p:cNvPr id="2" name="Title 1">
-            <a:extLst>
-              <a:ext uri="{FF2B5EF4-FFF2-40B4-BE49-F238E27FC236}">
-                <a16:creationId xmlns:a16="http://schemas.microsoft.com/office/drawing/2014/main" id="{BD1A189D-22D1-4D1A-9E04-C6134EC51F8B}"/>
-              </a:ext>
-            </a:extLst>
-          </p:cNvPr>
-          <p:cNvSpPr>
-            <a:spLocks noGrp="1"/>
-          </p:cNvSpPr>
-          <p:nvPr>
-            <p:ph type="ctrTitle"/>
-          </p:nvPr>
-        </p:nvSpPr>
-        <p:spPr>
-          <a:xfrm>
-            <a:off x="1684868" y="203198"/>
-            <a:ext cx="9694332" cy="880535"/>
-          </a:xfrm>
-        </p:spPr>
-        <p:txBody>
-          <a:bodyPr>
-            <a:normAutofit/>
-          </a:bodyPr>
-          <a:lstStyle/>
-          <a:p>
-            <a:pPr marL="0" indent="0" algn="l">
-              <a:spcBef>
-                <a:spcPts val="0"/>
-              </a:spcBef>
-              <a:buNone/>
-            </a:pPr>
-            <a:r>
-              <a:rPr lang="en-US" sz="3200" b="1" i="0" dirty="0">
-                <a:latin typeface="Calibri" panose="020F0502020204030204" pitchFamily="34" charset="0"/>
-                <a:ea typeface="Calibri" panose="020F0502020204030204" pitchFamily="34" charset="0"/>
-                <a:cs typeface="Calibri" panose="020F0502020204030204" pitchFamily="34" charset="0"/>
-              </a:rPr>
-              <a:t>Validation — Calibration</a:t>
-            </a:r>
-          </a:p>
-        </p:txBody>
-      </p:sp>
-      <p:sp>
-        <p:nvSpPr>
-          <p:cNvPr id="3" name="Subtitle 2">
-            <a:extLst>
-              <a:ext uri="{FF2B5EF4-FFF2-40B4-BE49-F238E27FC236}">
-                <a16:creationId xmlns:a16="http://schemas.microsoft.com/office/drawing/2014/main" id="{255E737C-85F2-47BC-AD38-AD8B001473B7}"/>
-              </a:ext>
-            </a:extLst>
-          </p:cNvPr>
-          <p:cNvSpPr>
-            <a:spLocks noGrp="1"/>
-          </p:cNvSpPr>
-          <p:nvPr>
-            <p:ph type="subTitle" idx="1"/>
-          </p:nvPr>
-        </p:nvSpPr>
-        <p:spPr>
-          <a:xfrm>
-            <a:off x="1684867" y="1574800"/>
-            <a:ext cx="9694333" cy="4614333"/>
-          </a:xfrm>
-        </p:spPr>
-        <p:txBody>
-          <a:bodyPr>
-            <a:normAutofit/>
-          </a:bodyPr>
-          <a:lstStyle/>
-          <a:p>
-            <a:pPr marL="0" indent="0" algn="l">
-              <a:spcBef>
-                <a:spcPts val="0"/>
-              </a:spcBef>
-              <a:buNone/>
-            </a:pPr>
-            <a:r>
-              <a:rPr lang="en-US" sz="1400" b="0" i="0" dirty="0">
-                <a:latin typeface="Calibri" panose="020F0502020204030204" pitchFamily="34" charset="0"/>
-                <a:ea typeface="Calibri" panose="020F0502020204030204" pitchFamily="34" charset="0"/>
-                <a:cs typeface="Calibri" panose="020F0502020204030204" pitchFamily="34" charset="0"/>
-              </a:rPr>
-              <a:t>Custos is a measuring instrument, so it is validated like one: shifts of a known size in, readings checked against the known answer.</a:t>
-            </a:r>
-          </a:p>
-        </p:txBody>
-      </p:sp>
-      <p:pic>
-        <p:nvPicPr>
-          <p:cNvPr id="5" name="Graphic 4">
-            <a:extLst>
-              <a:ext uri="{FF2B5EF4-FFF2-40B4-BE49-F238E27FC236}">
-                <a16:creationId xmlns:a16="http://schemas.microsoft.com/office/drawing/2014/main" id="{E7125167-8301-4D88-B79A-A8DA3C19E0D6}"/>
-              </a:ext>
-            </a:extLst>
-          </p:cNvPr>
-          <p:cNvPicPr>
-            <a:picLocks noChangeAspect="1"/>
-          </p:cNvPicPr>
-          <p:nvPr/>
-        </p:nvPicPr>
-        <p:blipFill>
-          <a:blip r:embed="rId2">
-            <a:extLst>
-              <a:ext uri="{96DAC541-7B7A-43D3-8B79-37D633B846F1}">
-                <asvg:svgBlip xmlns:asvg="http://schemas.microsoft.com/office/drawing/2016/SVG/main" r:embed="rId3"/>
-              </a:ext>
-            </a:extLst>
-          </a:blip>
-          <a:stretch>
-            <a:fillRect/>
-          </a:stretch>
-        </p:blipFill>
-        <p:spPr>
-          <a:xfrm>
-            <a:off x="127001" y="86782"/>
-            <a:ext cx="1159932" cy="1159932"/>
-          </a:xfrm>
-          <a:prstGeom prst="rect">
-            <a:avLst/>
-          </a:prstGeom>
-        </p:spPr>
-      </p:pic>
-      <p:sp>
-        <p:nvSpPr>
-          <p:cNvPr id="4" name="Date Placeholder 3">
-            <a:extLst>
-              <a:ext uri="{FF2B5EF4-FFF2-40B4-BE49-F238E27FC236}">
-                <a16:creationId xmlns:a16="http://schemas.microsoft.com/office/drawing/2014/main" id="{35032362-C5A5-4DBF-AD79-DE6FB7439999}"/>
-              </a:ext>
-            </a:extLst>
-          </p:cNvPr>
-          <p:cNvSpPr>
-            <a:spLocks noGrp="1"/>
-          </p:cNvSpPr>
-          <p:nvPr>
-            <p:ph type="dt" sz="half" idx="10"/>
-          </p:nvPr>
-        </p:nvSpPr>
-        <p:spPr/>
-        <p:txBody>
-          <a:bodyPr/>
-          <a:lstStyle/>
-          <a:p>
-            <a:fld id="{64C96E34-94C0-49E4-A53B-4A44141FD3C8}" type="datetime3">
-              <a:rPr lang="en-US" smtClean="0"/>
-              <a:t>17 October 2026</a:t>
-            </a:fld>
-            <a:endParaRPr lang="en-US" dirty="0"/>
-          </a:p>
-        </p:txBody>
-      </p:sp>
-      <p:sp>
-        <p:nvSpPr>
-          <p:cNvPr id="6" name="Slide Number Placeholder 5">
-            <a:extLst>
-              <a:ext uri="{FF2B5EF4-FFF2-40B4-BE49-F238E27FC236}">
-                <a16:creationId xmlns:a16="http://schemas.microsoft.com/office/drawing/2014/main" id="{115AAB64-5B51-4B5A-B69E-D96362CE6E74}"/>
-              </a:ext>
-            </a:extLst>
-          </p:cNvPr>
-          <p:cNvSpPr>
-            <a:spLocks noGrp="1"/>
-          </p:cNvSpPr>
-          <p:nvPr>
-            <p:ph type="sldNum" sz="quarter" idx="12"/>
-          </p:nvPr>
-        </p:nvSpPr>
-        <p:spPr/>
-        <p:txBody>
-          <a:bodyPr/>
-          <a:lstStyle/>
-          <a:p>
-            <a:fld id="{D57F1E4F-1CFF-5643-939E-217C01CDF565}" type="slidenum">
-              <a:rPr lang="en-US" smtClean="0"/>
-              <a:pPr/>
-              <a:t>3</a:t>
-            </a:fld>
-            <a:endParaRPr lang="en-US" dirty="0"/>
-          </a:p>
-        </p:txBody>
-      </p:sp>
-      <p:sp>
-        <p:nvSpPr>
-          <p:cNvPr id="7" name="Footer Placeholder 6">
-            <a:extLst>
-              <a:ext uri="{FF2B5EF4-FFF2-40B4-BE49-F238E27FC236}">
-                <a16:creationId xmlns:a16="http://schemas.microsoft.com/office/drawing/2014/main" id="{8683C6DF-27D9-468B-A1AB-FE568488FE57}"/>
-              </a:ext>
-            </a:extLst>
-          </p:cNvPr>
-          <p:cNvSpPr>
-            <a:spLocks noGrp="1"/>
-          </p:cNvSpPr>
-          <p:nvPr>
-            <p:ph type="ftr" sz="quarter" idx="11"/>
-          </p:nvPr>
-        </p:nvSpPr>
-        <p:spPr/>
-        <p:txBody>
-          <a:bodyPr/>
-          <a:lstStyle/>
-          <a:p>
-            <a:r>
-              <a:rPr lang="en-US"/>
-              <a:t>Dept of AI &amp; DS</a:t>
-            </a:r>
-            <a:endParaRPr lang="en-US" dirty="0"/>
-          </a:p>
-        </p:txBody>
-      </p:sp>
-      <p:pic>
-        <p:nvPicPr>
-          <p:cNvPr id="8" name="Picture 7" descr="calibration_curve.png"/>
-          <p:cNvPicPr>
-            <a:picLocks noChangeAspect="1"/>
-          </p:cNvPicPr>
-          <p:nvPr/>
-        </p:nvPicPr>
-        <p:blipFill>
-          <a:blip r:embed="rId4"/>
-          <a:stretch>
-            <a:fillRect/>
-          </a:stretch>
-        </p:blipFill>
-        <p:spPr>
-          <a:xfrm>
-            <a:off x="1066647" y="2514600"/>
-            <a:ext cx="10058400" cy="3154680"/>
-          </a:xfrm>
-          <a:prstGeom prst="rect">
-            <a:avLst/>
-          </a:prstGeom>
-        </p:spPr>
-      </p:pic>
-    </p:spTree>
-    <p:extLst>
-      <p:ext uri="{BB962C8B-B14F-4D97-AF65-F5344CB8AC3E}">
-        <p14:creationId xmlns:p14="http://schemas.microsoft.com/office/powerpoint/2010/main" val="3231882420"/>
-      </p:ext>
-    </p:extLst>
-  </p:cSld>
-  <p:clrMapOvr>
-    <a:masterClrMapping/>
-  </p:clrMapOvr>
-</p:sld>
-</file>
-
-<file path=ppt/slides/slide19.xml><?xml version="1.0" encoding="utf-8"?>
-<p:sld xmlns:a="http://schemas.openxmlformats.org/drawingml/2006/main" xmlns:r="http://schemas.openxmlformats.org/officeDocument/2006/relationships" xmlns:p="http://schemas.openxmlformats.org/presentationml/2006/main">
-  <p:cSld>
-    <p:spTree>
-      <p:nvGrpSpPr>
-        <p:cNvPr id="1" name=""/>
-        <p:cNvGrpSpPr/>
-        <p:nvPr/>
-      </p:nvGrpSpPr>
-      <p:grpSpPr>
-        <a:xfrm>
-          <a:off x="0" y="0"/>
-          <a:ext cx="0" cy="0"/>
-          <a:chOff x="0" y="0"/>
-          <a:chExt cx="0" cy="0"/>
-        </a:xfrm>
-      </p:grpSpPr>
-      <p:sp>
-        <p:nvSpPr>
-          <p:cNvPr id="2" name="Title 1">
-            <a:extLst>
-              <a:ext uri="{FF2B5EF4-FFF2-40B4-BE49-F238E27FC236}">
-                <a16:creationId xmlns:a16="http://schemas.microsoft.com/office/drawing/2014/main" id="{BD1A189D-22D1-4D1A-9E04-C6134EC51F8B}"/>
-              </a:ext>
-            </a:extLst>
-          </p:cNvPr>
-          <p:cNvSpPr>
-            <a:spLocks noGrp="1"/>
-          </p:cNvSpPr>
-          <p:nvPr>
-            <p:ph type="ctrTitle"/>
-          </p:nvPr>
-        </p:nvSpPr>
-        <p:spPr>
-          <a:xfrm>
-            <a:off x="1684868" y="203198"/>
-            <a:ext cx="9694332" cy="880535"/>
-          </a:xfrm>
-        </p:spPr>
-        <p:txBody>
-          <a:bodyPr>
-            <a:normAutofit/>
-          </a:bodyPr>
-          <a:lstStyle/>
-          <a:p>
-            <a:pPr marL="0" indent="0" algn="l">
-              <a:spcBef>
-                <a:spcPts val="0"/>
-              </a:spcBef>
-              <a:buNone/>
-            </a:pPr>
-            <a:r>
-              <a:rPr lang="en-US" sz="3200" b="1" i="0" dirty="0">
-                <a:latin typeface="Calibri" panose="020F0502020204030204" pitchFamily="34" charset="0"/>
-                <a:ea typeface="Calibri" panose="020F0502020204030204" pitchFamily="34" charset="0"/>
-                <a:cs typeface="Calibri" panose="020F0502020204030204" pitchFamily="34" charset="0"/>
-              </a:rPr>
-              <a:t>Validation — Field Study: How It Was Run</a:t>
-            </a:r>
-          </a:p>
-        </p:txBody>
-      </p:sp>
-      <p:sp>
-        <p:nvSpPr>
-          <p:cNvPr id="3" name="Subtitle 2">
-            <a:extLst>
-              <a:ext uri="{FF2B5EF4-FFF2-40B4-BE49-F238E27FC236}">
-                <a16:creationId xmlns:a16="http://schemas.microsoft.com/office/drawing/2014/main" id="{255E737C-85F2-47BC-AD38-AD8B001473B7}"/>
-              </a:ext>
-            </a:extLst>
-          </p:cNvPr>
-          <p:cNvSpPr>
-            <a:spLocks noGrp="1"/>
-          </p:cNvSpPr>
-          <p:nvPr>
-            <p:ph type="subTitle" idx="1"/>
-          </p:nvPr>
-        </p:nvSpPr>
-        <p:spPr>
-          <a:xfrm>
-            <a:off x="1684867" y="1574800"/>
-            <a:ext cx="9694333" cy="4614333"/>
-          </a:xfrm>
-        </p:spPr>
-        <p:txBody>
-          <a:bodyPr>
-            <a:normAutofit/>
-          </a:bodyPr>
-          <a:lstStyle/>
-          <a:p>
-            <a:pPr marL="0" indent="0" algn="l">
-              <a:spcBef>
-                <a:spcPts val="0"/>
-              </a:spcBef>
-              <a:buNone/>
-            </a:pPr>
-            <a:r>
-              <a:rPr lang="en-US" sz="1400" b="0" i="0" dirty="0">
-                <a:latin typeface="Calibri" panose="020F0502020204030204" pitchFamily="34" charset="0"/>
-                <a:ea typeface="Calibri" panose="020F0502020204030204" pitchFamily="34" charset="0"/>
-                <a:cs typeface="Calibri" panose="020F0502020204030204" pitchFamily="34" charset="0"/>
-              </a:rPr>
-              <a:t>Calibration proves the detector is correct. A field study tests whether gating on drift actually helps: 2.26 million real Lending Club loans, of which 589,186 matured loans from 2012–2015 were evaluated against a model trained on 2007–2011.</a:t>
-            </a:r>
-          </a:p>
-          <a:p>
-            <a:pPr marL="285750" indent="-285750" algn="l">
-              <a:spcBef>
-                <a:spcPts val="300"/>
-              </a:spcBef>
-              <a:buFont typeface="Arial" panose="020B0604020202020204" pitchFamily="34" charset="0"/>
-              <a:buChar char="•"/>
-            </a:pPr>
-            <a:r>
-              <a:rPr lang="en-US" sz="1300" b="0" i="0" dirty="0">
-                <a:latin typeface="Calibri" panose="020F0502020204030204" pitchFamily="34" charset="0"/>
-                <a:ea typeface="Calibri" panose="020F0502020204030204" pitchFamily="34" charset="0"/>
-                <a:cs typeface="Calibri" panose="020F0502020204030204" pitchFamily="34" charset="0"/>
-              </a:rPr>
-              <a:t>Pre-registered — hypotheses, metrics and what each outcome would mean were committed and pushed before the dataset was even downloaded.</a:t>
-            </a:r>
-          </a:p>
-          <a:p>
-            <a:pPr marL="285750" indent="-285750" algn="l">
-              <a:spcBef>
-                <a:spcPts val="160"/>
-              </a:spcBef>
-              <a:buFont typeface="Arial" panose="020B0604020202020204" pitchFamily="34" charset="0"/>
-              <a:buChar char="•"/>
-            </a:pPr>
-            <a:r>
-              <a:rPr lang="en-US" sz="1300" b="0" i="0" dirty="0">
-                <a:latin typeface="Calibri" panose="020F0502020204030204" pitchFamily="34" charset="0"/>
-                <a:ea typeface="Calibri" panose="020F0502020204030204" pitchFamily="34" charset="0"/>
-                <a:cs typeface="Calibri" panose="020F0502020204030204" pitchFamily="34" charset="0"/>
-              </a:rPr>
-              <a:t>Leakage and censoring enforced in code — only fields known when the loan was made, and only loans whose term had ended, so outcomes are real.</a:t>
-            </a:r>
-          </a:p>
-          <a:p>
-            <a:pPr marL="285750" indent="-285750" algn="l">
-              <a:spcBef>
-                <a:spcPts val="160"/>
-              </a:spcBef>
-              <a:buFont typeface="Arial" panose="020B0604020202020204" pitchFamily="34" charset="0"/>
-              <a:buChar char="•"/>
-            </a:pPr>
-            <a:r>
-              <a:rPr lang="en-US" sz="1300" b="0" i="0" dirty="0">
-                <a:latin typeface="Calibri" panose="020F0502020204030204" pitchFamily="34" charset="0"/>
-                <a:ea typeface="Calibri" panose="020F0502020204030204" pitchFamily="34" charset="0"/>
-                <a:cs typeface="Calibri" panose="020F0502020204030204" pitchFamily="34" charset="0"/>
-              </a:rPr>
-              <a:t>Seven review strategies compared at the same review budget, from random review to the model's own risk score to Custos's drift gating.</a:t>
-            </a:r>
-          </a:p>
-          <a:p>
-            <a:pPr marL="285750" indent="-285750" algn="l">
-              <a:spcBef>
-                <a:spcPts val="160"/>
-              </a:spcBef>
-              <a:buFont typeface="Arial" panose="020B0604020202020204" pitchFamily="34" charset="0"/>
-              <a:buChar char="•"/>
-            </a:pPr>
-            <a:r>
-              <a:rPr lang="en-US" sz="1300" b="0" i="0" dirty="0">
-                <a:latin typeface="Calibri" panose="020F0502020204030204" pitchFamily="34" charset="0"/>
-                <a:ea typeface="Calibri" panose="020F0502020204030204" pitchFamily="34" charset="0"/>
-                <a:cs typeface="Calibri" panose="020F0502020204030204" pitchFamily="34" charset="0"/>
-              </a:rPr>
-              <a:t>Two bugs caught before the real run — dates sorted as text, and a harm measure that could not see miscalibration. Both fixed, both recorded.</a:t>
-            </a:r>
-          </a:p>
-        </p:txBody>
-      </p:sp>
-      <p:pic>
-        <p:nvPicPr>
-          <p:cNvPr id="5" name="Graphic 4">
-            <a:extLst>
-              <a:ext uri="{FF2B5EF4-FFF2-40B4-BE49-F238E27FC236}">
-                <a16:creationId xmlns:a16="http://schemas.microsoft.com/office/drawing/2014/main" id="{E7125167-8301-4D88-B79A-A8DA3C19E0D6}"/>
-              </a:ext>
-            </a:extLst>
-          </p:cNvPr>
-          <p:cNvPicPr>
-            <a:picLocks noChangeAspect="1"/>
-          </p:cNvPicPr>
-          <p:nvPr/>
-        </p:nvPicPr>
-        <p:blipFill>
-          <a:blip r:embed="rId2">
-            <a:extLst>
-              <a:ext uri="{96DAC541-7B7A-43D3-8B79-37D633B846F1}">
-                <asvg:svgBlip xmlns:asvg="http://schemas.microsoft.com/office/drawing/2016/SVG/main" r:embed="rId3"/>
-              </a:ext>
-            </a:extLst>
-          </a:blip>
-          <a:stretch>
-            <a:fillRect/>
-          </a:stretch>
-        </p:blipFill>
-        <p:spPr>
-          <a:xfrm>
-            <a:off x="127001" y="86782"/>
-            <a:ext cx="1159932" cy="1159932"/>
-          </a:xfrm>
-          <a:prstGeom prst="rect">
-            <a:avLst/>
-          </a:prstGeom>
-        </p:spPr>
-      </p:pic>
-      <p:sp>
-        <p:nvSpPr>
-          <p:cNvPr id="4" name="Date Placeholder 3">
-            <a:extLst>
-              <a:ext uri="{FF2B5EF4-FFF2-40B4-BE49-F238E27FC236}">
-                <a16:creationId xmlns:a16="http://schemas.microsoft.com/office/drawing/2014/main" id="{35032362-C5A5-4DBF-AD79-DE6FB7439999}"/>
-              </a:ext>
-            </a:extLst>
-          </p:cNvPr>
-          <p:cNvSpPr>
-            <a:spLocks noGrp="1"/>
-          </p:cNvSpPr>
-          <p:nvPr>
-            <p:ph type="dt" sz="half" idx="10"/>
-          </p:nvPr>
-        </p:nvSpPr>
-        <p:spPr/>
-        <p:txBody>
-          <a:bodyPr/>
-          <a:lstStyle/>
-          <a:p>
-            <a:fld id="{64C96E34-94C0-49E4-A53B-4A44141FD3C8}" type="datetime3">
-              <a:rPr lang="en-US" smtClean="0"/>
-              <a:t>17 October 2026</a:t>
-            </a:fld>
-            <a:endParaRPr lang="en-US" dirty="0"/>
-          </a:p>
-        </p:txBody>
-      </p:sp>
-      <p:sp>
-        <p:nvSpPr>
-          <p:cNvPr id="6" name="Slide Number Placeholder 5">
-            <a:extLst>
-              <a:ext uri="{FF2B5EF4-FFF2-40B4-BE49-F238E27FC236}">
-                <a16:creationId xmlns:a16="http://schemas.microsoft.com/office/drawing/2014/main" id="{115AAB64-5B51-4B5A-B69E-D96362CE6E74}"/>
-              </a:ext>
-            </a:extLst>
-          </p:cNvPr>
-          <p:cNvSpPr>
-            <a:spLocks noGrp="1"/>
-          </p:cNvSpPr>
-          <p:nvPr>
-            <p:ph type="sldNum" sz="quarter" idx="12"/>
-          </p:nvPr>
-        </p:nvSpPr>
-        <p:spPr/>
-        <p:txBody>
-          <a:bodyPr/>
-          <a:lstStyle/>
-          <a:p>
-            <a:fld id="{D57F1E4F-1CFF-5643-939E-217C01CDF565}" type="slidenum">
-              <a:rPr lang="en-US" smtClean="0"/>
-              <a:pPr/>
-              <a:t>3</a:t>
-            </a:fld>
-            <a:endParaRPr lang="en-US" dirty="0"/>
-          </a:p>
-        </p:txBody>
-      </p:sp>
-      <p:sp>
-        <p:nvSpPr>
-          <p:cNvPr id="7" name="Footer Placeholder 6">
-            <a:extLst>
-              <a:ext uri="{FF2B5EF4-FFF2-40B4-BE49-F238E27FC236}">
-                <a16:creationId xmlns:a16="http://schemas.microsoft.com/office/drawing/2014/main" id="{8683C6DF-27D9-468B-A1AB-FE568488FE57}"/>
-              </a:ext>
-            </a:extLst>
-          </p:cNvPr>
-          <p:cNvSpPr>
-            <a:spLocks noGrp="1"/>
-          </p:cNvSpPr>
-          <p:nvPr>
-            <p:ph type="ftr" sz="quarter" idx="11"/>
-          </p:nvPr>
-        </p:nvSpPr>
-        <p:spPr/>
-        <p:txBody>
-          <a:bodyPr/>
-          <a:lstStyle/>
-          <a:p>
-            <a:r>
-              <a:rPr lang="en-US"/>
-              <a:t>Dept of AI &amp; DS</a:t>
-            </a:r>
-            <a:endParaRPr lang="en-US" dirty="0"/>
-          </a:p>
-        </p:txBody>
-      </p:sp>
-    </p:spTree>
-    <p:extLst>
-      <p:ext uri="{BB962C8B-B14F-4D97-AF65-F5344CB8AC3E}">
-        <p14:creationId xmlns:p14="http://schemas.microsoft.com/office/powerpoint/2010/main" val="3231882420"/>
+        <p14:creationId xmlns:p14="http://schemas.microsoft.com/office/powerpoint/2010/main" val="68599917"/>
       </p:ext>
     </p:extLst>
   </p:cSld>
@@ -9104,7 +6747,7 @@
           <a:p>
             <a:pPr marL="285750" indent="-285750" algn="l">
               <a:spcBef>
-                <a:spcPts val="400"/>
+                <a:spcPts val="0"/>
               </a:spcBef>
               <a:buFont typeface="Arial" panose="020B0604020202020204" pitchFamily="34" charset="0"/>
               <a:buChar char="•"/>
@@ -9132,7 +6775,7 @@
                 <a:ea typeface="Calibri" panose="020F0502020204030204" pitchFamily="34" charset="0"/>
                 <a:cs typeface="Calibri" panose="020F0502020204030204" pitchFamily="34" charset="0"/>
               </a:rPr>
-              <a:t>Progress since Review-1</a:t>
+              <a:t>Introduction — motivation, existing vs proposed, objectives</a:t>
             </a:r>
           </a:p>
           <a:p>
@@ -9149,7 +6792,7 @@
                 <a:ea typeface="Calibri" panose="020F0502020204030204" pitchFamily="34" charset="0"/>
                 <a:cs typeface="Calibri" panose="020F0502020204030204" pitchFamily="34" charset="0"/>
               </a:rPr>
-              <a:t>Introduction — motivation, existing vs proposed system, objectives</a:t>
+              <a:t>Literature survey and research gap</a:t>
             </a:r>
           </a:p>
           <a:p>
@@ -9166,7 +6809,7 @@
                 <a:ea typeface="Calibri" panose="020F0502020204030204" pitchFamily="34" charset="0"/>
                 <a:cs typeface="Calibri" panose="020F0502020204030204" pitchFamily="34" charset="0"/>
               </a:rPr>
-              <a:t>Literature survey and research gap</a:t>
+              <a:t>Requirement analysis and specification</a:t>
             </a:r>
           </a:p>
           <a:p>
@@ -9183,7 +6826,7 @@
                 <a:ea typeface="Calibri" panose="020F0502020204030204" pitchFamily="34" charset="0"/>
                 <a:cs typeface="Calibri" panose="020F0502020204030204" pitchFamily="34" charset="0"/>
               </a:rPr>
-              <a:t>Requirement analysis and specification</a:t>
+              <a:t>System design — architecture and decision logic</a:t>
             </a:r>
           </a:p>
           <a:p>
@@ -9200,7 +6843,7 @@
                 <a:ea typeface="Calibri" panose="020F0502020204030204" pitchFamily="34" charset="0"/>
                 <a:cs typeface="Calibri" panose="020F0502020204030204" pitchFamily="34" charset="0"/>
               </a:rPr>
-              <a:t>System design — architecture and decision logic</a:t>
+              <a:t>Implementation and results</a:t>
             </a:r>
           </a:p>
           <a:p>
@@ -9217,7 +6860,7 @@
                 <a:ea typeface="Calibri" panose="020F0502020204030204" pitchFamily="34" charset="0"/>
                 <a:cs typeface="Calibri" panose="020F0502020204030204" pitchFamily="34" charset="0"/>
               </a:rPr>
-              <a:t>Implementation — new: risk engine and admission control</a:t>
+              <a:t>Governed self-healing and other domains</a:t>
             </a:r>
           </a:p>
           <a:p>
@@ -9234,24 +6877,7 @@
                 <a:ea typeface="Calibri" panose="020F0502020204030204" pitchFamily="34" charset="0"/>
                 <a:cs typeface="Calibri" panose="020F0502020204030204" pitchFamily="34" charset="0"/>
               </a:rPr>
-              <a:t>Results and validation</a:t>
-            </a:r>
-          </a:p>
-          <a:p>
-            <a:pPr marL="285750" indent="-285750" algn="l">
-              <a:spcBef>
-                <a:spcPts val="400"/>
-              </a:spcBef>
-              <a:buFont typeface="Arial" panose="020B0604020202020204" pitchFamily="34" charset="0"/>
-              <a:buChar char="•"/>
-            </a:pPr>
-            <a:r>
-              <a:rPr lang="en-US" sz="1700" b="0" i="0" dirty="0">
-                <a:latin typeface="Calibri" panose="020F0502020204030204" pitchFamily="34" charset="0"/>
-                <a:ea typeface="Calibri" panose="020F0502020204030204" pitchFamily="34" charset="0"/>
-                <a:cs typeface="Calibri" panose="020F0502020204030204" pitchFamily="34" charset="0"/>
-              </a:rPr>
-              <a:t>Engineering rigour, self-healing, other domains, work plan, conclusion</a:t>
+              <a:t>Conclusion and work plan  ·  then a live demo</a:t>
             </a:r>
           </a:p>
         </p:txBody>
@@ -9384,3324 +7010,6 @@
     <p:extLst>
       <p:ext uri="{BB962C8B-B14F-4D97-AF65-F5344CB8AC3E}">
         <p14:creationId xmlns:p14="http://schemas.microsoft.com/office/powerpoint/2010/main" val="2366995734"/>
-      </p:ext>
-    </p:extLst>
-  </p:cSld>
-  <p:clrMapOvr>
-    <a:masterClrMapping/>
-  </p:clrMapOvr>
-</p:sld>
-</file>
-
-<file path=ppt/slides/slide20.xml><?xml version="1.0" encoding="utf-8"?>
-<p:sld xmlns:a="http://schemas.openxmlformats.org/drawingml/2006/main" xmlns:r="http://schemas.openxmlformats.org/officeDocument/2006/relationships" xmlns:p="http://schemas.openxmlformats.org/presentationml/2006/main">
-  <p:cSld>
-    <p:spTree>
-      <p:nvGrpSpPr>
-        <p:cNvPr id="1" name=""/>
-        <p:cNvGrpSpPr/>
-        <p:nvPr/>
-      </p:nvGrpSpPr>
-      <p:grpSpPr>
-        <a:xfrm>
-          <a:off x="0" y="0"/>
-          <a:ext cx="0" cy="0"/>
-          <a:chOff x="0" y="0"/>
-          <a:chExt cx="0" cy="0"/>
-        </a:xfrm>
-      </p:grpSpPr>
-      <p:sp>
-        <p:nvSpPr>
-          <p:cNvPr id="2" name="Title 1">
-            <a:extLst>
-              <a:ext uri="{FF2B5EF4-FFF2-40B4-BE49-F238E27FC236}">
-                <a16:creationId xmlns:a16="http://schemas.microsoft.com/office/drawing/2014/main" id="{BD1A189D-22D1-4D1A-9E04-C6134EC51F8B}"/>
-              </a:ext>
-            </a:extLst>
-          </p:cNvPr>
-          <p:cNvSpPr>
-            <a:spLocks noGrp="1"/>
-          </p:cNvSpPr>
-          <p:nvPr>
-            <p:ph type="ctrTitle"/>
-          </p:nvPr>
-        </p:nvSpPr>
-        <p:spPr>
-          <a:xfrm>
-            <a:off x="1684868" y="203198"/>
-            <a:ext cx="9694332" cy="880535"/>
-          </a:xfrm>
-        </p:spPr>
-        <p:txBody>
-          <a:bodyPr>
-            <a:normAutofit/>
-          </a:bodyPr>
-          <a:lstStyle/>
-          <a:p>
-            <a:pPr marL="0" indent="0" algn="l">
-              <a:spcBef>
-                <a:spcPts val="0"/>
-              </a:spcBef>
-              <a:buNone/>
-            </a:pPr>
-            <a:r>
-              <a:rPr lang="en-US" sz="3200" b="1" i="0" dirty="0">
-                <a:latin typeface="Calibri" panose="020F0502020204030204" pitchFamily="34" charset="0"/>
-                <a:ea typeface="Calibri" panose="020F0502020204030204" pitchFamily="34" charset="0"/>
-                <a:cs typeface="Calibri" panose="020F0502020204030204" pitchFamily="34" charset="0"/>
-              </a:rPr>
-              <a:t>Field Result — Our Core Assumption Failed</a:t>
-            </a:r>
-          </a:p>
-        </p:txBody>
-      </p:sp>
-      <p:sp>
-        <p:nvSpPr>
-          <p:cNvPr id="3" name="Subtitle 2">
-            <a:extLst>
-              <a:ext uri="{FF2B5EF4-FFF2-40B4-BE49-F238E27FC236}">
-                <a16:creationId xmlns:a16="http://schemas.microsoft.com/office/drawing/2014/main" id="{255E737C-85F2-47BC-AD38-AD8B001473B7}"/>
-              </a:ext>
-            </a:extLst>
-          </p:cNvPr>
-          <p:cNvSpPr>
-            <a:spLocks noGrp="1"/>
-          </p:cNvSpPr>
-          <p:nvPr>
-            <p:ph type="subTitle" idx="1"/>
-          </p:nvPr>
-        </p:nvSpPr>
-        <p:spPr>
-          <a:xfrm>
-            <a:off x="1684867" y="1574800"/>
-            <a:ext cx="9694333" cy="4614333"/>
-          </a:xfrm>
-        </p:spPr>
-        <p:txBody>
-          <a:bodyPr>
-            <a:normAutofit/>
-          </a:bodyPr>
-          <a:lstStyle/>
-          <a:p>
-            <a:pPr marL="0" indent="0" algn="l">
-              <a:spcBef>
-                <a:spcPts val="0"/>
-              </a:spcBef>
-              <a:buNone/>
-            </a:pPr>
-            <a:r>
-              <a:rPr lang="en-US" sz="1400" b="0" i="0" dirty="0">
-                <a:latin typeface="Calibri" panose="020F0502020204030204" pitchFamily="34" charset="0"/>
-                <a:ea typeface="Calibri" panose="020F0502020204030204" pitchFamily="34" charset="0"/>
-                <a:cs typeface="Calibri" panose="020F0502020204030204" pitchFamily="34" charset="0"/>
-              </a:rPr>
-              <a:t>Asked to pick 5% of 589,186 real loans for human review, gating on population drift — how Custos works today — caught fewer defaults than picking at random. The model's own risk score caught 2.1× random.</a:t>
-            </a:r>
-          </a:p>
-        </p:txBody>
-      </p:sp>
-      <p:pic>
-        <p:nvPicPr>
-          <p:cNvPr id="5" name="Graphic 4">
-            <a:extLst>
-              <a:ext uri="{FF2B5EF4-FFF2-40B4-BE49-F238E27FC236}">
-                <a16:creationId xmlns:a16="http://schemas.microsoft.com/office/drawing/2014/main" id="{E7125167-8301-4D88-B79A-A8DA3C19E0D6}"/>
-              </a:ext>
-            </a:extLst>
-          </p:cNvPr>
-          <p:cNvPicPr>
-            <a:picLocks noChangeAspect="1"/>
-          </p:cNvPicPr>
-          <p:nvPr/>
-        </p:nvPicPr>
-        <p:blipFill>
-          <a:blip r:embed="rId2">
-            <a:extLst>
-              <a:ext uri="{96DAC541-7B7A-43D3-8B79-37D633B846F1}">
-                <asvg:svgBlip xmlns:asvg="http://schemas.microsoft.com/office/drawing/2016/SVG/main" r:embed="rId3"/>
-              </a:ext>
-            </a:extLst>
-          </a:blip>
-          <a:stretch>
-            <a:fillRect/>
-          </a:stretch>
-        </p:blipFill>
-        <p:spPr>
-          <a:xfrm>
-            <a:off x="127001" y="86782"/>
-            <a:ext cx="1159932" cy="1159932"/>
-          </a:xfrm>
-          <a:prstGeom prst="rect">
-            <a:avLst/>
-          </a:prstGeom>
-        </p:spPr>
-      </p:pic>
-      <p:sp>
-        <p:nvSpPr>
-          <p:cNvPr id="4" name="Date Placeholder 3">
-            <a:extLst>
-              <a:ext uri="{FF2B5EF4-FFF2-40B4-BE49-F238E27FC236}">
-                <a16:creationId xmlns:a16="http://schemas.microsoft.com/office/drawing/2014/main" id="{35032362-C5A5-4DBF-AD79-DE6FB7439999}"/>
-              </a:ext>
-            </a:extLst>
-          </p:cNvPr>
-          <p:cNvSpPr>
-            <a:spLocks noGrp="1"/>
-          </p:cNvSpPr>
-          <p:nvPr>
-            <p:ph type="dt" sz="half" idx="10"/>
-          </p:nvPr>
-        </p:nvSpPr>
-        <p:spPr/>
-        <p:txBody>
-          <a:bodyPr/>
-          <a:lstStyle/>
-          <a:p>
-            <a:fld id="{64C96E34-94C0-49E4-A53B-4A44141FD3C8}" type="datetime3">
-              <a:rPr lang="en-US" smtClean="0"/>
-              <a:t>17 October 2026</a:t>
-            </a:fld>
-            <a:endParaRPr lang="en-US" dirty="0"/>
-          </a:p>
-        </p:txBody>
-      </p:sp>
-      <p:sp>
-        <p:nvSpPr>
-          <p:cNvPr id="6" name="Slide Number Placeholder 5">
-            <a:extLst>
-              <a:ext uri="{FF2B5EF4-FFF2-40B4-BE49-F238E27FC236}">
-                <a16:creationId xmlns:a16="http://schemas.microsoft.com/office/drawing/2014/main" id="{115AAB64-5B51-4B5A-B69E-D96362CE6E74}"/>
-              </a:ext>
-            </a:extLst>
-          </p:cNvPr>
-          <p:cNvSpPr>
-            <a:spLocks noGrp="1"/>
-          </p:cNvSpPr>
-          <p:nvPr>
-            <p:ph type="sldNum" sz="quarter" idx="12"/>
-          </p:nvPr>
-        </p:nvSpPr>
-        <p:spPr/>
-        <p:txBody>
-          <a:bodyPr/>
-          <a:lstStyle/>
-          <a:p>
-            <a:fld id="{D57F1E4F-1CFF-5643-939E-217C01CDF565}" type="slidenum">
-              <a:rPr lang="en-US" smtClean="0"/>
-              <a:pPr/>
-              <a:t>3</a:t>
-            </a:fld>
-            <a:endParaRPr lang="en-US" dirty="0"/>
-          </a:p>
-        </p:txBody>
-      </p:sp>
-      <p:sp>
-        <p:nvSpPr>
-          <p:cNvPr id="7" name="Footer Placeholder 6">
-            <a:extLst>
-              <a:ext uri="{FF2B5EF4-FFF2-40B4-BE49-F238E27FC236}">
-                <a16:creationId xmlns:a16="http://schemas.microsoft.com/office/drawing/2014/main" id="{8683C6DF-27D9-468B-A1AB-FE568488FE57}"/>
-              </a:ext>
-            </a:extLst>
-          </p:cNvPr>
-          <p:cNvSpPr>
-            <a:spLocks noGrp="1"/>
-          </p:cNvSpPr>
-          <p:nvPr>
-            <p:ph type="ftr" sz="quarter" idx="11"/>
-          </p:nvPr>
-        </p:nvSpPr>
-        <p:spPr/>
-        <p:txBody>
-          <a:bodyPr/>
-          <a:lstStyle/>
-          <a:p>
-            <a:r>
-              <a:rPr lang="en-US"/>
-              <a:t>Dept of AI &amp; DS</a:t>
-            </a:r>
-            <a:endParaRPr lang="en-US" dirty="0"/>
-          </a:p>
-        </p:txBody>
-      </p:sp>
-      <p:pic>
-        <p:nvPicPr>
-          <p:cNvPr id="8" name="Picture 7" descr="gating_results.png"/>
-          <p:cNvPicPr>
-            <a:picLocks noChangeAspect="1"/>
-          </p:cNvPicPr>
-          <p:nvPr/>
-        </p:nvPicPr>
-        <p:blipFill>
-          <a:blip r:embed="rId4"/>
-          <a:stretch>
-            <a:fillRect/>
-          </a:stretch>
-        </p:blipFill>
-        <p:spPr>
-          <a:xfrm>
-            <a:off x="1066647" y="2514600"/>
-            <a:ext cx="10058400" cy="3017520"/>
-          </a:xfrm>
-          <a:prstGeom prst="rect">
-            <a:avLst/>
-          </a:prstGeom>
-        </p:spPr>
-      </p:pic>
-    </p:spTree>
-    <p:extLst>
-      <p:ext uri="{BB962C8B-B14F-4D97-AF65-F5344CB8AC3E}">
-        <p14:creationId xmlns:p14="http://schemas.microsoft.com/office/powerpoint/2010/main" val="3231882420"/>
-      </p:ext>
-    </p:extLst>
-  </p:cSld>
-  <p:clrMapOvr>
-    <a:masterClrMapping/>
-  </p:clrMapOvr>
-</p:sld>
-</file>
-
-<file path=ppt/slides/slide21.xml><?xml version="1.0" encoding="utf-8"?>
-<p:sld xmlns:a="http://schemas.openxmlformats.org/drawingml/2006/main" xmlns:r="http://schemas.openxmlformats.org/officeDocument/2006/relationships" xmlns:p="http://schemas.openxmlformats.org/presentationml/2006/main">
-  <p:cSld>
-    <p:spTree>
-      <p:nvGrpSpPr>
-        <p:cNvPr id="1" name=""/>
-        <p:cNvGrpSpPr/>
-        <p:nvPr/>
-      </p:nvGrpSpPr>
-      <p:grpSpPr>
-        <a:xfrm>
-          <a:off x="0" y="0"/>
-          <a:ext cx="0" cy="0"/>
-          <a:chOff x="0" y="0"/>
-          <a:chExt cx="0" cy="0"/>
-        </a:xfrm>
-      </p:grpSpPr>
-      <p:sp>
-        <p:nvSpPr>
-          <p:cNvPr id="2" name="Title 1">
-            <a:extLst>
-              <a:ext uri="{FF2B5EF4-FFF2-40B4-BE49-F238E27FC236}">
-                <a16:creationId xmlns:a16="http://schemas.microsoft.com/office/drawing/2014/main" id="{BD1A189D-22D1-4D1A-9E04-C6134EC51F8B}"/>
-              </a:ext>
-            </a:extLst>
-          </p:cNvPr>
-          <p:cNvSpPr>
-            <a:spLocks noGrp="1"/>
-          </p:cNvSpPr>
-          <p:nvPr>
-            <p:ph type="ctrTitle"/>
-          </p:nvPr>
-        </p:nvSpPr>
-        <p:spPr>
-          <a:xfrm>
-            <a:off x="1684868" y="203198"/>
-            <a:ext cx="9694332" cy="880535"/>
-          </a:xfrm>
-        </p:spPr>
-        <p:txBody>
-          <a:bodyPr>
-            <a:normAutofit/>
-          </a:bodyPr>
-          <a:lstStyle/>
-          <a:p>
-            <a:pPr marL="0" indent="0" algn="l">
-              <a:spcBef>
-                <a:spcPts val="0"/>
-              </a:spcBef>
-              <a:buNone/>
-            </a:pPr>
-            <a:r>
-              <a:rPr lang="en-US" sz="3200" b="1" i="0" dirty="0">
-                <a:latin typeface="Calibri" panose="020F0502020204030204" pitchFamily="34" charset="0"/>
-                <a:ea typeface="Calibri" panose="020F0502020204030204" pitchFamily="34" charset="0"/>
-                <a:cs typeface="Calibri" panose="020F0502020204030204" pitchFamily="34" charset="0"/>
-              </a:rPr>
-              <a:t>Engineering Rigour — Problems We Found in Our Own System</a:t>
-            </a:r>
-          </a:p>
-        </p:txBody>
-      </p:sp>
-      <p:sp>
-        <p:nvSpPr>
-          <p:cNvPr id="3" name="Subtitle 2">
-            <a:extLst>
-              <a:ext uri="{FF2B5EF4-FFF2-40B4-BE49-F238E27FC236}">
-                <a16:creationId xmlns:a16="http://schemas.microsoft.com/office/drawing/2014/main" id="{255E737C-85F2-47BC-AD38-AD8B001473B7}"/>
-              </a:ext>
-            </a:extLst>
-          </p:cNvPr>
-          <p:cNvSpPr>
-            <a:spLocks noGrp="1"/>
-          </p:cNvSpPr>
-          <p:nvPr>
-            <p:ph type="subTitle" idx="1"/>
-          </p:nvPr>
-        </p:nvSpPr>
-        <p:spPr>
-          <a:xfrm>
-            <a:off x="1684867" y="1574800"/>
-            <a:ext cx="9694333" cy="4614333"/>
-          </a:xfrm>
-        </p:spPr>
-        <p:txBody>
-          <a:bodyPr>
-            <a:normAutofit/>
-          </a:bodyPr>
-          <a:lstStyle/>
-          <a:p>
-            <a:pPr marL="0" indent="0" algn="l">
-              <a:spcBef>
-                <a:spcPts val="0"/>
-              </a:spcBef>
-              <a:buNone/>
-            </a:pPr>
-            <a:r>
-              <a:rPr lang="en-US" sz="1300" b="0" i="0" dirty="0">
-                <a:latin typeface="Calibri" panose="020F0502020204030204" pitchFamily="34" charset="0"/>
-                <a:ea typeface="Calibri" panose="020F0502020204030204" pitchFamily="34" charset="0"/>
-                <a:cs typeface="Calibri" panose="020F0502020204030204" pitchFamily="34" charset="0"/>
-              </a:rPr>
-              <a:t>Seven problems, found by our own tooling. The largest: real data contradicted the assumption the gating was built on.</a:t>
-            </a:r>
-          </a:p>
-        </p:txBody>
-      </p:sp>
-      <p:pic>
-        <p:nvPicPr>
-          <p:cNvPr id="5" name="Graphic 4">
-            <a:extLst>
-              <a:ext uri="{FF2B5EF4-FFF2-40B4-BE49-F238E27FC236}">
-                <a16:creationId xmlns:a16="http://schemas.microsoft.com/office/drawing/2014/main" id="{E7125167-8301-4D88-B79A-A8DA3C19E0D6}"/>
-              </a:ext>
-            </a:extLst>
-          </p:cNvPr>
-          <p:cNvPicPr>
-            <a:picLocks noChangeAspect="1"/>
-          </p:cNvPicPr>
-          <p:nvPr/>
-        </p:nvPicPr>
-        <p:blipFill>
-          <a:blip r:embed="rId2">
-            <a:extLst>
-              <a:ext uri="{96DAC541-7B7A-43D3-8B79-37D633B846F1}">
-                <asvg:svgBlip xmlns:asvg="http://schemas.microsoft.com/office/drawing/2016/SVG/main" r:embed="rId3"/>
-              </a:ext>
-            </a:extLst>
-          </a:blip>
-          <a:stretch>
-            <a:fillRect/>
-          </a:stretch>
-        </p:blipFill>
-        <p:spPr>
-          <a:xfrm>
-            <a:off x="127001" y="86782"/>
-            <a:ext cx="1159932" cy="1159932"/>
-          </a:xfrm>
-          <a:prstGeom prst="rect">
-            <a:avLst/>
-          </a:prstGeom>
-        </p:spPr>
-      </p:pic>
-      <p:sp>
-        <p:nvSpPr>
-          <p:cNvPr id="4" name="Date Placeholder 3">
-            <a:extLst>
-              <a:ext uri="{FF2B5EF4-FFF2-40B4-BE49-F238E27FC236}">
-                <a16:creationId xmlns:a16="http://schemas.microsoft.com/office/drawing/2014/main" id="{35032362-C5A5-4DBF-AD79-DE6FB7439999}"/>
-              </a:ext>
-            </a:extLst>
-          </p:cNvPr>
-          <p:cNvSpPr>
-            <a:spLocks noGrp="1"/>
-          </p:cNvSpPr>
-          <p:nvPr>
-            <p:ph type="dt" sz="half" idx="10"/>
-          </p:nvPr>
-        </p:nvSpPr>
-        <p:spPr/>
-        <p:txBody>
-          <a:bodyPr/>
-          <a:lstStyle/>
-          <a:p>
-            <a:fld id="{64C96E34-94C0-49E4-A53B-4A44141FD3C8}" type="datetime3">
-              <a:rPr lang="en-US" smtClean="0"/>
-              <a:t>17 October 2026</a:t>
-            </a:fld>
-            <a:endParaRPr lang="en-US" dirty="0"/>
-          </a:p>
-        </p:txBody>
-      </p:sp>
-      <p:sp>
-        <p:nvSpPr>
-          <p:cNvPr id="6" name="Slide Number Placeholder 5">
-            <a:extLst>
-              <a:ext uri="{FF2B5EF4-FFF2-40B4-BE49-F238E27FC236}">
-                <a16:creationId xmlns:a16="http://schemas.microsoft.com/office/drawing/2014/main" id="{115AAB64-5B51-4B5A-B69E-D96362CE6E74}"/>
-              </a:ext>
-            </a:extLst>
-          </p:cNvPr>
-          <p:cNvSpPr>
-            <a:spLocks noGrp="1"/>
-          </p:cNvSpPr>
-          <p:nvPr>
-            <p:ph type="sldNum" sz="quarter" idx="12"/>
-          </p:nvPr>
-        </p:nvSpPr>
-        <p:spPr/>
-        <p:txBody>
-          <a:bodyPr/>
-          <a:lstStyle/>
-          <a:p>
-            <a:fld id="{D57F1E4F-1CFF-5643-939E-217C01CDF565}" type="slidenum">
-              <a:rPr lang="en-US" smtClean="0"/>
-              <a:pPr/>
-              <a:t>3</a:t>
-            </a:fld>
-            <a:endParaRPr lang="en-US" dirty="0"/>
-          </a:p>
-        </p:txBody>
-      </p:sp>
-      <p:sp>
-        <p:nvSpPr>
-          <p:cNvPr id="7" name="Footer Placeholder 6">
-            <a:extLst>
-              <a:ext uri="{FF2B5EF4-FFF2-40B4-BE49-F238E27FC236}">
-                <a16:creationId xmlns:a16="http://schemas.microsoft.com/office/drawing/2014/main" id="{8683C6DF-27D9-468B-A1AB-FE568488FE57}"/>
-              </a:ext>
-            </a:extLst>
-          </p:cNvPr>
-          <p:cNvSpPr>
-            <a:spLocks noGrp="1"/>
-          </p:cNvSpPr>
-          <p:nvPr>
-            <p:ph type="ftr" sz="quarter" idx="11"/>
-          </p:nvPr>
-        </p:nvSpPr>
-        <p:spPr/>
-        <p:txBody>
-          <a:bodyPr/>
-          <a:lstStyle/>
-          <a:p>
-            <a:r>
-              <a:rPr lang="en-US"/>
-              <a:t>Dept of AI &amp; DS</a:t>
-            </a:r>
-            <a:endParaRPr lang="en-US" dirty="0"/>
-          </a:p>
-        </p:txBody>
-      </p:sp>
-      <p:graphicFrame>
-        <p:nvGraphicFramePr>
-          <p:cNvPr id="8" name="Table 7"/>
-          <p:cNvGraphicFramePr>
-            <a:graphicFrameLocks noGrp="1"/>
-          </p:cNvGraphicFramePr>
-          <p:nvPr/>
-        </p:nvGraphicFramePr>
-        <p:xfrm>
-          <a:off x="960120" y="2331720"/>
-          <a:ext cx="10241279" cy="203200"/>
-        </p:xfrm>
-        <a:graphic>
-          <a:graphicData uri="http://schemas.openxmlformats.org/drawingml/2006/table">
-            <a:tbl>
-              <a:tblPr firstRow="1">
-                <a:tableStyleId>{5C22544A-7EE6-4342-B048-85BDC9FD1C3A}</a:tableStyleId>
-              </a:tblPr>
-              <a:tblGrid>
-                <a:gridCol w="1741017"/>
-                <a:gridCol w="4915814"/>
-                <a:gridCol w="3584448"/>
-              </a:tblGrid>
-              <a:tr h="25400">
-                <a:tc>
-                  <a:txBody>
-                    <a:bodyPr wrap="square"/>
-                    <a:lstStyle/>
-                    <a:p>
-                      <a:r>
-                        <a:rPr sz="1100" b="1">
-                          <a:solidFill>
-                            <a:srgbClr val="FFFFFF"/>
-                          </a:solidFill>
-                          <a:latin typeface="Calibri"/>
-                        </a:rPr>
-                        <a:t>Found by</a:t>
-                      </a:r>
-                    </a:p>
-                  </a:txBody>
-                  <a:tcPr marL="63500" marR="63500" marT="38100" marB="38100">
-                    <a:solidFill>
-                      <a:srgbClr val="1F5CA8"/>
-                    </a:solidFill>
-                  </a:tcPr>
-                </a:tc>
-                <a:tc>
-                  <a:txBody>
-                    <a:bodyPr wrap="square"/>
-                    <a:lstStyle/>
-                    <a:p>
-                      <a:r>
-                        <a:rPr sz="1100" b="1">
-                          <a:solidFill>
-                            <a:srgbClr val="FFFFFF"/>
-                          </a:solidFill>
-                          <a:latin typeface="Calibri"/>
-                        </a:rPr>
-                        <a:t>Defect</a:t>
-                      </a:r>
-                    </a:p>
-                  </a:txBody>
-                  <a:tcPr marL="63500" marR="63500" marT="38100" marB="38100">
-                    <a:solidFill>
-                      <a:srgbClr val="1F5CA8"/>
-                    </a:solidFill>
-                  </a:tcPr>
-                </a:tc>
-                <a:tc>
-                  <a:txBody>
-                    <a:bodyPr wrap="square"/>
-                    <a:lstStyle/>
-                    <a:p>
-                      <a:r>
-                        <a:rPr sz="1100" b="1">
-                          <a:solidFill>
-                            <a:srgbClr val="FFFFFF"/>
-                          </a:solidFill>
-                          <a:latin typeface="Calibri"/>
-                        </a:rPr>
-                        <a:t>Fix</a:t>
-                      </a:r>
-                    </a:p>
-                  </a:txBody>
-                  <a:tcPr marL="63500" marR="63500" marT="38100" marB="38100">
-                    <a:solidFill>
-                      <a:srgbClr val="1F5CA8"/>
-                    </a:solidFill>
-                  </a:tcPr>
-                </a:tc>
-              </a:tr>
-              <a:tr h="25400">
-                <a:tc>
-                  <a:txBody>
-                    <a:bodyPr wrap="square"/>
-                    <a:lstStyle/>
-                    <a:p>
-                      <a:r>
-                        <a:rPr sz="1100" b="0">
-                          <a:latin typeface="Calibri"/>
-                        </a:rPr>
-                        <a:t>Load harness (R1)</a:t>
-                      </a:r>
-                    </a:p>
-                  </a:txBody>
-                  <a:tcPr marL="63500" marR="63500" marT="38100" marB="38100">
-                    <a:noFill/>
-                  </a:tcPr>
-                </a:tc>
-                <a:tc>
-                  <a:txBody>
-                    <a:bodyPr wrap="square"/>
-                    <a:lstStyle/>
-                    <a:p>
-                      <a:r>
-                        <a:rPr sz="1100" b="0">
-                          <a:latin typeface="Calibri"/>
-                        </a:rPr>
-                        <a:t>Published p99 of 0.5 ms measured a timer that stops before the audit write; real figure was 49 ms</a:t>
-                      </a:r>
-                    </a:p>
-                  </a:txBody>
-                  <a:tcPr marL="63500" marR="63500" marT="38100" marB="38100">
-                    <a:noFill/>
-                  </a:tcPr>
-                </a:tc>
-                <a:tc>
-                  <a:txBody>
-                    <a:bodyPr wrap="square"/>
-                    <a:lstStyle/>
-                    <a:p>
-                      <a:r>
-                        <a:rPr sz="1100" b="0">
-                          <a:latin typeface="Calibri"/>
-                        </a:rPr>
-                        <a:t>Report client-observed latency; now 9 ms at the same rate</a:t>
-                      </a:r>
-                    </a:p>
-                  </a:txBody>
-                  <a:tcPr marL="63500" marR="63500" marT="38100" marB="38100">
-                    <a:noFill/>
-                  </a:tcPr>
-                </a:tc>
-              </a:tr>
-              <a:tr h="25400">
-                <a:tc>
-                  <a:txBody>
-                    <a:bodyPr wrap="square"/>
-                    <a:lstStyle/>
-                    <a:p>
-                      <a:r>
-                        <a:rPr sz="1100" b="0">
-                          <a:latin typeface="Calibri"/>
-                        </a:rPr>
-                        <a:t>Load harness (R1)</a:t>
-                      </a:r>
-                    </a:p>
-                  </a:txBody>
-                  <a:tcPr marL="63500" marR="63500" marT="38100" marB="38100">
-                    <a:solidFill>
-                      <a:srgbClr val="F4F6F9"/>
-                    </a:solidFill>
-                  </a:tcPr>
-                </a:tc>
-                <a:tc>
-                  <a:txBody>
-                    <a:bodyPr wrap="square"/>
-                    <a:lstStyle/>
-                    <a:p>
-                      <a:r>
-                        <a:rPr sz="1100" b="0">
-                          <a:latin typeface="Calibri"/>
-                        </a:rPr>
-                        <a:t>Audit chain dropped entries under concurrency and still verified as intact</a:t>
-                      </a:r>
-                    </a:p>
-                  </a:txBody>
-                  <a:tcPr marL="63500" marR="63500" marT="38100" marB="38100">
-                    <a:solidFill>
-                      <a:srgbClr val="F4F6F9"/>
-                    </a:solidFill>
-                  </a:tcPr>
-                </a:tc>
-                <a:tc>
-                  <a:txBody>
-                    <a:bodyPr wrap="square"/>
-                    <a:lstStyle/>
-                    <a:p>
-                      <a:r>
-                        <a:rPr sz="1100" b="0">
-                          <a:latin typeface="Calibri"/>
-                        </a:rPr>
-                        <a:t>Advisory lock + jittered backoff; 0 lost from 2 to 48 writers</a:t>
-                      </a:r>
-                    </a:p>
-                  </a:txBody>
-                  <a:tcPr marL="63500" marR="63500" marT="38100" marB="38100">
-                    <a:solidFill>
-                      <a:srgbClr val="F4F6F9"/>
-                    </a:solidFill>
-                  </a:tcPr>
-                </a:tc>
-              </a:tr>
-              <a:tr h="25400">
-                <a:tc>
-                  <a:txBody>
-                    <a:bodyPr wrap="square"/>
-                    <a:lstStyle/>
-                    <a:p>
-                      <a:r>
-                        <a:rPr sz="1100" b="0">
-                          <a:latin typeface="Calibri"/>
-                        </a:rPr>
-                        <a:t>Load harness (R1)</a:t>
-                      </a:r>
-                    </a:p>
-                  </a:txBody>
-                  <a:tcPr marL="63500" marR="63500" marT="38100" marB="38100">
-                    <a:noFill/>
-                  </a:tcPr>
-                </a:tc>
-                <a:tc>
-                  <a:txBody>
-                    <a:bodyPr wrap="square"/>
-                    <a:lstStyle/>
-                    <a:p>
-                      <a:r>
-                        <a:rPr sz="1100" b="0">
-                          <a:latin typeface="Calibri"/>
-                        </a:rPr>
-                        <a:t>Overload changed verdicts: ~13% flipped ALLOW → REVIEW</a:t>
-                      </a:r>
-                    </a:p>
-                  </a:txBody>
-                  <a:tcPr marL="63500" marR="63500" marT="38100" marB="38100">
-                    <a:noFill/>
-                  </a:tcPr>
-                </a:tc>
-                <a:tc>
-                  <a:txBody>
-                    <a:bodyPr wrap="square"/>
-                    <a:lstStyle/>
-                    <a:p>
-                      <a:r>
-                        <a:rPr sz="1100" b="0">
-                          <a:latin typeface="Calibri"/>
-                        </a:rPr>
-                        <a:t>Event loop unblocked + admission control: 0 flips under overload</a:t>
-                      </a:r>
-                    </a:p>
-                  </a:txBody>
-                  <a:tcPr marL="63500" marR="63500" marT="38100" marB="38100">
-                    <a:noFill/>
-                  </a:tcPr>
-                </a:tc>
-              </a:tr>
-              <a:tr h="25400">
-                <a:tc>
-                  <a:txBody>
-                    <a:bodyPr wrap="square"/>
-                    <a:lstStyle/>
-                    <a:p>
-                      <a:r>
-                        <a:rPr sz="1100" b="0">
-                          <a:latin typeface="Calibri"/>
-                        </a:rPr>
-                        <a:t>Unit test (R2)</a:t>
-                      </a:r>
-                    </a:p>
-                  </a:txBody>
-                  <a:tcPr marL="63500" marR="63500" marT="38100" marB="38100">
-                    <a:solidFill>
-                      <a:srgbClr val="F4F6F9"/>
-                    </a:solidFill>
-                  </a:tcPr>
-                </a:tc>
-                <a:tc>
-                  <a:txBody>
-                    <a:bodyPr wrap="square"/>
-                    <a:lstStyle/>
-                    <a:p>
-                      <a:r>
-                        <a:rPr sz="1100" b="0">
-                          <a:latin typeface="Calibri"/>
-                        </a:rPr>
-                        <a:t>Replay harness sorted dates as text — “Aug-2018” became the 2007 baseline</a:t>
-                      </a:r>
-                    </a:p>
-                  </a:txBody>
-                  <a:tcPr marL="63500" marR="63500" marT="38100" marB="38100">
-                    <a:solidFill>
-                      <a:srgbClr val="F4F6F9"/>
-                    </a:solidFill>
-                  </a:tcPr>
-                </a:tc>
-                <a:tc>
-                  <a:txBody>
-                    <a:bodyPr wrap="square"/>
-                    <a:lstStyle/>
-                    <a:p>
-                      <a:r>
-                        <a:rPr sz="1100" b="0">
-                          <a:latin typeface="Calibri"/>
-                        </a:rPr>
-                        <a:t>Parse dates; regression test on Lending Club's own date format</a:t>
-                      </a:r>
-                    </a:p>
-                  </a:txBody>
-                  <a:tcPr marL="63500" marR="63500" marT="38100" marB="38100">
-                    <a:solidFill>
-                      <a:srgbClr val="F4F6F9"/>
-                    </a:solidFill>
-                  </a:tcPr>
-                </a:tc>
-              </a:tr>
-              <a:tr h="25400">
-                <a:tc>
-                  <a:txBody>
-                    <a:bodyPr wrap="square"/>
-                    <a:lstStyle/>
-                    <a:p>
-                      <a:r>
-                        <a:rPr sz="1100" b="0">
-                          <a:latin typeface="Calibri"/>
-                        </a:rPr>
-                        <a:t>Fusion arithmetic (R2)</a:t>
-                      </a:r>
-                    </a:p>
-                  </a:txBody>
-                  <a:tcPr marL="63500" marR="63500" marT="38100" marB="38100">
-                    <a:noFill/>
-                  </a:tcPr>
-                </a:tc>
-                <a:tc>
-                  <a:txBody>
-                    <a:bodyPr wrap="square"/>
-                    <a:lstStyle/>
-                    <a:p>
-                      <a:r>
-                        <a:rPr sz="1100" b="0">
-                          <a:latin typeface="Calibri"/>
-                        </a:rPr>
-                        <a:t>Adding a live risk signal let a significantly drifted model reach ALLOW</a:t>
-                      </a:r>
-                    </a:p>
-                  </a:txBody>
-                  <a:tcPr marL="63500" marR="63500" marT="38100" marB="38100">
-                    <a:noFill/>
-                  </a:tcPr>
-                </a:tc>
-                <a:tc>
-                  <a:txBody>
-                    <a:bodyPr wrap="square"/>
-                    <a:lstStyle/>
-                    <a:p>
-                      <a:r>
-                        <a:rPr sz="1100" b="0">
-                          <a:latin typeface="Calibri"/>
-                        </a:rPr>
-                        <a:t>Explicit drift-floor rule in the decision cascade, pinned by tests</a:t>
-                      </a:r>
-                    </a:p>
-                  </a:txBody>
-                  <a:tcPr marL="63500" marR="63500" marT="38100" marB="38100">
-                    <a:noFill/>
-                  </a:tcPr>
-                </a:tc>
-              </a:tr>
-              <a:tr h="25400">
-                <a:tc>
-                  <a:txBody>
-                    <a:bodyPr wrap="square"/>
-                    <a:lstStyle/>
-                    <a:p>
-                      <a:r>
-                        <a:rPr sz="1100" b="0">
-                          <a:latin typeface="Calibri"/>
-                        </a:rPr>
-                        <a:t>Pre-registered study (R2)</a:t>
-                      </a:r>
-                    </a:p>
-                  </a:txBody>
-                  <a:tcPr marL="63500" marR="63500" marT="38100" marB="38100">
-                    <a:solidFill>
-                      <a:srgbClr val="F4F6F9"/>
-                    </a:solidFill>
-                  </a:tcPr>
-                </a:tc>
-                <a:tc>
-                  <a:txBody>
-                    <a:bodyPr wrap="square"/>
-                    <a:lstStyle/>
-                    <a:p>
-                      <a:r>
-                        <a:rPr sz="1100" b="0">
-                          <a:latin typeface="Calibri"/>
-                        </a:rPr>
-                        <a:t>On real loans, drift gating caught fewer defaults than random; the drift floor would escalate 92% of decisions for no gain</a:t>
-                      </a:r>
-                    </a:p>
-                  </a:txBody>
-                  <a:tcPr marL="63500" marR="63500" marT="38100" marB="38100">
-                    <a:solidFill>
-                      <a:srgbClr val="F4F6F9"/>
-                    </a:solidFill>
-                  </a:tcPr>
-                </a:tc>
-                <a:tc>
-                  <a:txBody>
-                    <a:bodyPr wrap="square"/>
-                    <a:lstStyle/>
-                    <a:p>
-                      <a:r>
-                        <a:rPr sz="1100" b="0">
-                          <a:latin typeface="Calibri"/>
-                        </a:rPr>
-                        <a:t>Not yet fixed — gating to be rebuilt around risk-ranked review</a:t>
-                      </a:r>
-                    </a:p>
-                  </a:txBody>
-                  <a:tcPr marL="63500" marR="63500" marT="38100" marB="38100">
-                    <a:solidFill>
-                      <a:srgbClr val="F4F6F9"/>
-                    </a:solidFill>
-                  </a:tcPr>
-                </a:tc>
-              </a:tr>
-              <a:tr h="25400">
-                <a:tc>
-                  <a:txBody>
-                    <a:bodyPr wrap="square"/>
-                    <a:lstStyle/>
-                    <a:p>
-                      <a:r>
-                        <a:rPr sz="1100" b="0">
-                          <a:latin typeface="Calibri"/>
-                        </a:rPr>
-                        <a:t>Self-healing (R2+)</a:t>
-                      </a:r>
-                    </a:p>
-                  </a:txBody>
-                  <a:tcPr marL="63500" marR="63500" marT="38100" marB="38100">
-                    <a:noFill/>
-                  </a:tcPr>
-                </a:tc>
-                <a:tc>
-                  <a:txBody>
-                    <a:bodyPr wrap="square"/>
-                    <a:lstStyle/>
-                    <a:p>
-                      <a:r>
-                        <a:rPr sz="1100" b="0">
-                          <a:latin typeface="Calibri"/>
-                        </a:rPr>
-                        <a:t>Drift window scored the baseline's own rows as live traffic: healthy drift read 0.02, honestly 0.18</a:t>
-                      </a:r>
-                    </a:p>
-                  </a:txBody>
-                  <a:tcPr marL="63500" marR="63500" marT="38100" marB="38100">
-                    <a:noFill/>
-                  </a:tcPr>
-                </a:tc>
-                <a:tc>
-                  <a:txBody>
-                    <a:bodyPr wrap="square"/>
-                    <a:lstStyle/>
-                    <a:p>
-                      <a:r>
-                        <a:rPr sz="1100" b="0">
-                          <a:latin typeface="Calibri"/>
-                        </a:rPr>
-                        <a:t>Window starts at the current baseline; regression test</a:t>
-                      </a:r>
-                    </a:p>
-                  </a:txBody>
-                  <a:tcPr marL="63500" marR="63500" marT="38100" marB="38100">
-                    <a:noFill/>
-                  </a:tcPr>
-                </a:tc>
-              </a:tr>
-            </a:tbl>
-          </a:graphicData>
-        </a:graphic>
-      </p:graphicFrame>
-    </p:spTree>
-    <p:extLst>
-      <p:ext uri="{BB962C8B-B14F-4D97-AF65-F5344CB8AC3E}">
-        <p14:creationId xmlns:p14="http://schemas.microsoft.com/office/powerpoint/2010/main" val="3231882420"/>
-      </p:ext>
-    </p:extLst>
-  </p:cSld>
-  <p:clrMapOvr>
-    <a:masterClrMapping/>
-  </p:clrMapOvr>
-</p:sld>
-</file>
-
-<file path=ppt/slides/slide22.xml><?xml version="1.0" encoding="utf-8"?>
-<p:sld xmlns:a="http://schemas.openxmlformats.org/drawingml/2006/main" xmlns:r="http://schemas.openxmlformats.org/officeDocument/2006/relationships" xmlns:p="http://schemas.openxmlformats.org/presentationml/2006/main">
-  <p:cSld>
-    <p:spTree>
-      <p:nvGrpSpPr>
-        <p:cNvPr id="1" name=""/>
-        <p:cNvGrpSpPr/>
-        <p:nvPr/>
-      </p:nvGrpSpPr>
-      <p:grpSpPr>
-        <a:xfrm>
-          <a:off x="0" y="0"/>
-          <a:ext cx="0" cy="0"/>
-          <a:chOff x="0" y="0"/>
-          <a:chExt cx="0" cy="0"/>
-        </a:xfrm>
-      </p:grpSpPr>
-      <p:sp>
-        <p:nvSpPr>
-          <p:cNvPr id="2" name="Title 1">
-            <a:extLst>
-              <a:ext uri="{FF2B5EF4-FFF2-40B4-BE49-F238E27FC236}">
-                <a16:creationId xmlns:a16="http://schemas.microsoft.com/office/drawing/2014/main" id="{BD1A189D-22D1-4D1A-9E04-C6134EC51F8B}"/>
-              </a:ext>
-            </a:extLst>
-          </p:cNvPr>
-          <p:cNvSpPr>
-            <a:spLocks noGrp="1"/>
-          </p:cNvSpPr>
-          <p:nvPr>
-            <p:ph type="ctrTitle"/>
-          </p:nvPr>
-        </p:nvSpPr>
-        <p:spPr>
-          <a:xfrm>
-            <a:off x="1684868" y="203198"/>
-            <a:ext cx="9694332" cy="880535"/>
-          </a:xfrm>
-        </p:spPr>
-        <p:txBody>
-          <a:bodyPr>
-            <a:normAutofit/>
-          </a:bodyPr>
-          <a:lstStyle/>
-          <a:p>
-            <a:pPr marL="0" indent="0" algn="l">
-              <a:spcBef>
-                <a:spcPts val="0"/>
-              </a:spcBef>
-              <a:buNone/>
-            </a:pPr>
-            <a:r>
-              <a:rPr lang="en-US" sz="3200" b="1" i="0" dirty="0">
-                <a:latin typeface="Calibri" panose="020F0502020204030204" pitchFamily="34" charset="0"/>
-                <a:ea typeface="Calibri" panose="020F0502020204030204" pitchFamily="34" charset="0"/>
-                <a:cs typeface="Calibri" panose="020F0502020204030204" pitchFamily="34" charset="0"/>
-              </a:rPr>
-              <a:t>Governed Self-Healing — Built</a:t>
-            </a:r>
-          </a:p>
-        </p:txBody>
-      </p:sp>
-      <p:sp>
-        <p:nvSpPr>
-          <p:cNvPr id="3" name="Subtitle 2">
-            <a:extLst>
-              <a:ext uri="{FF2B5EF4-FFF2-40B4-BE49-F238E27FC236}">
-                <a16:creationId xmlns:a16="http://schemas.microsoft.com/office/drawing/2014/main" id="{255E737C-85F2-47BC-AD38-AD8B001473B7}"/>
-              </a:ext>
-            </a:extLst>
-          </p:cNvPr>
-          <p:cNvSpPr>
-            <a:spLocks noGrp="1"/>
-          </p:cNvSpPr>
-          <p:nvPr>
-            <p:ph type="subTitle" idx="1"/>
-          </p:nvPr>
-        </p:nvSpPr>
-        <p:spPr>
-          <a:xfrm>
-            <a:off x="1684867" y="1574800"/>
-            <a:ext cx="9694333" cy="4614333"/>
-          </a:xfrm>
-        </p:spPr>
-        <p:txBody>
-          <a:bodyPr>
-            <a:normAutofit/>
-          </a:bodyPr>
-          <a:lstStyle/>
-          <a:p>
-            <a:pPr marL="0" indent="0" algn="l">
-              <a:spcBef>
-                <a:spcPts val="0"/>
-              </a:spcBef>
-              <a:buNone/>
-            </a:pPr>
-            <a:r>
-              <a:rPr lang="en-US" sz="1300" b="0" i="0" dirty="0">
-                <a:latin typeface="Calibri" panose="020F0502020204030204" pitchFamily="34" charset="0"/>
-                <a:ea typeface="Calibri" panose="020F0502020204030204" pitchFamily="34" charset="0"/>
-                <a:cs typeface="Calibri" panose="020F0502020204030204" pitchFamily="34" charset="0"/>
-              </a:rPr>
-              <a:t>Drift is a poor per-decision gate but a strong alarm, so Custos now acts on it: it tells a broken data feed from a real population shift, proposes a repair, shadow-tests it on real decisions, and applies it only when a named person approves. Domain-agnostic — any model whose output triggers an action.</a:t>
-            </a:r>
-          </a:p>
-        </p:txBody>
-      </p:sp>
-      <p:pic>
-        <p:nvPicPr>
-          <p:cNvPr id="5" name="Graphic 4">
-            <a:extLst>
-              <a:ext uri="{FF2B5EF4-FFF2-40B4-BE49-F238E27FC236}">
-                <a16:creationId xmlns:a16="http://schemas.microsoft.com/office/drawing/2014/main" id="{E7125167-8301-4D88-B79A-A8DA3C19E0D6}"/>
-              </a:ext>
-            </a:extLst>
-          </p:cNvPr>
-          <p:cNvPicPr>
-            <a:picLocks noChangeAspect="1"/>
-          </p:cNvPicPr>
-          <p:nvPr/>
-        </p:nvPicPr>
-        <p:blipFill>
-          <a:blip r:embed="rId2">
-            <a:extLst>
-              <a:ext uri="{96DAC541-7B7A-43D3-8B79-37D633B846F1}">
-                <asvg:svgBlip xmlns:asvg="http://schemas.microsoft.com/office/drawing/2016/SVG/main" r:embed="rId3"/>
-              </a:ext>
-            </a:extLst>
-          </a:blip>
-          <a:stretch>
-            <a:fillRect/>
-          </a:stretch>
-        </p:blipFill>
-        <p:spPr>
-          <a:xfrm>
-            <a:off x="127001" y="86782"/>
-            <a:ext cx="1159932" cy="1159932"/>
-          </a:xfrm>
-          <a:prstGeom prst="rect">
-            <a:avLst/>
-          </a:prstGeom>
-        </p:spPr>
-      </p:pic>
-      <p:sp>
-        <p:nvSpPr>
-          <p:cNvPr id="4" name="Date Placeholder 3">
-            <a:extLst>
-              <a:ext uri="{FF2B5EF4-FFF2-40B4-BE49-F238E27FC236}">
-                <a16:creationId xmlns:a16="http://schemas.microsoft.com/office/drawing/2014/main" id="{35032362-C5A5-4DBF-AD79-DE6FB7439999}"/>
-              </a:ext>
-            </a:extLst>
-          </p:cNvPr>
-          <p:cNvSpPr>
-            <a:spLocks noGrp="1"/>
-          </p:cNvSpPr>
-          <p:nvPr>
-            <p:ph type="dt" sz="half" idx="10"/>
-          </p:nvPr>
-        </p:nvSpPr>
-        <p:spPr/>
-        <p:txBody>
-          <a:bodyPr/>
-          <a:lstStyle/>
-          <a:p>
-            <a:fld id="{64C96E34-94C0-49E4-A53B-4A44141FD3C8}" type="datetime3">
-              <a:rPr lang="en-US" smtClean="0"/>
-              <a:t>17 October 2026</a:t>
-            </a:fld>
-            <a:endParaRPr lang="en-US" dirty="0"/>
-          </a:p>
-        </p:txBody>
-      </p:sp>
-      <p:sp>
-        <p:nvSpPr>
-          <p:cNvPr id="6" name="Slide Number Placeholder 5">
-            <a:extLst>
-              <a:ext uri="{FF2B5EF4-FFF2-40B4-BE49-F238E27FC236}">
-                <a16:creationId xmlns:a16="http://schemas.microsoft.com/office/drawing/2014/main" id="{115AAB64-5B51-4B5A-B69E-D96362CE6E74}"/>
-              </a:ext>
-            </a:extLst>
-          </p:cNvPr>
-          <p:cNvSpPr>
-            <a:spLocks noGrp="1"/>
-          </p:cNvSpPr>
-          <p:nvPr>
-            <p:ph type="sldNum" sz="quarter" idx="12"/>
-          </p:nvPr>
-        </p:nvSpPr>
-        <p:spPr/>
-        <p:txBody>
-          <a:bodyPr/>
-          <a:lstStyle/>
-          <a:p>
-            <a:fld id="{D57F1E4F-1CFF-5643-939E-217C01CDF565}" type="slidenum">
-              <a:rPr lang="en-US" smtClean="0"/>
-              <a:pPr/>
-              <a:t>3</a:t>
-            </a:fld>
-            <a:endParaRPr lang="en-US" dirty="0"/>
-          </a:p>
-        </p:txBody>
-      </p:sp>
-      <p:sp>
-        <p:nvSpPr>
-          <p:cNvPr id="7" name="Footer Placeholder 6">
-            <a:extLst>
-              <a:ext uri="{FF2B5EF4-FFF2-40B4-BE49-F238E27FC236}">
-                <a16:creationId xmlns:a16="http://schemas.microsoft.com/office/drawing/2014/main" id="{8683C6DF-27D9-468B-A1AB-FE568488FE57}"/>
-              </a:ext>
-            </a:extLst>
-          </p:cNvPr>
-          <p:cNvSpPr>
-            <a:spLocks noGrp="1"/>
-          </p:cNvSpPr>
-          <p:nvPr>
-            <p:ph type="ftr" sz="quarter" idx="11"/>
-          </p:nvPr>
-        </p:nvSpPr>
-        <p:spPr/>
-        <p:txBody>
-          <a:bodyPr/>
-          <a:lstStyle/>
-          <a:p>
-            <a:r>
-              <a:rPr lang="en-US"/>
-              <a:t>Dept of AI &amp; DS</a:t>
-            </a:r>
-            <a:endParaRPr lang="en-US" dirty="0"/>
-          </a:p>
-        </p:txBody>
-      </p:sp>
-      <p:pic>
-        <p:nvPicPr>
-          <p:cNvPr id="8" name="Picture 7" descr="self_healing_loop.png"/>
-          <p:cNvPicPr>
-            <a:picLocks noChangeAspect="1"/>
-          </p:cNvPicPr>
-          <p:nvPr/>
-        </p:nvPicPr>
-        <p:blipFill>
-          <a:blip r:embed="rId4"/>
-          <a:stretch>
-            <a:fillRect/>
-          </a:stretch>
-        </p:blipFill>
-        <p:spPr>
-          <a:xfrm>
-            <a:off x="1066647" y="2606040"/>
-            <a:ext cx="10058400" cy="2011680"/>
-          </a:xfrm>
-          <a:prstGeom prst="rect">
-            <a:avLst/>
-          </a:prstGeom>
-        </p:spPr>
-      </p:pic>
-    </p:spTree>
-    <p:extLst>
-      <p:ext uri="{BB962C8B-B14F-4D97-AF65-F5344CB8AC3E}">
-        <p14:creationId xmlns:p14="http://schemas.microsoft.com/office/powerpoint/2010/main" val="3231882420"/>
-      </p:ext>
-    </p:extLst>
-  </p:cSld>
-  <p:clrMapOvr>
-    <a:masterClrMapping/>
-  </p:clrMapOvr>
-</p:sld>
-</file>
-
-<file path=ppt/slides/slide23.xml><?xml version="1.0" encoding="utf-8"?>
-<p:sld xmlns:a="http://schemas.openxmlformats.org/drawingml/2006/main" xmlns:r="http://schemas.openxmlformats.org/officeDocument/2006/relationships" xmlns:p="http://schemas.openxmlformats.org/presentationml/2006/main">
-  <p:cSld>
-    <p:spTree>
-      <p:nvGrpSpPr>
-        <p:cNvPr id="1" name=""/>
-        <p:cNvGrpSpPr/>
-        <p:nvPr/>
-      </p:nvGrpSpPr>
-      <p:grpSpPr>
-        <a:xfrm>
-          <a:off x="0" y="0"/>
-          <a:ext cx="0" cy="0"/>
-          <a:chOff x="0" y="0"/>
-          <a:chExt cx="0" cy="0"/>
-        </a:xfrm>
-      </p:grpSpPr>
-      <p:sp>
-        <p:nvSpPr>
-          <p:cNvPr id="2" name="Title 1">
-            <a:extLst>
-              <a:ext uri="{FF2B5EF4-FFF2-40B4-BE49-F238E27FC236}">
-                <a16:creationId xmlns:a16="http://schemas.microsoft.com/office/drawing/2014/main" id="{BD1A189D-22D1-4D1A-9E04-C6134EC51F8B}"/>
-              </a:ext>
-            </a:extLst>
-          </p:cNvPr>
-          <p:cNvSpPr>
-            <a:spLocks noGrp="1"/>
-          </p:cNvSpPr>
-          <p:nvPr>
-            <p:ph type="ctrTitle"/>
-          </p:nvPr>
-        </p:nvSpPr>
-        <p:spPr>
-          <a:xfrm>
-            <a:off x="1684868" y="203198"/>
-            <a:ext cx="9694332" cy="880535"/>
-          </a:xfrm>
-        </p:spPr>
-        <p:txBody>
-          <a:bodyPr>
-            <a:normAutofit/>
-          </a:bodyPr>
-          <a:lstStyle/>
-          <a:p>
-            <a:pPr marL="0" indent="0" algn="l">
-              <a:spcBef>
-                <a:spcPts val="0"/>
-              </a:spcBef>
-              <a:buNone/>
-            </a:pPr>
-            <a:r>
-              <a:rPr lang="en-US" sz="3200" b="1" i="0" dirty="0">
-                <a:latin typeface="Calibri" panose="020F0502020204030204" pitchFamily="34" charset="0"/>
-                <a:ea typeface="Calibri" panose="020F0502020204030204" pitchFamily="34" charset="0"/>
-                <a:cs typeface="Calibri" panose="020F0502020204030204" pitchFamily="34" charset="0"/>
-              </a:rPr>
-              <a:t>Beyond Lending — Where Custos Applies</a:t>
-            </a:r>
-          </a:p>
-        </p:txBody>
-      </p:sp>
-      <p:sp>
-        <p:nvSpPr>
-          <p:cNvPr id="3" name="Subtitle 2">
-            <a:extLst>
-              <a:ext uri="{FF2B5EF4-FFF2-40B4-BE49-F238E27FC236}">
-                <a16:creationId xmlns:a16="http://schemas.microsoft.com/office/drawing/2014/main" id="{255E737C-85F2-47BC-AD38-AD8B001473B7}"/>
-              </a:ext>
-            </a:extLst>
-          </p:cNvPr>
-          <p:cNvSpPr>
-            <a:spLocks noGrp="1"/>
-          </p:cNvSpPr>
-          <p:nvPr>
-            <p:ph type="subTitle" idx="1"/>
-          </p:nvPr>
-        </p:nvSpPr>
-        <p:spPr>
-          <a:xfrm>
-            <a:off x="1684867" y="1574800"/>
-            <a:ext cx="9694333" cy="4614333"/>
-          </a:xfrm>
-        </p:spPr>
-        <p:txBody>
-          <a:bodyPr>
-            <a:normAutofit/>
-          </a:bodyPr>
-          <a:lstStyle/>
-          <a:p>
-            <a:pPr marL="0" indent="0" algn="l">
-              <a:spcBef>
-                <a:spcPts val="0"/>
-              </a:spcBef>
-              <a:buNone/>
-            </a:pPr>
-            <a:r>
-              <a:rPr lang="en-US" sz="1300" b="0" i="0" dirty="0">
-                <a:latin typeface="Calibri" panose="020F0502020204030204" pitchFamily="34" charset="0"/>
-                <a:ea typeface="Calibri" panose="020F0502020204030204" pitchFamily="34" charset="0"/>
-                <a:cs typeface="Calibri" panose="020F0502020204030204" pitchFamily="34" charset="0"/>
-              </a:rPr>
-              <a:t>Custos gates any model whose output triggers an action that can be allowed, held for a person, or blocked. A new domain is configuration — inputs, context, rules, weights — not code. Two are demonstrated; the rest are stated, not claimed.</a:t>
-            </a:r>
-          </a:p>
-        </p:txBody>
-      </p:sp>
-      <p:pic>
-        <p:nvPicPr>
-          <p:cNvPr id="5" name="Graphic 4">
-            <a:extLst>
-              <a:ext uri="{FF2B5EF4-FFF2-40B4-BE49-F238E27FC236}">
-                <a16:creationId xmlns:a16="http://schemas.microsoft.com/office/drawing/2014/main" id="{E7125167-8301-4D88-B79A-A8DA3C19E0D6}"/>
-              </a:ext>
-            </a:extLst>
-          </p:cNvPr>
-          <p:cNvPicPr>
-            <a:picLocks noChangeAspect="1"/>
-          </p:cNvPicPr>
-          <p:nvPr/>
-        </p:nvPicPr>
-        <p:blipFill>
-          <a:blip r:embed="rId2">
-            <a:extLst>
-              <a:ext uri="{96DAC541-7B7A-43D3-8B79-37D633B846F1}">
-                <asvg:svgBlip xmlns:asvg="http://schemas.microsoft.com/office/drawing/2016/SVG/main" r:embed="rId3"/>
-              </a:ext>
-            </a:extLst>
-          </a:blip>
-          <a:stretch>
-            <a:fillRect/>
-          </a:stretch>
-        </p:blipFill>
-        <p:spPr>
-          <a:xfrm>
-            <a:off x="127001" y="86782"/>
-            <a:ext cx="1159932" cy="1159932"/>
-          </a:xfrm>
-          <a:prstGeom prst="rect">
-            <a:avLst/>
-          </a:prstGeom>
-        </p:spPr>
-      </p:pic>
-      <p:sp>
-        <p:nvSpPr>
-          <p:cNvPr id="4" name="Date Placeholder 3">
-            <a:extLst>
-              <a:ext uri="{FF2B5EF4-FFF2-40B4-BE49-F238E27FC236}">
-                <a16:creationId xmlns:a16="http://schemas.microsoft.com/office/drawing/2014/main" id="{35032362-C5A5-4DBF-AD79-DE6FB7439999}"/>
-              </a:ext>
-            </a:extLst>
-          </p:cNvPr>
-          <p:cNvSpPr>
-            <a:spLocks noGrp="1"/>
-          </p:cNvSpPr>
-          <p:nvPr>
-            <p:ph type="dt" sz="half" idx="10"/>
-          </p:nvPr>
-        </p:nvSpPr>
-        <p:spPr/>
-        <p:txBody>
-          <a:bodyPr/>
-          <a:lstStyle/>
-          <a:p>
-            <a:fld id="{64C96E34-94C0-49E4-A53B-4A44141FD3C8}" type="datetime3">
-              <a:rPr lang="en-US" smtClean="0"/>
-              <a:t>17 October 2026</a:t>
-            </a:fld>
-            <a:endParaRPr lang="en-US" dirty="0"/>
-          </a:p>
-        </p:txBody>
-      </p:sp>
-      <p:sp>
-        <p:nvSpPr>
-          <p:cNvPr id="6" name="Slide Number Placeholder 5">
-            <a:extLst>
-              <a:ext uri="{FF2B5EF4-FFF2-40B4-BE49-F238E27FC236}">
-                <a16:creationId xmlns:a16="http://schemas.microsoft.com/office/drawing/2014/main" id="{115AAB64-5B51-4B5A-B69E-D96362CE6E74}"/>
-              </a:ext>
-            </a:extLst>
-          </p:cNvPr>
-          <p:cNvSpPr>
-            <a:spLocks noGrp="1"/>
-          </p:cNvSpPr>
-          <p:nvPr>
-            <p:ph type="sldNum" sz="quarter" idx="12"/>
-          </p:nvPr>
-        </p:nvSpPr>
-        <p:spPr/>
-        <p:txBody>
-          <a:bodyPr/>
-          <a:lstStyle/>
-          <a:p>
-            <a:fld id="{D57F1E4F-1CFF-5643-939E-217C01CDF565}" type="slidenum">
-              <a:rPr lang="en-US" smtClean="0"/>
-              <a:pPr/>
-              <a:t>3</a:t>
-            </a:fld>
-            <a:endParaRPr lang="en-US" dirty="0"/>
-          </a:p>
-        </p:txBody>
-      </p:sp>
-      <p:sp>
-        <p:nvSpPr>
-          <p:cNvPr id="7" name="Footer Placeholder 6">
-            <a:extLst>
-              <a:ext uri="{FF2B5EF4-FFF2-40B4-BE49-F238E27FC236}">
-                <a16:creationId xmlns:a16="http://schemas.microsoft.com/office/drawing/2014/main" id="{8683C6DF-27D9-468B-A1AB-FE568488FE57}"/>
-              </a:ext>
-            </a:extLst>
-          </p:cNvPr>
-          <p:cNvSpPr>
-            <a:spLocks noGrp="1"/>
-          </p:cNvSpPr>
-          <p:nvPr>
-            <p:ph type="ftr" sz="quarter" idx="11"/>
-          </p:nvPr>
-        </p:nvSpPr>
-        <p:spPr/>
-        <p:txBody>
-          <a:bodyPr/>
-          <a:lstStyle/>
-          <a:p>
-            <a:r>
-              <a:rPr lang="en-US"/>
-              <a:t>Dept of AI &amp; DS</a:t>
-            </a:r>
-            <a:endParaRPr lang="en-US" dirty="0"/>
-          </a:p>
-        </p:txBody>
-      </p:sp>
-      <p:graphicFrame>
-        <p:nvGraphicFramePr>
-          <p:cNvPr id="8" name="Table 7"/>
-          <p:cNvGraphicFramePr>
-            <a:graphicFrameLocks noGrp="1"/>
-          </p:cNvGraphicFramePr>
-          <p:nvPr/>
-        </p:nvGraphicFramePr>
-        <p:xfrm>
-          <a:off x="960120" y="2331720"/>
-          <a:ext cx="10241278" cy="177800"/>
-        </p:xfrm>
-        <a:graphic>
-          <a:graphicData uri="http://schemas.openxmlformats.org/drawingml/2006/table">
-            <a:tbl>
-              <a:tblPr firstRow="1">
-                <a:tableStyleId>{5C22544A-7EE6-4342-B048-85BDC9FD1C3A}</a:tableStyleId>
-              </a:tblPr>
-              <a:tblGrid>
-                <a:gridCol w="1741017"/>
-                <a:gridCol w="2560320"/>
-                <a:gridCol w="3277209"/>
-                <a:gridCol w="2662732"/>
-              </a:tblGrid>
-              <a:tr h="25400">
-                <a:tc>
-                  <a:txBody>
-                    <a:bodyPr wrap="square"/>
-                    <a:lstStyle/>
-                    <a:p>
-                      <a:r>
-                        <a:rPr sz="1100" b="1">
-                          <a:solidFill>
-                            <a:srgbClr val="FFFFFF"/>
-                          </a:solidFill>
-                          <a:latin typeface="Calibri"/>
-                        </a:rPr>
-                        <a:t>Domain</a:t>
-                      </a:r>
-                    </a:p>
-                  </a:txBody>
-                  <a:tcPr marL="63500" marR="63500" marT="38100" marB="38100">
-                    <a:solidFill>
-                      <a:srgbClr val="1F5CA8"/>
-                    </a:solidFill>
-                  </a:tcPr>
-                </a:tc>
-                <a:tc>
-                  <a:txBody>
-                    <a:bodyPr wrap="square"/>
-                    <a:lstStyle/>
-                    <a:p>
-                      <a:r>
-                        <a:rPr sz="1100" b="1">
-                          <a:solidFill>
-                            <a:srgbClr val="FFFFFF"/>
-                          </a:solidFill>
-                          <a:latin typeface="Calibri"/>
-                        </a:rPr>
-                        <a:t>Action Custos gates</a:t>
-                      </a:r>
-                    </a:p>
-                  </a:txBody>
-                  <a:tcPr marL="63500" marR="63500" marT="38100" marB="38100">
-                    <a:solidFill>
-                      <a:srgbClr val="1F5CA8"/>
-                    </a:solidFill>
-                  </a:tcPr>
-                </a:tc>
-                <a:tc>
-                  <a:txBody>
-                    <a:bodyPr wrap="square"/>
-                    <a:lstStyle/>
-                    <a:p>
-                      <a:r>
-                        <a:rPr sz="1100" b="1">
-                          <a:solidFill>
-                            <a:srgbClr val="FFFFFF"/>
-                          </a:solidFill>
-                          <a:latin typeface="Calibri"/>
-                        </a:rPr>
-                        <a:t>What it catches</a:t>
-                      </a:r>
-                    </a:p>
-                  </a:txBody>
-                  <a:tcPr marL="63500" marR="63500" marT="38100" marB="38100">
-                    <a:solidFill>
-                      <a:srgbClr val="1F5CA8"/>
-                    </a:solidFill>
-                  </a:tcPr>
-                </a:tc>
-                <a:tc>
-                  <a:txBody>
-                    <a:bodyPr wrap="square"/>
-                    <a:lstStyle/>
-                    <a:p>
-                      <a:r>
-                        <a:rPr sz="1100" b="1">
-                          <a:solidFill>
-                            <a:srgbClr val="FFFFFF"/>
-                          </a:solidFill>
-                          <a:latin typeface="Calibri"/>
-                        </a:rPr>
-                        <a:t>Status</a:t>
-                      </a:r>
-                    </a:p>
-                  </a:txBody>
-                  <a:tcPr marL="63500" marR="63500" marT="38100" marB="38100">
-                    <a:solidFill>
-                      <a:srgbClr val="1F5CA8"/>
-                    </a:solidFill>
-                  </a:tcPr>
-                </a:tc>
-              </a:tr>
-              <a:tr h="25400">
-                <a:tc>
-                  <a:txBody>
-                    <a:bodyPr wrap="square"/>
-                    <a:lstStyle/>
-                    <a:p>
-                      <a:r>
-                        <a:rPr sz="1100" b="0">
-                          <a:latin typeface="Calibri"/>
-                        </a:rPr>
-                        <a:t>Lending</a:t>
-                      </a:r>
-                    </a:p>
-                  </a:txBody>
-                  <a:tcPr marL="63500" marR="63500" marT="38100" marB="38100">
-                    <a:noFill/>
-                  </a:tcPr>
-                </a:tc>
-                <a:tc>
-                  <a:txBody>
-                    <a:bodyPr wrap="square"/>
-                    <a:lstStyle/>
-                    <a:p>
-                      <a:r>
-                        <a:rPr sz="1100" b="0">
-                          <a:latin typeface="Calibri"/>
-                        </a:rPr>
-                        <a:t>Approve or disburse a loan</a:t>
-                      </a:r>
-                    </a:p>
-                  </a:txBody>
-                  <a:tcPr marL="63500" marR="63500" marT="38100" marB="38100">
-                    <a:noFill/>
-                  </a:tcPr>
-                </a:tc>
-                <a:tc>
-                  <a:txBody>
-                    <a:bodyPr wrap="square"/>
-                    <a:lstStyle/>
-                    <a:p>
-                      <a:r>
-                        <a:rPr sz="1100" b="0">
-                          <a:latin typeface="Calibri"/>
-                        </a:rPr>
-                        <a:t>Population drift, unusual amounts, policy limits</a:t>
-                      </a:r>
-                    </a:p>
-                  </a:txBody>
-                  <a:tcPr marL="63500" marR="63500" marT="38100" marB="38100">
-                    <a:noFill/>
-                  </a:tcPr>
-                </a:tc>
-                <a:tc>
-                  <a:txBody>
-                    <a:bodyPr wrap="square"/>
-                    <a:lstStyle/>
-                    <a:p>
-                      <a:r>
-                        <a:rPr sz="1100" b="0">
-                          <a:latin typeface="Calibri"/>
-                        </a:rPr>
-                        <a:t>Demonstrated · field study on 589,186 loans · EU AI Act high-risk</a:t>
-                      </a:r>
-                    </a:p>
-                  </a:txBody>
-                  <a:tcPr marL="63500" marR="63500" marT="38100" marB="38100">
-                    <a:noFill/>
-                  </a:tcPr>
-                </a:tc>
-              </a:tr>
-              <a:tr h="25400">
-                <a:tc>
-                  <a:txBody>
-                    <a:bodyPr wrap="square"/>
-                    <a:lstStyle/>
-                    <a:p>
-                      <a:r>
-                        <a:rPr sz="1100" b="0">
-                          <a:latin typeface="Calibri"/>
-                        </a:rPr>
-                        <a:t>AI agents (refunds)</a:t>
-                      </a:r>
-                    </a:p>
-                  </a:txBody>
-                  <a:tcPr marL="63500" marR="63500" marT="38100" marB="38100">
-                    <a:solidFill>
-                      <a:srgbClr val="F4F6F9"/>
-                    </a:solidFill>
-                  </a:tcPr>
-                </a:tc>
-                <a:tc>
-                  <a:txBody>
-                    <a:bodyPr wrap="square"/>
-                    <a:lstStyle/>
-                    <a:p>
-                      <a:r>
-                        <a:rPr sz="1100" b="0">
-                          <a:latin typeface="Calibri"/>
-                        </a:rPr>
-                        <a:t>Any tool action — here, issuing a refund</a:t>
-                      </a:r>
-                    </a:p>
-                  </a:txBody>
-                  <a:tcPr marL="63500" marR="63500" marT="38100" marB="38100">
-                    <a:solidFill>
-                      <a:srgbClr val="F4F6F9"/>
-                    </a:solidFill>
-                  </a:tcPr>
-                </a:tc>
-                <a:tc>
-                  <a:txBody>
-                    <a:bodyPr wrap="square"/>
-                    <a:lstStyle/>
-                    <a:p>
-                      <a:r>
-                        <a:rPr sz="1100" b="0">
-                          <a:latin typeface="Calibri"/>
-                        </a:rPr>
-                        <a:t>Runaway loops, manipulated requests, a fraud ring</a:t>
-                      </a:r>
-                    </a:p>
-                  </a:txBody>
-                  <a:tcPr marL="63500" marR="63500" marT="38100" marB="38100">
-                    <a:solidFill>
-                      <a:srgbClr val="F4F6F9"/>
-                    </a:solidFill>
-                  </a:tcPr>
-                </a:tc>
-                <a:tc>
-                  <a:txBody>
-                    <a:bodyPr wrap="square"/>
-                    <a:lstStyle/>
-                    <a:p>
-                      <a:r>
-                        <a:rPr sz="1100" b="0">
-                          <a:latin typeface="Calibri"/>
-                        </a:rPr>
-                        <a:t>Demonstrated · live demo 3, no code change</a:t>
-                      </a:r>
-                    </a:p>
-                  </a:txBody>
-                  <a:tcPr marL="63500" marR="63500" marT="38100" marB="38100">
-                    <a:solidFill>
-                      <a:srgbClr val="F4F6F9"/>
-                    </a:solidFill>
-                  </a:tcPr>
-                </a:tc>
-              </a:tr>
-              <a:tr h="25400">
-                <a:tc>
-                  <a:txBody>
-                    <a:bodyPr wrap="square"/>
-                    <a:lstStyle/>
-                    <a:p>
-                      <a:r>
-                        <a:rPr sz="1100" b="0">
-                          <a:latin typeface="Calibri"/>
-                        </a:rPr>
-                        <a:t>Dynamic pricing</a:t>
-                      </a:r>
-                    </a:p>
-                  </a:txBody>
-                  <a:tcPr marL="63500" marR="63500" marT="38100" marB="38100">
-                    <a:noFill/>
-                  </a:tcPr>
-                </a:tc>
-                <a:tc>
-                  <a:txBody>
-                    <a:bodyPr wrap="square"/>
-                    <a:lstStyle/>
-                    <a:p>
-                      <a:r>
-                        <a:rPr sz="1100" b="0">
-                          <a:latin typeface="Calibri"/>
-                        </a:rPr>
-                        <a:t>Publish a price</a:t>
-                      </a:r>
-                    </a:p>
-                  </a:txBody>
-                  <a:tcPr marL="63500" marR="63500" marT="38100" marB="38100">
-                    <a:noFill/>
-                  </a:tcPr>
-                </a:tc>
-                <a:tc>
-                  <a:txBody>
-                    <a:bodyPr wrap="square"/>
-                    <a:lstStyle/>
-                    <a:p>
-                      <a:r>
-                        <a:rPr sz="1100" b="0">
-                          <a:latin typeface="Calibri"/>
-                        </a:rPr>
-                        <a:t>A price far outside its normal range; never below cost</a:t>
-                      </a:r>
-                    </a:p>
-                  </a:txBody>
-                  <a:tcPr marL="63500" marR="63500" marT="38100" marB="38100">
-                    <a:noFill/>
-                  </a:tcPr>
-                </a:tc>
-                <a:tc>
-                  <a:txBody>
-                    <a:bodyPr wrap="square"/>
-                    <a:lstStyle/>
-                    <a:p>
-                      <a:r>
-                        <a:rPr sz="1100" b="0">
-                          <a:latin typeface="Calibri"/>
-                        </a:rPr>
-                        <a:t>Applies by configuration</a:t>
-                      </a:r>
-                    </a:p>
-                  </a:txBody>
-                  <a:tcPr marL="63500" marR="63500" marT="38100" marB="38100">
-                    <a:noFill/>
-                  </a:tcPr>
-                </a:tc>
-              </a:tr>
-              <a:tr h="25400">
-                <a:tc>
-                  <a:txBody>
-                    <a:bodyPr wrap="square"/>
-                    <a:lstStyle/>
-                    <a:p>
-                      <a:r>
-                        <a:rPr sz="1100" b="0">
-                          <a:latin typeface="Calibri"/>
-                        </a:rPr>
-                        <a:t>Medical triage</a:t>
-                      </a:r>
-                    </a:p>
-                  </a:txBody>
-                  <a:tcPr marL="63500" marR="63500" marT="38100" marB="38100">
-                    <a:solidFill>
-                      <a:srgbClr val="F4F6F9"/>
-                    </a:solidFill>
-                  </a:tcPr>
-                </a:tc>
-                <a:tc>
-                  <a:txBody>
-                    <a:bodyPr wrap="square"/>
-                    <a:lstStyle/>
-                    <a:p>
-                      <a:r>
-                        <a:rPr sz="1100" b="0">
-                          <a:latin typeface="Calibri"/>
-                        </a:rPr>
-                        <a:t>Route a patient as low priority</a:t>
-                      </a:r>
-                    </a:p>
-                  </a:txBody>
-                  <a:tcPr marL="63500" marR="63500" marT="38100" marB="38100">
-                    <a:solidFill>
-                      <a:srgbClr val="F4F6F9"/>
-                    </a:solidFill>
-                  </a:tcPr>
-                </a:tc>
-                <a:tc>
-                  <a:txBody>
-                    <a:bodyPr wrap="square"/>
-                    <a:lstStyle/>
-                    <a:p>
-                      <a:r>
-                        <a:rPr sz="1100" b="0">
-                          <a:latin typeface="Calibri"/>
-                        </a:rPr>
-                        <a:t>A stuck device feed; red-flag symptoms always to a human</a:t>
-                      </a:r>
-                    </a:p>
-                  </a:txBody>
-                  <a:tcPr marL="63500" marR="63500" marT="38100" marB="38100">
-                    <a:solidFill>
-                      <a:srgbClr val="F4F6F9"/>
-                    </a:solidFill>
-                  </a:tcPr>
-                </a:tc>
-                <a:tc>
-                  <a:txBody>
-                    <a:bodyPr wrap="square"/>
-                    <a:lstStyle/>
-                    <a:p>
-                      <a:r>
-                        <a:rPr sz="1100" b="0">
-                          <a:latin typeface="Calibri"/>
-                        </a:rPr>
-                        <a:t>Applies by configuration · EU AI Act high-risk</a:t>
-                      </a:r>
-                    </a:p>
-                  </a:txBody>
-                  <a:tcPr marL="63500" marR="63500" marT="38100" marB="38100">
-                    <a:solidFill>
-                      <a:srgbClr val="F4F6F9"/>
-                    </a:solidFill>
-                  </a:tcPr>
-                </a:tc>
-              </a:tr>
-              <a:tr h="25400">
-                <a:tc>
-                  <a:txBody>
-                    <a:bodyPr wrap="square"/>
-                    <a:lstStyle/>
-                    <a:p>
-                      <a:r>
-                        <a:rPr sz="1100" b="0">
-                          <a:latin typeface="Calibri"/>
-                        </a:rPr>
-                        <a:t>Hiring and screening</a:t>
-                      </a:r>
-                    </a:p>
-                  </a:txBody>
-                  <a:tcPr marL="63500" marR="63500" marT="38100" marB="38100">
-                    <a:noFill/>
-                  </a:tcPr>
-                </a:tc>
-                <a:tc>
-                  <a:txBody>
-                    <a:bodyPr wrap="square"/>
-                    <a:lstStyle/>
-                    <a:p>
-                      <a:r>
-                        <a:rPr sz="1100" b="0">
-                          <a:latin typeface="Calibri"/>
-                        </a:rPr>
-                        <a:t>Auto-reject a candidate</a:t>
-                      </a:r>
-                    </a:p>
-                  </a:txBody>
-                  <a:tcPr marL="63500" marR="63500" marT="38100" marB="38100">
-                    <a:noFill/>
-                  </a:tcPr>
-                </a:tc>
-                <a:tc>
-                  <a:txBody>
-                    <a:bodyPr wrap="square"/>
-                    <a:lstStyle/>
-                    <a:p>
-                      <a:r>
-                        <a:rPr sz="1100" b="0">
-                          <a:latin typeface="Calibri"/>
-                        </a:rPr>
-                        <a:t>Applicant-pool shift; rule: REVIEW only, never auto-reject</a:t>
-                      </a:r>
-                    </a:p>
-                  </a:txBody>
-                  <a:tcPr marL="63500" marR="63500" marT="38100" marB="38100">
-                    <a:noFill/>
-                  </a:tcPr>
-                </a:tc>
-                <a:tc>
-                  <a:txBody>
-                    <a:bodyPr wrap="square"/>
-                    <a:lstStyle/>
-                    <a:p>
-                      <a:r>
-                        <a:rPr sz="1100" b="0">
-                          <a:latin typeface="Calibri"/>
-                        </a:rPr>
-                        <a:t>Applies by configuration · EU AI Act high-risk</a:t>
-                      </a:r>
-                    </a:p>
-                  </a:txBody>
-                  <a:tcPr marL="63500" marR="63500" marT="38100" marB="38100">
-                    <a:noFill/>
-                  </a:tcPr>
-                </a:tc>
-              </a:tr>
-              <a:tr h="25400">
-                <a:tc>
-                  <a:txBody>
-                    <a:bodyPr wrap="square"/>
-                    <a:lstStyle/>
-                    <a:p>
-                      <a:r>
-                        <a:rPr sz="1100" b="0">
-                          <a:latin typeface="Calibri"/>
-                        </a:rPr>
-                        <a:t>Insurance claims</a:t>
-                      </a:r>
-                    </a:p>
-                  </a:txBody>
-                  <a:tcPr marL="63500" marR="63500" marT="38100" marB="38100">
-                    <a:solidFill>
-                      <a:srgbClr val="F4F6F9"/>
-                    </a:solidFill>
-                  </a:tcPr>
-                </a:tc>
-                <a:tc>
-                  <a:txBody>
-                    <a:bodyPr wrap="square"/>
-                    <a:lstStyle/>
-                    <a:p>
-                      <a:r>
-                        <a:rPr sz="1100" b="0">
-                          <a:latin typeface="Calibri"/>
-                        </a:rPr>
-                        <a:t>Auto-pay a claim</a:t>
-                      </a:r>
-                    </a:p>
-                  </a:txBody>
-                  <a:tcPr marL="63500" marR="63500" marT="38100" marB="38100">
-                    <a:solidFill>
-                      <a:srgbClr val="F4F6F9"/>
-                    </a:solidFill>
-                  </a:tcPr>
-                </a:tc>
-                <a:tc>
-                  <a:txBody>
-                    <a:bodyPr wrap="square"/>
-                    <a:lstStyle/>
-                    <a:p>
-                      <a:r>
-                        <a:rPr sz="1100" b="0">
-                          <a:latin typeface="Calibri"/>
-                        </a:rPr>
-                        <a:t>Claim-mix shift after a disaster; bursts per policy</a:t>
-                      </a:r>
-                    </a:p>
-                  </a:txBody>
-                  <a:tcPr marL="63500" marR="63500" marT="38100" marB="38100">
-                    <a:solidFill>
-                      <a:srgbClr val="F4F6F9"/>
-                    </a:solidFill>
-                  </a:tcPr>
-                </a:tc>
-                <a:tc>
-                  <a:txBody>
-                    <a:bodyPr wrap="square"/>
-                    <a:lstStyle/>
-                    <a:p>
-                      <a:r>
-                        <a:rPr sz="1100" b="0">
-                          <a:latin typeface="Calibri"/>
-                        </a:rPr>
-                        <a:t>Applies by configuration</a:t>
-                      </a:r>
-                    </a:p>
-                  </a:txBody>
-                  <a:tcPr marL="63500" marR="63500" marT="38100" marB="38100">
-                    <a:solidFill>
-                      <a:srgbClr val="F4F6F9"/>
-                    </a:solidFill>
-                  </a:tcPr>
-                </a:tc>
-              </a:tr>
-            </a:tbl>
-          </a:graphicData>
-        </a:graphic>
-      </p:graphicFrame>
-    </p:spTree>
-    <p:extLst>
-      <p:ext uri="{BB962C8B-B14F-4D97-AF65-F5344CB8AC3E}">
-        <p14:creationId xmlns:p14="http://schemas.microsoft.com/office/powerpoint/2010/main" val="3231882420"/>
-      </p:ext>
-    </p:extLst>
-  </p:cSld>
-  <p:clrMapOvr>
-    <a:masterClrMapping/>
-  </p:clrMapOvr>
-</p:sld>
-</file>
-
-<file path=ppt/slides/slide24.xml><?xml version="1.0" encoding="utf-8"?>
-<p:sld xmlns:a="http://schemas.openxmlformats.org/drawingml/2006/main" xmlns:r="http://schemas.openxmlformats.org/officeDocument/2006/relationships" xmlns:p="http://schemas.openxmlformats.org/presentationml/2006/main">
-  <p:cSld>
-    <p:spTree>
-      <p:nvGrpSpPr>
-        <p:cNvPr id="1" name=""/>
-        <p:cNvGrpSpPr/>
-        <p:nvPr/>
-      </p:nvGrpSpPr>
-      <p:grpSpPr>
-        <a:xfrm>
-          <a:off x="0" y="0"/>
-          <a:ext cx="0" cy="0"/>
-          <a:chOff x="0" y="0"/>
-          <a:chExt cx="0" cy="0"/>
-        </a:xfrm>
-      </p:grpSpPr>
-      <p:sp>
-        <p:nvSpPr>
-          <p:cNvPr id="2" name="Title 1">
-            <a:extLst>
-              <a:ext uri="{FF2B5EF4-FFF2-40B4-BE49-F238E27FC236}">
-                <a16:creationId xmlns:a16="http://schemas.microsoft.com/office/drawing/2014/main" id="{BD1A189D-22D1-4D1A-9E04-C6134EC51F8B}"/>
-              </a:ext>
-            </a:extLst>
-          </p:cNvPr>
-          <p:cNvSpPr>
-            <a:spLocks noGrp="1"/>
-          </p:cNvSpPr>
-          <p:nvPr>
-            <p:ph type="ctrTitle"/>
-          </p:nvPr>
-        </p:nvSpPr>
-        <p:spPr>
-          <a:xfrm>
-            <a:off x="1684868" y="203198"/>
-            <a:ext cx="9694332" cy="880535"/>
-          </a:xfrm>
-        </p:spPr>
-        <p:txBody>
-          <a:bodyPr>
-            <a:normAutofit/>
-          </a:bodyPr>
-          <a:lstStyle/>
-          <a:p>
-            <a:pPr marL="0" indent="0" algn="l">
-              <a:spcBef>
-                <a:spcPts val="0"/>
-              </a:spcBef>
-              <a:buNone/>
-            </a:pPr>
-            <a:r>
-              <a:rPr lang="en-US" sz="3200" b="1" i="0" dirty="0">
-                <a:latin typeface="Calibri" panose="020F0502020204030204" pitchFamily="34" charset="0"/>
-                <a:ea typeface="Calibri" panose="020F0502020204030204" pitchFamily="34" charset="0"/>
-                <a:cs typeface="Calibri" panose="020F0502020204030204" pitchFamily="34" charset="0"/>
-              </a:rPr>
-              <a:t>Work Plan to the Final Review</a:t>
-            </a:r>
-          </a:p>
-        </p:txBody>
-      </p:sp>
-      <p:sp>
-        <p:nvSpPr>
-          <p:cNvPr id="3" name="Subtitle 2">
-            <a:extLst>
-              <a:ext uri="{FF2B5EF4-FFF2-40B4-BE49-F238E27FC236}">
-                <a16:creationId xmlns:a16="http://schemas.microsoft.com/office/drawing/2014/main" id="{255E737C-85F2-47BC-AD38-AD8B001473B7}"/>
-              </a:ext>
-            </a:extLst>
-          </p:cNvPr>
-          <p:cNvSpPr>
-            <a:spLocks noGrp="1"/>
-          </p:cNvSpPr>
-          <p:nvPr>
-            <p:ph type="subTitle" idx="1"/>
-          </p:nvPr>
-        </p:nvSpPr>
-        <p:spPr>
-          <a:xfrm>
-            <a:off x="1684867" y="1574800"/>
-            <a:ext cx="9694333" cy="4614333"/>
-          </a:xfrm>
-        </p:spPr>
-        <p:txBody>
-          <a:bodyPr>
-            <a:normAutofit/>
-          </a:bodyPr>
-          <a:lstStyle/>
-          <a:p>
-            <a:pPr marL="0" indent="0" algn="l">
-              <a:spcBef>
-                <a:spcPts val="0"/>
-              </a:spcBef>
-              <a:buNone/>
-            </a:pPr>
-            <a:r>
-              <a:rPr lang="en-US" sz="1400" b="0" i="0" dirty="0">
-                <a:latin typeface="Calibri" panose="020F0502020204030204" pitchFamily="34" charset="0"/>
-                <a:ea typeface="Calibri" panose="020F0502020204030204" pitchFamily="34" charset="0"/>
-                <a:cs typeface="Calibri" panose="020F0502020204030204" pitchFamily="34" charset="0"/>
-              </a:rPr>
-              <a:t>What remains, and what each item depends on.</a:t>
-            </a:r>
-          </a:p>
-        </p:txBody>
-      </p:sp>
-      <p:pic>
-        <p:nvPicPr>
-          <p:cNvPr id="5" name="Graphic 4">
-            <a:extLst>
-              <a:ext uri="{FF2B5EF4-FFF2-40B4-BE49-F238E27FC236}">
-                <a16:creationId xmlns:a16="http://schemas.microsoft.com/office/drawing/2014/main" id="{E7125167-8301-4D88-B79A-A8DA3C19E0D6}"/>
-              </a:ext>
-            </a:extLst>
-          </p:cNvPr>
-          <p:cNvPicPr>
-            <a:picLocks noChangeAspect="1"/>
-          </p:cNvPicPr>
-          <p:nvPr/>
-        </p:nvPicPr>
-        <p:blipFill>
-          <a:blip r:embed="rId2">
-            <a:extLst>
-              <a:ext uri="{96DAC541-7B7A-43D3-8B79-37D633B846F1}">
-                <asvg:svgBlip xmlns:asvg="http://schemas.microsoft.com/office/drawing/2016/SVG/main" r:embed="rId3"/>
-              </a:ext>
-            </a:extLst>
-          </a:blip>
-          <a:stretch>
-            <a:fillRect/>
-          </a:stretch>
-        </p:blipFill>
-        <p:spPr>
-          <a:xfrm>
-            <a:off x="127001" y="86782"/>
-            <a:ext cx="1159932" cy="1159932"/>
-          </a:xfrm>
-          <a:prstGeom prst="rect">
-            <a:avLst/>
-          </a:prstGeom>
-        </p:spPr>
-      </p:pic>
-      <p:sp>
-        <p:nvSpPr>
-          <p:cNvPr id="4" name="Date Placeholder 3">
-            <a:extLst>
-              <a:ext uri="{FF2B5EF4-FFF2-40B4-BE49-F238E27FC236}">
-                <a16:creationId xmlns:a16="http://schemas.microsoft.com/office/drawing/2014/main" id="{35032362-C5A5-4DBF-AD79-DE6FB7439999}"/>
-              </a:ext>
-            </a:extLst>
-          </p:cNvPr>
-          <p:cNvSpPr>
-            <a:spLocks noGrp="1"/>
-          </p:cNvSpPr>
-          <p:nvPr>
-            <p:ph type="dt" sz="half" idx="10"/>
-          </p:nvPr>
-        </p:nvSpPr>
-        <p:spPr/>
-        <p:txBody>
-          <a:bodyPr/>
-          <a:lstStyle/>
-          <a:p>
-            <a:fld id="{64C96E34-94C0-49E4-A53B-4A44141FD3C8}" type="datetime3">
-              <a:rPr lang="en-US" smtClean="0"/>
-              <a:t>17 October 2026</a:t>
-            </a:fld>
-            <a:endParaRPr lang="en-US" dirty="0"/>
-          </a:p>
-        </p:txBody>
-      </p:sp>
-      <p:sp>
-        <p:nvSpPr>
-          <p:cNvPr id="6" name="Slide Number Placeholder 5">
-            <a:extLst>
-              <a:ext uri="{FF2B5EF4-FFF2-40B4-BE49-F238E27FC236}">
-                <a16:creationId xmlns:a16="http://schemas.microsoft.com/office/drawing/2014/main" id="{115AAB64-5B51-4B5A-B69E-D96362CE6E74}"/>
-              </a:ext>
-            </a:extLst>
-          </p:cNvPr>
-          <p:cNvSpPr>
-            <a:spLocks noGrp="1"/>
-          </p:cNvSpPr>
-          <p:nvPr>
-            <p:ph type="sldNum" sz="quarter" idx="12"/>
-          </p:nvPr>
-        </p:nvSpPr>
-        <p:spPr/>
-        <p:txBody>
-          <a:bodyPr/>
-          <a:lstStyle/>
-          <a:p>
-            <a:fld id="{D57F1E4F-1CFF-5643-939E-217C01CDF565}" type="slidenum">
-              <a:rPr lang="en-US" smtClean="0"/>
-              <a:pPr/>
-              <a:t>3</a:t>
-            </a:fld>
-            <a:endParaRPr lang="en-US" dirty="0"/>
-          </a:p>
-        </p:txBody>
-      </p:sp>
-      <p:sp>
-        <p:nvSpPr>
-          <p:cNvPr id="7" name="Footer Placeholder 6">
-            <a:extLst>
-              <a:ext uri="{FF2B5EF4-FFF2-40B4-BE49-F238E27FC236}">
-                <a16:creationId xmlns:a16="http://schemas.microsoft.com/office/drawing/2014/main" id="{8683C6DF-27D9-468B-A1AB-FE568488FE57}"/>
-              </a:ext>
-            </a:extLst>
-          </p:cNvPr>
-          <p:cNvSpPr>
-            <a:spLocks noGrp="1"/>
-          </p:cNvSpPr>
-          <p:nvPr>
-            <p:ph type="ftr" sz="quarter" idx="11"/>
-          </p:nvPr>
-        </p:nvSpPr>
-        <p:spPr/>
-        <p:txBody>
-          <a:bodyPr/>
-          <a:lstStyle/>
-          <a:p>
-            <a:r>
-              <a:rPr lang="en-US"/>
-              <a:t>Dept of AI &amp; DS</a:t>
-            </a:r>
-            <a:endParaRPr lang="en-US" dirty="0"/>
-          </a:p>
-        </p:txBody>
-      </p:sp>
-      <p:graphicFrame>
-        <p:nvGraphicFramePr>
-          <p:cNvPr id="8" name="Table 7"/>
-          <p:cNvGraphicFramePr>
-            <a:graphicFrameLocks noGrp="1"/>
-          </p:cNvGraphicFramePr>
-          <p:nvPr/>
-        </p:nvGraphicFramePr>
-        <p:xfrm>
-          <a:off x="960120" y="2194560"/>
-          <a:ext cx="10241279" cy="203200"/>
-        </p:xfrm>
-        <a:graphic>
-          <a:graphicData uri="http://schemas.openxmlformats.org/drawingml/2006/table">
-            <a:tbl>
-              <a:tblPr firstRow="1">
-                <a:tableStyleId>{5C22544A-7EE6-4342-B048-85BDC9FD1C3A}</a:tableStyleId>
-              </a:tblPr>
-              <a:tblGrid>
-                <a:gridCol w="3072384"/>
-                <a:gridCol w="4915814"/>
-                <a:gridCol w="2253081"/>
-              </a:tblGrid>
-              <a:tr h="25400">
-                <a:tc>
-                  <a:txBody>
-                    <a:bodyPr wrap="square"/>
-                    <a:lstStyle/>
-                    <a:p>
-                      <a:r>
-                        <a:rPr sz="1100" b="1">
-                          <a:solidFill>
-                            <a:srgbClr val="FFFFFF"/>
-                          </a:solidFill>
-                          <a:latin typeface="Calibri"/>
-                        </a:rPr>
-                        <a:t>Item</a:t>
-                      </a:r>
-                    </a:p>
-                  </a:txBody>
-                  <a:tcPr marL="63500" marR="63500" marT="38100" marB="38100">
-                    <a:solidFill>
-                      <a:srgbClr val="1F5CA8"/>
-                    </a:solidFill>
-                  </a:tcPr>
-                </a:tc>
-                <a:tc>
-                  <a:txBody>
-                    <a:bodyPr wrap="square"/>
-                    <a:lstStyle/>
-                    <a:p>
-                      <a:r>
-                        <a:rPr sz="1100" b="1">
-                          <a:solidFill>
-                            <a:srgbClr val="FFFFFF"/>
-                          </a:solidFill>
-                          <a:latin typeface="Calibri"/>
-                        </a:rPr>
-                        <a:t>Why it matters</a:t>
-                      </a:r>
-                    </a:p>
-                  </a:txBody>
-                  <a:tcPr marL="63500" marR="63500" marT="38100" marB="38100">
-                    <a:solidFill>
-                      <a:srgbClr val="1F5CA8"/>
-                    </a:solidFill>
-                  </a:tcPr>
-                </a:tc>
-                <a:tc>
-                  <a:txBody>
-                    <a:bodyPr wrap="square"/>
-                    <a:lstStyle/>
-                    <a:p>
-                      <a:r>
-                        <a:rPr sz="1100" b="1">
-                          <a:solidFill>
-                            <a:srgbClr val="FFFFFF"/>
-                          </a:solidFill>
-                          <a:latin typeface="Calibri"/>
-                        </a:rPr>
-                        <a:t>Depends on</a:t>
-                      </a:r>
-                    </a:p>
-                  </a:txBody>
-                  <a:tcPr marL="63500" marR="63500" marT="38100" marB="38100">
-                    <a:solidFill>
-                      <a:srgbClr val="1F5CA8"/>
-                    </a:solidFill>
-                  </a:tcPr>
-                </a:tc>
-              </a:tr>
-              <a:tr h="25400">
-                <a:tc>
-                  <a:txBody>
-                    <a:bodyPr wrap="square"/>
-                    <a:lstStyle/>
-                    <a:p>
-                      <a:r>
-                        <a:rPr sz="1100" b="0">
-                          <a:latin typeface="Calibri"/>
-                        </a:rPr>
-                        <a:t>Rebuild gating around risk-ranked review</a:t>
-                      </a:r>
-                    </a:p>
-                  </a:txBody>
-                  <a:tcPr marL="63500" marR="63500" marT="38100" marB="38100">
-                    <a:noFill/>
-                  </a:tcPr>
-                </a:tc>
-                <a:tc>
-                  <a:txBody>
-                    <a:bodyPr wrap="square"/>
-                    <a:lstStyle/>
-                    <a:p>
-                      <a:r>
-                        <a:rPr sz="1100" b="0">
-                          <a:latin typeface="Calibri"/>
-                        </a:rPr>
-                        <a:t>On real loans the model's risk ranking caught 2.1× random; drift gating caught less than random</a:t>
-                      </a:r>
-                    </a:p>
-                  </a:txBody>
-                  <a:tcPr marL="63500" marR="63500" marT="38100" marB="38100">
-                    <a:noFill/>
-                  </a:tcPr>
-                </a:tc>
-                <a:tc>
-                  <a:txBody>
-                    <a:bodyPr wrap="square"/>
-                    <a:lstStyle/>
-                    <a:p>
-                      <a:r>
-                        <a:rPr sz="1100" b="0">
-                          <a:latin typeface="Calibri"/>
-                        </a:rPr>
-                        <a:t>—</a:t>
-                      </a:r>
-                    </a:p>
-                  </a:txBody>
-                  <a:tcPr marL="63500" marR="63500" marT="38100" marB="38100">
-                    <a:noFill/>
-                  </a:tcPr>
-                </a:tc>
-              </a:tr>
-              <a:tr h="25400">
-                <a:tc>
-                  <a:txBody>
-                    <a:bodyPr wrap="square"/>
-                    <a:lstStyle/>
-                    <a:p>
-                      <a:r>
-                        <a:rPr sz="1100" b="0">
-                          <a:latin typeface="Calibri"/>
-                        </a:rPr>
-                        <a:t>Replicate on a second credit dataset</a:t>
-                      </a:r>
-                    </a:p>
-                  </a:txBody>
-                  <a:tcPr marL="63500" marR="63500" marT="38100" marB="38100">
-                    <a:solidFill>
-                      <a:srgbClr val="F4F6F9"/>
-                    </a:solidFill>
-                  </a:tcPr>
-                </a:tc>
-                <a:tc>
-                  <a:txBody>
-                    <a:bodyPr wrap="square"/>
-                    <a:lstStyle/>
-                    <a:p>
-                      <a:r>
-                        <a:rPr sz="1100" b="0">
-                          <a:latin typeface="Calibri"/>
-                        </a:rPr>
-                        <a:t>One dataset cannot support a general claim</a:t>
-                      </a:r>
-                    </a:p>
-                  </a:txBody>
-                  <a:tcPr marL="63500" marR="63500" marT="38100" marB="38100">
-                    <a:solidFill>
-                      <a:srgbClr val="F4F6F9"/>
-                    </a:solidFill>
-                  </a:tcPr>
-                </a:tc>
-                <a:tc>
-                  <a:txBody>
-                    <a:bodyPr wrap="square"/>
-                    <a:lstStyle/>
-                    <a:p>
-                      <a:r>
-                        <a:rPr sz="1100" b="0">
-                          <a:latin typeface="Calibri"/>
-                        </a:rPr>
-                        <a:t>Dataset access</a:t>
-                      </a:r>
-                    </a:p>
-                  </a:txBody>
-                  <a:tcPr marL="63500" marR="63500" marT="38100" marB="38100">
-                    <a:solidFill>
-                      <a:srgbClr val="F4F6F9"/>
-                    </a:solidFill>
-                  </a:tcPr>
-                </a:tc>
-              </a:tr>
-              <a:tr h="25400">
-                <a:tc>
-                  <a:txBody>
-                    <a:bodyPr wrap="square"/>
-                    <a:lstStyle/>
-                    <a:p>
-                      <a:r>
-                        <a:rPr sz="1100" b="0">
-                          <a:latin typeface="Calibri"/>
-                        </a:rPr>
-                        <a:t>Scale-out: multiple gateway workers</a:t>
-                      </a:r>
-                    </a:p>
-                  </a:txBody>
-                  <a:tcPr marL="63500" marR="63500" marT="38100" marB="38100">
-                    <a:noFill/>
-                  </a:tcPr>
-                </a:tc>
-                <a:tc>
-                  <a:txBody>
-                    <a:bodyPr wrap="square"/>
-                    <a:lstStyle/>
-                    <a:p>
-                      <a:r>
-                        <a:rPr sz="1100" b="0">
-                          <a:latin typeface="Calibri"/>
-                        </a:rPr>
-                        <a:t>One process saturates near 300 req/s; past that, requests queue before the gate can see them</a:t>
-                      </a:r>
-                    </a:p>
-                  </a:txBody>
-                  <a:tcPr marL="63500" marR="63500" marT="38100" marB="38100">
-                    <a:noFill/>
-                  </a:tcPr>
-                </a:tc>
-                <a:tc>
-                  <a:txBody>
-                    <a:bodyPr wrap="square"/>
-                    <a:lstStyle/>
-                    <a:p>
-                      <a:r>
-                        <a:rPr sz="1100" b="0">
-                          <a:latin typeface="Calibri"/>
-                        </a:rPr>
-                        <a:t>Postgres for shared state</a:t>
-                      </a:r>
-                    </a:p>
-                  </a:txBody>
-                  <a:tcPr marL="63500" marR="63500" marT="38100" marB="38100">
-                    <a:noFill/>
-                  </a:tcPr>
-                </a:tc>
-              </a:tr>
-              <a:tr h="25400">
-                <a:tc>
-                  <a:txBody>
-                    <a:bodyPr wrap="square"/>
-                    <a:lstStyle/>
-                    <a:p>
-                      <a:r>
-                        <a:rPr sz="1100" b="0">
-                          <a:latin typeface="Calibri"/>
-                        </a:rPr>
-                        <a:t>Postgres load measurement</a:t>
-                      </a:r>
-                    </a:p>
-                  </a:txBody>
-                  <a:tcPr marL="63500" marR="63500" marT="38100" marB="38100">
-                    <a:solidFill>
-                      <a:srgbClr val="F4F6F9"/>
-                    </a:solidFill>
-                  </a:tcPr>
-                </a:tc>
-                <a:tc>
-                  <a:txBody>
-                    <a:bodyPr wrap="square"/>
-                    <a:lstStyle/>
-                    <a:p>
-                      <a:r>
-                        <a:rPr sz="1100" b="0">
-                          <a:latin typeface="Calibri"/>
-                        </a:rPr>
-                        <a:t>SQLite is the pessimistic floor; production runs Postgres</a:t>
-                      </a:r>
-                    </a:p>
-                  </a:txBody>
-                  <a:tcPr marL="63500" marR="63500" marT="38100" marB="38100">
-                    <a:solidFill>
-                      <a:srgbClr val="F4F6F9"/>
-                    </a:solidFill>
-                  </a:tcPr>
-                </a:tc>
-                <a:tc>
-                  <a:txBody>
-                    <a:bodyPr wrap="square"/>
-                    <a:lstStyle/>
-                    <a:p>
-                      <a:r>
-                        <a:rPr sz="1100" b="0">
-                          <a:latin typeface="Calibri"/>
-                        </a:rPr>
-                        <a:t>Docker</a:t>
-                      </a:r>
-                    </a:p>
-                  </a:txBody>
-                  <a:tcPr marL="63500" marR="63500" marT="38100" marB="38100">
-                    <a:solidFill>
-                      <a:srgbClr val="F4F6F9"/>
-                    </a:solidFill>
-                  </a:tcPr>
-                </a:tc>
-              </a:tr>
-              <a:tr h="25400">
-                <a:tc>
-                  <a:txBody>
-                    <a:bodyPr wrap="square"/>
-                    <a:lstStyle/>
-                    <a:p>
-                      <a:r>
-                        <a:rPr sz="1100" b="0">
-                          <a:latin typeface="Calibri"/>
-                        </a:rPr>
-                        <a:t>Self-healing: more fault signatures (unit change, partial outage)</a:t>
-                      </a:r>
-                    </a:p>
-                  </a:txBody>
-                  <a:tcPr marL="63500" marR="63500" marT="38100" marB="38100">
-                    <a:noFill/>
-                  </a:tcPr>
-                </a:tc>
-                <a:tc>
-                  <a:txBody>
-                    <a:bodyPr wrap="square"/>
-                    <a:lstStyle/>
-                    <a:p>
-                      <a:r>
-                        <a:rPr sz="1100" b="0">
-                          <a:latin typeface="Calibri"/>
-                        </a:rPr>
-                        <a:t>Today only stuck and missing feeds are diagnosed; a feed that is wrong but still varies reads as a shift</a:t>
-                      </a:r>
-                    </a:p>
-                  </a:txBody>
-                  <a:tcPr marL="63500" marR="63500" marT="38100" marB="38100">
-                    <a:noFill/>
-                  </a:tcPr>
-                </a:tc>
-                <a:tc>
-                  <a:txBody>
-                    <a:bodyPr wrap="square"/>
-                    <a:lstStyle/>
-                    <a:p>
-                      <a:r>
-                        <a:rPr sz="1100" b="0">
-                          <a:latin typeface="Calibri"/>
-                        </a:rPr>
-                        <a:t>—</a:t>
-                      </a:r>
-                    </a:p>
-                  </a:txBody>
-                  <a:tcPr marL="63500" marR="63500" marT="38100" marB="38100">
-                    <a:noFill/>
-                  </a:tcPr>
-                </a:tc>
-              </a:tr>
-              <a:tr h="25400">
-                <a:tc>
-                  <a:txBody>
-                    <a:bodyPr wrap="square"/>
-                    <a:lstStyle/>
-                    <a:p>
-                      <a:r>
-                        <a:rPr sz="1100" b="0">
-                          <a:latin typeface="Calibri"/>
-                        </a:rPr>
-                        <a:t>Per-user sign-in for approvers</a:t>
-                      </a:r>
-                    </a:p>
-                  </a:txBody>
-                  <a:tcPr marL="63500" marR="63500" marT="38100" marB="38100">
-                    <a:solidFill>
-                      <a:srgbClr val="F4F6F9"/>
-                    </a:solidFill>
-                  </a:tcPr>
-                </a:tc>
-                <a:tc>
-                  <a:txBody>
-                    <a:bodyPr wrap="square"/>
-                    <a:lstStyle/>
-                    <a:p>
-                      <a:r>
-                        <a:rPr sz="1100" b="0">
-                          <a:latin typeface="Calibri"/>
-                        </a:rPr>
-                        <a:t>Approvers are named, not authenticated — Custos has tenant keys, not user accounts</a:t>
-                      </a:r>
-                    </a:p>
-                  </a:txBody>
-                  <a:tcPr marL="63500" marR="63500" marT="38100" marB="38100">
-                    <a:solidFill>
-                      <a:srgbClr val="F4F6F9"/>
-                    </a:solidFill>
-                  </a:tcPr>
-                </a:tc>
-                <a:tc>
-                  <a:txBody>
-                    <a:bodyPr wrap="square"/>
-                    <a:lstStyle/>
-                    <a:p>
-                      <a:r>
-                        <a:rPr sz="1100" b="0">
-                          <a:latin typeface="Calibri"/>
-                        </a:rPr>
-                        <a:t>—</a:t>
-                      </a:r>
-                    </a:p>
-                  </a:txBody>
-                  <a:tcPr marL="63500" marR="63500" marT="38100" marB="38100">
-                    <a:solidFill>
-                      <a:srgbClr val="F4F6F9"/>
-                    </a:solidFill>
-                  </a:tcPr>
-                </a:tc>
-              </a:tr>
-              <a:tr h="25400">
-                <a:tc>
-                  <a:txBody>
-                    <a:bodyPr wrap="square"/>
-                    <a:lstStyle/>
-                    <a:p>
-                      <a:r>
-                        <a:rPr sz="1100" b="0">
-                          <a:latin typeface="Calibri"/>
-                        </a:rPr>
-                        <a:t>Final report and paper draft</a:t>
-                      </a:r>
-                    </a:p>
-                  </a:txBody>
-                  <a:tcPr marL="63500" marR="63500" marT="38100" marB="38100">
-                    <a:noFill/>
-                  </a:tcPr>
-                </a:tc>
-                <a:tc>
-                  <a:txBody>
-                    <a:bodyPr wrap="square"/>
-                    <a:lstStyle/>
-                    <a:p>
-                      <a:r>
-                        <a:rPr sz="1100" b="0">
-                          <a:latin typeface="Calibri"/>
-                        </a:rPr>
-                        <a:t>Department submission</a:t>
-                      </a:r>
-                    </a:p>
-                  </a:txBody>
-                  <a:tcPr marL="63500" marR="63500" marT="38100" marB="38100">
-                    <a:noFill/>
-                  </a:tcPr>
-                </a:tc>
-                <a:tc>
-                  <a:txBody>
-                    <a:bodyPr wrap="square"/>
-                    <a:lstStyle/>
-                    <a:p>
-                      <a:r>
-                        <a:rPr sz="1100" b="0">
-                          <a:latin typeface="Calibri"/>
-                        </a:rPr>
-                        <a:t>All of the above</a:t>
-                      </a:r>
-                    </a:p>
-                  </a:txBody>
-                  <a:tcPr marL="63500" marR="63500" marT="38100" marB="38100">
-                    <a:noFill/>
-                  </a:tcPr>
-                </a:tc>
-              </a:tr>
-            </a:tbl>
-          </a:graphicData>
-        </a:graphic>
-      </p:graphicFrame>
-    </p:spTree>
-    <p:extLst>
-      <p:ext uri="{BB962C8B-B14F-4D97-AF65-F5344CB8AC3E}">
-        <p14:creationId xmlns:p14="http://schemas.microsoft.com/office/powerpoint/2010/main" val="3231882420"/>
-      </p:ext>
-    </p:extLst>
-  </p:cSld>
-  <p:clrMapOvr>
-    <a:masterClrMapping/>
-  </p:clrMapOvr>
-</p:sld>
-</file>
-
-<file path=ppt/slides/slide25.xml><?xml version="1.0" encoding="utf-8"?>
-<p:sld xmlns:a="http://schemas.openxmlformats.org/drawingml/2006/main" xmlns:r="http://schemas.openxmlformats.org/officeDocument/2006/relationships" xmlns:p="http://schemas.openxmlformats.org/presentationml/2006/main">
-  <p:cSld>
-    <p:spTree>
-      <p:nvGrpSpPr>
-        <p:cNvPr id="1" name=""/>
-        <p:cNvGrpSpPr/>
-        <p:nvPr/>
-      </p:nvGrpSpPr>
-      <p:grpSpPr>
-        <a:xfrm>
-          <a:off x="0" y="0"/>
-          <a:ext cx="0" cy="0"/>
-          <a:chOff x="0" y="0"/>
-          <a:chExt cx="0" cy="0"/>
-        </a:xfrm>
-      </p:grpSpPr>
-      <p:sp>
-        <p:nvSpPr>
-          <p:cNvPr id="2" name="Title 1">
-            <a:extLst>
-              <a:ext uri="{FF2B5EF4-FFF2-40B4-BE49-F238E27FC236}">
-                <a16:creationId xmlns:a16="http://schemas.microsoft.com/office/drawing/2014/main" id="{BD1A189D-22D1-4D1A-9E04-C6134EC51F8B}"/>
-              </a:ext>
-            </a:extLst>
-          </p:cNvPr>
-          <p:cNvSpPr>
-            <a:spLocks noGrp="1"/>
-          </p:cNvSpPr>
-          <p:nvPr>
-            <p:ph type="ctrTitle"/>
-          </p:nvPr>
-        </p:nvSpPr>
-        <p:spPr>
-          <a:xfrm>
-            <a:off x="1684868" y="203198"/>
-            <a:ext cx="9694332" cy="880535"/>
-          </a:xfrm>
-        </p:spPr>
-        <p:txBody>
-          <a:bodyPr>
-            <a:normAutofit/>
-          </a:bodyPr>
-          <a:lstStyle/>
-          <a:p>
-            <a:pPr marL="0" indent="0" algn="l">
-              <a:spcBef>
-                <a:spcPts val="0"/>
-              </a:spcBef>
-              <a:buNone/>
-            </a:pPr>
-            <a:r>
-              <a:rPr lang="en-US" sz="3200" b="1" i="0" dirty="0">
-                <a:latin typeface="Calibri" panose="020F0502020204030204" pitchFamily="34" charset="0"/>
-                <a:ea typeface="Calibri" panose="020F0502020204030204" pitchFamily="34" charset="0"/>
-                <a:cs typeface="Calibri" panose="020F0502020204030204" pitchFamily="34" charset="0"/>
-              </a:rPr>
-              <a:t>Conclusion</a:t>
-            </a:r>
-          </a:p>
-        </p:txBody>
-      </p:sp>
-      <p:sp>
-        <p:nvSpPr>
-          <p:cNvPr id="3" name="Subtitle 2">
-            <a:extLst>
-              <a:ext uri="{FF2B5EF4-FFF2-40B4-BE49-F238E27FC236}">
-                <a16:creationId xmlns:a16="http://schemas.microsoft.com/office/drawing/2014/main" id="{255E737C-85F2-47BC-AD38-AD8B001473B7}"/>
-              </a:ext>
-            </a:extLst>
-          </p:cNvPr>
-          <p:cNvSpPr>
-            <a:spLocks noGrp="1"/>
-          </p:cNvSpPr>
-          <p:nvPr>
-            <p:ph type="subTitle" idx="1"/>
-          </p:nvPr>
-        </p:nvSpPr>
-        <p:spPr>
-          <a:xfrm>
-            <a:off x="1684867" y="1574800"/>
-            <a:ext cx="9694333" cy="4614333"/>
-          </a:xfrm>
-        </p:spPr>
-        <p:txBody>
-          <a:bodyPr>
-            <a:normAutofit/>
-          </a:bodyPr>
-          <a:lstStyle/>
-          <a:p>
-            <a:pPr marL="0" indent="0" algn="l">
-              <a:spcBef>
-                <a:spcPts val="0"/>
-              </a:spcBef>
-              <a:buNone/>
-            </a:pPr>
-            <a:r>
-              <a:rPr lang="en-US" sz="1400" b="1" i="0" dirty="0">
-                <a:latin typeface="Calibri" panose="020F0502020204030204" pitchFamily="34" charset="0"/>
-                <a:ea typeface="Calibri" panose="020F0502020204030204" pitchFamily="34" charset="0"/>
-                <a:cs typeface="Calibri" panose="020F0502020204030204" pitchFamily="34" charset="0"/>
-              </a:rPr>
-              <a:t>397 tests passing · latency budget holds to 200 req/s, double Review-1 · overload no longer changes verdicts · all three trust signals live · governed self-healing built.</a:t>
-            </a:r>
-          </a:p>
-          <a:p>
-            <a:pPr marL="0" indent="0" algn="l">
-              <a:spcBef>
-                <a:spcPts val="200"/>
-              </a:spcBef>
-              <a:buNone/>
-            </a:pPr>
-            <a:r>
-              <a:rPr lang="en-US" sz="1300" b="0" i="0" dirty="0">
-                <a:latin typeface="Calibri" panose="020F0502020204030204" pitchFamily="34" charset="0"/>
-                <a:ea typeface="Calibri" panose="020F0502020204030204" pitchFamily="34" charset="0"/>
-                <a:cs typeface="Calibri" panose="020F0502020204030204" pitchFamily="34" charset="0"/>
-              </a:rPr>
-              <a:t>And the hardest result: on 589,186 real loans, gating on drift did worse than random review. Pre-registered, reported as measured — and it now decides what we build next.</a:t>
-            </a:r>
-          </a:p>
-        </p:txBody>
-      </p:sp>
-      <p:pic>
-        <p:nvPicPr>
-          <p:cNvPr id="5" name="Graphic 4">
-            <a:extLst>
-              <a:ext uri="{FF2B5EF4-FFF2-40B4-BE49-F238E27FC236}">
-                <a16:creationId xmlns:a16="http://schemas.microsoft.com/office/drawing/2014/main" id="{E7125167-8301-4D88-B79A-A8DA3C19E0D6}"/>
-              </a:ext>
-            </a:extLst>
-          </p:cNvPr>
-          <p:cNvPicPr>
-            <a:picLocks noChangeAspect="1"/>
-          </p:cNvPicPr>
-          <p:nvPr/>
-        </p:nvPicPr>
-        <p:blipFill>
-          <a:blip r:embed="rId2">
-            <a:extLst>
-              <a:ext uri="{96DAC541-7B7A-43D3-8B79-37D633B846F1}">
-                <asvg:svgBlip xmlns:asvg="http://schemas.microsoft.com/office/drawing/2016/SVG/main" r:embed="rId3"/>
-              </a:ext>
-            </a:extLst>
-          </a:blip>
-          <a:stretch>
-            <a:fillRect/>
-          </a:stretch>
-        </p:blipFill>
-        <p:spPr>
-          <a:xfrm>
-            <a:off x="127001" y="86782"/>
-            <a:ext cx="1159932" cy="1159932"/>
-          </a:xfrm>
-          <a:prstGeom prst="rect">
-            <a:avLst/>
-          </a:prstGeom>
-        </p:spPr>
-      </p:pic>
-      <p:sp>
-        <p:nvSpPr>
-          <p:cNvPr id="4" name="Date Placeholder 3">
-            <a:extLst>
-              <a:ext uri="{FF2B5EF4-FFF2-40B4-BE49-F238E27FC236}">
-                <a16:creationId xmlns:a16="http://schemas.microsoft.com/office/drawing/2014/main" id="{35032362-C5A5-4DBF-AD79-DE6FB7439999}"/>
-              </a:ext>
-            </a:extLst>
-          </p:cNvPr>
-          <p:cNvSpPr>
-            <a:spLocks noGrp="1"/>
-          </p:cNvSpPr>
-          <p:nvPr>
-            <p:ph type="dt" sz="half" idx="10"/>
-          </p:nvPr>
-        </p:nvSpPr>
-        <p:spPr/>
-        <p:txBody>
-          <a:bodyPr/>
-          <a:lstStyle/>
-          <a:p>
-            <a:fld id="{64C96E34-94C0-49E4-A53B-4A44141FD3C8}" type="datetime3">
-              <a:rPr lang="en-US" smtClean="0"/>
-              <a:t>17 October 2026</a:t>
-            </a:fld>
-            <a:endParaRPr lang="en-US" dirty="0"/>
-          </a:p>
-        </p:txBody>
-      </p:sp>
-      <p:sp>
-        <p:nvSpPr>
-          <p:cNvPr id="6" name="Slide Number Placeholder 5">
-            <a:extLst>
-              <a:ext uri="{FF2B5EF4-FFF2-40B4-BE49-F238E27FC236}">
-                <a16:creationId xmlns:a16="http://schemas.microsoft.com/office/drawing/2014/main" id="{115AAB64-5B51-4B5A-B69E-D96362CE6E74}"/>
-              </a:ext>
-            </a:extLst>
-          </p:cNvPr>
-          <p:cNvSpPr>
-            <a:spLocks noGrp="1"/>
-          </p:cNvSpPr>
-          <p:nvPr>
-            <p:ph type="sldNum" sz="quarter" idx="12"/>
-          </p:nvPr>
-        </p:nvSpPr>
-        <p:spPr/>
-        <p:txBody>
-          <a:bodyPr/>
-          <a:lstStyle/>
-          <a:p>
-            <a:fld id="{D57F1E4F-1CFF-5643-939E-217C01CDF565}" type="slidenum">
-              <a:rPr lang="en-US" smtClean="0"/>
-              <a:pPr/>
-              <a:t>9</a:t>
-            </a:fld>
-            <a:endParaRPr lang="en-US" dirty="0"/>
-          </a:p>
-        </p:txBody>
-      </p:sp>
-      <p:sp>
-        <p:nvSpPr>
-          <p:cNvPr id="7" name="Footer Placeholder 6">
-            <a:extLst>
-              <a:ext uri="{FF2B5EF4-FFF2-40B4-BE49-F238E27FC236}">
-                <a16:creationId xmlns:a16="http://schemas.microsoft.com/office/drawing/2014/main" id="{8683C6DF-27D9-468B-A1AB-FE568488FE57}"/>
-              </a:ext>
-            </a:extLst>
-          </p:cNvPr>
-          <p:cNvSpPr>
-            <a:spLocks noGrp="1"/>
-          </p:cNvSpPr>
-          <p:nvPr>
-            <p:ph type="ftr" sz="quarter" idx="11"/>
-          </p:nvPr>
-        </p:nvSpPr>
-        <p:spPr/>
-        <p:txBody>
-          <a:bodyPr/>
-          <a:lstStyle/>
-          <a:p>
-            <a:r>
-              <a:rPr lang="en-US"/>
-              <a:t>Dept of AI &amp; DS</a:t>
-            </a:r>
-            <a:endParaRPr lang="en-US" dirty="0"/>
-          </a:p>
-        </p:txBody>
-      </p:sp>
-      <p:graphicFrame>
-        <p:nvGraphicFramePr>
-          <p:cNvPr id="8" name="Table 7"/>
-          <p:cNvGraphicFramePr>
-            <a:graphicFrameLocks noGrp="1"/>
-          </p:cNvGraphicFramePr>
-          <p:nvPr/>
-        </p:nvGraphicFramePr>
-        <p:xfrm>
-          <a:off x="960120" y="2834640"/>
-          <a:ext cx="10241279" cy="101600"/>
-        </p:xfrm>
-        <a:graphic>
-          <a:graphicData uri="http://schemas.openxmlformats.org/drawingml/2006/table">
-            <a:tbl>
-              <a:tblPr firstRow="1">
-                <a:tableStyleId>{5C22544A-7EE6-4342-B048-85BDC9FD1C3A}</a:tableStyleId>
-              </a:tblPr>
-              <a:tblGrid>
-                <a:gridCol w="2048256"/>
-                <a:gridCol w="1433779"/>
-                <a:gridCol w="6759244"/>
-              </a:tblGrid>
-              <a:tr h="25400">
-                <a:tc>
-                  <a:txBody>
-                    <a:bodyPr wrap="square"/>
-                    <a:lstStyle/>
-                    <a:p>
-                      <a:r>
-                        <a:rPr sz="1100" b="1">
-                          <a:solidFill>
-                            <a:srgbClr val="FFFFFF"/>
-                          </a:solidFill>
-                          <a:latin typeface="Calibri"/>
-                        </a:rPr>
-                        <a:t>Team member</a:t>
-                      </a:r>
-                    </a:p>
-                  </a:txBody>
-                  <a:tcPr marL="63500" marR="63500" marT="38100" marB="38100">
-                    <a:solidFill>
-                      <a:srgbClr val="1F5CA8"/>
-                    </a:solidFill>
-                  </a:tcPr>
-                </a:tc>
-                <a:tc>
-                  <a:txBody>
-                    <a:bodyPr wrap="square"/>
-                    <a:lstStyle/>
-                    <a:p>
-                      <a:r>
-                        <a:rPr sz="1100" b="1">
-                          <a:solidFill>
-                            <a:srgbClr val="FFFFFF"/>
-                          </a:solidFill>
-                          <a:latin typeface="Calibri"/>
-                        </a:rPr>
-                        <a:t>USN</a:t>
-                      </a:r>
-                    </a:p>
-                  </a:txBody>
-                  <a:tcPr marL="63500" marR="63500" marT="38100" marB="38100">
-                    <a:solidFill>
-                      <a:srgbClr val="1F5CA8"/>
-                    </a:solidFill>
-                  </a:tcPr>
-                </a:tc>
-                <a:tc>
-                  <a:txBody>
-                    <a:bodyPr wrap="square"/>
-                    <a:lstStyle/>
-                    <a:p>
-                      <a:r>
-                        <a:rPr sz="1100" b="1">
-                          <a:solidFill>
-                            <a:srgbClr val="FFFFFF"/>
-                          </a:solidFill>
-                          <a:latin typeface="Calibri"/>
-                        </a:rPr>
-                        <a:t>Modules owned</a:t>
-                      </a:r>
-                    </a:p>
-                  </a:txBody>
-                  <a:tcPr marL="63500" marR="63500" marT="38100" marB="38100">
-                    <a:solidFill>
-                      <a:srgbClr val="1F5CA8"/>
-                    </a:solidFill>
-                  </a:tcPr>
-                </a:tc>
-              </a:tr>
-              <a:tr h="25400">
-                <a:tc>
-                  <a:txBody>
-                    <a:bodyPr wrap="square"/>
-                    <a:lstStyle/>
-                    <a:p>
-                      <a:r>
-                        <a:rPr sz="1100" b="0">
-                          <a:latin typeface="Calibri"/>
-                        </a:rPr>
-                        <a:t>AYUSH PANDEY</a:t>
-                      </a:r>
-                    </a:p>
-                  </a:txBody>
-                  <a:tcPr marL="63500" marR="63500" marT="38100" marB="38100">
-                    <a:noFill/>
-                  </a:tcPr>
-                </a:tc>
-                <a:tc>
-                  <a:txBody>
-                    <a:bodyPr wrap="square"/>
-                    <a:lstStyle/>
-                    <a:p>
-                      <a:r>
-                        <a:rPr sz="1100" b="0">
-                          <a:latin typeface="Calibri"/>
-                        </a:rPr>
-                        <a:t>1BM23AD074</a:t>
-                      </a:r>
-                    </a:p>
-                  </a:txBody>
-                  <a:tcPr marL="63500" marR="63500" marT="38100" marB="38100">
-                    <a:noFill/>
-                  </a:tcPr>
-                </a:tc>
-                <a:tc>
-                  <a:txBody>
-                    <a:bodyPr wrap="square"/>
-                    <a:lstStyle/>
-                    <a:p>
-                      <a:r>
-                        <a:rPr sz="1100" b="0">
-                          <a:latin typeface="Calibri"/>
-                        </a:rPr>
-                        <a:t>Architecture and ADRs · drift engine (PSI/KS detectors, severity roll-up, offline worker) · trust engine fusion and decision matrix</a:t>
-                      </a:r>
-                    </a:p>
-                  </a:txBody>
-                  <a:tcPr marL="63500" marR="63500" marT="38100" marB="38100">
-                    <a:noFill/>
-                  </a:tcPr>
-                </a:tc>
-              </a:tr>
-              <a:tr h="25400">
-                <a:tc>
-                  <a:txBody>
-                    <a:bodyPr wrap="square"/>
-                    <a:lstStyle/>
-                    <a:p>
-                      <a:r>
-                        <a:rPr sz="1100" b="0">
-                          <a:latin typeface="Calibri"/>
-                        </a:rPr>
-                        <a:t>VIVEK BOORA</a:t>
-                      </a:r>
-                    </a:p>
-                  </a:txBody>
-                  <a:tcPr marL="63500" marR="63500" marT="38100" marB="38100">
-                    <a:solidFill>
-                      <a:srgbClr val="F4F6F9"/>
-                    </a:solidFill>
-                  </a:tcPr>
-                </a:tc>
-                <a:tc>
-                  <a:txBody>
-                    <a:bodyPr wrap="square"/>
-                    <a:lstStyle/>
-                    <a:p>
-                      <a:r>
-                        <a:rPr sz="1100" b="0">
-                          <a:latin typeface="Calibri"/>
-                        </a:rPr>
-                        <a:t>1BM23AD073</a:t>
-                      </a:r>
-                    </a:p>
-                  </a:txBody>
-                  <a:tcPr marL="63500" marR="63500" marT="38100" marB="38100">
-                    <a:solidFill>
-                      <a:srgbClr val="F4F6F9"/>
-                    </a:solidFill>
-                  </a:tcPr>
-                </a:tc>
-                <a:tc>
-                  <a:txBody>
-                    <a:bodyPr wrap="square"/>
-                    <a:lstStyle/>
-                    <a:p>
-                      <a:r>
-                        <a:rPr sz="1100" b="0">
-                          <a:latin typeface="Calibri"/>
-                        </a:rPr>
-                        <a:t>Gateway and control-plane APIs · policy engine and rule grammar · tamper-evident audit chain and evidence export</a:t>
-                      </a:r>
-                    </a:p>
-                  </a:txBody>
-                  <a:tcPr marL="63500" marR="63500" marT="38100" marB="38100">
-                    <a:solidFill>
-                      <a:srgbClr val="F4F6F9"/>
-                    </a:solidFill>
-                  </a:tcPr>
-                </a:tc>
-              </a:tr>
-              <a:tr h="25400">
-                <a:tc>
-                  <a:txBody>
-                    <a:bodyPr wrap="square"/>
-                    <a:lstStyle/>
-                    <a:p>
-                      <a:r>
-                        <a:rPr sz="1100" b="0">
-                          <a:latin typeface="Calibri"/>
-                        </a:rPr>
-                        <a:t>NITIN</a:t>
-                      </a:r>
-                    </a:p>
-                  </a:txBody>
-                  <a:tcPr marL="63500" marR="63500" marT="38100" marB="38100">
-                    <a:noFill/>
-                  </a:tcPr>
-                </a:tc>
-                <a:tc>
-                  <a:txBody>
-                    <a:bodyPr wrap="square"/>
-                    <a:lstStyle/>
-                    <a:p>
-                      <a:r>
-                        <a:rPr sz="1100" b="0">
-                          <a:latin typeface="Calibri"/>
-                        </a:rPr>
-                        <a:t>1BM24AD404</a:t>
-                      </a:r>
-                    </a:p>
-                  </a:txBody>
-                  <a:tcPr marL="63500" marR="63500" marT="38100" marB="38100">
-                    <a:noFill/>
-                  </a:tcPr>
-                </a:tc>
-                <a:tc>
-                  <a:txBody>
-                    <a:bodyPr wrap="square"/>
-                    <a:lstStyle/>
-                    <a:p>
-                      <a:r>
-                        <a:rPr sz="1100" b="0">
-                          <a:latin typeface="Calibri"/>
-                        </a:rPr>
-                        <a:t>Python SDK · React operator dashboard · fintech demonstration · 397-test suite across unit, integration and end-to-end</a:t>
-                      </a:r>
-                    </a:p>
-                  </a:txBody>
-                  <a:tcPr marL="63500" marR="63500" marT="38100" marB="38100">
-                    <a:noFill/>
-                  </a:tcPr>
-                </a:tc>
-              </a:tr>
-            </a:tbl>
-          </a:graphicData>
-        </a:graphic>
-      </p:graphicFrame>
-    </p:spTree>
-    <p:extLst>
-      <p:ext uri="{BB962C8B-B14F-4D97-AF65-F5344CB8AC3E}">
-        <p14:creationId xmlns:p14="http://schemas.microsoft.com/office/powerpoint/2010/main" val="68599917"/>
       </p:ext>
     </p:extLst>
   </p:cSld>
@@ -12801,51 +7109,105 @@
           </a:bodyPr>
           <a:lstStyle/>
           <a:p>
-            <a:pPr marL="0" indent="0" algn="l">
+            <a:pPr marL="285750" indent="-285750" algn="l">
               <a:spcBef>
                 <a:spcPts val="0"/>
               </a:spcBef>
-              <a:buNone/>
+              <a:buFont typeface="Arial" panose="020B0604020202020204" pitchFamily="34" charset="0"/>
+              <a:buChar char="•"/>
             </a:pPr>
             <a:r>
-              <a:rPr lang="en-US" sz="1500" b="0" i="0" dirty="0">
+              <a:rPr lang="en-US" sz="1700" b="0" i="0" dirty="0">
                 <a:latin typeface="Calibri" panose="020F0502020204030204" pitchFamily="34" charset="0"/>
                 <a:ea typeface="Calibri" panose="020F0502020204030204" pitchFamily="34" charset="0"/>
                 <a:cs typeface="Calibri" panose="020F0502020204030204" pitchFamily="34" charset="0"/>
               </a:rPr>
-              <a:t>Machine-learning models are validated once and then trusted indefinitely, yet the data they see keeps changing. A drifted model fails quietly: it stays up, answers confidently, and is wrong.</a:t>
-            </a:r>
-          </a:p>
-          <a:p>
-            <a:pPr marL="0" indent="0" algn="l">
+              <a:t>Models are validated once, then trusted forever — and fail quietly.</a:t>
+            </a:r>
+          </a:p>
+          <a:p>
+            <a:pPr marL="285750" indent="-285750" algn="l">
               <a:spcBef>
-                <a:spcPts val="300"/>
+                <a:spcPts val="400"/>
               </a:spcBef>
-              <a:buNone/>
+              <a:buFont typeface="Arial" panose="020B0604020202020204" pitchFamily="34" charset="0"/>
+              <a:buChar char="•"/>
             </a:pPr>
             <a:r>
-              <a:rPr lang="en-US" sz="1500" b="0" i="0" dirty="0">
+              <a:rPr lang="en-US" sz="1700" b="0" i="0" dirty="0">
                 <a:latin typeface="Calibri" panose="020F0502020204030204" pitchFamily="34" charset="0"/>
                 <a:ea typeface="Calibri" panose="020F0502020204030204" pitchFamily="34" charset="0"/>
                 <a:cs typeface="Calibri" panose="020F0502020204030204" pitchFamily="34" charset="0"/>
               </a:rPr>
-              <a:t>Custos is a runtime trust layer between a model and the consequential action taken on its output. On every request it fuses three signals — population drift (PSI and KS against a fixed baseline), business policy, and per-request risk — into a trust score and an ALLOW, REVIEW or BLOCK verdict within a 50 ms budget, and appends each verdict to a tamper-evident hash chain. Drift is computed offline so the request path stays fast.</a:t>
-            </a:r>
-          </a:p>
-          <a:p>
-            <a:pPr marL="0" indent="0" algn="l">
+              <a:t>Custos checks every model-driven action before it runs: ALLOW, REVIEW or BLOCK.</a:t>
+            </a:r>
+          </a:p>
+          <a:p>
+            <a:pPr marL="285750" indent="-285750" algn="l">
               <a:spcBef>
-                <a:spcPts val="300"/>
+                <a:spcPts val="400"/>
               </a:spcBef>
-              <a:buNone/>
+              <a:buFont typeface="Arial" panose="020B0604020202020204" pitchFamily="34" charset="0"/>
+              <a:buChar char="•"/>
             </a:pPr>
             <a:r>
-              <a:rPr lang="en-US" sz="1500" b="0" i="0" dirty="0">
+              <a:rPr lang="en-US" sz="1700" b="0" i="0" dirty="0">
                 <a:latin typeface="Calibri" panose="020F0502020204030204" pitchFamily="34" charset="0"/>
                 <a:ea typeface="Calibri" panose="020F0502020204030204" pitchFamily="34" charset="0"/>
                 <a:cs typeface="Calibri" panose="020F0502020204030204" pitchFamily="34" charset="0"/>
               </a:rPr>
-              <a:t>The detector is validated by calibration against shifts of known size, the gateway by open-loop load testing, and the gating idea itself by a pre-registered study on 589,186 real loans. That study found that gating on population drift catches fewer bad loans than random review. We report it as measured, and it now decides what we build next.</a:t>
+              <a:t>It fuses policy rules, request risk and model drift — in under 50 ms.</a:t>
+            </a:r>
+          </a:p>
+          <a:p>
+            <a:pPr marL="285750" indent="-285750" algn="l">
+              <a:spcBef>
+                <a:spcPts val="400"/>
+              </a:spcBef>
+              <a:buFont typeface="Arial" panose="020B0604020202020204" pitchFamily="34" charset="0"/>
+              <a:buChar char="•"/>
+            </a:pPr>
+            <a:r>
+              <a:rPr lang="en-US" sz="1700" b="0" i="0" dirty="0">
+                <a:latin typeface="Calibri" panose="020F0502020204030204" pitchFamily="34" charset="0"/>
+                <a:ea typeface="Calibri" panose="020F0502020204030204" pitchFamily="34" charset="0"/>
+                <a:cs typeface="Calibri" panose="020F0502020204030204" pitchFamily="34" charset="0"/>
+              </a:rPr>
+              <a:t>Every verdict is explained, and hash-chained so it can't be quietly edited.</a:t>
+            </a:r>
+          </a:p>
+          <a:p>
+            <a:pPr marL="285750" indent="-285750" algn="l">
+              <a:spcBef>
+                <a:spcPts val="400"/>
+              </a:spcBef>
+              <a:buFont typeface="Arial" panose="020B0604020202020204" pitchFamily="34" charset="0"/>
+              <a:buChar char="•"/>
+            </a:pPr>
+            <a:r>
+              <a:rPr lang="en-US" sz="1700" b="0" i="0" dirty="0">
+                <a:latin typeface="Calibri" panose="020F0502020204030204" pitchFamily="34" charset="0"/>
+                <a:ea typeface="Calibri" panose="020F0502020204030204" pitchFamily="34" charset="0"/>
+                <a:cs typeface="Calibri" panose="020F0502020204030204" pitchFamily="34" charset="0"/>
+              </a:rPr>
+              <a:t>It repairs a broken data feed — only after a person approves.</a:t>
+            </a:r>
+          </a:p>
+          <a:p>
+            <a:pPr marL="285750" indent="-285750" algn="l">
+              <a:spcBef>
+                <a:spcPts val="400"/>
+              </a:spcBef>
+              <a:buFont typeface="Arial" panose="020B0604020202020204" pitchFamily="34" charset="0"/>
+              <a:buChar char="•"/>
+            </a:pPr>
+            <a:r>
+              <a:rPr lang="en-US" sz="1700" b="0" i="0" dirty="0">
+                <a:latin typeface="Calibri" panose="020F0502020204030204" pitchFamily="34" charset="0"/>
+                <a:ea typeface="Calibri" panose="020F0502020204030204" pitchFamily="34" charset="0"/>
+                <a:cs typeface="Calibri" panose="020F0502020204030204" pitchFamily="34" charset="0"/>
+              </a:rPr>
+              <a:t>Validated: 397 tests, load-tested, a pre-registered study on 589,186 real loans.</a:t>
             </a:r>
           </a:p>
         </p:txBody>
@@ -13044,7 +7406,7 @@
                 <a:ea typeface="Calibri" panose="020F0502020204030204" pitchFamily="34" charset="0"/>
                 <a:cs typeface="Calibri" panose="020F0502020204030204" pitchFamily="34" charset="0"/>
               </a:rPr>
-              <a:t>Progress since Review-1</a:t>
+              <a:t>Introduction — Overview and Motivation</a:t>
             </a:r>
           </a:p>
         </p:txBody>
@@ -13067,7 +7429,7 @@
         </p:nvSpPr>
         <p:spPr>
           <a:xfrm>
-            <a:off x="1684867" y="1574800"/>
+            <a:off x="1659467" y="1600200"/>
             <a:ext cx="9694333" cy="4614333"/>
           </a:xfrm>
         </p:spPr>
@@ -13084,12 +7446,12 @@
               <a:buNone/>
             </a:pPr>
             <a:r>
-              <a:rPr lang="en-US" sz="1400" b="0" i="0" dirty="0">
+              <a:rPr lang="en-US" sz="1500" b="0" i="1" dirty="0">
                 <a:latin typeface="Calibri" panose="020F0502020204030204" pitchFamily="34" charset="0"/>
                 <a:ea typeface="Calibri" panose="020F0502020204030204" pitchFamily="34" charset="0"/>
                 <a:cs typeface="Calibri" panose="020F0502020204030204" pitchFamily="34" charset="0"/>
               </a:rPr>
-              <a:t>Every commitment from the Review-1 closing slide, and what happened to it — including what did not get done.</a:t>
+              <a:t>Models don't crash. They go quietly wrong — Zillow wrote off $304M in one quarter.</a:t>
             </a:r>
           </a:p>
         </p:txBody>
@@ -13183,7 +7545,7 @@
             <a:fld id="{D57F1E4F-1CFF-5643-939E-217C01CDF565}" type="slidenum">
               <a:rPr lang="en-US" smtClean="0"/>
               <a:pPr/>
-              <a:t>3</a:t>
+              <a:t>4</a:t>
             </a:fld>
             <a:endParaRPr lang="en-US" dirty="0"/>
           </a:p>
@@ -13218,441 +7580,34 @@
           </a:p>
         </p:txBody>
       </p:sp>
-      <p:graphicFrame>
-        <p:nvGraphicFramePr>
-          <p:cNvPr id="8" name="Table 7"/>
-          <p:cNvGraphicFramePr>
-            <a:graphicFrameLocks noGrp="1"/>
-          </p:cNvGraphicFramePr>
+      <p:pic>
+        <p:nvPicPr>
+          <p:cNvPr id="8" name="Picture 7" descr="problem_timeline.png"/>
+          <p:cNvPicPr>
+            <a:picLocks noChangeAspect="1"/>
+          </p:cNvPicPr>
           <p:nvPr/>
-        </p:nvGraphicFramePr>
-        <p:xfrm>
-          <a:off x="960120" y="2331720"/>
-          <a:ext cx="10241279" cy="177800"/>
-        </p:xfrm>
-        <a:graphic>
-          <a:graphicData uri="http://schemas.openxmlformats.org/drawingml/2006/table">
-            <a:tbl>
-              <a:tblPr firstRow="1">
-                <a:tableStyleId>{5C22544A-7EE6-4342-B048-85BDC9FD1C3A}</a:tableStyleId>
-              </a:tblPr>
-              <a:tblGrid>
-                <a:gridCol w="3072384"/>
-                <a:gridCol w="1331366"/>
-                <a:gridCol w="5837529"/>
-              </a:tblGrid>
-              <a:tr h="25400">
-                <a:tc>
-                  <a:txBody>
-                    <a:bodyPr wrap="square"/>
-                    <a:lstStyle/>
-                    <a:p>
-                      <a:r>
-                        <a:rPr sz="1100" b="1">
-                          <a:solidFill>
-                            <a:srgbClr val="FFFFFF"/>
-                          </a:solidFill>
-                          <a:latin typeface="Calibri"/>
-                        </a:rPr>
-                        <a:t>Committed at Review-1</a:t>
-                      </a:r>
-                    </a:p>
-                  </a:txBody>
-                  <a:tcPr marL="63500" marR="63500" marT="38100" marB="38100">
-                    <a:solidFill>
-                      <a:srgbClr val="1F5CA8"/>
-                    </a:solidFill>
-                  </a:tcPr>
-                </a:tc>
-                <a:tc>
-                  <a:txBody>
-                    <a:bodyPr wrap="square"/>
-                    <a:lstStyle/>
-                    <a:p>
-                      <a:r>
-                        <a:rPr sz="1100" b="1">
-                          <a:solidFill>
-                            <a:srgbClr val="FFFFFF"/>
-                          </a:solidFill>
-                          <a:latin typeface="Calibri"/>
-                        </a:rPr>
-                        <a:t>Status</a:t>
-                      </a:r>
-                    </a:p>
-                  </a:txBody>
-                  <a:tcPr marL="63500" marR="63500" marT="38100" marB="38100">
-                    <a:solidFill>
-                      <a:srgbClr val="1F5CA8"/>
-                    </a:solidFill>
-                  </a:tcPr>
-                </a:tc>
-                <a:tc>
-                  <a:txBody>
-                    <a:bodyPr wrap="square"/>
-                    <a:lstStyle/>
-                    <a:p>
-                      <a:r>
-                        <a:rPr sz="1100" b="1">
-                          <a:solidFill>
-                            <a:srgbClr val="FFFFFF"/>
-                          </a:solidFill>
-                          <a:latin typeface="Calibri"/>
-                        </a:rPr>
-                        <a:t>Evidence</a:t>
-                      </a:r>
-                    </a:p>
-                  </a:txBody>
-                  <a:tcPr marL="63500" marR="63500" marT="38100" marB="38100">
-                    <a:solidFill>
-                      <a:srgbClr val="1F5CA8"/>
-                    </a:solidFill>
-                  </a:tcPr>
-                </a:tc>
-              </a:tr>
-              <a:tr h="25400">
-                <a:tc>
-                  <a:txBody>
-                    <a:bodyPr wrap="square"/>
-                    <a:lstStyle/>
-                    <a:p>
-                      <a:r>
-                        <a:rPr sz="1100" b="0">
-                          <a:latin typeface="Calibri"/>
-                        </a:rPr>
-                        <a:t>Admission control: shed load at the door</a:t>
-                      </a:r>
-                    </a:p>
-                  </a:txBody>
-                  <a:tcPr marL="63500" marR="63500" marT="38100" marB="38100">
-                    <a:noFill/>
-                  </a:tcPr>
-                </a:tc>
-                <a:tc>
-                  <a:txBody>
-                    <a:bodyPr wrap="square"/>
-                    <a:lstStyle/>
-                    <a:p>
-                      <a:r>
-                        <a:rPr sz="1100" b="0">
-                          <a:latin typeface="Calibri"/>
-                        </a:rPr>
-                        <a:t>Done</a:t>
-                      </a:r>
-                    </a:p>
-                  </a:txBody>
-                  <a:tcPr marL="63500" marR="63500" marT="38100" marB="38100">
-                    <a:noFill/>
-                  </a:tcPr>
-                </a:tc>
-                <a:tc>
-                  <a:txBody>
-                    <a:bodyPr wrap="square"/>
-                    <a:lstStyle/>
-                    <a:p>
-                      <a:r>
-                        <a:rPr sz="1100" b="0">
-                          <a:latin typeface="Calibri"/>
-                        </a:rPr>
-                        <a:t>Gateway refuses past a bounded in-flight limit with 503; the SDK then applies the tenant's fail-open / fail-closed policy</a:t>
-                      </a:r>
-                    </a:p>
-                  </a:txBody>
-                  <a:tcPr marL="63500" marR="63500" marT="38100" marB="38100">
-                    <a:noFill/>
-                  </a:tcPr>
-                </a:tc>
-              </a:tr>
-              <a:tr h="25400">
-                <a:tc>
-                  <a:txBody>
-                    <a:bodyPr wrap="square"/>
-                    <a:lstStyle/>
-                    <a:p>
-                      <a:r>
-                        <a:rPr sz="1100" b="0">
-                          <a:latin typeface="Calibri"/>
-                        </a:rPr>
-                        <a:t>Move the audit write off the hot path</a:t>
-                      </a:r>
-                    </a:p>
-                  </a:txBody>
-                  <a:tcPr marL="63500" marR="63500" marT="38100" marB="38100">
-                    <a:solidFill>
-                      <a:srgbClr val="F4F6F9"/>
-                    </a:solidFill>
-                  </a:tcPr>
-                </a:tc>
-                <a:tc>
-                  <a:txBody>
-                    <a:bodyPr wrap="square"/>
-                    <a:lstStyle/>
-                    <a:p>
-                      <a:r>
-                        <a:rPr sz="1100" b="0">
-                          <a:latin typeface="Calibri"/>
-                        </a:rPr>
-                        <a:t>Done</a:t>
-                      </a:r>
-                    </a:p>
-                  </a:txBody>
-                  <a:tcPr marL="63500" marR="63500" marT="38100" marB="38100">
-                    <a:solidFill>
-                      <a:srgbClr val="F4F6F9"/>
-                    </a:solidFill>
-                  </a:tcPr>
-                </a:tc>
-                <a:tc>
-                  <a:txBody>
-                    <a:bodyPr wrap="square"/>
-                    <a:lstStyle/>
-                    <a:p>
-                      <a:r>
-                        <a:rPr sz="1100" b="0">
-                          <a:latin typeface="Calibri"/>
-                        </a:rPr>
-                        <a:t>Dedicated single writer thread; event loop no longer blocks. p99 at 100 req/s: 49 ms → 9 ms</a:t>
-                      </a:r>
-                    </a:p>
-                  </a:txBody>
-                  <a:tcPr marL="63500" marR="63500" marT="38100" marB="38100">
-                    <a:solidFill>
-                      <a:srgbClr val="F4F6F9"/>
-                    </a:solidFill>
-                  </a:tcPr>
-                </a:tc>
-              </a:tr>
-              <a:tr h="25400">
-                <a:tc>
-                  <a:txBody>
-                    <a:bodyPr wrap="square"/>
-                    <a:lstStyle/>
-                    <a:p>
-                      <a:r>
-                        <a:rPr sz="1100" b="0">
-                          <a:latin typeface="Calibri"/>
-                        </a:rPr>
-                        <a:t>Validate against real drift (Lending Club)</a:t>
-                      </a:r>
-                    </a:p>
-                  </a:txBody>
-                  <a:tcPr marL="63500" marR="63500" marT="38100" marB="38100">
-                    <a:noFill/>
-                  </a:tcPr>
-                </a:tc>
-                <a:tc>
-                  <a:txBody>
-                    <a:bodyPr wrap="square"/>
-                    <a:lstStyle/>
-                    <a:p>
-                      <a:r>
-                        <a:rPr sz="1100" b="0">
-                          <a:latin typeface="Calibri"/>
-                        </a:rPr>
-                        <a:t>Done — negative</a:t>
-                      </a:r>
-                    </a:p>
-                  </a:txBody>
-                  <a:tcPr marL="63500" marR="63500" marT="38100" marB="38100">
-                    <a:noFill/>
-                  </a:tcPr>
-                </a:tc>
-                <a:tc>
-                  <a:txBody>
-                    <a:bodyPr wrap="square"/>
-                    <a:lstStyle/>
-                    <a:p>
-                      <a:r>
-                        <a:rPr sz="1100" b="0">
-                          <a:latin typeface="Calibri"/>
-                        </a:rPr>
-                        <a:t>Pre-registered study, 589,186 real loans: drift gating caught fewer defaults than random review. Reported as measured</a:t>
-                      </a:r>
-                    </a:p>
-                  </a:txBody>
-                  <a:tcPr marL="63500" marR="63500" marT="38100" marB="38100">
-                    <a:noFill/>
-                  </a:tcPr>
-                </a:tc>
-              </a:tr>
-              <a:tr h="25400">
-                <a:tc>
-                  <a:txBody>
-                    <a:bodyPr wrap="square"/>
-                    <a:lstStyle/>
-                    <a:p>
-                      <a:r>
-                        <a:rPr sz="1100" b="0">
-                          <a:latin typeface="Calibri"/>
-                        </a:rPr>
-                        <a:t>Model and data versioning + retraining trigger</a:t>
-                      </a:r>
-                    </a:p>
-                  </a:txBody>
-                  <a:tcPr marL="63500" marR="63500" marT="38100" marB="38100">
-                    <a:solidFill>
-                      <a:srgbClr val="F4F6F9"/>
-                    </a:solidFill>
-                  </a:tcPr>
-                </a:tc>
-                <a:tc>
-                  <a:txBody>
-                    <a:bodyPr wrap="square"/>
-                    <a:lstStyle/>
-                    <a:p>
-                      <a:r>
-                        <a:rPr sz="1100" b="0">
-                          <a:latin typeface="Calibri"/>
-                        </a:rPr>
-                        <a:t>Not started</a:t>
-                      </a:r>
-                    </a:p>
-                  </a:txBody>
-                  <a:tcPr marL="63500" marR="63500" marT="38100" marB="38100">
-                    <a:solidFill>
-                      <a:srgbClr val="F4F6F9"/>
-                    </a:solidFill>
-                  </a:tcPr>
-                </a:tc>
-                <a:tc>
-                  <a:txBody>
-                    <a:bodyPr wrap="square"/>
-                    <a:lstStyle/>
-                    <a:p>
-                      <a:r>
-                        <a:rPr sz="1100" b="0">
-                          <a:latin typeface="Calibri"/>
-                        </a:rPr>
-                        <a:t>Moved to the final-review plan</a:t>
-                      </a:r>
-                    </a:p>
-                  </a:txBody>
-                  <a:tcPr marL="63500" marR="63500" marT="38100" marB="38100">
-                    <a:solidFill>
-                      <a:srgbClr val="F4F6F9"/>
-                    </a:solidFill>
-                  </a:tcPr>
-                </a:tc>
-              </a:tr>
-              <a:tr h="25400">
-                <a:tc>
-                  <a:txBody>
-                    <a:bodyPr wrap="square"/>
-                    <a:lstStyle/>
-                    <a:p>
-                      <a:r>
-                        <a:rPr sz="1100" b="0">
-                          <a:latin typeface="Calibri"/>
-                        </a:rPr>
-                        <a:t>Re-measure against Postgres</a:t>
-                      </a:r>
-                    </a:p>
-                  </a:txBody>
-                  <a:tcPr marL="63500" marR="63500" marT="38100" marB="38100">
-                    <a:noFill/>
-                  </a:tcPr>
-                </a:tc>
-                <a:tc>
-                  <a:txBody>
-                    <a:bodyPr wrap="square"/>
-                    <a:lstStyle/>
-                    <a:p>
-                      <a:r>
-                        <a:rPr sz="1100" b="0">
-                          <a:latin typeface="Calibri"/>
-                        </a:rPr>
-                        <a:t>Not started</a:t>
-                      </a:r>
-                    </a:p>
-                  </a:txBody>
-                  <a:tcPr marL="63500" marR="63500" marT="38100" marB="38100">
-                    <a:noFill/>
-                  </a:tcPr>
-                </a:tc>
-                <a:tc>
-                  <a:txBody>
-                    <a:bodyPr wrap="square"/>
-                    <a:lstStyle/>
-                    <a:p>
-                      <a:r>
-                        <a:rPr sz="1100" b="0">
-                          <a:latin typeface="Calibri"/>
-                        </a:rPr>
-                        <a:t>Harness supports --database-url; needs the Postgres container</a:t>
-                      </a:r>
-                    </a:p>
-                  </a:txBody>
-                  <a:tcPr marL="63500" marR="63500" marT="38100" marB="38100">
-                    <a:noFill/>
-                  </a:tcPr>
-                </a:tc>
-              </a:tr>
-              <a:tr h="25400">
-                <a:tc>
-                  <a:txBody>
-                    <a:bodyPr wrap="square"/>
-                    <a:lstStyle/>
-                    <a:p>
-                      <a:r>
-                        <a:rPr sz="1100" b="0">
-                          <a:latin typeface="Calibri"/>
-                        </a:rPr>
-                        <a:t>Not committed — added: real RiskEngine</a:t>
-                      </a:r>
-                    </a:p>
-                  </a:txBody>
-                  <a:tcPr marL="63500" marR="63500" marT="38100" marB="38100">
-                    <a:solidFill>
-                      <a:srgbClr val="F4F6F9"/>
-                    </a:solidFill>
-                  </a:tcPr>
-                </a:tc>
-                <a:tc>
-                  <a:txBody>
-                    <a:bodyPr wrap="square"/>
-                    <a:lstStyle/>
-                    <a:p>
-                      <a:r>
-                        <a:rPr sz="1100" b="0">
-                          <a:latin typeface="Calibri"/>
-                        </a:rPr>
-                        <a:t>Done</a:t>
-                      </a:r>
-                    </a:p>
-                  </a:txBody>
-                  <a:tcPr marL="63500" marR="63500" marT="38100" marB="38100">
-                    <a:solidFill>
-                      <a:srgbClr val="F4F6F9"/>
-                    </a:solidFill>
-                  </a:tcPr>
-                </a:tc>
-                <a:tc>
-                  <a:txBody>
-                    <a:bodyPr wrap="square"/>
-                    <a:lstStyle/>
-                    <a:p>
-                      <a:r>
-                        <a:rPr sz="1100" b="0">
-                          <a:latin typeface="Calibri"/>
-                        </a:rPr>
-                        <a:t>Amount anomaly (robust z-score) + request velocity; the third signal is live instead of a stub</a:t>
-                      </a:r>
-                    </a:p>
-                  </a:txBody>
-                  <a:tcPr marL="63500" marR="63500" marT="38100" marB="38100">
-                    <a:solidFill>
-                      <a:srgbClr val="F4F6F9"/>
-                    </a:solidFill>
-                  </a:tcPr>
-                </a:tc>
-              </a:tr>
-            </a:tbl>
-          </a:graphicData>
-        </a:graphic>
-      </p:graphicFrame>
+        </p:nvPicPr>
+        <p:blipFill>
+          <a:blip r:embed="rId4"/>
+          <a:stretch>
+            <a:fillRect/>
+          </a:stretch>
+        </p:blipFill>
+        <p:spPr>
+          <a:xfrm>
+            <a:off x="1066647" y="2240280"/>
+            <a:ext cx="10058400" cy="2514600"/>
+          </a:xfrm>
+          <a:prstGeom prst="rect">
+            <a:avLst/>
+          </a:prstGeom>
+        </p:spPr>
+      </p:pic>
     </p:spTree>
     <p:extLst>
       <p:ext uri="{BB962C8B-B14F-4D97-AF65-F5344CB8AC3E}">
-        <p14:creationId xmlns:p14="http://schemas.microsoft.com/office/powerpoint/2010/main" val="3231882420"/>
+        <p14:creationId xmlns:p14="http://schemas.microsoft.com/office/powerpoint/2010/main" val="2905062769"/>
       </p:ext>
     </p:extLst>
   </p:cSld>
@@ -13719,7 +7674,7 @@
                 <a:ea typeface="Calibri" panose="020F0502020204030204" pitchFamily="34" charset="0"/>
                 <a:cs typeface="Calibri" panose="020F0502020204030204" pitchFamily="34" charset="0"/>
               </a:rPr>
-              <a:t>Introduction — Overview and Motivation</a:t>
+              <a:t>Existing System vs Proposed System</a:t>
             </a:r>
           </a:p>
         </p:txBody>
@@ -13742,7 +7697,7 @@
         </p:nvSpPr>
         <p:spPr>
           <a:xfrm>
-            <a:off x="1659467" y="1600200"/>
+            <a:off x="1684867" y="1574800"/>
             <a:ext cx="9694333" cy="4614333"/>
           </a:xfrm>
         </p:spPr>
@@ -13759,12 +7714,12 @@
               <a:buNone/>
             </a:pPr>
             <a:r>
-              <a:rPr lang="en-US" sz="1400" b="0" i="0" dirty="0">
+              <a:rPr lang="en-US" sz="1500" b="0" i="1" dirty="0">
                 <a:latin typeface="Calibri" panose="020F0502020204030204" pitchFamily="34" charset="0"/>
                 <a:ea typeface="Calibri" panose="020F0502020204030204" pitchFamily="34" charset="0"/>
                 <a:cs typeface="Calibri" panose="020F0502020204030204" pitchFamily="34" charset="0"/>
               </a:rPr>
-              <a:t>A model is validated once, deployed, and then trusted indefinitely. Drift is checked on a quarterly report — but decisions are made every second.</a:t>
+              <a:t>Monitoring reports after the fact. Custos decides before the action.</a:t>
             </a:r>
           </a:p>
         </p:txBody>
@@ -13858,7 +7813,7 @@
             <a:fld id="{D57F1E4F-1CFF-5643-939E-217C01CDF565}" type="slidenum">
               <a:rPr lang="en-US" smtClean="0"/>
               <a:pPr/>
-              <a:t>4</a:t>
+              <a:t>3</a:t>
             </a:fld>
             <a:endParaRPr lang="en-US" dirty="0"/>
           </a:p>
@@ -13895,7 +7850,7 @@
       </p:sp>
       <p:pic>
         <p:nvPicPr>
-          <p:cNvPr id="8" name="Picture 7" descr="problem_timeline.png"/>
+          <p:cNvPr id="8" name="Picture 7" descr="on_path.png"/>
           <p:cNvPicPr>
             <a:picLocks noChangeAspect="1"/>
           </p:cNvPicPr>
@@ -13909,8 +7864,8 @@
         </p:blipFill>
         <p:spPr>
           <a:xfrm>
-            <a:off x="1066647" y="2606040"/>
-            <a:ext cx="10058400" cy="2514600"/>
+            <a:off x="1249527" y="2194560"/>
+            <a:ext cx="9692640" cy="2887232"/>
           </a:xfrm>
           <a:prstGeom prst="rect">
             <a:avLst/>
@@ -13920,7 +7875,7 @@
     </p:spTree>
     <p:extLst>
       <p:ext uri="{BB962C8B-B14F-4D97-AF65-F5344CB8AC3E}">
-        <p14:creationId xmlns:p14="http://schemas.microsoft.com/office/powerpoint/2010/main" val="2905062769"/>
+        <p14:creationId xmlns:p14="http://schemas.microsoft.com/office/powerpoint/2010/main" val="3231882420"/>
       </p:ext>
     </p:extLst>
   </p:cSld>
@@ -13987,7 +7942,7 @@
                 <a:ea typeface="Calibri" panose="020F0502020204030204" pitchFamily="34" charset="0"/>
                 <a:cs typeface="Calibri" panose="020F0502020204030204" pitchFamily="34" charset="0"/>
               </a:rPr>
-              <a:t>Existing System vs Proposed System</a:t>
+              <a:t>Objectives, Scope and SDGs</a:t>
             </a:r>
           </a:p>
         </p:txBody>
@@ -14027,12 +7982,163 @@
               <a:buNone/>
             </a:pPr>
             <a:r>
-              <a:rPr lang="en-US" sz="1400" b="0" i="0" dirty="0">
+              <a:rPr lang="en-US" sz="1700" b="1" i="0" dirty="0">
                 <a:latin typeface="Calibri" panose="020F0502020204030204" pitchFamily="34" charset="0"/>
                 <a:ea typeface="Calibri" panose="020F0502020204030204" pitchFamily="34" charset="0"/>
                 <a:cs typeface="Calibri" panose="020F0502020204030204" pitchFamily="34" charset="0"/>
               </a:rPr>
-              <a:t>Monitoring tools sit beside the request path and report afterwards. Guardrails block in real time, but only on content. Custos gates the decision itself on whether the model still fits its traffic.</a:t>
+              <a:t>Objectives</a:t>
+            </a:r>
+          </a:p>
+          <a:p>
+            <a:pPr marL="285750" indent="-285750" algn="l">
+              <a:spcBef>
+                <a:spcPts val="100"/>
+              </a:spcBef>
+              <a:buFont typeface="Arial" panose="020B0604020202020204" pitchFamily="34" charset="0"/>
+              <a:buChar char="•"/>
+            </a:pPr>
+            <a:r>
+              <a:rPr lang="en-US" sz="1500" b="0" i="0" dirty="0">
+                <a:latin typeface="Calibri" panose="020F0502020204030204" pitchFamily="34" charset="0"/>
+                <a:ea typeface="Calibri" panose="020F0502020204030204" pitchFamily="34" charset="0"/>
+                <a:cs typeface="Calibri" panose="020F0502020204030204" pitchFamily="34" charset="0"/>
+              </a:rPr>
+              <a:t>Check drift on the live request path, within 50 ms</a:t>
+            </a:r>
+          </a:p>
+          <a:p>
+            <a:pPr marL="285750" indent="-285750" algn="l">
+              <a:spcBef>
+                <a:spcPts val="60"/>
+              </a:spcBef>
+              <a:buFont typeface="Arial" panose="020B0604020202020204" pitchFamily="34" charset="0"/>
+              <a:buChar char="•"/>
+            </a:pPr>
+            <a:r>
+              <a:rPr lang="en-US" sz="1500" b="0" i="0" dirty="0">
+                <a:latin typeface="Calibri" panose="020F0502020204030204" pitchFamily="34" charset="0"/>
+                <a:ea typeface="Calibri" panose="020F0502020204030204" pitchFamily="34" charset="0"/>
+                <a:cs typeface="Calibri" panose="020F0502020204030204" pitchFamily="34" charset="0"/>
+              </a:rPr>
+              <a:t>Name the inputs that moved</a:t>
+            </a:r>
+          </a:p>
+          <a:p>
+            <a:pPr marL="285750" indent="-285750" algn="l">
+              <a:spcBef>
+                <a:spcPts val="60"/>
+              </a:spcBef>
+              <a:buFont typeface="Arial" panose="020B0604020202020204" pitchFamily="34" charset="0"/>
+              <a:buChar char="•"/>
+            </a:pPr>
+            <a:r>
+              <a:rPr lang="en-US" sz="1500" b="0" i="0" dirty="0">
+                <a:latin typeface="Calibri" panose="020F0502020204030204" pitchFamily="34" charset="0"/>
+                <a:ea typeface="Calibri" panose="020F0502020204030204" pitchFamily="34" charset="0"/>
+                <a:cs typeface="Calibri" panose="020F0502020204030204" pitchFamily="34" charset="0"/>
+              </a:rPr>
+              <a:t>One explainable verdict from policy, risk and drift</a:t>
+            </a:r>
+          </a:p>
+          <a:p>
+            <a:pPr marL="285750" indent="-285750" algn="l">
+              <a:spcBef>
+                <a:spcPts val="60"/>
+              </a:spcBef>
+              <a:buFont typeface="Arial" panose="020B0604020202020204" pitchFamily="34" charset="0"/>
+              <a:buChar char="•"/>
+            </a:pPr>
+            <a:r>
+              <a:rPr lang="en-US" sz="1500" b="0" i="0" dirty="0">
+                <a:latin typeface="Calibri" panose="020F0502020204030204" pitchFamily="34" charset="0"/>
+                <a:ea typeface="Calibri" panose="020F0502020204030204" pitchFamily="34" charset="0"/>
+                <a:cs typeface="Calibri" panose="020F0502020204030204" pitchFamily="34" charset="0"/>
+              </a:rPr>
+              <a:t>A tamper-evident record of every verdict</a:t>
+            </a:r>
+          </a:p>
+          <a:p>
+            <a:pPr marL="285750" indent="-285750" algn="l">
+              <a:spcBef>
+                <a:spcPts val="60"/>
+              </a:spcBef>
+              <a:buFont typeface="Arial" panose="020B0604020202020204" pitchFamily="34" charset="0"/>
+              <a:buChar char="•"/>
+            </a:pPr>
+            <a:r>
+              <a:rPr lang="en-US" sz="1500" b="0" i="0" dirty="0">
+                <a:latin typeface="Calibri" panose="020F0502020204030204" pitchFamily="34" charset="0"/>
+                <a:ea typeface="Calibri" panose="020F0502020204030204" pitchFamily="34" charset="0"/>
+                <a:cs typeface="Calibri" panose="020F0502020204030204" pitchFamily="34" charset="0"/>
+              </a:rPr>
+              <a:t>Correct under overload; repairs only with human approval</a:t>
+            </a:r>
+          </a:p>
+          <a:p>
+            <a:pPr marL="0" indent="0" algn="l">
+              <a:spcBef>
+                <a:spcPts val="240"/>
+              </a:spcBef>
+              <a:buNone/>
+            </a:pPr>
+            <a:r>
+              <a:rPr lang="en-US" sz="1700" b="1" i="0" dirty="0">
+                <a:latin typeface="Calibri" panose="020F0502020204030204" pitchFamily="34" charset="0"/>
+                <a:ea typeface="Calibri" panose="020F0502020204030204" pitchFamily="34" charset="0"/>
+                <a:cs typeface="Calibri" panose="020F0502020204030204" pitchFamily="34" charset="0"/>
+              </a:rPr>
+              <a:t>Scope</a:t>
+            </a:r>
+          </a:p>
+          <a:p>
+            <a:pPr marL="285750" indent="-285750" algn="l">
+              <a:spcBef>
+                <a:spcPts val="100"/>
+              </a:spcBef>
+              <a:buFont typeface="Arial" panose="020B0604020202020204" pitchFamily="34" charset="0"/>
+              <a:buChar char="•"/>
+            </a:pPr>
+            <a:r>
+              <a:rPr lang="en-US" sz="1500" b="0" i="0" dirty="0">
+                <a:latin typeface="Calibri" panose="020F0502020204030204" pitchFamily="34" charset="0"/>
+                <a:ea typeface="Calibri" panose="020F0502020204030204" pitchFamily="34" charset="0"/>
+                <a:cs typeface="Calibri" panose="020F0502020204030204" pitchFamily="34" charset="0"/>
+              </a:rPr>
+              <a:t>Gates any model-driven action. Never trains or retrains models.</a:t>
+            </a:r>
+          </a:p>
+          <a:p>
+            <a:pPr marL="0" indent="0" algn="l">
+              <a:spcBef>
+                <a:spcPts val="240"/>
+              </a:spcBef>
+              <a:buNone/>
+            </a:pPr>
+            <a:r>
+              <a:rPr lang="en-US" sz="1700" b="1" i="0" dirty="0">
+                <a:latin typeface="Calibri" panose="020F0502020204030204" pitchFamily="34" charset="0"/>
+                <a:ea typeface="Calibri" panose="020F0502020204030204" pitchFamily="34" charset="0"/>
+                <a:cs typeface="Calibri" panose="020F0502020204030204" pitchFamily="34" charset="0"/>
+              </a:rPr>
+              <a:t>SDGs</a:t>
+            </a:r>
+          </a:p>
+          <a:p>
+            <a:pPr marL="285750" indent="-285750" algn="l">
+              <a:spcBef>
+                <a:spcPts val="100"/>
+              </a:spcBef>
+              <a:buFont typeface="Arial" panose="020B0604020202020204" pitchFamily="34" charset="0"/>
+              <a:buChar char="•"/>
+            </a:pPr>
+            <a:r>
+              <a:rPr lang="en-US" sz="1500" b="0" i="0" dirty="0">
+                <a:latin typeface="Calibri" panose="020F0502020204030204" pitchFamily="34" charset="0"/>
+                <a:ea typeface="Calibri" panose="020F0502020204030204" pitchFamily="34" charset="0"/>
+                <a:cs typeface="Calibri" panose="020F0502020204030204" pitchFamily="34" charset="0"/>
+              </a:rPr>
+              <a:t>9 Industry &amp; innovation  ·  10 Fairer credit  ·  16 Accountable institutions</a:t>
             </a:r>
           </a:p>
         </p:txBody>
@@ -14161,30 +8267,6 @@
           </a:p>
         </p:txBody>
       </p:sp>
-      <p:pic>
-        <p:nvPicPr>
-          <p:cNvPr id="8" name="Picture 7" descr="on_path.png"/>
-          <p:cNvPicPr>
-            <a:picLocks noChangeAspect="1"/>
-          </p:cNvPicPr>
-          <p:nvPr/>
-        </p:nvPicPr>
-        <p:blipFill>
-          <a:blip r:embed="rId4"/>
-          <a:stretch>
-            <a:fillRect/>
-          </a:stretch>
-        </p:blipFill>
-        <p:spPr>
-          <a:xfrm>
-            <a:off x="1249527" y="2514600"/>
-            <a:ext cx="9692640" cy="2887232"/>
-          </a:xfrm>
-          <a:prstGeom prst="rect">
-            <a:avLst/>
-          </a:prstGeom>
-        </p:spPr>
-      </p:pic>
     </p:spTree>
     <p:extLst>
       <p:ext uri="{BB962C8B-B14F-4D97-AF65-F5344CB8AC3E}">
@@ -14255,7 +8337,7 @@
                 <a:ea typeface="Calibri" panose="020F0502020204030204" pitchFamily="34" charset="0"/>
                 <a:cs typeface="Calibri" panose="020F0502020204030204" pitchFamily="34" charset="0"/>
               </a:rPr>
-              <a:t>Objectives, Scope and SDGs</a:t>
+              <a:t>Literature Survey</a:t>
             </a:r>
           </a:p>
         </p:txBody>
@@ -14295,407 +8377,12 @@
               <a:buNone/>
             </a:pPr>
             <a:r>
-              <a:rPr lang="en-US" sz="1600" b="1" i="0" dirty="0">
+              <a:rPr lang="en-US" sz="1500" b="0" i="1" dirty="0">
                 <a:latin typeface="Calibri" panose="020F0502020204030204" pitchFamily="34" charset="0"/>
                 <a:ea typeface="Calibri" panose="020F0502020204030204" pitchFamily="34" charset="0"/>
                 <a:cs typeface="Calibri" panose="020F0502020204030204" pitchFamily="34" charset="0"/>
               </a:rPr>
-              <a:t>Objectives</a:t>
-            </a:r>
-          </a:p>
-          <a:p>
-            <a:pPr marL="285750" indent="-285750" algn="l">
-              <a:spcBef>
-                <a:spcPts val="120"/>
-              </a:spcBef>
-              <a:buFont typeface="Arial" panose="020B0604020202020204" pitchFamily="34" charset="0"/>
-              <a:buChar char="•"/>
-            </a:pPr>
-            <a:r>
-              <a:rPr lang="en-US" sz="1300" b="0" i="0" dirty="0">
-                <a:latin typeface="Calibri" panose="020F0502020204030204" pitchFamily="34" charset="0"/>
-                <a:ea typeface="Calibri" panose="020F0502020204030204" pitchFamily="34" charset="0"/>
-                <a:cs typeface="Calibri" panose="020F0502020204030204" pitchFamily="34" charset="0"/>
-              </a:rPr>
-              <a:t>O1  Put drift on the live request path, inside a 50 ms budget</a:t>
-            </a:r>
-          </a:p>
-          <a:p>
-            <a:pPr marL="285750" indent="-285750" algn="l">
-              <a:spcBef>
-                <a:spcPts val="80"/>
-              </a:spcBef>
-              <a:buFont typeface="Arial" panose="020B0604020202020204" pitchFamily="34" charset="0"/>
-              <a:buChar char="•"/>
-            </a:pPr>
-            <a:r>
-              <a:rPr lang="en-US" sz="1300" b="0" i="0" dirty="0">
-                <a:latin typeface="Calibri" panose="020F0502020204030204" pitchFamily="34" charset="0"/>
-                <a:ea typeface="Calibri" panose="020F0502020204030204" pitchFamily="34" charset="0"/>
-                <a:cs typeface="Calibri" panose="020F0502020204030204" pitchFamily="34" charset="0"/>
-              </a:rPr>
-              <a:t>O2  Attribute drift to the individual inputs that moved</a:t>
-            </a:r>
-          </a:p>
-          <a:p>
-            <a:pPr marL="285750" indent="-285750" algn="l">
-              <a:spcBef>
-                <a:spcPts val="80"/>
-              </a:spcBef>
-              <a:buFont typeface="Arial" panose="020B0604020202020204" pitchFamily="34" charset="0"/>
-              <a:buChar char="•"/>
-            </a:pPr>
-            <a:r>
-              <a:rPr lang="en-US" sz="1300" b="0" i="0" dirty="0">
-                <a:latin typeface="Calibri" panose="020F0502020204030204" pitchFamily="34" charset="0"/>
-                <a:ea typeface="Calibri" panose="020F0502020204030204" pitchFamily="34" charset="0"/>
-                <a:cs typeface="Calibri" panose="020F0502020204030204" pitchFamily="34" charset="0"/>
-              </a:rPr>
-              <a:t>O3  Fuse drift, policy and risk into one explainable verdict</a:t>
-            </a:r>
-          </a:p>
-          <a:p>
-            <a:pPr marL="285750" indent="-285750" algn="l">
-              <a:spcBef>
-                <a:spcPts val="80"/>
-              </a:spcBef>
-              <a:buFont typeface="Arial" panose="020B0604020202020204" pitchFamily="34" charset="0"/>
-              <a:buChar char="•"/>
-            </a:pPr>
-            <a:r>
-              <a:rPr lang="en-US" sz="1300" b="0" i="0" dirty="0">
-                <a:latin typeface="Calibri" panose="020F0502020204030204" pitchFamily="34" charset="0"/>
-                <a:ea typeface="Calibri" panose="020F0502020204030204" pitchFamily="34" charset="0"/>
-                <a:cs typeface="Calibri" panose="020F0502020204030204" pitchFamily="34" charset="0"/>
-              </a:rPr>
-              <a:t>O4  Record every verdict in a tamper-evident chain</a:t>
-            </a:r>
-          </a:p>
-          <a:p>
-            <a:pPr marL="285750" indent="-285750" algn="l">
-              <a:spcBef>
-                <a:spcPts val="80"/>
-              </a:spcBef>
-              <a:buFont typeface="Arial" panose="020B0604020202020204" pitchFamily="34" charset="0"/>
-              <a:buChar char="•"/>
-            </a:pPr>
-            <a:r>
-              <a:rPr lang="en-US" sz="1300" b="0" i="0" dirty="0">
-                <a:latin typeface="Calibri" panose="020F0502020204030204" pitchFamily="34" charset="0"/>
-                <a:ea typeface="Calibri" panose="020F0502020204030204" pitchFamily="34" charset="0"/>
-                <a:cs typeface="Calibri" panose="020F0502020204030204" pitchFamily="34" charset="0"/>
-              </a:rPr>
-              <a:t>O5  Stay correct under overload — refuse, never queue or change answers  (new)</a:t>
-            </a:r>
-          </a:p>
-          <a:p>
-            <a:pPr marL="0" indent="0" algn="l">
-              <a:spcBef>
-                <a:spcPts val="260"/>
-              </a:spcBef>
-              <a:buNone/>
-            </a:pPr>
-            <a:r>
-              <a:rPr lang="en-US" sz="1600" b="1" i="0" dirty="0">
-                <a:latin typeface="Calibri" panose="020F0502020204030204" pitchFamily="34" charset="0"/>
-                <a:ea typeface="Calibri" panose="020F0502020204030204" pitchFamily="34" charset="0"/>
-                <a:cs typeface="Calibri" panose="020F0502020204030204" pitchFamily="34" charset="0"/>
-              </a:rPr>
-              <a:t>Scope</a:t>
-            </a:r>
-          </a:p>
-          <a:p>
-            <a:pPr marL="285750" indent="-285750" algn="l">
-              <a:spcBef>
-                <a:spcPts val="120"/>
-              </a:spcBef>
-              <a:buFont typeface="Arial" panose="020B0604020202020204" pitchFamily="34" charset="0"/>
-              <a:buChar char="•"/>
-            </a:pPr>
-            <a:r>
-              <a:rPr lang="en-US" sz="1300" b="0" i="0" dirty="0">
-                <a:latin typeface="Calibri" panose="020F0502020204030204" pitchFamily="34" charset="0"/>
-                <a:ea typeface="Calibri" panose="020F0502020204030204" pitchFamily="34" charset="0"/>
-                <a:cs typeface="Calibri" panose="020F0502020204030204" pitchFamily="34" charset="0"/>
-              </a:rPr>
-              <a:t>Custos does not train, serve or retrain models. It decides, records and proposes repairs to its own gating; humans approve.</a:t>
-            </a:r>
-          </a:p>
-          <a:p>
-            <a:pPr marL="0" indent="0" algn="l">
-              <a:spcBef>
-                <a:spcPts val="260"/>
-              </a:spcBef>
-              <a:buNone/>
-            </a:pPr>
-            <a:r>
-              <a:rPr lang="en-US" sz="1600" b="1" i="0" dirty="0">
-                <a:latin typeface="Calibri" panose="020F0502020204030204" pitchFamily="34" charset="0"/>
-                <a:ea typeface="Calibri" panose="020F0502020204030204" pitchFamily="34" charset="0"/>
-                <a:cs typeface="Calibri" panose="020F0502020204030204" pitchFamily="34" charset="0"/>
-              </a:rPr>
-              <a:t>SDGs</a:t>
-            </a:r>
-          </a:p>
-          <a:p>
-            <a:pPr marL="285750" indent="-285750" algn="l">
-              <a:spcBef>
-                <a:spcPts val="120"/>
-              </a:spcBef>
-              <a:buFont typeface="Arial" panose="020B0604020202020204" pitchFamily="34" charset="0"/>
-              <a:buChar char="•"/>
-            </a:pPr>
-            <a:r>
-              <a:rPr lang="en-US" sz="1300" b="0" i="0" dirty="0">
-                <a:latin typeface="Calibri" panose="020F0502020204030204" pitchFamily="34" charset="0"/>
-                <a:ea typeface="Calibri" panose="020F0502020204030204" pitchFamily="34" charset="0"/>
-                <a:cs typeface="Calibri" panose="020F0502020204030204" pitchFamily="34" charset="0"/>
-              </a:rPr>
-              <a:t>9 — auditable infrastructure  ·  10 — limits systematically unfair credit decisions  ·  16 — verifiable records for regulators</a:t>
-            </a:r>
-          </a:p>
-        </p:txBody>
-      </p:sp>
-      <p:pic>
-        <p:nvPicPr>
-          <p:cNvPr id="5" name="Graphic 4">
-            <a:extLst>
-              <a:ext uri="{FF2B5EF4-FFF2-40B4-BE49-F238E27FC236}">
-                <a16:creationId xmlns:a16="http://schemas.microsoft.com/office/drawing/2014/main" id="{E7125167-8301-4D88-B79A-A8DA3C19E0D6}"/>
-              </a:ext>
-            </a:extLst>
-          </p:cNvPr>
-          <p:cNvPicPr>
-            <a:picLocks noChangeAspect="1"/>
-          </p:cNvPicPr>
-          <p:nvPr/>
-        </p:nvPicPr>
-        <p:blipFill>
-          <a:blip r:embed="rId2">
-            <a:extLst>
-              <a:ext uri="{96DAC541-7B7A-43D3-8B79-37D633B846F1}">
-                <asvg:svgBlip xmlns:asvg="http://schemas.microsoft.com/office/drawing/2016/SVG/main" r:embed="rId3"/>
-              </a:ext>
-            </a:extLst>
-          </a:blip>
-          <a:stretch>
-            <a:fillRect/>
-          </a:stretch>
-        </p:blipFill>
-        <p:spPr>
-          <a:xfrm>
-            <a:off x="127001" y="86782"/>
-            <a:ext cx="1159932" cy="1159932"/>
-          </a:xfrm>
-          <a:prstGeom prst="rect">
-            <a:avLst/>
-          </a:prstGeom>
-        </p:spPr>
-      </p:pic>
-      <p:sp>
-        <p:nvSpPr>
-          <p:cNvPr id="4" name="Date Placeholder 3">
-            <a:extLst>
-              <a:ext uri="{FF2B5EF4-FFF2-40B4-BE49-F238E27FC236}">
-                <a16:creationId xmlns:a16="http://schemas.microsoft.com/office/drawing/2014/main" id="{35032362-C5A5-4DBF-AD79-DE6FB7439999}"/>
-              </a:ext>
-            </a:extLst>
-          </p:cNvPr>
-          <p:cNvSpPr>
-            <a:spLocks noGrp="1"/>
-          </p:cNvSpPr>
-          <p:nvPr>
-            <p:ph type="dt" sz="half" idx="10"/>
-          </p:nvPr>
-        </p:nvSpPr>
-        <p:spPr/>
-        <p:txBody>
-          <a:bodyPr/>
-          <a:lstStyle/>
-          <a:p>
-            <a:fld id="{64C96E34-94C0-49E4-A53B-4A44141FD3C8}" type="datetime3">
-              <a:rPr lang="en-US" smtClean="0"/>
-              <a:t>17 October 2026</a:t>
-            </a:fld>
-            <a:endParaRPr lang="en-US" dirty="0"/>
-          </a:p>
-        </p:txBody>
-      </p:sp>
-      <p:sp>
-        <p:nvSpPr>
-          <p:cNvPr id="6" name="Slide Number Placeholder 5">
-            <a:extLst>
-              <a:ext uri="{FF2B5EF4-FFF2-40B4-BE49-F238E27FC236}">
-                <a16:creationId xmlns:a16="http://schemas.microsoft.com/office/drawing/2014/main" id="{115AAB64-5B51-4B5A-B69E-D96362CE6E74}"/>
-              </a:ext>
-            </a:extLst>
-          </p:cNvPr>
-          <p:cNvSpPr>
-            <a:spLocks noGrp="1"/>
-          </p:cNvSpPr>
-          <p:nvPr>
-            <p:ph type="sldNum" sz="quarter" idx="12"/>
-          </p:nvPr>
-        </p:nvSpPr>
-        <p:spPr/>
-        <p:txBody>
-          <a:bodyPr/>
-          <a:lstStyle/>
-          <a:p>
-            <a:fld id="{D57F1E4F-1CFF-5643-939E-217C01CDF565}" type="slidenum">
-              <a:rPr lang="en-US" smtClean="0"/>
-              <a:pPr/>
-              <a:t>3</a:t>
-            </a:fld>
-            <a:endParaRPr lang="en-US" dirty="0"/>
-          </a:p>
-        </p:txBody>
-      </p:sp>
-      <p:sp>
-        <p:nvSpPr>
-          <p:cNvPr id="7" name="Footer Placeholder 6">
-            <a:extLst>
-              <a:ext uri="{FF2B5EF4-FFF2-40B4-BE49-F238E27FC236}">
-                <a16:creationId xmlns:a16="http://schemas.microsoft.com/office/drawing/2014/main" id="{8683C6DF-27D9-468B-A1AB-FE568488FE57}"/>
-              </a:ext>
-            </a:extLst>
-          </p:cNvPr>
-          <p:cNvSpPr>
-            <a:spLocks noGrp="1"/>
-          </p:cNvSpPr>
-          <p:nvPr>
-            <p:ph type="ftr" sz="quarter" idx="11"/>
-          </p:nvPr>
-        </p:nvSpPr>
-        <p:spPr/>
-        <p:txBody>
-          <a:bodyPr/>
-          <a:lstStyle/>
-          <a:p>
-            <a:r>
-              <a:rPr lang="en-US"/>
-              <a:t>Dept of AI &amp; DS</a:t>
-            </a:r>
-            <a:endParaRPr lang="en-US" dirty="0"/>
-          </a:p>
-        </p:txBody>
-      </p:sp>
-    </p:spTree>
-    <p:extLst>
-      <p:ext uri="{BB962C8B-B14F-4D97-AF65-F5344CB8AC3E}">
-        <p14:creationId xmlns:p14="http://schemas.microsoft.com/office/powerpoint/2010/main" val="3231882420"/>
-      </p:ext>
-    </p:extLst>
-  </p:cSld>
-  <p:clrMapOvr>
-    <a:masterClrMapping/>
-  </p:clrMapOvr>
-</p:sld>
-</file>
-
-<file path=ppt/slides/slide8.xml><?xml version="1.0" encoding="utf-8"?>
-<p:sld xmlns:a="http://schemas.openxmlformats.org/drawingml/2006/main" xmlns:r="http://schemas.openxmlformats.org/officeDocument/2006/relationships" xmlns:p="http://schemas.openxmlformats.org/presentationml/2006/main">
-  <p:cSld>
-    <p:spTree>
-      <p:nvGrpSpPr>
-        <p:cNvPr id="1" name=""/>
-        <p:cNvGrpSpPr/>
-        <p:nvPr/>
-      </p:nvGrpSpPr>
-      <p:grpSpPr>
-        <a:xfrm>
-          <a:off x="0" y="0"/>
-          <a:ext cx="0" cy="0"/>
-          <a:chOff x="0" y="0"/>
-          <a:chExt cx="0" cy="0"/>
-        </a:xfrm>
-      </p:grpSpPr>
-      <p:sp>
-        <p:nvSpPr>
-          <p:cNvPr id="2" name="Title 1">
-            <a:extLst>
-              <a:ext uri="{FF2B5EF4-FFF2-40B4-BE49-F238E27FC236}">
-                <a16:creationId xmlns:a16="http://schemas.microsoft.com/office/drawing/2014/main" id="{BD1A189D-22D1-4D1A-9E04-C6134EC51F8B}"/>
-              </a:ext>
-            </a:extLst>
-          </p:cNvPr>
-          <p:cNvSpPr>
-            <a:spLocks noGrp="1"/>
-          </p:cNvSpPr>
-          <p:nvPr>
-            <p:ph type="ctrTitle"/>
-          </p:nvPr>
-        </p:nvSpPr>
-        <p:spPr>
-          <a:xfrm>
-            <a:off x="1684868" y="203198"/>
-            <a:ext cx="9694332" cy="880535"/>
-          </a:xfrm>
-        </p:spPr>
-        <p:txBody>
-          <a:bodyPr>
-            <a:normAutofit/>
-          </a:bodyPr>
-          <a:lstStyle/>
-          <a:p>
-            <a:pPr marL="0" indent="0" algn="l">
-              <a:spcBef>
-                <a:spcPts val="0"/>
-              </a:spcBef>
-              <a:buNone/>
-            </a:pPr>
-            <a:r>
-              <a:rPr lang="en-US" sz="3200" b="1" i="0" dirty="0">
-                <a:latin typeface="Calibri" panose="020F0502020204030204" pitchFamily="34" charset="0"/>
-                <a:ea typeface="Calibri" panose="020F0502020204030204" pitchFamily="34" charset="0"/>
-                <a:cs typeface="Calibri" panose="020F0502020204030204" pitchFamily="34" charset="0"/>
-              </a:rPr>
-              <a:t>Literature Survey</a:t>
-            </a:r>
-          </a:p>
-        </p:txBody>
-      </p:sp>
-      <p:sp>
-        <p:nvSpPr>
-          <p:cNvPr id="3" name="Subtitle 2">
-            <a:extLst>
-              <a:ext uri="{FF2B5EF4-FFF2-40B4-BE49-F238E27FC236}">
-                <a16:creationId xmlns:a16="http://schemas.microsoft.com/office/drawing/2014/main" id="{255E737C-85F2-47BC-AD38-AD8B001473B7}"/>
-              </a:ext>
-            </a:extLst>
-          </p:cNvPr>
-          <p:cNvSpPr>
-            <a:spLocks noGrp="1"/>
-          </p:cNvSpPr>
-          <p:nvPr>
-            <p:ph type="subTitle" idx="1"/>
-          </p:nvPr>
-        </p:nvSpPr>
-        <p:spPr>
-          <a:xfrm>
-            <a:off x="1684867" y="1574800"/>
-            <a:ext cx="9694333" cy="4614333"/>
-          </a:xfrm>
-        </p:spPr>
-        <p:txBody>
-          <a:bodyPr>
-            <a:normAutofit/>
-          </a:bodyPr>
-          <a:lstStyle/>
-          <a:p>
-            <a:pPr marL="0" indent="0" algn="l">
-              <a:spcBef>
-                <a:spcPts val="0"/>
-              </a:spcBef>
-              <a:buNone/>
-            </a:pPr>
-            <a:r>
-              <a:rPr lang="en-US" sz="1300" b="0" i="0" dirty="0">
-                <a:latin typeface="Calibri" panose="020F0502020204030204" pitchFamily="34" charset="0"/>
-                <a:ea typeface="Calibri" panose="020F0502020204030204" pitchFamily="34" charset="0"/>
-                <a:cs typeface="Calibri" panose="020F0502020204030204" pitchFamily="34" charset="0"/>
-              </a:rPr>
-              <a:t>Eight works, each checked against its published venue. New since Review-1: Paleyes et al. (2022) and Rauba et al. (NeurIPS 2024).</a:t>
+              <a:t>Every paper detects or diagnoses. None acts on the decision in flight.</a:t>
             </a:r>
           </a:p>
         </p:txBody>
@@ -15215,117 +8902,6 @@
                         <a:rPr sz="900" i="0">
                           <a:latin typeface="Calibri"/>
                         </a:rPr>
-                        <a:t>Learning under Concept Drift: A Review</a:t>
-                      </a:r>
-                      <a:endParaRPr lang="en-IN" dirty="0"/>
-                    </a:p>
-                    <a:p>
-                      <a:r>
-                        <a:rPr sz="850" i="1">
-                          <a:latin typeface="Calibri"/>
-                        </a:rPr>
-                        <a:t>Lu, Liu, Dong, Gu, Gama, Zhang</a:t>
-                      </a:r>
-                    </a:p>
-                  </a:txBody>
-                  <a:tcPr/>
-                </a:tc>
-                <a:tc>
-                  <a:txBody>
-                    <a:bodyPr wrap="square"/>
-                    <a:lstStyle/>
-                    <a:p>
-                      <a:r>
-                        <a:rPr sz="900" i="0">
-                          <a:latin typeface="Calibri"/>
-                        </a:rPr>
-                        <a:t>IEEE TKDE</a:t>
-                      </a:r>
-                      <a:endParaRPr lang="en-IN" dirty="0"/>
-                    </a:p>
-                  </a:txBody>
-                  <a:tcPr/>
-                </a:tc>
-                <a:tc>
-                  <a:txBody>
-                    <a:bodyPr wrap="square"/>
-                    <a:lstStyle/>
-                    <a:p>
-                      <a:r>
-                        <a:rPr sz="900" i="0">
-                          <a:latin typeface="Calibri"/>
-                        </a:rPr>
-                        <a:t>2019</a:t>
-                      </a:r>
-                      <a:endParaRPr lang="en-IN" dirty="0"/>
-                    </a:p>
-                  </a:txBody>
-                  <a:tcPr/>
-                </a:tc>
-                <a:tc>
-                  <a:txBody>
-                    <a:bodyPr wrap="square"/>
-                    <a:lstStyle/>
-                    <a:p>
-                      <a:r>
-                        <a:rPr sz="900" i="0">
-                          <a:latin typeface="Calibri"/>
-                        </a:rPr>
-                        <a:t>Unifies drift detection, understanding and adaptation</a:t>
-                      </a:r>
-                      <a:endParaRPr lang="en-IN" dirty="0"/>
-                    </a:p>
-                  </a:txBody>
-                  <a:tcPr/>
-                </a:tc>
-                <a:tc>
-                  <a:txBody>
-                    <a:bodyPr wrap="square"/>
-                    <a:lstStyle/>
-                    <a:p>
-                      <a:r>
-                        <a:rPr sz="900" i="0">
-                          <a:latin typeface="Calibri"/>
-                        </a:rPr>
-                        <a:t>Assumes labels arrive; evaluated in batch</a:t>
-                      </a:r>
-                      <a:endParaRPr lang="en-IN" dirty="0"/>
-                    </a:p>
-                  </a:txBody>
-                  <a:tcPr/>
-                </a:tc>
-                <a:tc>
-                  <a:txBody>
-                    <a:bodyPr wrap="square"/>
-                    <a:lstStyle/>
-                    <a:p>
-                      <a:r>
-                        <a:rPr sz="900" i="0">
-                          <a:latin typeface="Calibri"/>
-                        </a:rPr>
-                        <a:t>Unlabelled live traffic not addressed</a:t>
-                      </a:r>
-                      <a:endParaRPr lang="en-IN" dirty="0"/>
-                    </a:p>
-                  </a:txBody>
-                  <a:tcPr/>
-                </a:tc>
-                <a:extLst>
-                  <a:ext uri="{0D108BD9-81ED-4DB2-BD59-A6C34878D82A}">
-                    <a16:rowId xmlns:a16="http://schemas.microsoft.com/office/drawing/2014/main" val="3961905800"/>
-                  </a:ext>
-                </a:extLst>
-              </a:tr>
-              <a:tr h="370840">
-                <a:tc>
-                  <a:txBody>
-                    <a:bodyPr wrap="square"/>
-                    <a:lstStyle/>
-                    <a:p>
-                      <a:r>
-                        <a:rPr sz="900" i="0">
-                          <a:latin typeface="Calibri"/>
-                        </a:rPr>
                         <a:t>Failing Loudly: Detecting Dataset Shift</a:t>
                       </a:r>
                       <a:endParaRPr lang="en-IN" dirty="0"/>
@@ -15423,118 +8999,7 @@
                 </a:tc>
                 <a:extLst>
                   <a:ext uri="{0D108BD9-81ED-4DB2-BD59-A6C34878D82A}">
-                    <a16:rowId xmlns:a16="http://schemas.microsoft.com/office/drawing/2014/main" val="357925700"/>
-                  </a:ext>
-                </a:extLst>
-              </a:tr>
-              <a:tr h="370840">
-                <a:tc>
-                  <a:txBody>
-                    <a:bodyPr wrap="square"/>
-                    <a:lstStyle/>
-                    <a:p>
-                      <a:r>
-                        <a:rPr sz="900" i="0">
-                          <a:latin typeface="Calibri"/>
-                        </a:rPr>
-                        <a:t>Data Validation for Machine Learning</a:t>
-                      </a:r>
-                      <a:endParaRPr lang="en-IN" dirty="0"/>
-                    </a:p>
-                    <a:p>
-                      <a:r>
-                        <a:rPr sz="850" i="1">
-                          <a:latin typeface="Calibri"/>
-                        </a:rPr>
-                        <a:t>Breck, Polyzotis et al., Google</a:t>
-                      </a:r>
-                    </a:p>
-                  </a:txBody>
-                  <a:tcPr/>
-                </a:tc>
-                <a:tc>
-                  <a:txBody>
-                    <a:bodyPr wrap="square"/>
-                    <a:lstStyle/>
-                    <a:p>
-                      <a:r>
-                        <a:rPr sz="900" i="0">
-                          <a:latin typeface="Calibri"/>
-                        </a:rPr>
-                        <a:t>MLSys</a:t>
-                      </a:r>
-                      <a:endParaRPr lang="en-IN" dirty="0"/>
-                    </a:p>
-                  </a:txBody>
-                  <a:tcPr/>
-                </a:tc>
-                <a:tc>
-                  <a:txBody>
-                    <a:bodyPr wrap="square"/>
-                    <a:lstStyle/>
-                    <a:p>
-                      <a:r>
-                        <a:rPr sz="900" i="0">
-                          <a:latin typeface="Calibri"/>
-                        </a:rPr>
-                        <a:t>2019</a:t>
-                      </a:r>
-                      <a:endParaRPr lang="en-IN" dirty="0"/>
-                    </a:p>
-                  </a:txBody>
-                  <a:tcPr/>
-                </a:tc>
-                <a:tc>
-                  <a:txBody>
-                    <a:bodyPr wrap="square"/>
-                    <a:lstStyle/>
-                    <a:p>
-                      <a:r>
-                        <a:rPr sz="900" i="0">
-                          <a:latin typeface="Calibri"/>
-                        </a:rPr>
-                        <a:t>Schema-driven validation of training and serving data in TFX</a:t>
-                      </a:r>
-                      <a:endParaRPr lang="en-IN" dirty="0"/>
-                    </a:p>
-                  </a:txBody>
-                  <a:tcPr/>
-                </a:tc>
-                <a:tc>
-                  <a:txBody>
-                    <a:bodyPr wrap="square"/>
-                    <a:lstStyle/>
-                    <a:p>
-                      <a:r>
-                        <a:rPr sz="900" i="0">
-                          <a:latin typeface="Calibri"/>
-                        </a:rPr>
-                        <a:t>Validates schema conformance, not distributional trust</a:t>
-                      </a:r>
-                      <a:endParaRPr lang="en-IN" dirty="0"/>
-                    </a:p>
-                  </a:txBody>
-                  <a:tcPr/>
-                </a:tc>
-                <a:tc>
-                  <a:txBody>
-                    <a:bodyPr wrap="square"/>
-                    <a:lstStyle/>
-                    <a:p>
-                      <a:r>
-                        <a:rPr sz="900" i="0">
-                          <a:latin typeface="Calibri"/>
-                        </a:rPr>
-                        <a:t>Pipeline-time only; no per-request verdict</a:t>
-                      </a:r>
-                      <a:endParaRPr lang="en-IN" dirty="0"/>
-                    </a:p>
-                  </a:txBody>
-                  <a:tcPr/>
-                </a:tc>
-                <a:extLst>
-                  <a:ext uri="{0D108BD9-81ED-4DB2-BD59-A6C34878D82A}">
-                    <a16:rowId xmlns:a16="http://schemas.microsoft.com/office/drawing/2014/main" val="357925700"/>
+                    <a16:rowId xmlns:a16="http://schemas.microsoft.com/office/drawing/2014/main" val="3961905800"/>
                   </a:ext>
                 </a:extLst>
               </a:tr>
@@ -15888,6 +9353,274 @@
 </p:sld>
 </file>
 
+<file path=ppt/slides/slide8.xml><?xml version="1.0" encoding="utf-8"?>
+<p:sld xmlns:a="http://schemas.openxmlformats.org/drawingml/2006/main" xmlns:r="http://schemas.openxmlformats.org/officeDocument/2006/relationships" xmlns:p="http://schemas.openxmlformats.org/presentationml/2006/main">
+  <p:cSld>
+    <p:spTree>
+      <p:nvGrpSpPr>
+        <p:cNvPr id="1" name=""/>
+        <p:cNvGrpSpPr/>
+        <p:nvPr/>
+      </p:nvGrpSpPr>
+      <p:grpSpPr>
+        <a:xfrm>
+          <a:off x="0" y="0"/>
+          <a:ext cx="0" cy="0"/>
+          <a:chOff x="0" y="0"/>
+          <a:chExt cx="0" cy="0"/>
+        </a:xfrm>
+      </p:grpSpPr>
+      <p:sp>
+        <p:nvSpPr>
+          <p:cNvPr id="2" name="Title 1">
+            <a:extLst>
+              <a:ext uri="{FF2B5EF4-FFF2-40B4-BE49-F238E27FC236}">
+                <a16:creationId xmlns:a16="http://schemas.microsoft.com/office/drawing/2014/main" id="{BD1A189D-22D1-4D1A-9E04-C6134EC51F8B}"/>
+              </a:ext>
+            </a:extLst>
+          </p:cNvPr>
+          <p:cNvSpPr>
+            <a:spLocks noGrp="1"/>
+          </p:cNvSpPr>
+          <p:nvPr>
+            <p:ph type="ctrTitle"/>
+          </p:nvPr>
+        </p:nvSpPr>
+        <p:spPr>
+          <a:xfrm>
+            <a:off x="1684868" y="203198"/>
+            <a:ext cx="9694332" cy="880535"/>
+          </a:xfrm>
+        </p:spPr>
+        <p:txBody>
+          <a:bodyPr>
+            <a:normAutofit/>
+          </a:bodyPr>
+          <a:lstStyle/>
+          <a:p>
+            <a:pPr marL="0" indent="0" algn="l">
+              <a:spcBef>
+                <a:spcPts val="0"/>
+              </a:spcBef>
+              <a:buNone/>
+            </a:pPr>
+            <a:r>
+              <a:rPr lang="en-US" sz="3200" b="1" i="0" dirty="0">
+                <a:latin typeface="Calibri" panose="020F0502020204030204" pitchFamily="34" charset="0"/>
+                <a:ea typeface="Calibri" panose="020F0502020204030204" pitchFamily="34" charset="0"/>
+                <a:cs typeface="Calibri" panose="020F0502020204030204" pitchFamily="34" charset="0"/>
+              </a:rPr>
+              <a:t>Research Gap → Objectives</a:t>
+            </a:r>
+          </a:p>
+        </p:txBody>
+      </p:sp>
+      <p:sp>
+        <p:nvSpPr>
+          <p:cNvPr id="3" name="Subtitle 2">
+            <a:extLst>
+              <a:ext uri="{FF2B5EF4-FFF2-40B4-BE49-F238E27FC236}">
+                <a16:creationId xmlns:a16="http://schemas.microsoft.com/office/drawing/2014/main" id="{255E737C-85F2-47BC-AD38-AD8B001473B7}"/>
+              </a:ext>
+            </a:extLst>
+          </p:cNvPr>
+          <p:cNvSpPr>
+            <a:spLocks noGrp="1"/>
+          </p:cNvSpPr>
+          <p:nvPr>
+            <p:ph type="subTitle" idx="1"/>
+          </p:nvPr>
+        </p:nvSpPr>
+        <p:spPr>
+          <a:xfrm>
+            <a:off x="1684867" y="1574800"/>
+            <a:ext cx="9694333" cy="4614333"/>
+          </a:xfrm>
+        </p:spPr>
+        <p:txBody>
+          <a:bodyPr>
+            <a:normAutofit/>
+          </a:bodyPr>
+          <a:lstStyle/>
+          <a:p>
+            <a:pPr marL="0" indent="0" algn="l">
+              <a:spcBef>
+                <a:spcPts val="0"/>
+              </a:spcBef>
+              <a:buNone/>
+            </a:pPr>
+            <a:r>
+              <a:rPr lang="en-US" sz="1500" b="0" i="1" dirty="0">
+                <a:latin typeface="Calibri" panose="020F0502020204030204" pitchFamily="34" charset="0"/>
+                <a:ea typeface="Calibri" panose="020F0502020204030204" pitchFamily="34" charset="0"/>
+                <a:cs typeface="Calibri" panose="020F0502020204030204" pitchFamily="34" charset="0"/>
+              </a:rPr>
+              <a:t>Each gap the survey found maps to one objective.</a:t>
+            </a:r>
+          </a:p>
+        </p:txBody>
+      </p:sp>
+      <p:pic>
+        <p:nvPicPr>
+          <p:cNvPr id="5" name="Graphic 4">
+            <a:extLst>
+              <a:ext uri="{FF2B5EF4-FFF2-40B4-BE49-F238E27FC236}">
+                <a16:creationId xmlns:a16="http://schemas.microsoft.com/office/drawing/2014/main" id="{E7125167-8301-4D88-B79A-A8DA3C19E0D6}"/>
+              </a:ext>
+            </a:extLst>
+          </p:cNvPr>
+          <p:cNvPicPr>
+            <a:picLocks noChangeAspect="1"/>
+          </p:cNvPicPr>
+          <p:nvPr/>
+        </p:nvPicPr>
+        <p:blipFill>
+          <a:blip r:embed="rId2">
+            <a:extLst>
+              <a:ext uri="{96DAC541-7B7A-43D3-8B79-37D633B846F1}">
+                <asvg:svgBlip xmlns:asvg="http://schemas.microsoft.com/office/drawing/2016/SVG/main" r:embed="rId3"/>
+              </a:ext>
+            </a:extLst>
+          </a:blip>
+          <a:stretch>
+            <a:fillRect/>
+          </a:stretch>
+        </p:blipFill>
+        <p:spPr>
+          <a:xfrm>
+            <a:off x="127001" y="86782"/>
+            <a:ext cx="1159932" cy="1159932"/>
+          </a:xfrm>
+          <a:prstGeom prst="rect">
+            <a:avLst/>
+          </a:prstGeom>
+        </p:spPr>
+      </p:pic>
+      <p:sp>
+        <p:nvSpPr>
+          <p:cNvPr id="4" name="Date Placeholder 3">
+            <a:extLst>
+              <a:ext uri="{FF2B5EF4-FFF2-40B4-BE49-F238E27FC236}">
+                <a16:creationId xmlns:a16="http://schemas.microsoft.com/office/drawing/2014/main" id="{35032362-C5A5-4DBF-AD79-DE6FB7439999}"/>
+              </a:ext>
+            </a:extLst>
+          </p:cNvPr>
+          <p:cNvSpPr>
+            <a:spLocks noGrp="1"/>
+          </p:cNvSpPr>
+          <p:nvPr>
+            <p:ph type="dt" sz="half" idx="10"/>
+          </p:nvPr>
+        </p:nvSpPr>
+        <p:spPr/>
+        <p:txBody>
+          <a:bodyPr/>
+          <a:lstStyle/>
+          <a:p>
+            <a:fld id="{64C96E34-94C0-49E4-A53B-4A44141FD3C8}" type="datetime3">
+              <a:rPr lang="en-US" smtClean="0"/>
+              <a:t>17 October 2026</a:t>
+            </a:fld>
+            <a:endParaRPr lang="en-US" dirty="0"/>
+          </a:p>
+        </p:txBody>
+      </p:sp>
+      <p:sp>
+        <p:nvSpPr>
+          <p:cNvPr id="6" name="Slide Number Placeholder 5">
+            <a:extLst>
+              <a:ext uri="{FF2B5EF4-FFF2-40B4-BE49-F238E27FC236}">
+                <a16:creationId xmlns:a16="http://schemas.microsoft.com/office/drawing/2014/main" id="{115AAB64-5B51-4B5A-B69E-D96362CE6E74}"/>
+              </a:ext>
+            </a:extLst>
+          </p:cNvPr>
+          <p:cNvSpPr>
+            <a:spLocks noGrp="1"/>
+          </p:cNvSpPr>
+          <p:nvPr>
+            <p:ph type="sldNum" sz="quarter" idx="12"/>
+          </p:nvPr>
+        </p:nvSpPr>
+        <p:spPr/>
+        <p:txBody>
+          <a:bodyPr/>
+          <a:lstStyle/>
+          <a:p>
+            <a:fld id="{D57F1E4F-1CFF-5643-939E-217C01CDF565}" type="slidenum">
+              <a:rPr lang="en-US" smtClean="0"/>
+              <a:pPr/>
+              <a:t>3</a:t>
+            </a:fld>
+            <a:endParaRPr lang="en-US" dirty="0"/>
+          </a:p>
+        </p:txBody>
+      </p:sp>
+      <p:sp>
+        <p:nvSpPr>
+          <p:cNvPr id="7" name="Footer Placeholder 6">
+            <a:extLst>
+              <a:ext uri="{FF2B5EF4-FFF2-40B4-BE49-F238E27FC236}">
+                <a16:creationId xmlns:a16="http://schemas.microsoft.com/office/drawing/2014/main" id="{8683C6DF-27D9-468B-A1AB-FE568488FE57}"/>
+              </a:ext>
+            </a:extLst>
+          </p:cNvPr>
+          <p:cNvSpPr>
+            <a:spLocks noGrp="1"/>
+          </p:cNvSpPr>
+          <p:nvPr>
+            <p:ph type="ftr" sz="quarter" idx="11"/>
+          </p:nvPr>
+        </p:nvSpPr>
+        <p:spPr/>
+        <p:txBody>
+          <a:bodyPr/>
+          <a:lstStyle/>
+          <a:p>
+            <a:r>
+              <a:rPr lang="en-US"/>
+              <a:t>Dept of AI &amp; DS</a:t>
+            </a:r>
+            <a:endParaRPr lang="en-US" dirty="0"/>
+          </a:p>
+        </p:txBody>
+      </p:sp>
+      <p:pic>
+        <p:nvPicPr>
+          <p:cNvPr id="8" name="Picture 7" descr="gap_map.png"/>
+          <p:cNvPicPr>
+            <a:picLocks noChangeAspect="1"/>
+          </p:cNvPicPr>
+          <p:nvPr/>
+        </p:nvPicPr>
+        <p:blipFill>
+          <a:blip r:embed="rId4"/>
+          <a:stretch>
+            <a:fillRect/>
+          </a:stretch>
+        </p:blipFill>
+        <p:spPr>
+          <a:xfrm>
+            <a:off x="1066647" y="2240280"/>
+            <a:ext cx="10058400" cy="2926080"/>
+          </a:xfrm>
+          <a:prstGeom prst="rect">
+            <a:avLst/>
+          </a:prstGeom>
+        </p:spPr>
+      </p:pic>
+    </p:spTree>
+    <p:extLst>
+      <p:ext uri="{BB962C8B-B14F-4D97-AF65-F5344CB8AC3E}">
+        <p14:creationId xmlns:p14="http://schemas.microsoft.com/office/powerpoint/2010/main" val="3231882420"/>
+      </p:ext>
+    </p:extLst>
+  </p:cSld>
+  <p:clrMapOvr>
+    <a:masterClrMapping/>
+  </p:clrMapOvr>
+</p:sld>
+</file>
+
 <file path=ppt/slides/slide9.xml><?xml version="1.0" encoding="utf-8"?>
 <p:sld xmlns:a="http://schemas.openxmlformats.org/drawingml/2006/main" xmlns:r="http://schemas.openxmlformats.org/officeDocument/2006/relationships" xmlns:p="http://schemas.openxmlformats.org/presentationml/2006/main">
   <p:cSld>
@@ -15924,7 +9657,7 @@
         <p:spPr>
           <a:xfrm>
             <a:off x="1684868" y="203198"/>
-            <a:ext cx="9694332" cy="880535"/>
+            <a:ext cx="9999132" cy="880535"/>
           </a:xfrm>
         </p:spPr>
         <p:txBody>
@@ -15945,7 +9678,7 @@
                 <a:ea typeface="Calibri" panose="020F0502020204030204" pitchFamily="34" charset="0"/>
                 <a:cs typeface="Calibri" panose="020F0502020204030204" pitchFamily="34" charset="0"/>
               </a:rPr>
-              <a:t>Research Gap and Objectives</a:t>
+              <a:t>Requirement Analysis and Specification</a:t>
             </a:r>
           </a:p>
         </p:txBody>
@@ -15985,12 +9718,12 @@
               <a:buNone/>
             </a:pPr>
             <a:r>
-              <a:rPr lang="en-US" sz="1400" b="0" i="0" dirty="0">
+              <a:rPr lang="en-US" sz="1500" b="0" i="1" dirty="0">
                 <a:latin typeface="Calibri" panose="020F0502020204030204" pitchFamily="34" charset="0"/>
                 <a:ea typeface="Calibri" panose="020F0502020204030204" pitchFamily="34" charset="0"/>
                 <a:cs typeface="Calibri" panose="020F0502020204030204" pitchFamily="34" charset="0"/>
               </a:rPr>
-              <a:t>Every work stops at detection or repairs the model afterwards. None gates the decision in flight on whether the model still fits its traffic.</a:t>
+              <a:t>What Custos must do — and the guarantees it must keep while doing it.</a:t>
             </a:r>
           </a:p>
         </p:txBody>
@@ -16084,7 +9817,7 @@
             <a:fld id="{D57F1E4F-1CFF-5643-939E-217C01CDF565}" type="slidenum">
               <a:rPr lang="en-US" smtClean="0"/>
               <a:pPr/>
-              <a:t>3</a:t>
+              <a:t>6</a:t>
             </a:fld>
             <a:endParaRPr lang="en-US" dirty="0"/>
           </a:p>
@@ -16119,34 +9852,346 @@
           </a:p>
         </p:txBody>
       </p:sp>
-      <p:pic>
-        <p:nvPicPr>
-          <p:cNvPr id="8" name="Picture 7" descr="gap_map.png"/>
-          <p:cNvPicPr>
-            <a:picLocks noChangeAspect="1"/>
-          </p:cNvPicPr>
+      <p:graphicFrame>
+        <p:nvGraphicFramePr>
+          <p:cNvPr id="8" name="Table 7"/>
+          <p:cNvGraphicFramePr>
+            <a:graphicFrameLocks noGrp="1"/>
+          </p:cNvGraphicFramePr>
           <p:nvPr/>
-        </p:nvPicPr>
-        <p:blipFill>
-          <a:blip r:embed="rId4"/>
-          <a:stretch>
-            <a:fillRect/>
-          </a:stretch>
-        </p:blipFill>
-        <p:spPr>
-          <a:xfrm>
-            <a:off x="1066647" y="2606040"/>
-            <a:ext cx="10058400" cy="2926080"/>
-          </a:xfrm>
-          <a:prstGeom prst="rect">
-            <a:avLst/>
-          </a:prstGeom>
-        </p:spPr>
-      </p:pic>
+        </p:nvGraphicFramePr>
+        <p:xfrm>
+          <a:off x="960120" y="2103120"/>
+          <a:ext cx="10241280" cy="203200"/>
+        </p:xfrm>
+        <a:graphic>
+          <a:graphicData uri="http://schemas.openxmlformats.org/drawingml/2006/table">
+            <a:tbl>
+              <a:tblPr firstRow="1">
+                <a:tableStyleId>{5C22544A-7EE6-4342-B048-85BDC9FD1C3A}</a:tableStyleId>
+              </a:tblPr>
+              <a:tblGrid>
+                <a:gridCol w="5120640"/>
+                <a:gridCol w="5120640"/>
+              </a:tblGrid>
+              <a:tr h="25400">
+                <a:tc>
+                  <a:txBody>
+                    <a:bodyPr wrap="square"/>
+                    <a:lstStyle/>
+                    <a:p>
+                      <a:r>
+                        <a:rPr sz="1400" b="1">
+                          <a:solidFill>
+                            <a:srgbClr val="FFFFFF"/>
+                          </a:solidFill>
+                          <a:latin typeface="Calibri"/>
+                        </a:rPr>
+                        <a:t>Functional</a:t>
+                      </a:r>
+                    </a:p>
+                  </a:txBody>
+                  <a:tcPr marL="63500" marR="63500" marT="38100" marB="38100">
+                    <a:solidFill>
+                      <a:srgbClr val="1F5CA8"/>
+                    </a:solidFill>
+                  </a:tcPr>
+                </a:tc>
+                <a:tc>
+                  <a:txBody>
+                    <a:bodyPr wrap="square"/>
+                    <a:lstStyle/>
+                    <a:p>
+                      <a:r>
+                        <a:rPr sz="1400" b="1">
+                          <a:solidFill>
+                            <a:srgbClr val="FFFFFF"/>
+                          </a:solidFill>
+                          <a:latin typeface="Calibri"/>
+                        </a:rPr>
+                        <a:t>Non-functional</a:t>
+                      </a:r>
+                    </a:p>
+                  </a:txBody>
+                  <a:tcPr marL="63500" marR="63500" marT="38100" marB="38100">
+                    <a:solidFill>
+                      <a:srgbClr val="1F5CA8"/>
+                    </a:solidFill>
+                  </a:tcPr>
+                </a:tc>
+              </a:tr>
+              <a:tr h="25400">
+                <a:tc>
+                  <a:txBody>
+                    <a:bodyPr wrap="square"/>
+                    <a:lstStyle/>
+                    <a:p>
+                      <a:r>
+                        <a:rPr sz="1400" b="0">
+                          <a:latin typeface="Calibri"/>
+                        </a:rPr>
+                        <a:t>Register models and a reference baseline</a:t>
+                      </a:r>
+                    </a:p>
+                  </a:txBody>
+                  <a:tcPr marL="63500" marR="63500" marT="38100" marB="38100">
+                    <a:noFill/>
+                  </a:tcPr>
+                </a:tc>
+                <a:tc>
+                  <a:txBody>
+                    <a:bodyPr wrap="square"/>
+                    <a:lstStyle/>
+                    <a:p>
+                      <a:r>
+                        <a:rPr sz="1400" b="0">
+                          <a:latin typeface="Calibri"/>
+                        </a:rPr>
+                        <a:t>p99 decision latency ≤ 50 ms</a:t>
+                      </a:r>
+                    </a:p>
+                  </a:txBody>
+                  <a:tcPr marL="63500" marR="63500" marT="38100" marB="38100">
+                    <a:noFill/>
+                  </a:tcPr>
+                </a:tc>
+              </a:tr>
+              <a:tr h="25400">
+                <a:tc>
+                  <a:txBody>
+                    <a:bodyPr wrap="square"/>
+                    <a:lstStyle/>
+                    <a:p>
+                      <a:r>
+                        <a:rPr sz="1400" b="0">
+                          <a:latin typeface="Calibri"/>
+                        </a:rPr>
+                        <a:t>Per-input drift: PSI and KS</a:t>
+                      </a:r>
+                    </a:p>
+                  </a:txBody>
+                  <a:tcPr marL="63500" marR="63500" marT="38100" marB="38100">
+                    <a:solidFill>
+                      <a:srgbClr val="F4F6F9"/>
+                    </a:solidFill>
+                  </a:tcPr>
+                </a:tc>
+                <a:tc>
+                  <a:txBody>
+                    <a:bodyPr wrap="square"/>
+                    <a:lstStyle/>
+                    <a:p>
+                      <a:r>
+                        <a:rPr sz="1400" b="0">
+                          <a:latin typeface="Calibri"/>
+                        </a:rPr>
+                        <a:t>A Custos failure never fails the caller</a:t>
+                      </a:r>
+                    </a:p>
+                  </a:txBody>
+                  <a:tcPr marL="63500" marR="63500" marT="38100" marB="38100">
+                    <a:solidFill>
+                      <a:srgbClr val="F4F6F9"/>
+                    </a:solidFill>
+                  </a:tcPr>
+                </a:tc>
+              </a:tr>
+              <a:tr h="25400">
+                <a:tc>
+                  <a:txBody>
+                    <a:bodyPr wrap="square"/>
+                    <a:lstStyle/>
+                    <a:p>
+                      <a:r>
+                        <a:rPr sz="1400" b="0">
+                          <a:latin typeface="Calibri"/>
+                        </a:rPr>
+                        <a:t>Policy rules that can veto</a:t>
+                      </a:r>
+                    </a:p>
+                  </a:txBody>
+                  <a:tcPr marL="63500" marR="63500" marT="38100" marB="38100">
+                    <a:noFill/>
+                  </a:tcPr>
+                </a:tc>
+                <a:tc>
+                  <a:txBody>
+                    <a:bodyPr wrap="square"/>
+                    <a:lstStyle/>
+                    <a:p>
+                      <a:r>
+                        <a:rPr sz="1400" b="0">
+                          <a:latin typeface="Calibri"/>
+                        </a:rPr>
+                        <a:t>Overload is refused, never queued</a:t>
+                      </a:r>
+                    </a:p>
+                  </a:txBody>
+                  <a:tcPr marL="63500" marR="63500" marT="38100" marB="38100">
+                    <a:noFill/>
+                  </a:tcPr>
+                </a:tc>
+              </a:tr>
+              <a:tr h="25400">
+                <a:tc>
+                  <a:txBody>
+                    <a:bodyPr wrap="square"/>
+                    <a:lstStyle/>
+                    <a:p>
+                      <a:r>
+                        <a:rPr sz="1400" b="0">
+                          <a:latin typeface="Calibri"/>
+                        </a:rPr>
+                        <a:t>Per-request risk: unusual amount, bursts</a:t>
+                      </a:r>
+                    </a:p>
+                  </a:txBody>
+                  <a:tcPr marL="63500" marR="63500" marT="38100" marB="38100">
+                    <a:solidFill>
+                      <a:srgbClr val="F4F6F9"/>
+                    </a:solidFill>
+                  </a:tcPr>
+                </a:tc>
+                <a:tc>
+                  <a:txBody>
+                    <a:bodyPr wrap="square"/>
+                    <a:lstStyle/>
+                    <a:p>
+                      <a:r>
+                        <a:rPr sz="1400" b="0">
+                          <a:latin typeface="Calibri"/>
+                        </a:rPr>
+                        <a:t>Every query scoped by tenant</a:t>
+                      </a:r>
+                    </a:p>
+                  </a:txBody>
+                  <a:tcPr marL="63500" marR="63500" marT="38100" marB="38100">
+                    <a:solidFill>
+                      <a:srgbClr val="F4F6F9"/>
+                    </a:solidFill>
+                  </a:tcPr>
+                </a:tc>
+              </a:tr>
+              <a:tr h="25400">
+                <a:tc>
+                  <a:txBody>
+                    <a:bodyPr wrap="square"/>
+                    <a:lstStyle/>
+                    <a:p>
+                      <a:r>
+                        <a:rPr sz="1400" b="0">
+                          <a:latin typeface="Calibri"/>
+                        </a:rPr>
+                        <a:t>ALLOW / REVIEW / BLOCK, with reasons</a:t>
+                      </a:r>
+                    </a:p>
+                  </a:txBody>
+                  <a:tcPr marL="63500" marR="63500" marT="38100" marB="38100">
+                    <a:noFill/>
+                  </a:tcPr>
+                </a:tc>
+                <a:tc>
+                  <a:txBody>
+                    <a:bodyPr wrap="square"/>
+                    <a:lstStyle/>
+                    <a:p>
+                      <a:r>
+                        <a:rPr sz="1400" b="0">
+                          <a:latin typeface="Calibri"/>
+                        </a:rPr>
+                        <a:t>Keys hashed; rules parsed, never eval'd</a:t>
+                      </a:r>
+                    </a:p>
+                  </a:txBody>
+                  <a:tcPr marL="63500" marR="63500" marT="38100" marB="38100">
+                    <a:noFill/>
+                  </a:tcPr>
+                </a:tc>
+              </a:tr>
+              <a:tr h="25400">
+                <a:tc>
+                  <a:txBody>
+                    <a:bodyPr wrap="square"/>
+                    <a:lstStyle/>
+                    <a:p>
+                      <a:r>
+                        <a:rPr sz="1400" b="0">
+                          <a:latin typeface="Calibri"/>
+                        </a:rPr>
+                        <a:t>Tamper-evident audit, with verification</a:t>
+                      </a:r>
+                    </a:p>
+                  </a:txBody>
+                  <a:tcPr marL="63500" marR="63500" marT="38100" marB="38100">
+                    <a:solidFill>
+                      <a:srgbClr val="F4F6F9"/>
+                    </a:solidFill>
+                  </a:tcPr>
+                </a:tc>
+                <a:tc>
+                  <a:txBody>
+                    <a:bodyPr wrap="square"/>
+                    <a:lstStyle/>
+                    <a:p>
+                      <a:r>
+                        <a:rPr sz="1400" b="0">
+                          <a:latin typeface="Calibri"/>
+                        </a:rPr>
+                        <a:t>A new signal is a new file, not a refactor</a:t>
+                      </a:r>
+                    </a:p>
+                  </a:txBody>
+                  <a:tcPr marL="63500" marR="63500" marT="38100" marB="38100">
+                    <a:solidFill>
+                      <a:srgbClr val="F4F6F9"/>
+                    </a:solidFill>
+                  </a:tcPr>
+                </a:tc>
+              </a:tr>
+              <a:tr h="25400">
+                <a:tc>
+                  <a:txBody>
+                    <a:bodyPr wrap="square"/>
+                    <a:lstStyle/>
+                    <a:p>
+                      <a:r>
+                        <a:rPr sz="1400" b="0">
+                          <a:latin typeface="Calibri"/>
+                        </a:rPr>
+                        <a:t>Self-healing, applied only on human approval</a:t>
+                      </a:r>
+                    </a:p>
+                  </a:txBody>
+                  <a:tcPr marL="63500" marR="63500" marT="38100" marB="38100">
+                    <a:noFill/>
+                  </a:tcPr>
+                </a:tc>
+                <a:tc>
+                  <a:txBody>
+                    <a:bodyPr wrap="square"/>
+                    <a:lstStyle/>
+                    <a:p>
+                      <a:r>
+                        <a:rPr sz="1400" b="0">
+                          <a:latin typeface="Calibri"/>
+                        </a:rPr>
+                        <a:t>Python · FastAPI · PostgreSQL · Redis · React</a:t>
+                      </a:r>
+                    </a:p>
+                  </a:txBody>
+                  <a:tcPr marL="63500" marR="63500" marT="38100" marB="38100">
+                    <a:noFill/>
+                  </a:tcPr>
+                </a:tc>
+              </a:tr>
+            </a:tbl>
+          </a:graphicData>
+        </a:graphic>
+      </p:graphicFrame>
     </p:spTree>
     <p:extLst>
       <p:ext uri="{BB962C8B-B14F-4D97-AF65-F5344CB8AC3E}">
-        <p14:creationId xmlns:p14="http://schemas.microsoft.com/office/powerpoint/2010/main" val="3231882420"/>
+        <p14:creationId xmlns:p14="http://schemas.microsoft.com/office/powerpoint/2010/main" val="402940564"/>
       </p:ext>
     </p:extLst>
   </p:cSld>

--- a/docs/presentations/Custos_Phase2_Review2.pptx
+++ b/docs/presentations/Custos_Phase2_Review2.pptx
@@ -6256,6 +6256,54 @@
               <a:t>Now: a live demo — three scenarios, two domains.</a:t>
             </a:r>
           </a:p>
+          <a:p>
+            <a:pPr marL="0" indent="0" algn="ctr">
+              <a:spcBef>
+                <a:spcPts val="600"/>
+              </a:spcBef>
+              <a:buNone/>
+            </a:pPr>
+            <a:r>
+              <a:rPr lang="en-US" sz="2600" b="1" i="0" dirty="0">
+                <a:latin typeface="Calibri" panose="020F0502020204030204" pitchFamily="34" charset="0"/>
+                <a:ea typeface="Calibri" panose="020F0502020204030204" pitchFamily="34" charset="0"/>
+                <a:cs typeface="Calibri" panose="020F0502020204030204" pitchFamily="34" charset="0"/>
+              </a:rPr>
+              <a:t>Models decide. Custos makes sure they still deserve to.</a:t>
+            </a:r>
+          </a:p>
+          <a:p>
+            <a:pPr marL="0" indent="0" algn="ctr">
+              <a:spcBef>
+                <a:spcPts val="300"/>
+              </a:spcBef>
+              <a:buNone/>
+            </a:pPr>
+            <a:r>
+              <a:rPr lang="en-US" sz="1600" b="0" i="1" dirty="0">
+                <a:latin typeface="Calibri" panose="020F0502020204030204" pitchFamily="34" charset="0"/>
+                <a:ea typeface="Calibri" panose="020F0502020204030204" pitchFamily="34" charset="0"/>
+                <a:cs typeface="Calibri" panose="020F0502020204030204" pitchFamily="34" charset="0"/>
+              </a:rPr>
+              <a:t>“A model that is running is not a model that can be trusted.</a:t>
+            </a:r>
+          </a:p>
+          <a:p>
+            <a:pPr marL="0" indent="0" algn="ctr">
+              <a:spcBef>
+                <a:spcPts val="0"/>
+              </a:spcBef>
+              <a:buNone/>
+            </a:pPr>
+            <a:r>
+              <a:rPr lang="en-US" sz="1600" b="0" i="1" dirty="0">
+                <a:latin typeface="Calibri" panose="020F0502020204030204" pitchFamily="34" charset="0"/>
+                <a:ea typeface="Calibri" panose="020F0502020204030204" pitchFamily="34" charset="0"/>
+                <a:cs typeface="Calibri" panose="020F0502020204030204" pitchFamily="34" charset="0"/>
+              </a:rPr>
+              <a:t>Custos checks the difference — every decision, every time.”</a:t>
+            </a:r>
+          </a:p>
         </p:txBody>
       </p:sp>
       <p:pic>
@@ -6391,7 +6439,7 @@
           <p:nvPr/>
         </p:nvGraphicFramePr>
         <p:xfrm>
-          <a:off x="960120" y="3291840"/>
+          <a:off x="960120" y="4206240"/>
           <a:ext cx="10241279" cy="101600"/>
         </p:xfrm>
         <a:graphic>
